--- a/docs/Insurance_AI_상담설계.pptx
+++ b/docs/Insurance_AI_상담설계.pptx
@@ -2468,24 +2468,24 @@
         </p:nvSpPr>
         <p:spPr>
           <a:xfrm>
-            <a:off x="548640" y="329184"/>
-            <a:ext cx="11064240" cy="219456"/>
-          </a:xfrm>
-          <a:prstGeom prst="rect">
-            <a:avLst/>
-          </a:prstGeom>
-          <a:noFill/>
-          <a:ln/>
-        </p:spPr>
-        <p:txBody>
-          <a:bodyPr wrap="square" rtlCol="0" anchor="ctr"/>
-          <a:lstStyle/>
-          <a:p>
-            <a:pPr indent="0" marL="0">
-              <a:buNone/>
-            </a:pPr>
-            <a:r>
-              <a:rPr lang="en-US" sz="1100" b="1" spc="200" kern="0" dirty="0">
+            <a:off x="502920" y="384048"/>
+            <a:ext cx="3200400" cy="219456"/>
+          </a:xfrm>
+          <a:prstGeom prst="rect">
+            <a:avLst/>
+          </a:prstGeom>
+          <a:noFill/>
+          <a:ln/>
+        </p:spPr>
+        <p:txBody>
+          <a:bodyPr wrap="square" rtlCol="0" anchor="ctr"/>
+          <a:lstStyle/>
+          <a:p>
+            <a:pPr indent="0" marL="0">
+              <a:buNone/>
+            </a:pPr>
+            <a:r>
+              <a:rPr lang="en-US" sz="1050" b="1" spc="180" kern="0" dirty="0">
                 <a:solidFill>
                   <a:srgbClr val="0B7C44"/>
                 </a:solidFill>
@@ -2495,7 +2495,7 @@
               </a:rPr>
               <a:t>화면 ④ 약관북</a:t>
             </a:r>
-            <a:endParaRPr lang="en-US" sz="1100" dirty="0"/>
+            <a:endParaRPr lang="en-US" sz="1050" dirty="0"/>
           </a:p>
         </p:txBody>
       </p:sp>
@@ -2507,24 +2507,27 @@
         </p:nvSpPr>
         <p:spPr>
           <a:xfrm>
-            <a:off x="548640" y="566928"/>
-            <a:ext cx="11064240" cy="530352"/>
-          </a:xfrm>
-          <a:prstGeom prst="rect">
-            <a:avLst/>
-          </a:prstGeom>
-          <a:noFill/>
-          <a:ln/>
-        </p:spPr>
-        <p:txBody>
-          <a:bodyPr wrap="square" rtlCol="0" anchor="ctr"/>
-          <a:lstStyle/>
-          <a:p>
-            <a:pPr indent="0" marL="0">
-              <a:buNone/>
-            </a:pPr>
-            <a:r>
-              <a:rPr lang="en-US" sz="2700" b="1" dirty="0">
+            <a:off x="502920" y="621792"/>
+            <a:ext cx="3291840" cy="1005840"/>
+          </a:xfrm>
+          <a:prstGeom prst="rect">
+            <a:avLst/>
+          </a:prstGeom>
+          <a:noFill/>
+          <a:ln/>
+        </p:spPr>
+        <p:txBody>
+          <a:bodyPr wrap="square" rtlCol="0" anchor="ctr"/>
+          <a:lstStyle/>
+          <a:p>
+            <a:pPr indent="0" marL="0">
+              <a:lnSpc>
+                <a:spcPts val="2800"/>
+              </a:lnSpc>
+              <a:buNone/>
+            </a:pPr>
+            <a:r>
+              <a:rPr lang="en-US" sz="2100" b="1" dirty="0">
                 <a:solidFill>
                   <a:srgbClr val="16211C"/>
                 </a:solidFill>
@@ -2534,7 +2537,7 @@
               </a:rPr>
               <a:t>고객 폴더를 열면 질문 범위가 그 고객으로 잠깁니다</a:t>
             </a:r>
-            <a:endParaRPr lang="en-US" sz="2700" dirty="0"/>
+            <a:endParaRPr lang="en-US" sz="2100" dirty="0"/>
           </a:p>
         </p:txBody>
       </p:sp>
@@ -2546,24 +2549,27 @@
         </p:nvSpPr>
         <p:spPr>
           <a:xfrm>
-            <a:off x="548640" y="1115568"/>
-            <a:ext cx="11064240" cy="310896"/>
-          </a:xfrm>
-          <a:prstGeom prst="rect">
-            <a:avLst/>
-          </a:prstGeom>
-          <a:noFill/>
-          <a:ln/>
-        </p:spPr>
-        <p:txBody>
-          <a:bodyPr wrap="square" rtlCol="0" anchor="ctr"/>
-          <a:lstStyle/>
-          <a:p>
-            <a:pPr indent="0" marL="0">
-              <a:buNone/>
-            </a:pPr>
-            <a:r>
-              <a:rPr lang="en-US" sz="1300" dirty="0">
+            <a:off x="502920" y="1700784"/>
+            <a:ext cx="3291840" cy="822960"/>
+          </a:xfrm>
+          <a:prstGeom prst="rect">
+            <a:avLst/>
+          </a:prstGeom>
+          <a:noFill/>
+          <a:ln/>
+        </p:spPr>
+        <p:txBody>
+          <a:bodyPr wrap="square" rtlCol="0" anchor="ctr"/>
+          <a:lstStyle/>
+          <a:p>
+            <a:pPr indent="0" marL="0">
+              <a:lnSpc>
+                <a:spcPts val="1700"/>
+              </a:lnSpc>
+              <a:buNone/>
+            </a:pPr>
+            <a:r>
+              <a:rPr lang="en-US" sz="1150" dirty="0">
                 <a:solidFill>
                   <a:srgbClr val="7A867F"/>
                 </a:solidFill>
@@ -2573,13 +2579,337 @@
               </a:rPr>
               <a:t>이 화면이 차별점의 실체입니다. 상담할수록 고객별 약관이 쌓입니다.</a:t>
             </a:r>
-            <a:endParaRPr lang="en-US" sz="1300" dirty="0"/>
+            <a:endParaRPr lang="en-US" sz="1150" dirty="0"/>
+          </a:p>
+        </p:txBody>
+      </p:sp>
+      <p:sp>
+        <p:nvSpPr>
+          <p:cNvPr id="5" name="Shape 3"/>
+          <p:cNvSpPr/>
+          <p:nvPr/>
+        </p:nvSpPr>
+        <p:spPr>
+          <a:xfrm>
+            <a:off x="502920" y="2688336"/>
+            <a:ext cx="64008" cy="969264"/>
+          </a:xfrm>
+          <a:prstGeom prst="roundRect">
+            <a:avLst>
+              <a:gd name="adj" fmla="val 42857"/>
+            </a:avLst>
+          </a:prstGeom>
+          <a:solidFill>
+            <a:srgbClr val="14A05A"/>
+          </a:solidFill>
+          <a:ln w="12700">
+            <a:solidFill>
+              <a:srgbClr val="14A05A"/>
+            </a:solidFill>
+            <a:prstDash val="solid"/>
+          </a:ln>
+        </p:spPr>
+      </p:sp>
+      <p:sp>
+        <p:nvSpPr>
+          <p:cNvPr id="6" name="Text 4"/>
+          <p:cNvSpPr/>
+          <p:nvPr/>
+        </p:nvSpPr>
+        <p:spPr>
+          <a:xfrm>
+            <a:off x="749808" y="2706624"/>
+            <a:ext cx="3017520" cy="292608"/>
+          </a:xfrm>
+          <a:prstGeom prst="rect">
+            <a:avLst/>
+          </a:prstGeom>
+          <a:noFill/>
+          <a:ln/>
+        </p:spPr>
+        <p:txBody>
+          <a:bodyPr wrap="square" rtlCol="0" anchor="ctr"/>
+          <a:lstStyle/>
+          <a:p>
+            <a:pPr indent="0" marL="0">
+              <a:buNone/>
+            </a:pPr>
+            <a:r>
+              <a:rPr lang="en-US" sz="1200" b="1" dirty="0">
+                <a:solidFill>
+                  <a:srgbClr val="16211C"/>
+                </a:solidFill>
+                <a:latin typeface="맑은 고딕" pitchFamily="34" charset="0"/>
+                <a:ea typeface="맑은 고딕" pitchFamily="34" charset="-122"/>
+                <a:cs typeface="맑은 고딕" pitchFamily="34" charset="-120"/>
+              </a:rPr>
+              <a:t>폴더가 곧 검색 범위다</a:t>
+            </a:r>
+            <a:endParaRPr lang="en-US" sz="1200" dirty="0"/>
+          </a:p>
+        </p:txBody>
+      </p:sp>
+      <p:sp>
+        <p:nvSpPr>
+          <p:cNvPr id="7" name="Text 5"/>
+          <p:cNvSpPr/>
+          <p:nvPr/>
+        </p:nvSpPr>
+        <p:spPr>
+          <a:xfrm>
+            <a:off x="749808" y="2999232"/>
+            <a:ext cx="3017520" cy="621792"/>
+          </a:xfrm>
+          <a:prstGeom prst="rect">
+            <a:avLst/>
+          </a:prstGeom>
+          <a:noFill/>
+          <a:ln/>
+        </p:spPr>
+        <p:txBody>
+          <a:bodyPr wrap="square" rtlCol="0" anchor="ctr"/>
+          <a:lstStyle/>
+          <a:p>
+            <a:pPr indent="0" marL="0">
+              <a:lnSpc>
+                <a:spcPts val="1500"/>
+              </a:lnSpc>
+              <a:buNone/>
+            </a:pPr>
+            <a:r>
+              <a:rPr lang="en-US" sz="1000" dirty="0">
+                <a:solidFill>
+                  <a:srgbClr val="44524B"/>
+                </a:solidFill>
+                <a:latin typeface="맑은 고딕" pitchFamily="34" charset="0"/>
+                <a:ea typeface="맑은 고딕" pitchFamily="34" charset="-122"/>
+                <a:cs typeface="맑은 고딕" pitchFamily="34" charset="-120"/>
+              </a:rPr>
+              <a:t>그 고객 약관 4건 안에서만 찾습니다.</a:t>
+            </a:r>
+            <a:endParaRPr lang="en-US" sz="1000" dirty="0"/>
+          </a:p>
+        </p:txBody>
+      </p:sp>
+      <p:sp>
+        <p:nvSpPr>
+          <p:cNvPr id="8" name="Shape 6"/>
+          <p:cNvSpPr/>
+          <p:nvPr/>
+        </p:nvSpPr>
+        <p:spPr>
+          <a:xfrm>
+            <a:off x="502920" y="3858768"/>
+            <a:ext cx="64008" cy="969264"/>
+          </a:xfrm>
+          <a:prstGeom prst="roundRect">
+            <a:avLst>
+              <a:gd name="adj" fmla="val 42857"/>
+            </a:avLst>
+          </a:prstGeom>
+          <a:solidFill>
+            <a:srgbClr val="14A05A"/>
+          </a:solidFill>
+          <a:ln w="12700">
+            <a:solidFill>
+              <a:srgbClr val="14A05A"/>
+            </a:solidFill>
+            <a:prstDash val="solid"/>
+          </a:ln>
+        </p:spPr>
+      </p:sp>
+      <p:sp>
+        <p:nvSpPr>
+          <p:cNvPr id="9" name="Text 7"/>
+          <p:cNvSpPr/>
+          <p:nvPr/>
+        </p:nvSpPr>
+        <p:spPr>
+          <a:xfrm>
+            <a:off x="749808" y="3877056"/>
+            <a:ext cx="3017520" cy="292608"/>
+          </a:xfrm>
+          <a:prstGeom prst="rect">
+            <a:avLst/>
+          </a:prstGeom>
+          <a:noFill/>
+          <a:ln/>
+        </p:spPr>
+        <p:txBody>
+          <a:bodyPr wrap="square" rtlCol="0" anchor="ctr"/>
+          <a:lstStyle/>
+          <a:p>
+            <a:pPr indent="0" marL="0">
+              <a:buNone/>
+            </a:pPr>
+            <a:r>
+              <a:rPr lang="en-US" sz="1200" b="1" dirty="0">
+                <a:solidFill>
+                  <a:srgbClr val="16211C"/>
+                </a:solidFill>
+                <a:latin typeface="맑은 고딕" pitchFamily="34" charset="0"/>
+                <a:ea typeface="맑은 고딕" pitchFamily="34" charset="-122"/>
+                <a:cs typeface="맑은 고딕" pitchFamily="34" charset="-120"/>
+              </a:rPr>
+              <a:t>청구 누락을 잡는다</a:t>
+            </a:r>
+            <a:endParaRPr lang="en-US" sz="1200" dirty="0"/>
+          </a:p>
+        </p:txBody>
+      </p:sp>
+      <p:sp>
+        <p:nvSpPr>
+          <p:cNvPr id="10" name="Text 8"/>
+          <p:cNvSpPr/>
+          <p:nvPr/>
+        </p:nvSpPr>
+        <p:spPr>
+          <a:xfrm>
+            <a:off x="749808" y="4169664"/>
+            <a:ext cx="3017520" cy="621792"/>
+          </a:xfrm>
+          <a:prstGeom prst="rect">
+            <a:avLst/>
+          </a:prstGeom>
+          <a:noFill/>
+          <a:ln/>
+        </p:spPr>
+        <p:txBody>
+          <a:bodyPr wrap="square" rtlCol="0" anchor="ctr"/>
+          <a:lstStyle/>
+          <a:p>
+            <a:pPr indent="0" marL="0">
+              <a:lnSpc>
+                <a:spcPts val="1500"/>
+              </a:lnSpc>
+              <a:buNone/>
+            </a:pPr>
+            <a:r>
+              <a:rPr lang="en-US" sz="1000" dirty="0">
+                <a:solidFill>
+                  <a:srgbClr val="44524B"/>
+                </a:solidFill>
+                <a:latin typeface="맑은 고딕" pitchFamily="34" charset="0"/>
+                <a:ea typeface="맑은 고딕" pitchFamily="34" charset="-122"/>
+                <a:cs typeface="맑은 고딕" pitchFamily="34" charset="-120"/>
+              </a:rPr>
+              <a:t>담보가 여러 계약에 걸치면 모두 보여줍니다.</a:t>
+            </a:r>
+            <a:endParaRPr lang="en-US" sz="1000" dirty="0"/>
+          </a:p>
+        </p:txBody>
+      </p:sp>
+      <p:sp>
+        <p:nvSpPr>
+          <p:cNvPr id="11" name="Shape 9"/>
+          <p:cNvSpPr/>
+          <p:nvPr/>
+        </p:nvSpPr>
+        <p:spPr>
+          <a:xfrm>
+            <a:off x="502920" y="5029200"/>
+            <a:ext cx="64008" cy="969264"/>
+          </a:xfrm>
+          <a:prstGeom prst="roundRect">
+            <a:avLst>
+              <a:gd name="adj" fmla="val 42857"/>
+            </a:avLst>
+          </a:prstGeom>
+          <a:solidFill>
+            <a:srgbClr val="14A05A"/>
+          </a:solidFill>
+          <a:ln w="12700">
+            <a:solidFill>
+              <a:srgbClr val="14A05A"/>
+            </a:solidFill>
+            <a:prstDash val="solid"/>
+          </a:ln>
+        </p:spPr>
+      </p:sp>
+      <p:sp>
+        <p:nvSpPr>
+          <p:cNvPr id="12" name="Text 10"/>
+          <p:cNvSpPr/>
+          <p:nvPr/>
+        </p:nvSpPr>
+        <p:spPr>
+          <a:xfrm>
+            <a:off x="749808" y="5047488"/>
+            <a:ext cx="3017520" cy="292608"/>
+          </a:xfrm>
+          <a:prstGeom prst="rect">
+            <a:avLst/>
+          </a:prstGeom>
+          <a:noFill/>
+          <a:ln/>
+        </p:spPr>
+        <p:txBody>
+          <a:bodyPr wrap="square" rtlCol="0" anchor="ctr"/>
+          <a:lstStyle/>
+          <a:p>
+            <a:pPr indent="0" marL="0">
+              <a:buNone/>
+            </a:pPr>
+            <a:r>
+              <a:rPr lang="en-US" sz="1200" b="1" dirty="0">
+                <a:solidFill>
+                  <a:srgbClr val="16211C"/>
+                </a:solidFill>
+                <a:latin typeface="맑은 고딕" pitchFamily="34" charset="0"/>
+                <a:ea typeface="맑은 고딕" pitchFamily="34" charset="-122"/>
+                <a:cs typeface="맑은 고딕" pitchFamily="34" charset="-120"/>
+              </a:rPr>
+              <a:t>답할 수 있는 수를 밝힌다</a:t>
+            </a:r>
+            <a:endParaRPr lang="en-US" sz="1200" dirty="0"/>
+          </a:p>
+        </p:txBody>
+      </p:sp>
+      <p:sp>
+        <p:nvSpPr>
+          <p:cNvPr id="13" name="Text 11"/>
+          <p:cNvSpPr/>
+          <p:nvPr/>
+        </p:nvSpPr>
+        <p:spPr>
+          <a:xfrm>
+            <a:off x="749808" y="5340096"/>
+            <a:ext cx="3017520" cy="621792"/>
+          </a:xfrm>
+          <a:prstGeom prst="rect">
+            <a:avLst/>
+          </a:prstGeom>
+          <a:noFill/>
+          <a:ln/>
+        </p:spPr>
+        <p:txBody>
+          <a:bodyPr wrap="square" rtlCol="0" anchor="ctr"/>
+          <a:lstStyle/>
+          <a:p>
+            <a:pPr indent="0" marL="0">
+              <a:lnSpc>
+                <a:spcPts val="1500"/>
+              </a:lnSpc>
+              <a:buNone/>
+            </a:pPr>
+            <a:r>
+              <a:rPr lang="en-US" sz="1000" dirty="0">
+                <a:solidFill>
+                  <a:srgbClr val="44524B"/>
+                </a:solidFill>
+                <a:latin typeface="맑은 고딕" pitchFamily="34" charset="0"/>
+                <a:ea typeface="맑은 고딕" pitchFamily="34" charset="-122"/>
+                <a:cs typeface="맑은 고딕" pitchFamily="34" charset="-120"/>
+              </a:rPr>
+              <a:t>약관이 2건뿐이면 「답할 수 있는 건 2건」이라고 씁니다.</a:t>
+            </a:r>
+            <a:endParaRPr lang="en-US" sz="1000" dirty="0"/>
           </a:p>
         </p:txBody>
       </p:sp>
       <p:pic>
         <p:nvPicPr>
-          <p:cNvPr id="5" name="Image 0" descr="/tmp/claude-0/-home-user-chacha6377/ca7f6080-cf3a-5093-8a0d-eb3bfdb80785/scratchpad/app_entry.png">    </p:cNvPr>
+          <p:cNvPr id="14" name="Image 0" descr="/tmp/claude-0/-home-user-chacha6377/ca7f6080-cf3a-5093-8a0d-eb3bfdb80785/scratchpad/app_entry_main.png">    </p:cNvPr>
           <p:cNvPicPr>
             <a:picLocks noChangeAspect="1"/>
           </p:cNvPicPr>
@@ -2593,338 +2923,14 @@
         </p:blipFill>
         <p:spPr>
           <a:xfrm>
-            <a:off x="1142773" y="1572768"/>
-            <a:ext cx="6767015" cy="4572000"/>
+            <a:off x="4069080" y="1283863"/>
+            <a:ext cx="7726680" cy="4253698"/>
           </a:xfrm>
           <a:prstGeom prst="rect">
             <a:avLst/>
           </a:prstGeom>
         </p:spPr>
       </p:pic>
-      <p:sp>
-        <p:nvSpPr>
-          <p:cNvPr id="6" name="Shape 3"/>
-          <p:cNvSpPr/>
-          <p:nvPr/>
-        </p:nvSpPr>
-        <p:spPr>
-          <a:xfrm>
-            <a:off x="8732520" y="1737360"/>
-            <a:ext cx="2880360" cy="1481328"/>
-          </a:xfrm>
-          <a:prstGeom prst="roundRect">
-            <a:avLst>
-              <a:gd name="adj" fmla="val 5556"/>
-            </a:avLst>
-          </a:prstGeom>
-          <a:solidFill>
-            <a:srgbClr val="FFFFFF"/>
-          </a:solidFill>
-          <a:ln w="12700">
-            <a:solidFill>
-              <a:srgbClr val="E3E9E5"/>
-            </a:solidFill>
-            <a:prstDash val="solid"/>
-          </a:ln>
-        </p:spPr>
-      </p:sp>
-      <p:sp>
-        <p:nvSpPr>
-          <p:cNvPr id="7" name="Text 4"/>
-          <p:cNvSpPr/>
-          <p:nvPr/>
-        </p:nvSpPr>
-        <p:spPr>
-          <a:xfrm>
-            <a:off x="8942832" y="1901952"/>
-            <a:ext cx="2468880" cy="402336"/>
-          </a:xfrm>
-          <a:prstGeom prst="rect">
-            <a:avLst/>
-          </a:prstGeom>
-          <a:noFill/>
-          <a:ln/>
-        </p:spPr>
-        <p:txBody>
-          <a:bodyPr wrap="square" rtlCol="0" anchor="ctr"/>
-          <a:lstStyle/>
-          <a:p>
-            <a:pPr indent="0" marL="0">
-              <a:buNone/>
-            </a:pPr>
-            <a:r>
-              <a:rPr lang="en-US" sz="1250" b="1" dirty="0">
-                <a:solidFill>
-                  <a:srgbClr val="16211C"/>
-                </a:solidFill>
-                <a:latin typeface="맑은 고딕" pitchFamily="34" charset="0"/>
-                <a:ea typeface="맑은 고딕" pitchFamily="34" charset="-122"/>
-                <a:cs typeface="맑은 고딕" pitchFamily="34" charset="-120"/>
-              </a:rPr>
-              <a:t>폴더가 곧 검색 범위다</a:t>
-            </a:r>
-            <a:endParaRPr lang="en-US" sz="1250" dirty="0"/>
-          </a:p>
-        </p:txBody>
-      </p:sp>
-      <p:sp>
-        <p:nvSpPr>
-          <p:cNvPr id="8" name="Text 5"/>
-          <p:cNvSpPr/>
-          <p:nvPr/>
-        </p:nvSpPr>
-        <p:spPr>
-          <a:xfrm>
-            <a:off x="8942832" y="2322576"/>
-            <a:ext cx="2468880" cy="768096"/>
-          </a:xfrm>
-          <a:prstGeom prst="rect">
-            <a:avLst/>
-          </a:prstGeom>
-          <a:noFill/>
-          <a:ln/>
-        </p:spPr>
-        <p:txBody>
-          <a:bodyPr wrap="square" rtlCol="0" anchor="ctr"/>
-          <a:lstStyle/>
-          <a:p>
-            <a:pPr indent="0" marL="0">
-              <a:lnSpc>
-                <a:spcPts val="1500"/>
-              </a:lnSpc>
-              <a:buNone/>
-            </a:pPr>
-            <a:r>
-              <a:rPr lang="en-US" sz="1000" dirty="0">
-                <a:solidFill>
-                  <a:srgbClr val="44524B"/>
-                </a:solidFill>
-                <a:latin typeface="맑은 고딕" pitchFamily="34" charset="0"/>
-                <a:ea typeface="맑은 고딕" pitchFamily="34" charset="-122"/>
-                <a:cs typeface="맑은 고딕" pitchFamily="34" charset="-120"/>
-              </a:rPr>
-              <a:t>차승희 폴더에서 물으면 그 고객 약관 4건 안에서만 찾습니다. 남의 계약이 섞이지 않습니다.</a:t>
-            </a:r>
-            <a:endParaRPr lang="en-US" sz="1000" dirty="0"/>
-          </a:p>
-        </p:txBody>
-      </p:sp>
-      <p:sp>
-        <p:nvSpPr>
-          <p:cNvPr id="9" name="Shape 6"/>
-          <p:cNvSpPr/>
-          <p:nvPr/>
-        </p:nvSpPr>
-        <p:spPr>
-          <a:xfrm>
-            <a:off x="8732520" y="3364992"/>
-            <a:ext cx="2880360" cy="1481328"/>
-          </a:xfrm>
-          <a:prstGeom prst="roundRect">
-            <a:avLst>
-              <a:gd name="adj" fmla="val 5556"/>
-            </a:avLst>
-          </a:prstGeom>
-          <a:solidFill>
-            <a:srgbClr val="FFFFFF"/>
-          </a:solidFill>
-          <a:ln w="12700">
-            <a:solidFill>
-              <a:srgbClr val="E3E9E5"/>
-            </a:solidFill>
-            <a:prstDash val="solid"/>
-          </a:ln>
-        </p:spPr>
-      </p:sp>
-      <p:sp>
-        <p:nvSpPr>
-          <p:cNvPr id="10" name="Text 7"/>
-          <p:cNvSpPr/>
-          <p:nvPr/>
-        </p:nvSpPr>
-        <p:spPr>
-          <a:xfrm>
-            <a:off x="8942832" y="3529584"/>
-            <a:ext cx="2468880" cy="402336"/>
-          </a:xfrm>
-          <a:prstGeom prst="rect">
-            <a:avLst/>
-          </a:prstGeom>
-          <a:noFill/>
-          <a:ln/>
-        </p:spPr>
-        <p:txBody>
-          <a:bodyPr wrap="square" rtlCol="0" anchor="ctr"/>
-          <a:lstStyle/>
-          <a:p>
-            <a:pPr indent="0" marL="0">
-              <a:buNone/>
-            </a:pPr>
-            <a:r>
-              <a:rPr lang="en-US" sz="1250" b="1" dirty="0">
-                <a:solidFill>
-                  <a:srgbClr val="16211C"/>
-                </a:solidFill>
-                <a:latin typeface="맑은 고딕" pitchFamily="34" charset="0"/>
-                <a:ea typeface="맑은 고딕" pitchFamily="34" charset="-122"/>
-                <a:cs typeface="맑은 고딕" pitchFamily="34" charset="-120"/>
-              </a:rPr>
-              <a:t>청구 누락을 잡는다</a:t>
-            </a:r>
-            <a:endParaRPr lang="en-US" sz="1250" dirty="0"/>
-          </a:p>
-        </p:txBody>
-      </p:sp>
-      <p:sp>
-        <p:nvSpPr>
-          <p:cNvPr id="11" name="Text 8"/>
-          <p:cNvSpPr/>
-          <p:nvPr/>
-        </p:nvSpPr>
-        <p:spPr>
-          <a:xfrm>
-            <a:off x="8942832" y="3950208"/>
-            <a:ext cx="2468880" cy="768096"/>
-          </a:xfrm>
-          <a:prstGeom prst="rect">
-            <a:avLst/>
-          </a:prstGeom>
-          <a:noFill/>
-          <a:ln/>
-        </p:spPr>
-        <p:txBody>
-          <a:bodyPr wrap="square" rtlCol="0" anchor="ctr"/>
-          <a:lstStyle/>
-          <a:p>
-            <a:pPr indent="0" marL="0">
-              <a:lnSpc>
-                <a:spcPts val="1500"/>
-              </a:lnSpc>
-              <a:buNone/>
-            </a:pPr>
-            <a:r>
-              <a:rPr lang="en-US" sz="1000" dirty="0">
-                <a:solidFill>
-                  <a:srgbClr val="44524B"/>
-                </a:solidFill>
-                <a:latin typeface="맑은 고딕" pitchFamily="34" charset="0"/>
-                <a:ea typeface="맑은 고딕" pitchFamily="34" charset="-122"/>
-                <a:cs typeface="맑은 고딕" pitchFamily="34" charset="-120"/>
-              </a:rPr>
-              <a:t>담보가 여러 계약에 걸치면 걸리는 계약을 모두 보여줍니다. 이게 폴더 질문의 가장 큰 효용입니다.</a:t>
-            </a:r>
-            <a:endParaRPr lang="en-US" sz="1000" dirty="0"/>
-          </a:p>
-        </p:txBody>
-      </p:sp>
-      <p:sp>
-        <p:nvSpPr>
-          <p:cNvPr id="12" name="Shape 9"/>
-          <p:cNvSpPr/>
-          <p:nvPr/>
-        </p:nvSpPr>
-        <p:spPr>
-          <a:xfrm>
-            <a:off x="8732520" y="4992624"/>
-            <a:ext cx="2880360" cy="1481328"/>
-          </a:xfrm>
-          <a:prstGeom prst="roundRect">
-            <a:avLst>
-              <a:gd name="adj" fmla="val 5556"/>
-            </a:avLst>
-          </a:prstGeom>
-          <a:solidFill>
-            <a:srgbClr val="FFFFFF"/>
-          </a:solidFill>
-          <a:ln w="12700">
-            <a:solidFill>
-              <a:srgbClr val="E3E9E5"/>
-            </a:solidFill>
-            <a:prstDash val="solid"/>
-          </a:ln>
-        </p:spPr>
-      </p:sp>
-      <p:sp>
-        <p:nvSpPr>
-          <p:cNvPr id="13" name="Text 10"/>
-          <p:cNvSpPr/>
-          <p:nvPr/>
-        </p:nvSpPr>
-        <p:spPr>
-          <a:xfrm>
-            <a:off x="8942832" y="5157216"/>
-            <a:ext cx="2468880" cy="402336"/>
-          </a:xfrm>
-          <a:prstGeom prst="rect">
-            <a:avLst/>
-          </a:prstGeom>
-          <a:noFill/>
-          <a:ln/>
-        </p:spPr>
-        <p:txBody>
-          <a:bodyPr wrap="square" rtlCol="0" anchor="ctr"/>
-          <a:lstStyle/>
-          <a:p>
-            <a:pPr indent="0" marL="0">
-              <a:buNone/>
-            </a:pPr>
-            <a:r>
-              <a:rPr lang="en-US" sz="1250" b="1" dirty="0">
-                <a:solidFill>
-                  <a:srgbClr val="16211C"/>
-                </a:solidFill>
-                <a:latin typeface="맑은 고딕" pitchFamily="34" charset="0"/>
-                <a:ea typeface="맑은 고딕" pitchFamily="34" charset="-122"/>
-                <a:cs typeface="맑은 고딕" pitchFamily="34" charset="-120"/>
-              </a:rPr>
-              <a:t>답할 수 있는 수를 밝힌다</a:t>
-            </a:r>
-            <a:endParaRPr lang="en-US" sz="1250" dirty="0"/>
-          </a:p>
-        </p:txBody>
-      </p:sp>
-      <p:sp>
-        <p:nvSpPr>
-          <p:cNvPr id="14" name="Text 11"/>
-          <p:cNvSpPr/>
-          <p:nvPr/>
-        </p:nvSpPr>
-        <p:spPr>
-          <a:xfrm>
-            <a:off x="8942832" y="5577840"/>
-            <a:ext cx="2468880" cy="768096"/>
-          </a:xfrm>
-          <a:prstGeom prst="rect">
-            <a:avLst/>
-          </a:prstGeom>
-          <a:noFill/>
-          <a:ln/>
-        </p:spPr>
-        <p:txBody>
-          <a:bodyPr wrap="square" rtlCol="0" anchor="ctr"/>
-          <a:lstStyle/>
-          <a:p>
-            <a:pPr indent="0" marL="0">
-              <a:lnSpc>
-                <a:spcPts val="1500"/>
-              </a:lnSpc>
-              <a:buNone/>
-            </a:pPr>
-            <a:r>
-              <a:rPr lang="en-US" sz="1000" dirty="0">
-                <a:solidFill>
-                  <a:srgbClr val="44524B"/>
-                </a:solidFill>
-                <a:latin typeface="맑은 고딕" pitchFamily="34" charset="0"/>
-                <a:ea typeface="맑은 고딕" pitchFamily="34" charset="-122"/>
-                <a:cs typeface="맑은 고딕" pitchFamily="34" charset="-120"/>
-              </a:rPr>
-              <a:t>계약 4건이어도 약관이 2건뿐이면 「지금 답할 수 있는 건 2건」이라고 씁니다.</a:t>
-            </a:r>
-            <a:endParaRPr lang="en-US" sz="1000" dirty="0"/>
-          </a:p>
-        </p:txBody>
-      </p:sp>
       <p:sp>
         <p:nvSpPr>
           <p:cNvPr id="15" name="Text 12"/>
@@ -3004,24 +3010,24 @@
         </p:nvSpPr>
         <p:spPr>
           <a:xfrm>
-            <a:off x="548640" y="329184"/>
-            <a:ext cx="11064240" cy="219456"/>
-          </a:xfrm>
-          <a:prstGeom prst="rect">
-            <a:avLst/>
-          </a:prstGeom>
-          <a:noFill/>
-          <a:ln/>
-        </p:spPr>
-        <p:txBody>
-          <a:bodyPr wrap="square" rtlCol="0" anchor="ctr"/>
-          <a:lstStyle/>
-          <a:p>
-            <a:pPr indent="0" marL="0">
-              <a:buNone/>
-            </a:pPr>
-            <a:r>
-              <a:rPr lang="en-US" sz="1100" b="1" spc="200" kern="0" dirty="0">
+            <a:off x="502920" y="384048"/>
+            <a:ext cx="3200400" cy="219456"/>
+          </a:xfrm>
+          <a:prstGeom prst="rect">
+            <a:avLst/>
+          </a:prstGeom>
+          <a:noFill/>
+          <a:ln/>
+        </p:spPr>
+        <p:txBody>
+          <a:bodyPr wrap="square" rtlCol="0" anchor="ctr"/>
+          <a:lstStyle/>
+          <a:p>
+            <a:pPr indent="0" marL="0">
+              <a:buNone/>
+            </a:pPr>
+            <a:r>
+              <a:rPr lang="en-US" sz="1050" b="1" spc="180" kern="0" dirty="0">
                 <a:solidFill>
                   <a:srgbClr val="0B7C44"/>
                 </a:solidFill>
@@ -3031,7 +3037,7 @@
               </a:rPr>
               <a:t>화면 ⑤ 약관 등록</a:t>
             </a:r>
-            <a:endParaRPr lang="en-US" sz="1100" dirty="0"/>
+            <a:endParaRPr lang="en-US" sz="1050" dirty="0"/>
           </a:p>
         </p:txBody>
       </p:sp>
@@ -3043,24 +3049,27 @@
         </p:nvSpPr>
         <p:spPr>
           <a:xfrm>
-            <a:off x="548640" y="566928"/>
-            <a:ext cx="11064240" cy="530352"/>
-          </a:xfrm>
-          <a:prstGeom prst="rect">
-            <a:avLst/>
-          </a:prstGeom>
-          <a:noFill/>
-          <a:ln/>
-        </p:spPr>
-        <p:txBody>
-          <a:bodyPr wrap="square" rtlCol="0" anchor="ctr"/>
-          <a:lstStyle/>
-          <a:p>
-            <a:pPr indent="0" marL="0">
-              <a:buNone/>
-            </a:pPr>
-            <a:r>
-              <a:rPr lang="en-US" sz="2700" b="1" dirty="0">
+            <a:off x="502920" y="621792"/>
+            <a:ext cx="3291840" cy="1005840"/>
+          </a:xfrm>
+          <a:prstGeom prst="rect">
+            <a:avLst/>
+          </a:prstGeom>
+          <a:noFill/>
+          <a:ln/>
+        </p:spPr>
+        <p:txBody>
+          <a:bodyPr wrap="square" rtlCol="0" anchor="ctr"/>
+          <a:lstStyle/>
+          <a:p>
+            <a:pPr indent="0" marL="0">
+              <a:lnSpc>
+                <a:spcPts val="2800"/>
+              </a:lnSpc>
+              <a:buNone/>
+            </a:pPr>
+            <a:r>
+              <a:rPr lang="en-US" sz="2100" b="1" dirty="0">
                 <a:solidFill>
                   <a:srgbClr val="16211C"/>
                 </a:solidFill>
@@ -3070,7 +3079,7 @@
               </a:rPr>
               <a:t>지금은 하나씩 넣습니다. My Data가 열리면 한 번에 들어옵니다</a:t>
             </a:r>
-            <a:endParaRPr lang="en-US" sz="2700" dirty="0"/>
+            <a:endParaRPr lang="en-US" sz="2100" dirty="0"/>
           </a:p>
         </p:txBody>
       </p:sp>
@@ -3082,24 +3091,27 @@
         </p:nvSpPr>
         <p:spPr>
           <a:xfrm>
-            <a:off x="548640" y="1115568"/>
-            <a:ext cx="11064240" cy="310896"/>
-          </a:xfrm>
-          <a:prstGeom prst="rect">
-            <a:avLst/>
-          </a:prstGeom>
-          <a:noFill/>
-          <a:ln/>
-        </p:spPr>
-        <p:txBody>
-          <a:bodyPr wrap="square" rtlCol="0" anchor="ctr"/>
-          <a:lstStyle/>
-          <a:p>
-            <a:pPr indent="0" marL="0">
-              <a:buNone/>
-            </a:pPr>
-            <a:r>
-              <a:rPr lang="en-US" sz="1300" dirty="0">
+            <a:off x="502920" y="1700784"/>
+            <a:ext cx="3291840" cy="822960"/>
+          </a:xfrm>
+          <a:prstGeom prst="rect">
+            <a:avLst/>
+          </a:prstGeom>
+          <a:noFill/>
+          <a:ln/>
+        </p:spPr>
+        <p:txBody>
+          <a:bodyPr wrap="square" rtlCol="0" anchor="ctr"/>
+          <a:lstStyle/>
+          <a:p>
+            <a:pPr indent="0" marL="0">
+              <a:lnSpc>
+                <a:spcPts val="1700"/>
+              </a:lnSpc>
+              <a:buNone/>
+            </a:pPr>
+            <a:r>
+              <a:rPr lang="en-US" sz="1150" dirty="0">
                 <a:solidFill>
                   <a:srgbClr val="7A867F"/>
                 </a:solidFill>
@@ -3109,13 +3121,337 @@
               </a:rPr>
               <a:t>경로를 빠른 순으로 놓되, 아직 안 열린 것은 두되 잠급니다.</a:t>
             </a:r>
-            <a:endParaRPr lang="en-US" sz="1300" dirty="0"/>
+            <a:endParaRPr lang="en-US" sz="1150" dirty="0"/>
+          </a:p>
+        </p:txBody>
+      </p:sp>
+      <p:sp>
+        <p:nvSpPr>
+          <p:cNvPr id="5" name="Shape 3"/>
+          <p:cNvSpPr/>
+          <p:nvPr/>
+        </p:nvSpPr>
+        <p:spPr>
+          <a:xfrm>
+            <a:off x="502920" y="2688336"/>
+            <a:ext cx="64008" cy="969264"/>
+          </a:xfrm>
+          <a:prstGeom prst="roundRect">
+            <a:avLst>
+              <a:gd name="adj" fmla="val 42857"/>
+            </a:avLst>
+          </a:prstGeom>
+          <a:solidFill>
+            <a:srgbClr val="14A05A"/>
+          </a:solidFill>
+          <a:ln w="12700">
+            <a:solidFill>
+              <a:srgbClr val="14A05A"/>
+            </a:solidFill>
+            <a:prstDash val="solid"/>
+          </a:ln>
+        </p:spPr>
+      </p:sp>
+      <p:sp>
+        <p:nvSpPr>
+          <p:cNvPr id="6" name="Text 4"/>
+          <p:cNvSpPr/>
+          <p:nvPr/>
+        </p:nvSpPr>
+        <p:spPr>
+          <a:xfrm>
+            <a:off x="749808" y="2706624"/>
+            <a:ext cx="3017520" cy="292608"/>
+          </a:xfrm>
+          <a:prstGeom prst="rect">
+            <a:avLst/>
+          </a:prstGeom>
+          <a:noFill/>
+          <a:ln/>
+        </p:spPr>
+        <p:txBody>
+          <a:bodyPr wrap="square" rtlCol="0" anchor="ctr"/>
+          <a:lstStyle/>
+          <a:p>
+            <a:pPr indent="0" marL="0">
+              <a:buNone/>
+            </a:pPr>
+            <a:r>
+              <a:rPr lang="en-US" sz="1200" b="1" dirty="0">
+                <a:solidFill>
+                  <a:srgbClr val="16211C"/>
+                </a:solidFill>
+                <a:latin typeface="맑은 고딕" pitchFamily="34" charset="0"/>
+                <a:ea typeface="맑은 고딕" pitchFamily="34" charset="-122"/>
+                <a:cs typeface="맑은 고딕" pitchFamily="34" charset="-120"/>
+              </a:rPr>
+              <a:t>안 열린 길도 보여준다</a:t>
+            </a:r>
+            <a:endParaRPr lang="en-US" sz="1200" dirty="0"/>
+          </a:p>
+        </p:txBody>
+      </p:sp>
+      <p:sp>
+        <p:nvSpPr>
+          <p:cNvPr id="7" name="Text 5"/>
+          <p:cNvSpPr/>
+          <p:nvPr/>
+        </p:nvSpPr>
+        <p:spPr>
+          <a:xfrm>
+            <a:off x="749808" y="2999232"/>
+            <a:ext cx="3017520" cy="621792"/>
+          </a:xfrm>
+          <a:prstGeom prst="rect">
+            <a:avLst/>
+          </a:prstGeom>
+          <a:noFill/>
+          <a:ln/>
+        </p:spPr>
+        <p:txBody>
+          <a:bodyPr wrap="square" rtlCol="0" anchor="ctr"/>
+          <a:lstStyle/>
+          <a:p>
+            <a:pPr indent="0" marL="0">
+              <a:lnSpc>
+                <a:spcPts val="1500"/>
+              </a:lnSpc>
+              <a:buNone/>
+            </a:pPr>
+            <a:r>
+              <a:rPr lang="en-US" sz="1000" dirty="0">
+                <a:solidFill>
+                  <a:srgbClr val="44524B"/>
+                </a:solidFill>
+                <a:latin typeface="맑은 고딕" pitchFamily="34" charset="0"/>
+                <a:ea typeface="맑은 고딕" pitchFamily="34" charset="-122"/>
+                <a:cs typeface="맑은 고딕" pitchFamily="34" charset="-120"/>
+              </a:rPr>
+              <a:t>곧 열릴 경로가 있다는 사실 자체가 안내입니다.</a:t>
+            </a:r>
+            <a:endParaRPr lang="en-US" sz="1000" dirty="0"/>
+          </a:p>
+        </p:txBody>
+      </p:sp>
+      <p:sp>
+        <p:nvSpPr>
+          <p:cNvPr id="8" name="Shape 6"/>
+          <p:cNvSpPr/>
+          <p:nvPr/>
+        </p:nvSpPr>
+        <p:spPr>
+          <a:xfrm>
+            <a:off x="502920" y="3858768"/>
+            <a:ext cx="64008" cy="969264"/>
+          </a:xfrm>
+          <a:prstGeom prst="roundRect">
+            <a:avLst>
+              <a:gd name="adj" fmla="val 42857"/>
+            </a:avLst>
+          </a:prstGeom>
+          <a:solidFill>
+            <a:srgbClr val="14A05A"/>
+          </a:solidFill>
+          <a:ln w="12700">
+            <a:solidFill>
+              <a:srgbClr val="14A05A"/>
+            </a:solidFill>
+            <a:prstDash val="solid"/>
+          </a:ln>
+        </p:spPr>
+      </p:sp>
+      <p:sp>
+        <p:nvSpPr>
+          <p:cNvPr id="9" name="Text 7"/>
+          <p:cNvSpPr/>
+          <p:nvPr/>
+        </p:nvSpPr>
+        <p:spPr>
+          <a:xfrm>
+            <a:off x="749808" y="3877056"/>
+            <a:ext cx="3017520" cy="292608"/>
+          </a:xfrm>
+          <a:prstGeom prst="rect">
+            <a:avLst/>
+          </a:prstGeom>
+          <a:noFill/>
+          <a:ln/>
+        </p:spPr>
+        <p:txBody>
+          <a:bodyPr wrap="square" rtlCol="0" anchor="ctr"/>
+          <a:lstStyle/>
+          <a:p>
+            <a:pPr indent="0" marL="0">
+              <a:buNone/>
+            </a:pPr>
+            <a:r>
+              <a:rPr lang="en-US" sz="1200" b="1" dirty="0">
+                <a:solidFill>
+                  <a:srgbClr val="16211C"/>
+                </a:solidFill>
+                <a:latin typeface="맑은 고딕" pitchFamily="34" charset="0"/>
+                <a:ea typeface="맑은 고딕" pitchFamily="34" charset="-122"/>
+                <a:cs typeface="맑은 고딕" pitchFamily="34" charset="-120"/>
+              </a:rPr>
+              <a:t>이미 말한 상품은 다시 안 찾는다</a:t>
+            </a:r>
+            <a:endParaRPr lang="en-US" sz="1200" dirty="0"/>
+          </a:p>
+        </p:txBody>
+      </p:sp>
+      <p:sp>
+        <p:nvSpPr>
+          <p:cNvPr id="10" name="Text 8"/>
+          <p:cNvSpPr/>
+          <p:nvPr/>
+        </p:nvSpPr>
+        <p:spPr>
+          <a:xfrm>
+            <a:off x="749808" y="4169664"/>
+            <a:ext cx="3017520" cy="621792"/>
+          </a:xfrm>
+          <a:prstGeom prst="rect">
+            <a:avLst/>
+          </a:prstGeom>
+          <a:noFill/>
+          <a:ln/>
+        </p:spPr>
+        <p:txBody>
+          <a:bodyPr wrap="square" rtlCol="0" anchor="ctr"/>
+          <a:lstStyle/>
+          <a:p>
+            <a:pPr indent="0" marL="0">
+              <a:lnSpc>
+                <a:spcPts val="1500"/>
+              </a:lnSpc>
+              <a:buNone/>
+            </a:pPr>
+            <a:r>
+              <a:rPr lang="en-US" sz="1000" dirty="0">
+                <a:solidFill>
+                  <a:srgbClr val="44524B"/>
+                </a:solidFill>
+                <a:latin typeface="맑은 고딕" pitchFamily="34" charset="0"/>
+                <a:ea typeface="맑은 고딕" pitchFamily="34" charset="-122"/>
+                <a:cs typeface="맑은 고딕" pitchFamily="34" charset="-120"/>
+              </a:rPr>
+              <a:t>지금 가장 빠른 길입니다.</a:t>
+            </a:r>
+            <a:endParaRPr lang="en-US" sz="1000" dirty="0"/>
+          </a:p>
+        </p:txBody>
+      </p:sp>
+      <p:sp>
+        <p:nvSpPr>
+          <p:cNvPr id="11" name="Shape 9"/>
+          <p:cNvSpPr/>
+          <p:nvPr/>
+        </p:nvSpPr>
+        <p:spPr>
+          <a:xfrm>
+            <a:off x="502920" y="5029200"/>
+            <a:ext cx="64008" cy="969264"/>
+          </a:xfrm>
+          <a:prstGeom prst="roundRect">
+            <a:avLst>
+              <a:gd name="adj" fmla="val 42857"/>
+            </a:avLst>
+          </a:prstGeom>
+          <a:solidFill>
+            <a:srgbClr val="14A05A"/>
+          </a:solidFill>
+          <a:ln w="12700">
+            <a:solidFill>
+              <a:srgbClr val="14A05A"/>
+            </a:solidFill>
+            <a:prstDash val="solid"/>
+          </a:ln>
+        </p:spPr>
+      </p:sp>
+      <p:sp>
+        <p:nvSpPr>
+          <p:cNvPr id="12" name="Text 10"/>
+          <p:cNvSpPr/>
+          <p:nvPr/>
+        </p:nvSpPr>
+        <p:spPr>
+          <a:xfrm>
+            <a:off x="749808" y="5047488"/>
+            <a:ext cx="3017520" cy="292608"/>
+          </a:xfrm>
+          <a:prstGeom prst="rect">
+            <a:avLst/>
+          </a:prstGeom>
+          <a:noFill/>
+          <a:ln/>
+        </p:spPr>
+        <p:txBody>
+          <a:bodyPr wrap="square" rtlCol="0" anchor="ctr"/>
+          <a:lstStyle/>
+          <a:p>
+            <a:pPr indent="0" marL="0">
+              <a:buNone/>
+            </a:pPr>
+            <a:r>
+              <a:rPr lang="en-US" sz="1200" b="1" dirty="0">
+                <a:solidFill>
+                  <a:srgbClr val="16211C"/>
+                </a:solidFill>
+                <a:latin typeface="맑은 고딕" pitchFamily="34" charset="0"/>
+                <a:ea typeface="맑은 고딕" pitchFamily="34" charset="-122"/>
+                <a:cs typeface="맑은 고딕" pitchFamily="34" charset="-120"/>
+              </a:rPr>
+              <a:t>「최근 등록한 상품」은 뺐다</a:t>
+            </a:r>
+            <a:endParaRPr lang="en-US" sz="1200" dirty="0"/>
+          </a:p>
+        </p:txBody>
+      </p:sp>
+      <p:sp>
+        <p:nvSpPr>
+          <p:cNvPr id="13" name="Text 11"/>
+          <p:cNvSpPr/>
+          <p:nvPr/>
+        </p:nvSpPr>
+        <p:spPr>
+          <a:xfrm>
+            <a:off x="749808" y="5340096"/>
+            <a:ext cx="3017520" cy="621792"/>
+          </a:xfrm>
+          <a:prstGeom prst="rect">
+            <a:avLst/>
+          </a:prstGeom>
+          <a:noFill/>
+          <a:ln/>
+        </p:spPr>
+        <p:txBody>
+          <a:bodyPr wrap="square" rtlCol="0" anchor="ctr"/>
+          <a:lstStyle/>
+          <a:p>
+            <a:pPr indent="0" marL="0">
+              <a:lnSpc>
+                <a:spcPts val="1500"/>
+              </a:lnSpc>
+              <a:buNone/>
+            </a:pPr>
+            <a:r>
+              <a:rPr lang="en-US" sz="1000" dirty="0">
+                <a:solidFill>
+                  <a:srgbClr val="44524B"/>
+                </a:solidFill>
+                <a:latin typeface="맑은 고딕" pitchFamily="34" charset="0"/>
+                <a:ea typeface="맑은 고딕" pitchFamily="34" charset="-122"/>
+                <a:cs typeface="맑은 고딕" pitchFamily="34" charset="-120"/>
+              </a:rPr>
+              <a:t>다른 고객 계약을 끌어오게 됩니다.</a:t>
+            </a:r>
+            <a:endParaRPr lang="en-US" sz="1000" dirty="0"/>
           </a:p>
         </p:txBody>
       </p:sp>
       <p:pic>
         <p:nvPicPr>
-          <p:cNvPr id="5" name="Image 0" descr="/tmp/claude-0/-home-user-chacha6377/ca7f6080-cf3a-5093-8a0d-eb3bfdb80785/scratchpad/app_register.png">    </p:cNvPr>
+          <p:cNvPr id="14" name="Image 0" descr="/tmp/claude-0/-home-user-chacha6377/ca7f6080-cf3a-5093-8a0d-eb3bfdb80785/scratchpad/app_register_main.png">    </p:cNvPr>
           <p:cNvPicPr>
             <a:picLocks noChangeAspect="1"/>
           </p:cNvPicPr>
@@ -3129,338 +3465,14 @@
         </p:blipFill>
         <p:spPr>
           <a:xfrm>
-            <a:off x="548640" y="2092228"/>
-            <a:ext cx="7955280" cy="3533080"/>
+            <a:off x="4069080" y="1283863"/>
+            <a:ext cx="7726680" cy="4253698"/>
           </a:xfrm>
           <a:prstGeom prst="rect">
             <a:avLst/>
           </a:prstGeom>
         </p:spPr>
       </p:pic>
-      <p:sp>
-        <p:nvSpPr>
-          <p:cNvPr id="6" name="Shape 3"/>
-          <p:cNvSpPr/>
-          <p:nvPr/>
-        </p:nvSpPr>
-        <p:spPr>
-          <a:xfrm>
-            <a:off x="8732520" y="1737360"/>
-            <a:ext cx="2880360" cy="1481328"/>
-          </a:xfrm>
-          <a:prstGeom prst="roundRect">
-            <a:avLst>
-              <a:gd name="adj" fmla="val 5556"/>
-            </a:avLst>
-          </a:prstGeom>
-          <a:solidFill>
-            <a:srgbClr val="FFFFFF"/>
-          </a:solidFill>
-          <a:ln w="12700">
-            <a:solidFill>
-              <a:srgbClr val="E3E9E5"/>
-            </a:solidFill>
-            <a:prstDash val="solid"/>
-          </a:ln>
-        </p:spPr>
-      </p:sp>
-      <p:sp>
-        <p:nvSpPr>
-          <p:cNvPr id="7" name="Text 4"/>
-          <p:cNvSpPr/>
-          <p:nvPr/>
-        </p:nvSpPr>
-        <p:spPr>
-          <a:xfrm>
-            <a:off x="8942832" y="1901952"/>
-            <a:ext cx="2468880" cy="402336"/>
-          </a:xfrm>
-          <a:prstGeom prst="rect">
-            <a:avLst/>
-          </a:prstGeom>
-          <a:noFill/>
-          <a:ln/>
-        </p:spPr>
-        <p:txBody>
-          <a:bodyPr wrap="square" rtlCol="0" anchor="ctr"/>
-          <a:lstStyle/>
-          <a:p>
-            <a:pPr indent="0" marL="0">
-              <a:buNone/>
-            </a:pPr>
-            <a:r>
-              <a:rPr lang="en-US" sz="1250" b="1" dirty="0">
-                <a:solidFill>
-                  <a:srgbClr val="16211C"/>
-                </a:solidFill>
-                <a:latin typeface="맑은 고딕" pitchFamily="34" charset="0"/>
-                <a:ea typeface="맑은 고딕" pitchFamily="34" charset="-122"/>
-                <a:cs typeface="맑은 고딕" pitchFamily="34" charset="-120"/>
-              </a:rPr>
-              <a:t>안 열린 길도 보여준다</a:t>
-            </a:r>
-            <a:endParaRPr lang="en-US" sz="1250" dirty="0"/>
-          </a:p>
-        </p:txBody>
-      </p:sp>
-      <p:sp>
-        <p:nvSpPr>
-          <p:cNvPr id="8" name="Text 5"/>
-          <p:cNvSpPr/>
-          <p:nvPr/>
-        </p:nvSpPr>
-        <p:spPr>
-          <a:xfrm>
-            <a:off x="8942832" y="2322576"/>
-            <a:ext cx="2468880" cy="768096"/>
-          </a:xfrm>
-          <a:prstGeom prst="rect">
-            <a:avLst/>
-          </a:prstGeom>
-          <a:noFill/>
-          <a:ln/>
-        </p:spPr>
-        <p:txBody>
-          <a:bodyPr wrap="square" rtlCol="0" anchor="ctr"/>
-          <a:lstStyle/>
-          <a:p>
-            <a:pPr indent="0" marL="0">
-              <a:lnSpc>
-                <a:spcPts val="1500"/>
-              </a:lnSpc>
-              <a:buNone/>
-            </a:pPr>
-            <a:r>
-              <a:rPr lang="en-US" sz="1000" dirty="0">
-                <a:solidFill>
-                  <a:srgbClr val="44524B"/>
-                </a:solidFill>
-                <a:latin typeface="맑은 고딕" pitchFamily="34" charset="0"/>
-                <a:ea typeface="맑은 고딕" pitchFamily="34" charset="-122"/>
-                <a:cs typeface="맑은 고딕" pitchFamily="34" charset="-120"/>
-              </a:rPr>
-              <a:t>곧 열릴 경로가 있다는 사실이 안내이고, 「왜 하나씩 넣나」를 납득하는 근거가 됩니다.</a:t>
-            </a:r>
-            <a:endParaRPr lang="en-US" sz="1000" dirty="0"/>
-          </a:p>
-        </p:txBody>
-      </p:sp>
-      <p:sp>
-        <p:nvSpPr>
-          <p:cNvPr id="9" name="Shape 6"/>
-          <p:cNvSpPr/>
-          <p:nvPr/>
-        </p:nvSpPr>
-        <p:spPr>
-          <a:xfrm>
-            <a:off x="8732520" y="3364992"/>
-            <a:ext cx="2880360" cy="1481328"/>
-          </a:xfrm>
-          <a:prstGeom prst="roundRect">
-            <a:avLst>
-              <a:gd name="adj" fmla="val 5556"/>
-            </a:avLst>
-          </a:prstGeom>
-          <a:solidFill>
-            <a:srgbClr val="FFFFFF"/>
-          </a:solidFill>
-          <a:ln w="12700">
-            <a:solidFill>
-              <a:srgbClr val="E3E9E5"/>
-            </a:solidFill>
-            <a:prstDash val="solid"/>
-          </a:ln>
-        </p:spPr>
-      </p:sp>
-      <p:sp>
-        <p:nvSpPr>
-          <p:cNvPr id="10" name="Text 7"/>
-          <p:cNvSpPr/>
-          <p:nvPr/>
-        </p:nvSpPr>
-        <p:spPr>
-          <a:xfrm>
-            <a:off x="8942832" y="3529584"/>
-            <a:ext cx="2468880" cy="402336"/>
-          </a:xfrm>
-          <a:prstGeom prst="rect">
-            <a:avLst/>
-          </a:prstGeom>
-          <a:noFill/>
-          <a:ln/>
-        </p:spPr>
-        <p:txBody>
-          <a:bodyPr wrap="square" rtlCol="0" anchor="ctr"/>
-          <a:lstStyle/>
-          <a:p>
-            <a:pPr indent="0" marL="0">
-              <a:buNone/>
-            </a:pPr>
-            <a:r>
-              <a:rPr lang="en-US" sz="1250" b="1" dirty="0">
-                <a:solidFill>
-                  <a:srgbClr val="16211C"/>
-                </a:solidFill>
-                <a:latin typeface="맑은 고딕" pitchFamily="34" charset="0"/>
-                <a:ea typeface="맑은 고딕" pitchFamily="34" charset="-122"/>
-                <a:cs typeface="맑은 고딕" pitchFamily="34" charset="-120"/>
-              </a:rPr>
-              <a:t>이미 말한 상품은 다시 안 찾는다</a:t>
-            </a:r>
-            <a:endParaRPr lang="en-US" sz="1250" dirty="0"/>
-          </a:p>
-        </p:txBody>
-      </p:sp>
-      <p:sp>
-        <p:nvSpPr>
-          <p:cNvPr id="11" name="Text 8"/>
-          <p:cNvSpPr/>
-          <p:nvPr/>
-        </p:nvSpPr>
-        <p:spPr>
-          <a:xfrm>
-            <a:off x="8942832" y="3950208"/>
-            <a:ext cx="2468880" cy="768096"/>
-          </a:xfrm>
-          <a:prstGeom prst="rect">
-            <a:avLst/>
-          </a:prstGeom>
-          <a:noFill/>
-          <a:ln/>
-        </p:spPr>
-        <p:txBody>
-          <a:bodyPr wrap="square" rtlCol="0" anchor="ctr"/>
-          <a:lstStyle/>
-          <a:p>
-            <a:pPr indent="0" marL="0">
-              <a:lnSpc>
-                <a:spcPts val="1500"/>
-              </a:lnSpc>
-              <a:buNone/>
-            </a:pPr>
-            <a:r>
-              <a:rPr lang="en-US" sz="1000" dirty="0">
-                <a:solidFill>
-                  <a:srgbClr val="44524B"/>
-                </a:solidFill>
-                <a:latin typeface="맑은 고딕" pitchFamily="34" charset="0"/>
-                <a:ea typeface="맑은 고딕" pitchFamily="34" charset="-122"/>
-                <a:cs typeface="맑은 고딕" pitchFamily="34" charset="-120"/>
-              </a:rPr>
-              <a:t>대화에서 말했다면 그것이 곧 등록 대상입니다. 지금 가장 빠른 길입니다.</a:t>
-            </a:r>
-            <a:endParaRPr lang="en-US" sz="1000" dirty="0"/>
-          </a:p>
-        </p:txBody>
-      </p:sp>
-      <p:sp>
-        <p:nvSpPr>
-          <p:cNvPr id="12" name="Shape 9"/>
-          <p:cNvSpPr/>
-          <p:nvPr/>
-        </p:nvSpPr>
-        <p:spPr>
-          <a:xfrm>
-            <a:off x="8732520" y="4992624"/>
-            <a:ext cx="2880360" cy="1481328"/>
-          </a:xfrm>
-          <a:prstGeom prst="roundRect">
-            <a:avLst>
-              <a:gd name="adj" fmla="val 5556"/>
-            </a:avLst>
-          </a:prstGeom>
-          <a:solidFill>
-            <a:srgbClr val="FFFFFF"/>
-          </a:solidFill>
-          <a:ln w="12700">
-            <a:solidFill>
-              <a:srgbClr val="E3E9E5"/>
-            </a:solidFill>
-            <a:prstDash val="solid"/>
-          </a:ln>
-        </p:spPr>
-      </p:sp>
-      <p:sp>
-        <p:nvSpPr>
-          <p:cNvPr id="13" name="Text 10"/>
-          <p:cNvSpPr/>
-          <p:nvPr/>
-        </p:nvSpPr>
-        <p:spPr>
-          <a:xfrm>
-            <a:off x="8942832" y="5157216"/>
-            <a:ext cx="2468880" cy="402336"/>
-          </a:xfrm>
-          <a:prstGeom prst="rect">
-            <a:avLst/>
-          </a:prstGeom>
-          <a:noFill/>
-          <a:ln/>
-        </p:spPr>
-        <p:txBody>
-          <a:bodyPr wrap="square" rtlCol="0" anchor="ctr"/>
-          <a:lstStyle/>
-          <a:p>
-            <a:pPr indent="0" marL="0">
-              <a:buNone/>
-            </a:pPr>
-            <a:r>
-              <a:rPr lang="en-US" sz="1250" b="1" dirty="0">
-                <a:solidFill>
-                  <a:srgbClr val="16211C"/>
-                </a:solidFill>
-                <a:latin typeface="맑은 고딕" pitchFamily="34" charset="0"/>
-                <a:ea typeface="맑은 고딕" pitchFamily="34" charset="-122"/>
-                <a:cs typeface="맑은 고딕" pitchFamily="34" charset="-120"/>
-              </a:rPr>
-              <a:t>「최근 등록한 상품」은 뺐다</a:t>
-            </a:r>
-            <a:endParaRPr lang="en-US" sz="1250" dirty="0"/>
-          </a:p>
-        </p:txBody>
-      </p:sp>
-      <p:sp>
-        <p:nvSpPr>
-          <p:cNvPr id="14" name="Text 11"/>
-          <p:cNvSpPr/>
-          <p:nvPr/>
-        </p:nvSpPr>
-        <p:spPr>
-          <a:xfrm>
-            <a:off x="8942832" y="5577840"/>
-            <a:ext cx="2468880" cy="768096"/>
-          </a:xfrm>
-          <a:prstGeom prst="rect">
-            <a:avLst/>
-          </a:prstGeom>
-          <a:noFill/>
-          <a:ln/>
-        </p:spPr>
-        <p:txBody>
-          <a:bodyPr wrap="square" rtlCol="0" anchor="ctr"/>
-          <a:lstStyle/>
-          <a:p>
-            <a:pPr indent="0" marL="0">
-              <a:lnSpc>
-                <a:spcPts val="1500"/>
-              </a:lnSpc>
-              <a:buNone/>
-            </a:pPr>
-            <a:r>
-              <a:rPr lang="en-US" sz="1000" dirty="0">
-                <a:solidFill>
-                  <a:srgbClr val="44524B"/>
-                </a:solidFill>
-                <a:latin typeface="맑은 고딕" pitchFamily="34" charset="0"/>
-                <a:ea typeface="맑은 고딕" pitchFamily="34" charset="-122"/>
-                <a:cs typeface="맑은 고딕" pitchFamily="34" charset="-120"/>
-              </a:rPr>
-              <a:t>그 목록은 결국 다른 고객에게 등록했던 상품이라, 무관한 계약을 끌어옵니다.</a:t>
-            </a:r>
-            <a:endParaRPr lang="en-US" sz="1000" dirty="0"/>
-          </a:p>
-        </p:txBody>
-      </p:sp>
       <p:sp>
         <p:nvSpPr>
           <p:cNvPr id="15" name="Text 12"/>
@@ -8035,7 +8047,7 @@
                 <a:ea typeface="맑은 고딕" pitchFamily="34" charset="-122"/>
                 <a:cs typeface="맑은 고딕" pitchFamily="34" charset="-120"/>
               </a:rPr>
-              <a:t>찾기 전에 한 권으로 좁힌다</a:t>
+              <a:t>찾기 전에 정확한 상품을 짚어낸다</a:t>
             </a:r>
             <a:endParaRPr lang="en-US" sz="1400" dirty="0"/>
           </a:p>
@@ -8077,7 +8089,7 @@
                 <a:ea typeface="맑은 고딕" pitchFamily="34" charset="-122"/>
                 <a:cs typeface="맑은 고딕" pitchFamily="34" charset="-120"/>
               </a:rPr>
-              <a:t>보험사 → 상품 → 가입 시점으로 약관 1권을 확정하고 그 안에서만 찾습니다.</a:t>
+              <a:t>보험사 → 상품 → 가입 시점으로 약관 1권을 정확히 짚고, 그 안에서만 찾습니다.</a:t>
             </a:r>
             <a:endParaRPr lang="en-US" sz="1050" dirty="0"/>
           </a:p>
@@ -11159,7 +11171,7 @@
                 <a:ea typeface="맑은 고딕" pitchFamily="34" charset="-122"/>
                 <a:cs typeface="맑은 고딕" pitchFamily="34" charset="-120"/>
               </a:rPr>
-              <a:t>그 약관 한 권만 펼친다</a:t>
+              <a:t>짚어낸 약관 한 권만 펼친다</a:t>
             </a:r>
             <a:endParaRPr lang="en-US" sz="1500" dirty="0"/>
           </a:p>
@@ -11198,7 +11210,7 @@
                 <a:ea typeface="맑은 고딕" pitchFamily="34" charset="-122"/>
                 <a:cs typeface="맑은 고딕" pitchFamily="34" charset="-120"/>
               </a:rPr>
-              <a:t>확정된 1권 안에서만 찾습니다. 밖의 조항은 점수가 높아도 버립니다.</a:t>
+              <a:t>그 1권 안에서만 찾습니다. 밖의 조항은 점수가 높아도 버립니다.</a:t>
             </a:r>
             <a:endParaRPr lang="en-US" sz="1150" dirty="0"/>
           </a:p>
@@ -14871,24 +14883,24 @@
         </p:nvSpPr>
         <p:spPr>
           <a:xfrm>
-            <a:off x="548640" y="329184"/>
-            <a:ext cx="11064240" cy="219456"/>
-          </a:xfrm>
-          <a:prstGeom prst="rect">
-            <a:avLst/>
-          </a:prstGeom>
-          <a:noFill/>
-          <a:ln/>
-        </p:spPr>
-        <p:txBody>
-          <a:bodyPr wrap="square" rtlCol="0" anchor="ctr"/>
-          <a:lstStyle/>
-          <a:p>
-            <a:pPr indent="0" marL="0">
-              <a:buNone/>
-            </a:pPr>
-            <a:r>
-              <a:rPr lang="en-US" sz="1100" b="1" spc="200" kern="0" dirty="0">
+            <a:off x="502920" y="384048"/>
+            <a:ext cx="3200400" cy="219456"/>
+          </a:xfrm>
+          <a:prstGeom prst="rect">
+            <a:avLst/>
+          </a:prstGeom>
+          <a:noFill/>
+          <a:ln/>
+        </p:spPr>
+        <p:txBody>
+          <a:bodyPr wrap="square" rtlCol="0" anchor="ctr"/>
+          <a:lstStyle/>
+          <a:p>
+            <a:pPr indent="0" marL="0">
+              <a:buNone/>
+            </a:pPr>
+            <a:r>
+              <a:rPr lang="en-US" sz="1050" b="1" spc="180" kern="0" dirty="0">
                 <a:solidFill>
                   <a:srgbClr val="0B7C44"/>
                 </a:solidFill>
@@ -14898,7 +14910,7 @@
               </a:rPr>
               <a:t>화면 ① 일반 답변</a:t>
             </a:r>
-            <a:endParaRPr lang="en-US" sz="1100" dirty="0"/>
+            <a:endParaRPr lang="en-US" sz="1050" dirty="0"/>
           </a:p>
         </p:txBody>
       </p:sp>
@@ -14910,24 +14922,27 @@
         </p:nvSpPr>
         <p:spPr>
           <a:xfrm>
-            <a:off x="548640" y="566928"/>
-            <a:ext cx="11064240" cy="530352"/>
-          </a:xfrm>
-          <a:prstGeom prst="rect">
-            <a:avLst/>
-          </a:prstGeom>
-          <a:noFill/>
-          <a:ln/>
-        </p:spPr>
-        <p:txBody>
-          <a:bodyPr wrap="square" rtlCol="0" anchor="ctr"/>
-          <a:lstStyle/>
-          <a:p>
-            <a:pPr indent="0" marL="0">
-              <a:buNone/>
-            </a:pPr>
-            <a:r>
-              <a:rPr lang="en-US" sz="2700" b="1" dirty="0">
+            <a:off x="502920" y="621792"/>
+            <a:ext cx="3291840" cy="1005840"/>
+          </a:xfrm>
+          <a:prstGeom prst="rect">
+            <a:avLst/>
+          </a:prstGeom>
+          <a:noFill/>
+          <a:ln/>
+        </p:spPr>
+        <p:txBody>
+          <a:bodyPr wrap="square" rtlCol="0" anchor="ctr"/>
+          <a:lstStyle/>
+          <a:p>
+            <a:pPr indent="0" marL="0">
+              <a:lnSpc>
+                <a:spcPts val="2800"/>
+              </a:lnSpc>
+              <a:buNone/>
+            </a:pPr>
+            <a:r>
+              <a:rPr lang="en-US" sz="2100" b="1" dirty="0">
                 <a:solidFill>
                   <a:srgbClr val="16211C"/>
                 </a:solidFill>
@@ -14937,7 +14952,7 @@
               </a:rPr>
               <a:t>먼저 일반으로 답하고, 개인화는 고르게 합니다</a:t>
             </a:r>
-            <a:endParaRPr lang="en-US" sz="2700" dirty="0"/>
+            <a:endParaRPr lang="en-US" sz="2100" dirty="0"/>
           </a:p>
         </p:txBody>
       </p:sp>
@@ -14949,24 +14964,27 @@
         </p:nvSpPr>
         <p:spPr>
           <a:xfrm>
-            <a:off x="548640" y="1115568"/>
-            <a:ext cx="11064240" cy="310896"/>
-          </a:xfrm>
-          <a:prstGeom prst="rect">
-            <a:avLst/>
-          </a:prstGeom>
-          <a:noFill/>
-          <a:ln/>
-        </p:spPr>
-        <p:txBody>
-          <a:bodyPr wrap="square" rtlCol="0" anchor="ctr"/>
-          <a:lstStyle/>
-          <a:p>
-            <a:pPr indent="0" marL="0">
-              <a:buNone/>
-            </a:pPr>
-            <a:r>
-              <a:rPr lang="en-US" sz="1300" dirty="0">
+            <a:off x="502920" y="1700784"/>
+            <a:ext cx="3291840" cy="822960"/>
+          </a:xfrm>
+          <a:prstGeom prst="rect">
+            <a:avLst/>
+          </a:prstGeom>
+          <a:noFill/>
+          <a:ln/>
+        </p:spPr>
+        <p:txBody>
+          <a:bodyPr wrap="square" rtlCol="0" anchor="ctr"/>
+          <a:lstStyle/>
+          <a:p>
+            <a:pPr indent="0" marL="0">
+              <a:lnSpc>
+                <a:spcPts val="1700"/>
+              </a:lnSpc>
+              <a:buNone/>
+            </a:pPr>
+            <a:r>
+              <a:rPr lang="en-US" sz="1150" dirty="0">
                 <a:solidFill>
                   <a:srgbClr val="7A867F"/>
                 </a:solidFill>
@@ -14976,13 +14994,337 @@
               </a:rPr>
               <a:t>「골절되면 보상되나요?」는 일반지식만으로 답이 나옵니다. 그 답으로 충분한 경우가 많습니다.</a:t>
             </a:r>
-            <a:endParaRPr lang="en-US" sz="1300" dirty="0"/>
+            <a:endParaRPr lang="en-US" sz="1150" dirty="0"/>
+          </a:p>
+        </p:txBody>
+      </p:sp>
+      <p:sp>
+        <p:nvSpPr>
+          <p:cNvPr id="5" name="Shape 3"/>
+          <p:cNvSpPr/>
+          <p:nvPr/>
+        </p:nvSpPr>
+        <p:spPr>
+          <a:xfrm>
+            <a:off x="502920" y="2688336"/>
+            <a:ext cx="64008" cy="969264"/>
+          </a:xfrm>
+          <a:prstGeom prst="roundRect">
+            <a:avLst>
+              <a:gd name="adj" fmla="val 42857"/>
+            </a:avLst>
+          </a:prstGeom>
+          <a:solidFill>
+            <a:srgbClr val="14A05A"/>
+          </a:solidFill>
+          <a:ln w="12700">
+            <a:solidFill>
+              <a:srgbClr val="14A05A"/>
+            </a:solidFill>
+            <a:prstDash val="solid"/>
+          </a:ln>
+        </p:spPr>
+      </p:sp>
+      <p:sp>
+        <p:nvSpPr>
+          <p:cNvPr id="6" name="Text 4"/>
+          <p:cNvSpPr/>
+          <p:nvPr/>
+        </p:nvSpPr>
+        <p:spPr>
+          <a:xfrm>
+            <a:off x="749808" y="2706624"/>
+            <a:ext cx="3017520" cy="292608"/>
+          </a:xfrm>
+          <a:prstGeom prst="rect">
+            <a:avLst/>
+          </a:prstGeom>
+          <a:noFill/>
+          <a:ln/>
+        </p:spPr>
+        <p:txBody>
+          <a:bodyPr wrap="square" rtlCol="0" anchor="ctr"/>
+          <a:lstStyle/>
+          <a:p>
+            <a:pPr indent="0" marL="0">
+              <a:buNone/>
+            </a:pPr>
+            <a:r>
+              <a:rPr lang="en-US" sz="1200" b="1" dirty="0">
+                <a:solidFill>
+                  <a:srgbClr val="16211C"/>
+                </a:solidFill>
+                <a:latin typeface="맑은 고딕" pitchFamily="34" charset="0"/>
+                <a:ea typeface="맑은 고딕" pitchFamily="34" charset="-122"/>
+                <a:cs typeface="맑은 고딕" pitchFamily="34" charset="-120"/>
+              </a:rPr>
+              <a:t>일반 답변은 실패가 아니다</a:t>
+            </a:r>
+            <a:endParaRPr lang="en-US" sz="1200" dirty="0"/>
+          </a:p>
+        </p:txBody>
+      </p:sp>
+      <p:sp>
+        <p:nvSpPr>
+          <p:cNvPr id="7" name="Text 5"/>
+          <p:cNvSpPr/>
+          <p:nvPr/>
+        </p:nvSpPr>
+        <p:spPr>
+          <a:xfrm>
+            <a:off x="749808" y="2999232"/>
+            <a:ext cx="3017520" cy="621792"/>
+          </a:xfrm>
+          <a:prstGeom prst="rect">
+            <a:avLst/>
+          </a:prstGeom>
+          <a:noFill/>
+          <a:ln/>
+        </p:spPr>
+        <p:txBody>
+          <a:bodyPr wrap="square" rtlCol="0" anchor="ctr"/>
+          <a:lstStyle/>
+          <a:p>
+            <a:pPr indent="0" marL="0">
+              <a:lnSpc>
+                <a:spcPts val="1500"/>
+              </a:lnSpc>
+              <a:buNone/>
+            </a:pPr>
+            <a:r>
+              <a:rPr lang="en-US" sz="1000" dirty="0">
+                <a:solidFill>
+                  <a:srgbClr val="44524B"/>
+                </a:solidFill>
+                <a:latin typeface="맑은 고딕" pitchFamily="34" charset="0"/>
+                <a:ea typeface="맑은 고딕" pitchFamily="34" charset="-122"/>
+                <a:cs typeface="맑은 고딕" pitchFamily="34" charset="-120"/>
+              </a:rPr>
+              <a:t>「이 답변으로 충분해요」를 같은 무게로 둡니다.</a:t>
+            </a:r>
+            <a:endParaRPr lang="en-US" sz="1000" dirty="0"/>
+          </a:p>
+        </p:txBody>
+      </p:sp>
+      <p:sp>
+        <p:nvSpPr>
+          <p:cNvPr id="8" name="Shape 6"/>
+          <p:cNvSpPr/>
+          <p:nvPr/>
+        </p:nvSpPr>
+        <p:spPr>
+          <a:xfrm>
+            <a:off x="502920" y="3858768"/>
+            <a:ext cx="64008" cy="969264"/>
+          </a:xfrm>
+          <a:prstGeom prst="roundRect">
+            <a:avLst>
+              <a:gd name="adj" fmla="val 42857"/>
+            </a:avLst>
+          </a:prstGeom>
+          <a:solidFill>
+            <a:srgbClr val="14A05A"/>
+          </a:solidFill>
+          <a:ln w="12700">
+            <a:solidFill>
+              <a:srgbClr val="14A05A"/>
+            </a:solidFill>
+            <a:prstDash val="solid"/>
+          </a:ln>
+        </p:spPr>
+      </p:sp>
+      <p:sp>
+        <p:nvSpPr>
+          <p:cNvPr id="9" name="Text 7"/>
+          <p:cNvSpPr/>
+          <p:nvPr/>
+        </p:nvSpPr>
+        <p:spPr>
+          <a:xfrm>
+            <a:off x="749808" y="3877056"/>
+            <a:ext cx="3017520" cy="292608"/>
+          </a:xfrm>
+          <a:prstGeom prst="rect">
+            <a:avLst/>
+          </a:prstGeom>
+          <a:noFill/>
+          <a:ln/>
+        </p:spPr>
+        <p:txBody>
+          <a:bodyPr wrap="square" rtlCol="0" anchor="ctr"/>
+          <a:lstStyle/>
+          <a:p>
+            <a:pPr indent="0" marL="0">
+              <a:buNone/>
+            </a:pPr>
+            <a:r>
+              <a:rPr lang="en-US" sz="1200" b="1" dirty="0">
+                <a:solidFill>
+                  <a:srgbClr val="16211C"/>
+                </a:solidFill>
+                <a:latin typeface="맑은 고딕" pitchFamily="34" charset="0"/>
+                <a:ea typeface="맑은 고딕" pitchFamily="34" charset="-122"/>
+                <a:cs typeface="맑은 고딕" pitchFamily="34" charset="-120"/>
+              </a:rPr>
+              <a:t>입구는 약관이지 고객이 아니다</a:t>
+            </a:r>
+            <a:endParaRPr lang="en-US" sz="1200" dirty="0"/>
+          </a:p>
+        </p:txBody>
+      </p:sp>
+      <p:sp>
+        <p:nvSpPr>
+          <p:cNvPr id="10" name="Text 8"/>
+          <p:cNvSpPr/>
+          <p:nvPr/>
+        </p:nvSpPr>
+        <p:spPr>
+          <a:xfrm>
+            <a:off x="749808" y="4169664"/>
+            <a:ext cx="3017520" cy="621792"/>
+          </a:xfrm>
+          <a:prstGeom prst="rect">
+            <a:avLst/>
+          </a:prstGeom>
+          <a:noFill/>
+          <a:ln/>
+        </p:spPr>
+        <p:txBody>
+          <a:bodyPr wrap="square" rtlCol="0" anchor="ctr"/>
+          <a:lstStyle/>
+          <a:p>
+            <a:pPr indent="0" marL="0">
+              <a:lnSpc>
+                <a:spcPts val="1500"/>
+              </a:lnSpc>
+              <a:buNone/>
+            </a:pPr>
+            <a:r>
+              <a:rPr lang="en-US" sz="1000" dirty="0">
+                <a:solidFill>
+                  <a:srgbClr val="44524B"/>
+                </a:solidFill>
+                <a:latin typeface="맑은 고딕" pitchFamily="34" charset="0"/>
+                <a:ea typeface="맑은 고딕" pitchFamily="34" charset="-122"/>
+                <a:cs typeface="맑은 고딕" pitchFamily="34" charset="-120"/>
+              </a:rPr>
+              <a:t>상품을 고르면 그 약관 기준으로 답이 바뀝니다.</a:t>
+            </a:r>
+            <a:endParaRPr lang="en-US" sz="1000" dirty="0"/>
+          </a:p>
+        </p:txBody>
+      </p:sp>
+      <p:sp>
+        <p:nvSpPr>
+          <p:cNvPr id="11" name="Shape 9"/>
+          <p:cNvSpPr/>
+          <p:nvPr/>
+        </p:nvSpPr>
+        <p:spPr>
+          <a:xfrm>
+            <a:off x="502920" y="5029200"/>
+            <a:ext cx="64008" cy="969264"/>
+          </a:xfrm>
+          <a:prstGeom prst="roundRect">
+            <a:avLst>
+              <a:gd name="adj" fmla="val 42857"/>
+            </a:avLst>
+          </a:prstGeom>
+          <a:solidFill>
+            <a:srgbClr val="14A05A"/>
+          </a:solidFill>
+          <a:ln w="12700">
+            <a:solidFill>
+              <a:srgbClr val="14A05A"/>
+            </a:solidFill>
+            <a:prstDash val="solid"/>
+          </a:ln>
+        </p:spPr>
+      </p:sp>
+      <p:sp>
+        <p:nvSpPr>
+          <p:cNvPr id="12" name="Text 10"/>
+          <p:cNvSpPr/>
+          <p:nvPr/>
+        </p:nvSpPr>
+        <p:spPr>
+          <a:xfrm>
+            <a:off x="749808" y="5047488"/>
+            <a:ext cx="3017520" cy="292608"/>
+          </a:xfrm>
+          <a:prstGeom prst="rect">
+            <a:avLst/>
+          </a:prstGeom>
+          <a:noFill/>
+          <a:ln/>
+        </p:spPr>
+        <p:txBody>
+          <a:bodyPr wrap="square" rtlCol="0" anchor="ctr"/>
+          <a:lstStyle/>
+          <a:p>
+            <a:pPr indent="0" marL="0">
+              <a:buNone/>
+            </a:pPr>
+            <a:r>
+              <a:rPr lang="en-US" sz="1200" b="1" dirty="0">
+                <a:solidFill>
+                  <a:srgbClr val="16211C"/>
+                </a:solidFill>
+                <a:latin typeface="맑은 고딕" pitchFamily="34" charset="0"/>
+                <a:ea typeface="맑은 고딕" pitchFamily="34" charset="-122"/>
+                <a:cs typeface="맑은 고딕" pitchFamily="34" charset="-120"/>
+              </a:rPr>
+              <a:t>여기서 금액은 말하지 않는다</a:t>
+            </a:r>
+            <a:endParaRPr lang="en-US" sz="1200" dirty="0"/>
+          </a:p>
+        </p:txBody>
+      </p:sp>
+      <p:sp>
+        <p:nvSpPr>
+          <p:cNvPr id="13" name="Text 11"/>
+          <p:cNvSpPr/>
+          <p:nvPr/>
+        </p:nvSpPr>
+        <p:spPr>
+          <a:xfrm>
+            <a:off x="749808" y="5340096"/>
+            <a:ext cx="3017520" cy="621792"/>
+          </a:xfrm>
+          <a:prstGeom prst="rect">
+            <a:avLst/>
+          </a:prstGeom>
+          <a:noFill/>
+          <a:ln/>
+        </p:spPr>
+        <p:txBody>
+          <a:bodyPr wrap="square" rtlCol="0" anchor="ctr"/>
+          <a:lstStyle/>
+          <a:p>
+            <a:pPr indent="0" marL="0">
+              <a:lnSpc>
+                <a:spcPts val="1500"/>
+              </a:lnSpc>
+              <a:buNone/>
+            </a:pPr>
+            <a:r>
+              <a:rPr lang="en-US" sz="1000" dirty="0">
+                <a:solidFill>
+                  <a:srgbClr val="44524B"/>
+                </a:solidFill>
+                <a:latin typeface="맑은 고딕" pitchFamily="34" charset="0"/>
+                <a:ea typeface="맑은 고딕" pitchFamily="34" charset="-122"/>
+                <a:cs typeface="맑은 고딕" pitchFamily="34" charset="-120"/>
+              </a:rPr>
+              <a:t>담보 · 지급 조건 · 면책은 상품과 판마다 다릅니다.</a:t>
+            </a:r>
+            <a:endParaRPr lang="en-US" sz="1000" dirty="0"/>
           </a:p>
         </p:txBody>
       </p:sp>
       <p:pic>
         <p:nvPicPr>
-          <p:cNvPr id="5" name="Image 0" descr="/tmp/claude-0/-home-user-chacha6377/ca7f6080-cf3a-5093-8a0d-eb3bfdb80785/scratchpad/app_branch.png">    </p:cNvPr>
+          <p:cNvPr id="14" name="Image 0" descr="/tmp/claude-0/-home-user-chacha6377/ca7f6080-cf3a-5093-8a0d-eb3bfdb80785/scratchpad/app_branch_main.png">    </p:cNvPr>
           <p:cNvPicPr>
             <a:picLocks noChangeAspect="1"/>
           </p:cNvPicPr>
@@ -14996,338 +15338,14 @@
         </p:blipFill>
         <p:spPr>
           <a:xfrm>
-            <a:off x="548640" y="1639312"/>
-            <a:ext cx="7955280" cy="4438913"/>
+            <a:off x="4069080" y="738569"/>
+            <a:ext cx="7726680" cy="5344287"/>
           </a:xfrm>
           <a:prstGeom prst="rect">
             <a:avLst/>
           </a:prstGeom>
         </p:spPr>
       </p:pic>
-      <p:sp>
-        <p:nvSpPr>
-          <p:cNvPr id="6" name="Shape 3"/>
-          <p:cNvSpPr/>
-          <p:nvPr/>
-        </p:nvSpPr>
-        <p:spPr>
-          <a:xfrm>
-            <a:off x="8732520" y="1737360"/>
-            <a:ext cx="2880360" cy="1481328"/>
-          </a:xfrm>
-          <a:prstGeom prst="roundRect">
-            <a:avLst>
-              <a:gd name="adj" fmla="val 5556"/>
-            </a:avLst>
-          </a:prstGeom>
-          <a:solidFill>
-            <a:srgbClr val="FFFFFF"/>
-          </a:solidFill>
-          <a:ln w="12700">
-            <a:solidFill>
-              <a:srgbClr val="E3E9E5"/>
-            </a:solidFill>
-            <a:prstDash val="solid"/>
-          </a:ln>
-        </p:spPr>
-      </p:sp>
-      <p:sp>
-        <p:nvSpPr>
-          <p:cNvPr id="7" name="Text 4"/>
-          <p:cNvSpPr/>
-          <p:nvPr/>
-        </p:nvSpPr>
-        <p:spPr>
-          <a:xfrm>
-            <a:off x="8942832" y="1901952"/>
-            <a:ext cx="2468880" cy="402336"/>
-          </a:xfrm>
-          <a:prstGeom prst="rect">
-            <a:avLst/>
-          </a:prstGeom>
-          <a:noFill/>
-          <a:ln/>
-        </p:spPr>
-        <p:txBody>
-          <a:bodyPr wrap="square" rtlCol="0" anchor="ctr"/>
-          <a:lstStyle/>
-          <a:p>
-            <a:pPr indent="0" marL="0">
-              <a:buNone/>
-            </a:pPr>
-            <a:r>
-              <a:rPr lang="en-US" sz="1250" b="1" dirty="0">
-                <a:solidFill>
-                  <a:srgbClr val="16211C"/>
-                </a:solidFill>
-                <a:latin typeface="맑은 고딕" pitchFamily="34" charset="0"/>
-                <a:ea typeface="맑은 고딕" pitchFamily="34" charset="-122"/>
-                <a:cs typeface="맑은 고딕" pitchFamily="34" charset="-120"/>
-              </a:rPr>
-              <a:t>일반 답변은 실패가 아니다</a:t>
-            </a:r>
-            <a:endParaRPr lang="en-US" sz="1250" dirty="0"/>
-          </a:p>
-        </p:txBody>
-      </p:sp>
-      <p:sp>
-        <p:nvSpPr>
-          <p:cNvPr id="8" name="Text 5"/>
-          <p:cNvSpPr/>
-          <p:nvPr/>
-        </p:nvSpPr>
-        <p:spPr>
-          <a:xfrm>
-            <a:off x="8942832" y="2322576"/>
-            <a:ext cx="2468880" cy="768096"/>
-          </a:xfrm>
-          <a:prstGeom prst="rect">
-            <a:avLst/>
-          </a:prstGeom>
-          <a:noFill/>
-          <a:ln/>
-        </p:spPr>
-        <p:txBody>
-          <a:bodyPr wrap="square" rtlCol="0" anchor="ctr"/>
-          <a:lstStyle/>
-          <a:p>
-            <a:pPr indent="0" marL="0">
-              <a:lnSpc>
-                <a:spcPts val="1500"/>
-              </a:lnSpc>
-              <a:buNone/>
-            </a:pPr>
-            <a:r>
-              <a:rPr lang="en-US" sz="1000" dirty="0">
-                <a:solidFill>
-                  <a:srgbClr val="44524B"/>
-                </a:solidFill>
-                <a:latin typeface="맑은 고딕" pitchFamily="34" charset="0"/>
-                <a:ea typeface="맑은 고딕" pitchFamily="34" charset="-122"/>
-                <a:cs typeface="맑은 고딕" pitchFamily="34" charset="-120"/>
-              </a:rPr>
-              <a:t>매번 약관 등록을 요구하면 도구가 무거워집니다. 「이 답변으로 충분해요」를 같은 무게로 둡니다.</a:t>
-            </a:r>
-            <a:endParaRPr lang="en-US" sz="1000" dirty="0"/>
-          </a:p>
-        </p:txBody>
-      </p:sp>
-      <p:sp>
-        <p:nvSpPr>
-          <p:cNvPr id="9" name="Shape 6"/>
-          <p:cNvSpPr/>
-          <p:nvPr/>
-        </p:nvSpPr>
-        <p:spPr>
-          <a:xfrm>
-            <a:off x="8732520" y="3364992"/>
-            <a:ext cx="2880360" cy="1481328"/>
-          </a:xfrm>
-          <a:prstGeom prst="roundRect">
-            <a:avLst>
-              <a:gd name="adj" fmla="val 5556"/>
-            </a:avLst>
-          </a:prstGeom>
-          <a:solidFill>
-            <a:srgbClr val="FFFFFF"/>
-          </a:solidFill>
-          <a:ln w="12700">
-            <a:solidFill>
-              <a:srgbClr val="E3E9E5"/>
-            </a:solidFill>
-            <a:prstDash val="solid"/>
-          </a:ln>
-        </p:spPr>
-      </p:sp>
-      <p:sp>
-        <p:nvSpPr>
-          <p:cNvPr id="10" name="Text 7"/>
-          <p:cNvSpPr/>
-          <p:nvPr/>
-        </p:nvSpPr>
-        <p:spPr>
-          <a:xfrm>
-            <a:off x="8942832" y="3529584"/>
-            <a:ext cx="2468880" cy="402336"/>
-          </a:xfrm>
-          <a:prstGeom prst="rect">
-            <a:avLst/>
-          </a:prstGeom>
-          <a:noFill/>
-          <a:ln/>
-        </p:spPr>
-        <p:txBody>
-          <a:bodyPr wrap="square" rtlCol="0" anchor="ctr"/>
-          <a:lstStyle/>
-          <a:p>
-            <a:pPr indent="0" marL="0">
-              <a:buNone/>
-            </a:pPr>
-            <a:r>
-              <a:rPr lang="en-US" sz="1250" b="1" dirty="0">
-                <a:solidFill>
-                  <a:srgbClr val="16211C"/>
-                </a:solidFill>
-                <a:latin typeface="맑은 고딕" pitchFamily="34" charset="0"/>
-                <a:ea typeface="맑은 고딕" pitchFamily="34" charset="-122"/>
-                <a:cs typeface="맑은 고딕" pitchFamily="34" charset="-120"/>
-              </a:rPr>
-              <a:t>입구는 약관이지 고객이 아니다</a:t>
-            </a:r>
-            <a:endParaRPr lang="en-US" sz="1250" dirty="0"/>
-          </a:p>
-        </p:txBody>
-      </p:sp>
-      <p:sp>
-        <p:nvSpPr>
-          <p:cNvPr id="11" name="Text 8"/>
-          <p:cNvSpPr/>
-          <p:nvPr/>
-        </p:nvSpPr>
-        <p:spPr>
-          <a:xfrm>
-            <a:off x="8942832" y="3950208"/>
-            <a:ext cx="2468880" cy="768096"/>
-          </a:xfrm>
-          <a:prstGeom prst="rect">
-            <a:avLst/>
-          </a:prstGeom>
-          <a:noFill/>
-          <a:ln/>
-        </p:spPr>
-        <p:txBody>
-          <a:bodyPr wrap="square" rtlCol="0" anchor="ctr"/>
-          <a:lstStyle/>
-          <a:p>
-            <a:pPr indent="0" marL="0">
-              <a:lnSpc>
-                <a:spcPts val="1500"/>
-              </a:lnSpc>
-              <a:buNone/>
-            </a:pPr>
-            <a:r>
-              <a:rPr lang="en-US" sz="1000" dirty="0">
-                <a:solidFill>
-                  <a:srgbClr val="44524B"/>
-                </a:solidFill>
-                <a:latin typeface="맑은 고딕" pitchFamily="34" charset="0"/>
-                <a:ea typeface="맑은 고딕" pitchFamily="34" charset="-122"/>
-                <a:cs typeface="맑은 고딕" pitchFamily="34" charset="-120"/>
-              </a:rPr>
-              <a:t>가입한 상품을 고르면 그 상품의 약관 기준으로 답이 바뀝니다. 고객 등록은 안 해도 됩니다.</a:t>
-            </a:r>
-            <a:endParaRPr lang="en-US" sz="1000" dirty="0"/>
-          </a:p>
-        </p:txBody>
-      </p:sp>
-      <p:sp>
-        <p:nvSpPr>
-          <p:cNvPr id="12" name="Shape 9"/>
-          <p:cNvSpPr/>
-          <p:nvPr/>
-        </p:nvSpPr>
-        <p:spPr>
-          <a:xfrm>
-            <a:off x="8732520" y="4992624"/>
-            <a:ext cx="2880360" cy="1481328"/>
-          </a:xfrm>
-          <a:prstGeom prst="roundRect">
-            <a:avLst>
-              <a:gd name="adj" fmla="val 5556"/>
-            </a:avLst>
-          </a:prstGeom>
-          <a:solidFill>
-            <a:srgbClr val="FFFFFF"/>
-          </a:solidFill>
-          <a:ln w="12700">
-            <a:solidFill>
-              <a:srgbClr val="E3E9E5"/>
-            </a:solidFill>
-            <a:prstDash val="solid"/>
-          </a:ln>
-        </p:spPr>
-      </p:sp>
-      <p:sp>
-        <p:nvSpPr>
-          <p:cNvPr id="13" name="Text 10"/>
-          <p:cNvSpPr/>
-          <p:nvPr/>
-        </p:nvSpPr>
-        <p:spPr>
-          <a:xfrm>
-            <a:off x="8942832" y="5157216"/>
-            <a:ext cx="2468880" cy="402336"/>
-          </a:xfrm>
-          <a:prstGeom prst="rect">
-            <a:avLst/>
-          </a:prstGeom>
-          <a:noFill/>
-          <a:ln/>
-        </p:spPr>
-        <p:txBody>
-          <a:bodyPr wrap="square" rtlCol="0" anchor="ctr"/>
-          <a:lstStyle/>
-          <a:p>
-            <a:pPr indent="0" marL="0">
-              <a:buNone/>
-            </a:pPr>
-            <a:r>
-              <a:rPr lang="en-US" sz="1250" b="1" dirty="0">
-                <a:solidFill>
-                  <a:srgbClr val="16211C"/>
-                </a:solidFill>
-                <a:latin typeface="맑은 고딕" pitchFamily="34" charset="0"/>
-                <a:ea typeface="맑은 고딕" pitchFamily="34" charset="-122"/>
-                <a:cs typeface="맑은 고딕" pitchFamily="34" charset="-120"/>
-              </a:rPr>
-              <a:t>여기서 금액은 말하지 않는다</a:t>
-            </a:r>
-            <a:endParaRPr lang="en-US" sz="1250" dirty="0"/>
-          </a:p>
-        </p:txBody>
-      </p:sp>
-      <p:sp>
-        <p:nvSpPr>
-          <p:cNvPr id="14" name="Text 11"/>
-          <p:cNvSpPr/>
-          <p:nvPr/>
-        </p:nvSpPr>
-        <p:spPr>
-          <a:xfrm>
-            <a:off x="8942832" y="5577840"/>
-            <a:ext cx="2468880" cy="768096"/>
-          </a:xfrm>
-          <a:prstGeom prst="rect">
-            <a:avLst/>
-          </a:prstGeom>
-          <a:noFill/>
-          <a:ln/>
-        </p:spPr>
-        <p:txBody>
-          <a:bodyPr wrap="square" rtlCol="0" anchor="ctr"/>
-          <a:lstStyle/>
-          <a:p>
-            <a:pPr indent="0" marL="0">
-              <a:lnSpc>
-                <a:spcPts val="1500"/>
-              </a:lnSpc>
-              <a:buNone/>
-            </a:pPr>
-            <a:r>
-              <a:rPr lang="en-US" sz="1000" dirty="0">
-                <a:solidFill>
-                  <a:srgbClr val="44524B"/>
-                </a:solidFill>
-                <a:latin typeface="맑은 고딕" pitchFamily="34" charset="0"/>
-                <a:ea typeface="맑은 고딕" pitchFamily="34" charset="-122"/>
-                <a:cs typeface="맑은 고딕" pitchFamily="34" charset="-120"/>
-              </a:rPr>
-              <a:t>담보 구성 · 지급 조건 · 면책은 상품과 판마다 다르다는 유의를 함께 답니다.</a:t>
-            </a:r>
-            <a:endParaRPr lang="en-US" sz="1000" dirty="0"/>
-          </a:p>
-        </p:txBody>
-      </p:sp>
       <p:sp>
         <p:nvSpPr>
           <p:cNvPr id="15" name="Text 12"/>
@@ -15407,24 +15425,24 @@
         </p:nvSpPr>
         <p:spPr>
           <a:xfrm>
-            <a:off x="548640" y="329184"/>
-            <a:ext cx="11064240" cy="219456"/>
-          </a:xfrm>
-          <a:prstGeom prst="rect">
-            <a:avLst/>
-          </a:prstGeom>
-          <a:noFill/>
-          <a:ln/>
-        </p:spPr>
-        <p:txBody>
-          <a:bodyPr wrap="square" rtlCol="0" anchor="ctr"/>
-          <a:lstStyle/>
-          <a:p>
-            <a:pPr indent="0" marL="0">
-              <a:buNone/>
-            </a:pPr>
-            <a:r>
-              <a:rPr lang="en-US" sz="1100" b="1" spc="200" kern="0" dirty="0">
+            <a:off x="502920" y="384048"/>
+            <a:ext cx="3200400" cy="219456"/>
+          </a:xfrm>
+          <a:prstGeom prst="rect">
+            <a:avLst/>
+          </a:prstGeom>
+          <a:noFill/>
+          <a:ln/>
+        </p:spPr>
+        <p:txBody>
+          <a:bodyPr wrap="square" rtlCol="0" anchor="ctr"/>
+          <a:lstStyle/>
+          <a:p>
+            <a:pPr indent="0" marL="0">
+              <a:buNone/>
+            </a:pPr>
+            <a:r>
+              <a:rPr lang="en-US" sz="1050" b="1" spc="180" kern="0" dirty="0">
                 <a:solidFill>
                   <a:srgbClr val="0B7C44"/>
                 </a:solidFill>
@@ -15434,7 +15452,7 @@
               </a:rPr>
               <a:t>화면 ② 약관 스코프 확정</a:t>
             </a:r>
-            <a:endParaRPr lang="en-US" sz="1100" dirty="0"/>
+            <a:endParaRPr lang="en-US" sz="1050" dirty="0"/>
           </a:p>
         </p:txBody>
       </p:sp>
@@ -15446,24 +15464,27 @@
         </p:nvSpPr>
         <p:spPr>
           <a:xfrm>
-            <a:off x="548640" y="566928"/>
-            <a:ext cx="11064240" cy="530352"/>
-          </a:xfrm>
-          <a:prstGeom prst="rect">
-            <a:avLst/>
-          </a:prstGeom>
-          <a:noFill/>
-          <a:ln/>
-        </p:spPr>
-        <p:txBody>
-          <a:bodyPr wrap="square" rtlCol="0" anchor="ctr"/>
-          <a:lstStyle/>
-          <a:p>
-            <a:pPr indent="0" marL="0">
-              <a:buNone/>
-            </a:pPr>
-            <a:r>
-              <a:rPr lang="en-US" sz="2700" b="1" dirty="0">
+            <a:off x="502920" y="621792"/>
+            <a:ext cx="3291840" cy="1005840"/>
+          </a:xfrm>
+          <a:prstGeom prst="rect">
+            <a:avLst/>
+          </a:prstGeom>
+          <a:noFill/>
+          <a:ln/>
+        </p:spPr>
+        <p:txBody>
+          <a:bodyPr wrap="square" rtlCol="0" anchor="ctr"/>
+          <a:lstStyle/>
+          <a:p>
+            <a:pPr indent="0" marL="0">
+              <a:lnSpc>
+                <a:spcPts val="2800"/>
+              </a:lnSpc>
+              <a:buNone/>
+            </a:pPr>
+            <a:r>
+              <a:rPr lang="en-US" sz="2100" b="1" dirty="0">
                 <a:solidFill>
                   <a:srgbClr val="16211C"/>
                 </a:solidFill>
@@ -15471,9 +15492,9 @@
                 <a:ea typeface="맑은 고딕" pitchFamily="34" charset="-122"/>
                 <a:cs typeface="맑은 고딕" pitchFamily="34" charset="-120"/>
               </a:rPr>
-              <a:t>찾기 전에 약관 한 권으로 좁힙니다</a:t>
-            </a:r>
-            <a:endParaRPr lang="en-US" sz="2700" dirty="0"/>
+              <a:t>찾기 전에 정확한 상품을 짚어냅니다</a:t>
+            </a:r>
+            <a:endParaRPr lang="en-US" sz="2100" dirty="0"/>
           </a:p>
         </p:txBody>
       </p:sp>
@@ -15485,24 +15506,27 @@
         </p:nvSpPr>
         <p:spPr>
           <a:xfrm>
-            <a:off x="548640" y="1115568"/>
-            <a:ext cx="11064240" cy="310896"/>
-          </a:xfrm>
-          <a:prstGeom prst="rect">
-            <a:avLst/>
-          </a:prstGeom>
-          <a:noFill/>
-          <a:ln/>
-        </p:spPr>
-        <p:txBody>
-          <a:bodyPr wrap="square" rtlCol="0" anchor="ctr"/>
-          <a:lstStyle/>
-          <a:p>
-            <a:pPr indent="0" marL="0">
-              <a:buNone/>
-            </a:pPr>
-            <a:r>
-              <a:rPr lang="en-US" sz="1300" dirty="0">
+            <a:off x="502920" y="1700784"/>
+            <a:ext cx="3291840" cy="822960"/>
+          </a:xfrm>
+          <a:prstGeom prst="rect">
+            <a:avLst/>
+          </a:prstGeom>
+          <a:noFill/>
+          <a:ln/>
+        </p:spPr>
+        <p:txBody>
+          <a:bodyPr wrap="square" rtlCol="0" anchor="ctr"/>
+          <a:lstStyle/>
+          <a:p>
+            <a:pPr indent="0" marL="0">
+              <a:lnSpc>
+                <a:spcPts val="1700"/>
+              </a:lnSpc>
+              <a:buNone/>
+            </a:pPr>
+            <a:r>
+              <a:rPr lang="en-US" sz="1150" dirty="0">
                 <a:solidFill>
                   <a:srgbClr val="7A867F"/>
                 </a:solidFill>
@@ -15512,13 +15536,337 @@
               </a:rPr>
               <a:t>보험사는 치거나 눌러 고르고, 상품은 검색으로 매칭합니다. 판까지 정해져야 검색이 열립니다.</a:t>
             </a:r>
-            <a:endParaRPr lang="en-US" sz="1300" dirty="0"/>
+            <a:endParaRPr lang="en-US" sz="1150" dirty="0"/>
+          </a:p>
+        </p:txBody>
+      </p:sp>
+      <p:sp>
+        <p:nvSpPr>
+          <p:cNvPr id="5" name="Shape 3"/>
+          <p:cNvSpPr/>
+          <p:nvPr/>
+        </p:nvSpPr>
+        <p:spPr>
+          <a:xfrm>
+            <a:off x="502920" y="2688336"/>
+            <a:ext cx="64008" cy="969264"/>
+          </a:xfrm>
+          <a:prstGeom prst="roundRect">
+            <a:avLst>
+              <a:gd name="adj" fmla="val 42857"/>
+            </a:avLst>
+          </a:prstGeom>
+          <a:solidFill>
+            <a:srgbClr val="14A05A"/>
+          </a:solidFill>
+          <a:ln w="12700">
+            <a:solidFill>
+              <a:srgbClr val="14A05A"/>
+            </a:solidFill>
+            <a:prstDash val="solid"/>
+          </a:ln>
+        </p:spPr>
+      </p:sp>
+      <p:sp>
+        <p:nvSpPr>
+          <p:cNvPr id="6" name="Text 4"/>
+          <p:cNvSpPr/>
+          <p:nvPr/>
+        </p:nvSpPr>
+        <p:spPr>
+          <a:xfrm>
+            <a:off x="749808" y="2706624"/>
+            <a:ext cx="3017520" cy="292608"/>
+          </a:xfrm>
+          <a:prstGeom prst="rect">
+            <a:avLst/>
+          </a:prstGeom>
+          <a:noFill/>
+          <a:ln/>
+        </p:spPr>
+        <p:txBody>
+          <a:bodyPr wrap="square" rtlCol="0" anchor="ctr"/>
+          <a:lstStyle/>
+          <a:p>
+            <a:pPr indent="0" marL="0">
+              <a:buNone/>
+            </a:pPr>
+            <a:r>
+              <a:rPr lang="en-US" sz="1200" b="1" dirty="0">
+                <a:solidFill>
+                  <a:srgbClr val="16211C"/>
+                </a:solidFill>
+                <a:latin typeface="맑은 고딕" pitchFamily="34" charset="0"/>
+                <a:ea typeface="맑은 고딕" pitchFamily="34" charset="-122"/>
+                <a:cs typeface="맑은 고딕" pitchFamily="34" charset="-120"/>
+              </a:rPr>
+              <a:t>보종은 묻지 않는다</a:t>
+            </a:r>
+            <a:endParaRPr lang="en-US" sz="1200" dirty="0"/>
+          </a:p>
+        </p:txBody>
+      </p:sp>
+      <p:sp>
+        <p:nvSpPr>
+          <p:cNvPr id="7" name="Text 5"/>
+          <p:cNvSpPr/>
+          <p:nvPr/>
+        </p:nvSpPr>
+        <p:spPr>
+          <a:xfrm>
+            <a:off x="749808" y="2999232"/>
+            <a:ext cx="3017520" cy="621792"/>
+          </a:xfrm>
+          <a:prstGeom prst="rect">
+            <a:avLst/>
+          </a:prstGeom>
+          <a:noFill/>
+          <a:ln/>
+        </p:spPr>
+        <p:txBody>
+          <a:bodyPr wrap="square" rtlCol="0" anchor="ctr"/>
+          <a:lstStyle/>
+          <a:p>
+            <a:pPr indent="0" marL="0">
+              <a:lnSpc>
+                <a:spcPts val="1500"/>
+              </a:lnSpc>
+              <a:buNone/>
+            </a:pPr>
+            <a:r>
+              <a:rPr lang="en-US" sz="1000" dirty="0">
+                <a:solidFill>
+                  <a:srgbClr val="44524B"/>
+                </a:solidFill>
+                <a:latin typeface="맑은 고딕" pitchFamily="34" charset="0"/>
+                <a:ea typeface="맑은 고딕" pitchFamily="34" charset="-122"/>
+                <a:cs typeface="맑은 고딕" pitchFamily="34" charset="-120"/>
+              </a:rPr>
+              <a:t>상품명을 이미 알고 있으니 검색이 더 빠릅니다.</a:t>
+            </a:r>
+            <a:endParaRPr lang="en-US" sz="1000" dirty="0"/>
+          </a:p>
+        </p:txBody>
+      </p:sp>
+      <p:sp>
+        <p:nvSpPr>
+          <p:cNvPr id="8" name="Shape 6"/>
+          <p:cNvSpPr/>
+          <p:nvPr/>
+        </p:nvSpPr>
+        <p:spPr>
+          <a:xfrm>
+            <a:off x="502920" y="3858768"/>
+            <a:ext cx="64008" cy="969264"/>
+          </a:xfrm>
+          <a:prstGeom prst="roundRect">
+            <a:avLst>
+              <a:gd name="adj" fmla="val 42857"/>
+            </a:avLst>
+          </a:prstGeom>
+          <a:solidFill>
+            <a:srgbClr val="14A05A"/>
+          </a:solidFill>
+          <a:ln w="12700">
+            <a:solidFill>
+              <a:srgbClr val="14A05A"/>
+            </a:solidFill>
+            <a:prstDash val="solid"/>
+          </a:ln>
+        </p:spPr>
+      </p:sp>
+      <p:sp>
+        <p:nvSpPr>
+          <p:cNvPr id="9" name="Text 7"/>
+          <p:cNvSpPr/>
+          <p:nvPr/>
+        </p:nvSpPr>
+        <p:spPr>
+          <a:xfrm>
+            <a:off x="749808" y="3877056"/>
+            <a:ext cx="3017520" cy="292608"/>
+          </a:xfrm>
+          <a:prstGeom prst="rect">
+            <a:avLst/>
+          </a:prstGeom>
+          <a:noFill/>
+          <a:ln/>
+        </p:spPr>
+        <p:txBody>
+          <a:bodyPr wrap="square" rtlCol="0" anchor="ctr"/>
+          <a:lstStyle/>
+          <a:p>
+            <a:pPr indent="0" marL="0">
+              <a:buNone/>
+            </a:pPr>
+            <a:r>
+              <a:rPr lang="en-US" sz="1200" b="1" dirty="0">
+                <a:solidFill>
+                  <a:srgbClr val="16211C"/>
+                </a:solidFill>
+                <a:latin typeface="맑은 고딕" pitchFamily="34" charset="0"/>
+                <a:ea typeface="맑은 고딕" pitchFamily="34" charset="-122"/>
+                <a:cs typeface="맑은 고딕" pitchFamily="34" charset="-120"/>
+              </a:rPr>
+              <a:t>겹치는 상품을 함께 본다</a:t>
+            </a:r>
+            <a:endParaRPr lang="en-US" sz="1200" dirty="0"/>
+          </a:p>
+        </p:txBody>
+      </p:sp>
+      <p:sp>
+        <p:nvSpPr>
+          <p:cNvPr id="10" name="Text 8"/>
+          <p:cNvSpPr/>
+          <p:nvPr/>
+        </p:nvSpPr>
+        <p:spPr>
+          <a:xfrm>
+            <a:off x="749808" y="4169664"/>
+            <a:ext cx="3017520" cy="621792"/>
+          </a:xfrm>
+          <a:prstGeom prst="rect">
+            <a:avLst/>
+          </a:prstGeom>
+          <a:noFill/>
+          <a:ln/>
+        </p:spPr>
+        <p:txBody>
+          <a:bodyPr wrap="square" rtlCol="0" anchor="ctr"/>
+          <a:lstStyle/>
+          <a:p>
+            <a:pPr indent="0" marL="0">
+              <a:lnSpc>
+                <a:spcPts val="1500"/>
+              </a:lnSpc>
+              <a:buNone/>
+            </a:pPr>
+            <a:r>
+              <a:rPr lang="en-US" sz="1000" dirty="0">
+                <a:solidFill>
+                  <a:srgbClr val="44524B"/>
+                </a:solidFill>
+                <a:latin typeface="맑은 고딕" pitchFamily="34" charset="0"/>
+                <a:ea typeface="맑은 고딕" pitchFamily="34" charset="-122"/>
+                <a:cs typeface="맑은 고딕" pitchFamily="34" charset="-120"/>
+              </a:rPr>
+              <a:t>「참좋은동행」과 「동행Ⅱ」는 다른 약관입니다.</a:t>
+            </a:r>
+            <a:endParaRPr lang="en-US" sz="1000" dirty="0"/>
+          </a:p>
+        </p:txBody>
+      </p:sp>
+      <p:sp>
+        <p:nvSpPr>
+          <p:cNvPr id="11" name="Shape 9"/>
+          <p:cNvSpPr/>
+          <p:nvPr/>
+        </p:nvSpPr>
+        <p:spPr>
+          <a:xfrm>
+            <a:off x="502920" y="5029200"/>
+            <a:ext cx="64008" cy="969264"/>
+          </a:xfrm>
+          <a:prstGeom prst="roundRect">
+            <a:avLst>
+              <a:gd name="adj" fmla="val 42857"/>
+            </a:avLst>
+          </a:prstGeom>
+          <a:solidFill>
+            <a:srgbClr val="14A05A"/>
+          </a:solidFill>
+          <a:ln w="12700">
+            <a:solidFill>
+              <a:srgbClr val="14A05A"/>
+            </a:solidFill>
+            <a:prstDash val="solid"/>
+          </a:ln>
+        </p:spPr>
+      </p:sp>
+      <p:sp>
+        <p:nvSpPr>
+          <p:cNvPr id="12" name="Text 10"/>
+          <p:cNvSpPr/>
+          <p:nvPr/>
+        </p:nvSpPr>
+        <p:spPr>
+          <a:xfrm>
+            <a:off x="749808" y="5047488"/>
+            <a:ext cx="3017520" cy="292608"/>
+          </a:xfrm>
+          <a:prstGeom prst="rect">
+            <a:avLst/>
+          </a:prstGeom>
+          <a:noFill/>
+          <a:ln/>
+        </p:spPr>
+        <p:txBody>
+          <a:bodyPr wrap="square" rtlCol="0" anchor="ctr"/>
+          <a:lstStyle/>
+          <a:p>
+            <a:pPr indent="0" marL="0">
+              <a:buNone/>
+            </a:pPr>
+            <a:r>
+              <a:rPr lang="en-US" sz="1200" b="1" dirty="0">
+                <a:solidFill>
+                  <a:srgbClr val="16211C"/>
+                </a:solidFill>
+                <a:latin typeface="맑은 고딕" pitchFamily="34" charset="0"/>
+                <a:ea typeface="맑은 고딕" pitchFamily="34" charset="-122"/>
+                <a:cs typeface="맑은 고딕" pitchFamily="34" charset="-120"/>
+              </a:rPr>
+              <a:t>실손은 판이 아니라 세대로</a:t>
+            </a:r>
+            <a:endParaRPr lang="en-US" sz="1200" dirty="0"/>
+          </a:p>
+        </p:txBody>
+      </p:sp>
+      <p:sp>
+        <p:nvSpPr>
+          <p:cNvPr id="13" name="Text 11"/>
+          <p:cNvSpPr/>
+          <p:nvPr/>
+        </p:nvSpPr>
+        <p:spPr>
+          <a:xfrm>
+            <a:off x="749808" y="5340096"/>
+            <a:ext cx="3017520" cy="621792"/>
+          </a:xfrm>
+          <a:prstGeom prst="rect">
+            <a:avLst/>
+          </a:prstGeom>
+          <a:noFill/>
+          <a:ln/>
+        </p:spPr>
+        <p:txBody>
+          <a:bodyPr wrap="square" rtlCol="0" anchor="ctr"/>
+          <a:lstStyle/>
+          <a:p>
+            <a:pPr indent="0" marL="0">
+              <a:lnSpc>
+                <a:spcPts val="1500"/>
+              </a:lnSpc>
+              <a:buNone/>
+            </a:pPr>
+            <a:r>
+              <a:rPr lang="en-US" sz="1000" dirty="0">
+                <a:solidFill>
+                  <a:srgbClr val="44524B"/>
+                </a:solidFill>
+                <a:latin typeface="맑은 고딕" pitchFamily="34" charset="0"/>
+                <a:ea typeface="맑은 고딕" pitchFamily="34" charset="-122"/>
+                <a:cs typeface="맑은 고딕" pitchFamily="34" charset="-120"/>
+              </a:rPr>
+              <a:t>1~4세대가 보상 갈래를 정합니다. 판 150개가 필요 없습니다.</a:t>
+            </a:r>
+            <a:endParaRPr lang="en-US" sz="1000" dirty="0"/>
           </a:p>
         </p:txBody>
       </p:sp>
       <p:pic>
         <p:nvPicPr>
-          <p:cNvPr id="5" name="Image 0" descr="/tmp/claude-0/-home-user-chacha6377/ca7f6080-cf3a-5093-8a0d-eb3bfdb80785/scratchpad/app_scope.png">    </p:cNvPr>
+          <p:cNvPr id="14" name="Image 0" descr="/tmp/claude-0/-home-user-chacha6377/ca7f6080-cf3a-5093-8a0d-eb3bfdb80785/scratchpad/app_scope_main.png">    </p:cNvPr>
           <p:cNvPicPr>
             <a:picLocks noChangeAspect="1"/>
           </p:cNvPicPr>
@@ -15532,338 +15880,14 @@
         </p:blipFill>
         <p:spPr>
           <a:xfrm>
-            <a:off x="1132219" y="1572768"/>
-            <a:ext cx="6788122" cy="4572000"/>
+            <a:off x="4307220" y="384048"/>
+            <a:ext cx="7250399" cy="6053328"/>
           </a:xfrm>
           <a:prstGeom prst="rect">
             <a:avLst/>
           </a:prstGeom>
         </p:spPr>
       </p:pic>
-      <p:sp>
-        <p:nvSpPr>
-          <p:cNvPr id="6" name="Shape 3"/>
-          <p:cNvSpPr/>
-          <p:nvPr/>
-        </p:nvSpPr>
-        <p:spPr>
-          <a:xfrm>
-            <a:off x="8732520" y="1737360"/>
-            <a:ext cx="2880360" cy="1481328"/>
-          </a:xfrm>
-          <a:prstGeom prst="roundRect">
-            <a:avLst>
-              <a:gd name="adj" fmla="val 5556"/>
-            </a:avLst>
-          </a:prstGeom>
-          <a:solidFill>
-            <a:srgbClr val="FFFFFF"/>
-          </a:solidFill>
-          <a:ln w="12700">
-            <a:solidFill>
-              <a:srgbClr val="E3E9E5"/>
-            </a:solidFill>
-            <a:prstDash val="solid"/>
-          </a:ln>
-        </p:spPr>
-      </p:sp>
-      <p:sp>
-        <p:nvSpPr>
-          <p:cNvPr id="7" name="Text 4"/>
-          <p:cNvSpPr/>
-          <p:nvPr/>
-        </p:nvSpPr>
-        <p:spPr>
-          <a:xfrm>
-            <a:off x="8942832" y="1901952"/>
-            <a:ext cx="2468880" cy="402336"/>
-          </a:xfrm>
-          <a:prstGeom prst="rect">
-            <a:avLst/>
-          </a:prstGeom>
-          <a:noFill/>
-          <a:ln/>
-        </p:spPr>
-        <p:txBody>
-          <a:bodyPr wrap="square" rtlCol="0" anchor="ctr"/>
-          <a:lstStyle/>
-          <a:p>
-            <a:pPr indent="0" marL="0">
-              <a:buNone/>
-            </a:pPr>
-            <a:r>
-              <a:rPr lang="en-US" sz="1250" b="1" dirty="0">
-                <a:solidFill>
-                  <a:srgbClr val="16211C"/>
-                </a:solidFill>
-                <a:latin typeface="맑은 고딕" pitchFamily="34" charset="0"/>
-                <a:ea typeface="맑은 고딕" pitchFamily="34" charset="-122"/>
-                <a:cs typeface="맑은 고딕" pitchFamily="34" charset="-120"/>
-              </a:rPr>
-              <a:t>보종은 묻지 않는다</a:t>
-            </a:r>
-            <a:endParaRPr lang="en-US" sz="1250" dirty="0"/>
-          </a:p>
-        </p:txBody>
-      </p:sp>
-      <p:sp>
-        <p:nvSpPr>
-          <p:cNvPr id="8" name="Text 5"/>
-          <p:cNvSpPr/>
-          <p:nvPr/>
-        </p:nvSpPr>
-        <p:spPr>
-          <a:xfrm>
-            <a:off x="8942832" y="2322576"/>
-            <a:ext cx="2468880" cy="768096"/>
-          </a:xfrm>
-          <a:prstGeom prst="rect">
-            <a:avLst/>
-          </a:prstGeom>
-          <a:noFill/>
-          <a:ln/>
-        </p:spPr>
-        <p:txBody>
-          <a:bodyPr wrap="square" rtlCol="0" anchor="ctr"/>
-          <a:lstStyle/>
-          <a:p>
-            <a:pPr indent="0" marL="0">
-              <a:lnSpc>
-                <a:spcPts val="1500"/>
-              </a:lnSpc>
-              <a:buNone/>
-            </a:pPr>
-            <a:r>
-              <a:rPr lang="en-US" sz="1000" dirty="0">
-                <a:solidFill>
-                  <a:srgbClr val="44524B"/>
-                </a:solidFill>
-                <a:latin typeface="맑은 고딕" pitchFamily="34" charset="0"/>
-                <a:ea typeface="맑은 고딕" pitchFamily="34" charset="-122"/>
-                <a:cs typeface="맑은 고딕" pitchFamily="34" charset="-120"/>
-              </a:rPr>
-              <a:t>한 단계를 더 두면 「장기인가 통합인가」를 멈춰서 생각하게 됩니다. 검색이 더 빠릅니다.</a:t>
-            </a:r>
-            <a:endParaRPr lang="en-US" sz="1000" dirty="0"/>
-          </a:p>
-        </p:txBody>
-      </p:sp>
-      <p:sp>
-        <p:nvSpPr>
-          <p:cNvPr id="9" name="Shape 6"/>
-          <p:cNvSpPr/>
-          <p:nvPr/>
-        </p:nvSpPr>
-        <p:spPr>
-          <a:xfrm>
-            <a:off x="8732520" y="3364992"/>
-            <a:ext cx="2880360" cy="1481328"/>
-          </a:xfrm>
-          <a:prstGeom prst="roundRect">
-            <a:avLst>
-              <a:gd name="adj" fmla="val 5556"/>
-            </a:avLst>
-          </a:prstGeom>
-          <a:solidFill>
-            <a:srgbClr val="FFFFFF"/>
-          </a:solidFill>
-          <a:ln w="12700">
-            <a:solidFill>
-              <a:srgbClr val="E3E9E5"/>
-            </a:solidFill>
-            <a:prstDash val="solid"/>
-          </a:ln>
-        </p:spPr>
-      </p:sp>
-      <p:sp>
-        <p:nvSpPr>
-          <p:cNvPr id="10" name="Text 7"/>
-          <p:cNvSpPr/>
-          <p:nvPr/>
-        </p:nvSpPr>
-        <p:spPr>
-          <a:xfrm>
-            <a:off x="8942832" y="3529584"/>
-            <a:ext cx="2468880" cy="402336"/>
-          </a:xfrm>
-          <a:prstGeom prst="rect">
-            <a:avLst/>
-          </a:prstGeom>
-          <a:noFill/>
-          <a:ln/>
-        </p:spPr>
-        <p:txBody>
-          <a:bodyPr wrap="square" rtlCol="0" anchor="ctr"/>
-          <a:lstStyle/>
-          <a:p>
-            <a:pPr indent="0" marL="0">
-              <a:buNone/>
-            </a:pPr>
-            <a:r>
-              <a:rPr lang="en-US" sz="1250" b="1" dirty="0">
-                <a:solidFill>
-                  <a:srgbClr val="16211C"/>
-                </a:solidFill>
-                <a:latin typeface="맑은 고딕" pitchFamily="34" charset="0"/>
-                <a:ea typeface="맑은 고딕" pitchFamily="34" charset="-122"/>
-                <a:cs typeface="맑은 고딕" pitchFamily="34" charset="-120"/>
-              </a:rPr>
-              <a:t>이름이 겹치는 상품을 함께 본다</a:t>
-            </a:r>
-            <a:endParaRPr lang="en-US" sz="1250" dirty="0"/>
-          </a:p>
-        </p:txBody>
-      </p:sp>
-      <p:sp>
-        <p:nvSpPr>
-          <p:cNvPr id="11" name="Text 8"/>
-          <p:cNvSpPr/>
-          <p:nvPr/>
-        </p:nvSpPr>
-        <p:spPr>
-          <a:xfrm>
-            <a:off x="8942832" y="3950208"/>
-            <a:ext cx="2468880" cy="768096"/>
-          </a:xfrm>
-          <a:prstGeom prst="rect">
-            <a:avLst/>
-          </a:prstGeom>
-          <a:noFill/>
-          <a:ln/>
-        </p:spPr>
-        <p:txBody>
-          <a:bodyPr wrap="square" rtlCol="0" anchor="ctr"/>
-          <a:lstStyle/>
-          <a:p>
-            <a:pPr indent="0" marL="0">
-              <a:lnSpc>
-                <a:spcPts val="1500"/>
-              </a:lnSpc>
-              <a:buNone/>
-            </a:pPr>
-            <a:r>
-              <a:rPr lang="en-US" sz="1000" dirty="0">
-                <a:solidFill>
-                  <a:srgbClr val="44524B"/>
-                </a:solidFill>
-                <a:latin typeface="맑은 고딕" pitchFamily="34" charset="0"/>
-                <a:ea typeface="맑은 고딕" pitchFamily="34" charset="-122"/>
-                <a:cs typeface="맑은 고딕" pitchFamily="34" charset="-120"/>
-              </a:rPr>
-              <a:t>「참좋은동행」과 「동행Ⅱ」는 다른 약관입니다. 한 건만 자동 선택하지 않습니다.</a:t>
-            </a:r>
-            <a:endParaRPr lang="en-US" sz="1000" dirty="0"/>
-          </a:p>
-        </p:txBody>
-      </p:sp>
-      <p:sp>
-        <p:nvSpPr>
-          <p:cNvPr id="12" name="Shape 9"/>
-          <p:cNvSpPr/>
-          <p:nvPr/>
-        </p:nvSpPr>
-        <p:spPr>
-          <a:xfrm>
-            <a:off x="8732520" y="4992624"/>
-            <a:ext cx="2880360" cy="1481328"/>
-          </a:xfrm>
-          <a:prstGeom prst="roundRect">
-            <a:avLst>
-              <a:gd name="adj" fmla="val 5556"/>
-            </a:avLst>
-          </a:prstGeom>
-          <a:solidFill>
-            <a:srgbClr val="FFFFFF"/>
-          </a:solidFill>
-          <a:ln w="12700">
-            <a:solidFill>
-              <a:srgbClr val="E3E9E5"/>
-            </a:solidFill>
-            <a:prstDash val="solid"/>
-          </a:ln>
-        </p:spPr>
-      </p:sp>
-      <p:sp>
-        <p:nvSpPr>
-          <p:cNvPr id="13" name="Text 10"/>
-          <p:cNvSpPr/>
-          <p:nvPr/>
-        </p:nvSpPr>
-        <p:spPr>
-          <a:xfrm>
-            <a:off x="8942832" y="5157216"/>
-            <a:ext cx="2468880" cy="402336"/>
-          </a:xfrm>
-          <a:prstGeom prst="rect">
-            <a:avLst/>
-          </a:prstGeom>
-          <a:noFill/>
-          <a:ln/>
-        </p:spPr>
-        <p:txBody>
-          <a:bodyPr wrap="square" rtlCol="0" anchor="ctr"/>
-          <a:lstStyle/>
-          <a:p>
-            <a:pPr indent="0" marL="0">
-              <a:buNone/>
-            </a:pPr>
-            <a:r>
-              <a:rPr lang="en-US" sz="1250" b="1" dirty="0">
-                <a:solidFill>
-                  <a:srgbClr val="16211C"/>
-                </a:solidFill>
-                <a:latin typeface="맑은 고딕" pitchFamily="34" charset="0"/>
-                <a:ea typeface="맑은 고딕" pitchFamily="34" charset="-122"/>
-                <a:cs typeface="맑은 고딕" pitchFamily="34" charset="-120"/>
-              </a:rPr>
-              <a:t>실손은 판이 아니라 세대로</a:t>
-            </a:r>
-            <a:endParaRPr lang="en-US" sz="1250" dirty="0"/>
-          </a:p>
-        </p:txBody>
-      </p:sp>
-      <p:sp>
-        <p:nvSpPr>
-          <p:cNvPr id="14" name="Text 11"/>
-          <p:cNvSpPr/>
-          <p:nvPr/>
-        </p:nvSpPr>
-        <p:spPr>
-          <a:xfrm>
-            <a:off x="8942832" y="5577840"/>
-            <a:ext cx="2468880" cy="768096"/>
-          </a:xfrm>
-          <a:prstGeom prst="rect">
-            <a:avLst/>
-          </a:prstGeom>
-          <a:noFill/>
-          <a:ln/>
-        </p:spPr>
-        <p:txBody>
-          <a:bodyPr wrap="square" rtlCol="0" anchor="ctr"/>
-          <a:lstStyle/>
-          <a:p>
-            <a:pPr indent="0" marL="0">
-              <a:lnSpc>
-                <a:spcPts val="1500"/>
-              </a:lnSpc>
-              <a:buNone/>
-            </a:pPr>
-            <a:r>
-              <a:rPr lang="en-US" sz="1000" dirty="0">
-                <a:solidFill>
-                  <a:srgbClr val="44524B"/>
-                </a:solidFill>
-                <a:latin typeface="맑은 고딕" pitchFamily="34" charset="0"/>
-                <a:ea typeface="맑은 고딕" pitchFamily="34" charset="-122"/>
-                <a:cs typeface="맑은 고딕" pitchFamily="34" charset="-120"/>
-              </a:rPr>
-              <a:t>1~4세대 표준약관이 보상 갈래를 정합니다. 판 150개를 늘어놓을 필요가 없습니다.</a:t>
-            </a:r>
-            <a:endParaRPr lang="en-US" sz="1000" dirty="0"/>
-          </a:p>
-        </p:txBody>
-      </p:sp>
       <p:sp>
         <p:nvSpPr>
           <p:cNvPr id="15" name="Text 12"/>
@@ -15943,24 +15967,24 @@
         </p:nvSpPr>
         <p:spPr>
           <a:xfrm>
-            <a:off x="548640" y="329184"/>
-            <a:ext cx="11064240" cy="219456"/>
-          </a:xfrm>
-          <a:prstGeom prst="rect">
-            <a:avLst/>
-          </a:prstGeom>
-          <a:noFill/>
-          <a:ln/>
-        </p:spPr>
-        <p:txBody>
-          <a:bodyPr wrap="square" rtlCol="0" anchor="ctr"/>
-          <a:lstStyle/>
-          <a:p>
-            <a:pPr indent="0" marL="0">
-              <a:buNone/>
-            </a:pPr>
-            <a:r>
-              <a:rPr lang="en-US" sz="1100" b="1" spc="200" kern="0" dirty="0">
+            <a:off x="502920" y="384048"/>
+            <a:ext cx="3200400" cy="219456"/>
+          </a:xfrm>
+          <a:prstGeom prst="rect">
+            <a:avLst/>
+          </a:prstGeom>
+          <a:noFill/>
+          <a:ln/>
+        </p:spPr>
+        <p:txBody>
+          <a:bodyPr wrap="square" rtlCol="0" anchor="ctr"/>
+          <a:lstStyle/>
+          <a:p>
+            <a:pPr indent="0" marL="0">
+              <a:buNone/>
+            </a:pPr>
+            <a:r>
+              <a:rPr lang="en-US" sz="1050" b="1" spc="180" kern="0" dirty="0">
                 <a:solidFill>
                   <a:srgbClr val="0B7C44"/>
                 </a:solidFill>
@@ -15970,7 +15994,7 @@
               </a:rPr>
               <a:t>화면 ③ 답변</a:t>
             </a:r>
-            <a:endParaRPr lang="en-US" sz="1100" dirty="0"/>
+            <a:endParaRPr lang="en-US" sz="1050" dirty="0"/>
           </a:p>
         </p:txBody>
       </p:sp>
@@ -15982,24 +16006,27 @@
         </p:nvSpPr>
         <p:spPr>
           <a:xfrm>
-            <a:off x="548640" y="566928"/>
-            <a:ext cx="11064240" cy="530352"/>
-          </a:xfrm>
-          <a:prstGeom prst="rect">
-            <a:avLst/>
-          </a:prstGeom>
-          <a:noFill/>
-          <a:ln/>
-        </p:spPr>
-        <p:txBody>
-          <a:bodyPr wrap="square" rtlCol="0" anchor="ctr"/>
-          <a:lstStyle/>
-          <a:p>
-            <a:pPr indent="0" marL="0">
-              <a:buNone/>
-            </a:pPr>
-            <a:r>
-              <a:rPr lang="en-US" sz="2700" b="1" dirty="0">
+            <a:off x="502920" y="621792"/>
+            <a:ext cx="3291840" cy="1005840"/>
+          </a:xfrm>
+          <a:prstGeom prst="rect">
+            <a:avLst/>
+          </a:prstGeom>
+          <a:noFill/>
+          <a:ln/>
+        </p:spPr>
+        <p:txBody>
+          <a:bodyPr wrap="square" rtlCol="0" anchor="ctr"/>
+          <a:lstStyle/>
+          <a:p>
+            <a:pPr indent="0" marL="0">
+              <a:lnSpc>
+                <a:spcPts val="2800"/>
+              </a:lnSpc>
+              <a:buNone/>
+            </a:pPr>
+            <a:r>
+              <a:rPr lang="en-US" sz="2100" b="1" dirty="0">
                 <a:solidFill>
                   <a:srgbClr val="16211C"/>
                 </a:solidFill>
@@ -16009,7 +16036,7 @@
               </a:rPr>
               <a:t>면책을 먼저 판정하고 조항으로 근거를 답니다</a:t>
             </a:r>
-            <a:endParaRPr lang="en-US" sz="2700" dirty="0"/>
+            <a:endParaRPr lang="en-US" sz="2100" dirty="0"/>
           </a:p>
         </p:txBody>
       </p:sp>
@@ -16021,24 +16048,27 @@
         </p:nvSpPr>
         <p:spPr>
           <a:xfrm>
-            <a:off x="548640" y="1115568"/>
-            <a:ext cx="11064240" cy="310896"/>
-          </a:xfrm>
-          <a:prstGeom prst="rect">
-            <a:avLst/>
-          </a:prstGeom>
-          <a:noFill/>
-          <a:ln/>
-        </p:spPr>
-        <p:txBody>
-          <a:bodyPr wrap="square" rtlCol="0" anchor="ctr"/>
-          <a:lstStyle/>
-          <a:p>
-            <a:pPr indent="0" marL="0">
-              <a:buNone/>
-            </a:pPr>
-            <a:r>
-              <a:rPr lang="en-US" sz="1300" dirty="0">
+            <a:off x="502920" y="1700784"/>
+            <a:ext cx="3291840" cy="822960"/>
+          </a:xfrm>
+          <a:prstGeom prst="rect">
+            <a:avLst/>
+          </a:prstGeom>
+          <a:noFill/>
+          <a:ln/>
+        </p:spPr>
+        <p:txBody>
+          <a:bodyPr wrap="square" rtlCol="0" anchor="ctr"/>
+          <a:lstStyle/>
+          <a:p>
+            <a:pPr indent="0" marL="0">
+              <a:lnSpc>
+                <a:spcPts val="1700"/>
+              </a:lnSpc>
+              <a:buNone/>
+            </a:pPr>
+            <a:r>
+              <a:rPr lang="en-US" sz="1150" dirty="0">
                 <a:solidFill>
                   <a:srgbClr val="7A867F"/>
                 </a:solidFill>
@@ -16048,13 +16078,337 @@
               </a:rPr>
               <a:t>고객을 만들지 않고 그냥 묻는 경로입니다. 대부분의 상담이 여기서 끝납니다.</a:t>
             </a:r>
-            <a:endParaRPr lang="en-US" sz="1300" dirty="0"/>
+            <a:endParaRPr lang="en-US" sz="1150" dirty="0"/>
+          </a:p>
+        </p:txBody>
+      </p:sp>
+      <p:sp>
+        <p:nvSpPr>
+          <p:cNvPr id="5" name="Shape 3"/>
+          <p:cNvSpPr/>
+          <p:nvPr/>
+        </p:nvSpPr>
+        <p:spPr>
+          <a:xfrm>
+            <a:off x="502920" y="2688336"/>
+            <a:ext cx="64008" cy="969264"/>
+          </a:xfrm>
+          <a:prstGeom prst="roundRect">
+            <a:avLst>
+              <a:gd name="adj" fmla="val 42857"/>
+            </a:avLst>
+          </a:prstGeom>
+          <a:solidFill>
+            <a:srgbClr val="14A05A"/>
+          </a:solidFill>
+          <a:ln w="12700">
+            <a:solidFill>
+              <a:srgbClr val="14A05A"/>
+            </a:solidFill>
+            <a:prstDash val="solid"/>
+          </a:ln>
+        </p:spPr>
+      </p:sp>
+      <p:sp>
+        <p:nvSpPr>
+          <p:cNvPr id="6" name="Text 4"/>
+          <p:cNvSpPr/>
+          <p:nvPr/>
+        </p:nvSpPr>
+        <p:spPr>
+          <a:xfrm>
+            <a:off x="749808" y="2706624"/>
+            <a:ext cx="3017520" cy="292608"/>
+          </a:xfrm>
+          <a:prstGeom prst="rect">
+            <a:avLst/>
+          </a:prstGeom>
+          <a:noFill/>
+          <a:ln/>
+        </p:spPr>
+        <p:txBody>
+          <a:bodyPr wrap="square" rtlCol="0" anchor="ctr"/>
+          <a:lstStyle/>
+          <a:p>
+            <a:pPr indent="0" marL="0">
+              <a:buNone/>
+            </a:pPr>
+            <a:r>
+              <a:rPr lang="en-US" sz="1200" b="1" dirty="0">
+                <a:solidFill>
+                  <a:srgbClr val="16211C"/>
+                </a:solidFill>
+                <a:latin typeface="맑은 고딕" pitchFamily="34" charset="0"/>
+                <a:ea typeface="맑은 고딕" pitchFamily="34" charset="-122"/>
+                <a:cs typeface="맑은 고딕" pitchFamily="34" charset="-120"/>
+              </a:rPr>
+              <a:t>면책이 먼저다</a:t>
+            </a:r>
+            <a:endParaRPr lang="en-US" sz="1200" dirty="0"/>
+          </a:p>
+        </p:txBody>
+      </p:sp>
+      <p:sp>
+        <p:nvSpPr>
+          <p:cNvPr id="7" name="Text 5"/>
+          <p:cNvSpPr/>
+          <p:nvPr/>
+        </p:nvSpPr>
+        <p:spPr>
+          <a:xfrm>
+            <a:off x="749808" y="2999232"/>
+            <a:ext cx="3017520" cy="621792"/>
+          </a:xfrm>
+          <a:prstGeom prst="rect">
+            <a:avLst/>
+          </a:prstGeom>
+          <a:noFill/>
+          <a:ln/>
+        </p:spPr>
+        <p:txBody>
+          <a:bodyPr wrap="square" rtlCol="0" anchor="ctr"/>
+          <a:lstStyle/>
+          <a:p>
+            <a:pPr indent="0" marL="0">
+              <a:lnSpc>
+                <a:spcPts val="1500"/>
+              </a:lnSpc>
+              <a:buNone/>
+            </a:pPr>
+            <a:r>
+              <a:rPr lang="en-US" sz="1000" dirty="0">
+                <a:solidFill>
+                  <a:srgbClr val="44524B"/>
+                </a:solidFill>
+                <a:latin typeface="맑은 고딕" pitchFamily="34" charset="0"/>
+                <a:ea typeface="맑은 고딕" pitchFamily="34" charset="-122"/>
+                <a:cs typeface="맑은 고딕" pitchFamily="34" charset="-120"/>
+              </a:rPr>
+              <a:t>지급사유를 먼저 보이면 아래 면책은 읽히지 않습니다.</a:t>
+            </a:r>
+            <a:endParaRPr lang="en-US" sz="1000" dirty="0"/>
+          </a:p>
+        </p:txBody>
+      </p:sp>
+      <p:sp>
+        <p:nvSpPr>
+          <p:cNvPr id="8" name="Shape 6"/>
+          <p:cNvSpPr/>
+          <p:nvPr/>
+        </p:nvSpPr>
+        <p:spPr>
+          <a:xfrm>
+            <a:off x="502920" y="3858768"/>
+            <a:ext cx="64008" cy="969264"/>
+          </a:xfrm>
+          <a:prstGeom prst="roundRect">
+            <a:avLst>
+              <a:gd name="adj" fmla="val 42857"/>
+            </a:avLst>
+          </a:prstGeom>
+          <a:solidFill>
+            <a:srgbClr val="14A05A"/>
+          </a:solidFill>
+          <a:ln w="12700">
+            <a:solidFill>
+              <a:srgbClr val="14A05A"/>
+            </a:solidFill>
+            <a:prstDash val="solid"/>
+          </a:ln>
+        </p:spPr>
+      </p:sp>
+      <p:sp>
+        <p:nvSpPr>
+          <p:cNvPr id="9" name="Text 7"/>
+          <p:cNvSpPr/>
+          <p:nvPr/>
+        </p:nvSpPr>
+        <p:spPr>
+          <a:xfrm>
+            <a:off x="749808" y="3877056"/>
+            <a:ext cx="3017520" cy="292608"/>
+          </a:xfrm>
+          <a:prstGeom prst="rect">
+            <a:avLst/>
+          </a:prstGeom>
+          <a:noFill/>
+          <a:ln/>
+        </p:spPr>
+        <p:txBody>
+          <a:bodyPr wrap="square" rtlCol="0" anchor="ctr"/>
+          <a:lstStyle/>
+          <a:p>
+            <a:pPr indent="0" marL="0">
+              <a:buNone/>
+            </a:pPr>
+            <a:r>
+              <a:rPr lang="en-US" sz="1200" b="1" dirty="0">
+                <a:solidFill>
+                  <a:srgbClr val="16211C"/>
+                </a:solidFill>
+                <a:latin typeface="맑은 고딕" pitchFamily="34" charset="0"/>
+                <a:ea typeface="맑은 고딕" pitchFamily="34" charset="-122"/>
+                <a:cs typeface="맑은 고딕" pitchFamily="34" charset="-120"/>
+              </a:rPr>
+              <a:t>근거를 조항으로 제시한다</a:t>
+            </a:r>
+            <a:endParaRPr lang="en-US" sz="1200" dirty="0"/>
+          </a:p>
+        </p:txBody>
+      </p:sp>
+      <p:sp>
+        <p:nvSpPr>
+          <p:cNvPr id="10" name="Text 8"/>
+          <p:cNvSpPr/>
+          <p:nvPr/>
+        </p:nvSpPr>
+        <p:spPr>
+          <a:xfrm>
+            <a:off x="749808" y="4169664"/>
+            <a:ext cx="3017520" cy="621792"/>
+          </a:xfrm>
+          <a:prstGeom prst="rect">
+            <a:avLst/>
+          </a:prstGeom>
+          <a:noFill/>
+          <a:ln/>
+        </p:spPr>
+        <p:txBody>
+          <a:bodyPr wrap="square" rtlCol="0" anchor="ctr"/>
+          <a:lstStyle/>
+          <a:p>
+            <a:pPr indent="0" marL="0">
+              <a:lnSpc>
+                <a:spcPts val="1500"/>
+              </a:lnSpc>
+              <a:buNone/>
+            </a:pPr>
+            <a:r>
+              <a:rPr lang="en-US" sz="1000" dirty="0">
+                <a:solidFill>
+                  <a:srgbClr val="44524B"/>
+                </a:solidFill>
+                <a:latin typeface="맑은 고딕" pitchFamily="34" charset="0"/>
+                <a:ea typeface="맑은 고딕" pitchFamily="34" charset="-122"/>
+                <a:cs typeface="맑은 고딕" pitchFamily="34" charset="-120"/>
+              </a:rPr>
+              <a:t>제5조 1항 6호까지 짚어야 고객에게 읽어줄 수 있습니다.</a:t>
+            </a:r>
+            <a:endParaRPr lang="en-US" sz="1000" dirty="0"/>
+          </a:p>
+        </p:txBody>
+      </p:sp>
+      <p:sp>
+        <p:nvSpPr>
+          <p:cNvPr id="11" name="Shape 9"/>
+          <p:cNvSpPr/>
+          <p:nvPr/>
+        </p:nvSpPr>
+        <p:spPr>
+          <a:xfrm>
+            <a:off x="502920" y="5029200"/>
+            <a:ext cx="64008" cy="969264"/>
+          </a:xfrm>
+          <a:prstGeom prst="roundRect">
+            <a:avLst>
+              <a:gd name="adj" fmla="val 42857"/>
+            </a:avLst>
+          </a:prstGeom>
+          <a:solidFill>
+            <a:srgbClr val="14A05A"/>
+          </a:solidFill>
+          <a:ln w="12700">
+            <a:solidFill>
+              <a:srgbClr val="14A05A"/>
+            </a:solidFill>
+            <a:prstDash val="solid"/>
+          </a:ln>
+        </p:spPr>
+      </p:sp>
+      <p:sp>
+        <p:nvSpPr>
+          <p:cNvPr id="12" name="Text 10"/>
+          <p:cNvSpPr/>
+          <p:nvPr/>
+        </p:nvSpPr>
+        <p:spPr>
+          <a:xfrm>
+            <a:off x="749808" y="5047488"/>
+            <a:ext cx="3017520" cy="292608"/>
+          </a:xfrm>
+          <a:prstGeom prst="rect">
+            <a:avLst/>
+          </a:prstGeom>
+          <a:noFill/>
+          <a:ln/>
+        </p:spPr>
+        <p:txBody>
+          <a:bodyPr wrap="square" rtlCol="0" anchor="ctr"/>
+          <a:lstStyle/>
+          <a:p>
+            <a:pPr indent="0" marL="0">
+              <a:buNone/>
+            </a:pPr>
+            <a:r>
+              <a:rPr lang="en-US" sz="1200" b="1" dirty="0">
+                <a:solidFill>
+                  <a:srgbClr val="16211C"/>
+                </a:solidFill>
+                <a:latin typeface="맑은 고딕" pitchFamily="34" charset="0"/>
+                <a:ea typeface="맑은 고딕" pitchFamily="34" charset="-122"/>
+                <a:cs typeface="맑은 고딕" pitchFamily="34" charset="-120"/>
+              </a:rPr>
+              <a:t>어느 약관인지 항상 보인다</a:t>
+            </a:r>
+            <a:endParaRPr lang="en-US" sz="1200" dirty="0"/>
+          </a:p>
+        </p:txBody>
+      </p:sp>
+      <p:sp>
+        <p:nvSpPr>
+          <p:cNvPr id="13" name="Text 11"/>
+          <p:cNvSpPr/>
+          <p:nvPr/>
+        </p:nvSpPr>
+        <p:spPr>
+          <a:xfrm>
+            <a:off x="749808" y="5340096"/>
+            <a:ext cx="3017520" cy="621792"/>
+          </a:xfrm>
+          <a:prstGeom prst="rect">
+            <a:avLst/>
+          </a:prstGeom>
+          <a:noFill/>
+          <a:ln/>
+        </p:spPr>
+        <p:txBody>
+          <a:bodyPr wrap="square" rtlCol="0" anchor="ctr"/>
+          <a:lstStyle/>
+          <a:p>
+            <a:pPr indent="0" marL="0">
+              <a:lnSpc>
+                <a:spcPts val="1500"/>
+              </a:lnSpc>
+              <a:buNone/>
+            </a:pPr>
+            <a:r>
+              <a:rPr lang="en-US" sz="1000" dirty="0">
+                <a:solidFill>
+                  <a:srgbClr val="44524B"/>
+                </a:solidFill>
+                <a:latin typeface="맑은 고딕" pitchFamily="34" charset="0"/>
+                <a:ea typeface="맑은 고딕" pitchFamily="34" charset="-122"/>
+                <a:cs typeface="맑은 고딕" pitchFamily="34" charset="-120"/>
+              </a:rPr>
+              <a:t>안 보이면 틀려도 알아챌 수 없습니다.</a:t>
+            </a:r>
+            <a:endParaRPr lang="en-US" sz="1000" dirty="0"/>
           </a:p>
         </p:txBody>
       </p:sp>
       <p:pic>
         <p:nvPicPr>
-          <p:cNvPr id="5" name="Image 0" descr="/tmp/claude-0/-home-user-chacha6377/ca7f6080-cf3a-5093-8a0d-eb3bfdb80785/scratchpad/app_ask.png">    </p:cNvPr>
+          <p:cNvPr id="14" name="Image 0" descr="/tmp/claude-0/-home-user-chacha6377/ca7f6080-cf3a-5093-8a0d-eb3bfdb80785/scratchpad/app_ask_main.png">    </p:cNvPr>
           <p:cNvPicPr>
             <a:picLocks noChangeAspect="1"/>
           </p:cNvPicPr>
@@ -16068,338 +16422,14 @@
         </p:blipFill>
         <p:spPr>
           <a:xfrm>
-            <a:off x="1210814" y="1572768"/>
-            <a:ext cx="6630932" cy="4572000"/>
+            <a:off x="4391168" y="384048"/>
+            <a:ext cx="7082504" cy="6053328"/>
           </a:xfrm>
           <a:prstGeom prst="rect">
             <a:avLst/>
           </a:prstGeom>
         </p:spPr>
       </p:pic>
-      <p:sp>
-        <p:nvSpPr>
-          <p:cNvPr id="6" name="Shape 3"/>
-          <p:cNvSpPr/>
-          <p:nvPr/>
-        </p:nvSpPr>
-        <p:spPr>
-          <a:xfrm>
-            <a:off x="8732520" y="1737360"/>
-            <a:ext cx="2880360" cy="1481328"/>
-          </a:xfrm>
-          <a:prstGeom prst="roundRect">
-            <a:avLst>
-              <a:gd name="adj" fmla="val 5556"/>
-            </a:avLst>
-          </a:prstGeom>
-          <a:solidFill>
-            <a:srgbClr val="FFFFFF"/>
-          </a:solidFill>
-          <a:ln w="12700">
-            <a:solidFill>
-              <a:srgbClr val="E3E9E5"/>
-            </a:solidFill>
-            <a:prstDash val="solid"/>
-          </a:ln>
-        </p:spPr>
-      </p:sp>
-      <p:sp>
-        <p:nvSpPr>
-          <p:cNvPr id="7" name="Text 4"/>
-          <p:cNvSpPr/>
-          <p:nvPr/>
-        </p:nvSpPr>
-        <p:spPr>
-          <a:xfrm>
-            <a:off x="8942832" y="1901952"/>
-            <a:ext cx="2468880" cy="402336"/>
-          </a:xfrm>
-          <a:prstGeom prst="rect">
-            <a:avLst/>
-          </a:prstGeom>
-          <a:noFill/>
-          <a:ln/>
-        </p:spPr>
-        <p:txBody>
-          <a:bodyPr wrap="square" rtlCol="0" anchor="ctr"/>
-          <a:lstStyle/>
-          <a:p>
-            <a:pPr indent="0" marL="0">
-              <a:buNone/>
-            </a:pPr>
-            <a:r>
-              <a:rPr lang="en-US" sz="1250" b="1" dirty="0">
-                <a:solidFill>
-                  <a:srgbClr val="16211C"/>
-                </a:solidFill>
-                <a:latin typeface="맑은 고딕" pitchFamily="34" charset="0"/>
-                <a:ea typeface="맑은 고딕" pitchFamily="34" charset="-122"/>
-                <a:cs typeface="맑은 고딕" pitchFamily="34" charset="-120"/>
-              </a:rPr>
-              <a:t>면책이 먼저다</a:t>
-            </a:r>
-            <a:endParaRPr lang="en-US" sz="1250" dirty="0"/>
-          </a:p>
-        </p:txBody>
-      </p:sp>
-      <p:sp>
-        <p:nvSpPr>
-          <p:cNvPr id="8" name="Text 5"/>
-          <p:cNvSpPr/>
-          <p:nvPr/>
-        </p:nvSpPr>
-        <p:spPr>
-          <a:xfrm>
-            <a:off x="8942832" y="2322576"/>
-            <a:ext cx="2468880" cy="768096"/>
-          </a:xfrm>
-          <a:prstGeom prst="rect">
-            <a:avLst/>
-          </a:prstGeom>
-          <a:noFill/>
-          <a:ln/>
-        </p:spPr>
-        <p:txBody>
-          <a:bodyPr wrap="square" rtlCol="0" anchor="ctr"/>
-          <a:lstStyle/>
-          <a:p>
-            <a:pPr indent="0" marL="0">
-              <a:lnSpc>
-                <a:spcPts val="1500"/>
-              </a:lnSpc>
-              <a:buNone/>
-            </a:pPr>
-            <a:r>
-              <a:rPr lang="en-US" sz="1000" dirty="0">
-                <a:solidFill>
-                  <a:srgbClr val="44524B"/>
-                </a:solidFill>
-                <a:latin typeface="맑은 고딕" pitchFamily="34" charset="0"/>
-                <a:ea typeface="맑은 고딕" pitchFamily="34" charset="-122"/>
-                <a:cs typeface="맑은 고딕" pitchFamily="34" charset="-120"/>
-              </a:rPr>
-              <a:t>지급사유를 먼저 보이면 그 줄에서 읽기를 멈추고 아래 면책은 읽히지 않습니다.</a:t>
-            </a:r>
-            <a:endParaRPr lang="en-US" sz="1000" dirty="0"/>
-          </a:p>
-        </p:txBody>
-      </p:sp>
-      <p:sp>
-        <p:nvSpPr>
-          <p:cNvPr id="9" name="Shape 6"/>
-          <p:cNvSpPr/>
-          <p:nvPr/>
-        </p:nvSpPr>
-        <p:spPr>
-          <a:xfrm>
-            <a:off x="8732520" y="3364992"/>
-            <a:ext cx="2880360" cy="1481328"/>
-          </a:xfrm>
-          <a:prstGeom prst="roundRect">
-            <a:avLst>
-              <a:gd name="adj" fmla="val 5556"/>
-            </a:avLst>
-          </a:prstGeom>
-          <a:solidFill>
-            <a:srgbClr val="FFFFFF"/>
-          </a:solidFill>
-          <a:ln w="12700">
-            <a:solidFill>
-              <a:srgbClr val="E3E9E5"/>
-            </a:solidFill>
-            <a:prstDash val="solid"/>
-          </a:ln>
-        </p:spPr>
-      </p:sp>
-      <p:sp>
-        <p:nvSpPr>
-          <p:cNvPr id="10" name="Text 7"/>
-          <p:cNvSpPr/>
-          <p:nvPr/>
-        </p:nvSpPr>
-        <p:spPr>
-          <a:xfrm>
-            <a:off x="8942832" y="3529584"/>
-            <a:ext cx="2468880" cy="402336"/>
-          </a:xfrm>
-          <a:prstGeom prst="rect">
-            <a:avLst/>
-          </a:prstGeom>
-          <a:noFill/>
-          <a:ln/>
-        </p:spPr>
-        <p:txBody>
-          <a:bodyPr wrap="square" rtlCol="0" anchor="ctr"/>
-          <a:lstStyle/>
-          <a:p>
-            <a:pPr indent="0" marL="0">
-              <a:buNone/>
-            </a:pPr>
-            <a:r>
-              <a:rPr lang="en-US" sz="1250" b="1" dirty="0">
-                <a:solidFill>
-                  <a:srgbClr val="16211C"/>
-                </a:solidFill>
-                <a:latin typeface="맑은 고딕" pitchFamily="34" charset="0"/>
-                <a:ea typeface="맑은 고딕" pitchFamily="34" charset="-122"/>
-                <a:cs typeface="맑은 고딕" pitchFamily="34" charset="-120"/>
-              </a:rPr>
-              <a:t>근거를 조항으로 제시한다</a:t>
-            </a:r>
-            <a:endParaRPr lang="en-US" sz="1250" dirty="0"/>
-          </a:p>
-        </p:txBody>
-      </p:sp>
-      <p:sp>
-        <p:nvSpPr>
-          <p:cNvPr id="11" name="Text 8"/>
-          <p:cNvSpPr/>
-          <p:nvPr/>
-        </p:nvSpPr>
-        <p:spPr>
-          <a:xfrm>
-            <a:off x="8942832" y="3950208"/>
-            <a:ext cx="2468880" cy="768096"/>
-          </a:xfrm>
-          <a:prstGeom prst="rect">
-            <a:avLst/>
-          </a:prstGeom>
-          <a:noFill/>
-          <a:ln/>
-        </p:spPr>
-        <p:txBody>
-          <a:bodyPr wrap="square" rtlCol="0" anchor="ctr"/>
-          <a:lstStyle/>
-          <a:p>
-            <a:pPr indent="0" marL="0">
-              <a:lnSpc>
-                <a:spcPts val="1500"/>
-              </a:lnSpc>
-              <a:buNone/>
-            </a:pPr>
-            <a:r>
-              <a:rPr lang="en-US" sz="1000" dirty="0">
-                <a:solidFill>
-                  <a:srgbClr val="44524B"/>
-                </a:solidFill>
-                <a:latin typeface="맑은 고딕" pitchFamily="34" charset="0"/>
-                <a:ea typeface="맑은 고딕" pitchFamily="34" charset="-122"/>
-                <a:cs typeface="맑은 고딕" pitchFamily="34" charset="-120"/>
-              </a:rPr>
-              <a:t>제5조 1항 6호까지 짚어야 FA가 고객에게 그대로 읽어줄 수 있습니다.</a:t>
-            </a:r>
-            <a:endParaRPr lang="en-US" sz="1000" dirty="0"/>
-          </a:p>
-        </p:txBody>
-      </p:sp>
-      <p:sp>
-        <p:nvSpPr>
-          <p:cNvPr id="12" name="Shape 9"/>
-          <p:cNvSpPr/>
-          <p:nvPr/>
-        </p:nvSpPr>
-        <p:spPr>
-          <a:xfrm>
-            <a:off x="8732520" y="4992624"/>
-            <a:ext cx="2880360" cy="1481328"/>
-          </a:xfrm>
-          <a:prstGeom prst="roundRect">
-            <a:avLst>
-              <a:gd name="adj" fmla="val 5556"/>
-            </a:avLst>
-          </a:prstGeom>
-          <a:solidFill>
-            <a:srgbClr val="FFFFFF"/>
-          </a:solidFill>
-          <a:ln w="12700">
-            <a:solidFill>
-              <a:srgbClr val="E3E9E5"/>
-            </a:solidFill>
-            <a:prstDash val="solid"/>
-          </a:ln>
-        </p:spPr>
-      </p:sp>
-      <p:sp>
-        <p:nvSpPr>
-          <p:cNvPr id="13" name="Text 10"/>
-          <p:cNvSpPr/>
-          <p:nvPr/>
-        </p:nvSpPr>
-        <p:spPr>
-          <a:xfrm>
-            <a:off x="8942832" y="5157216"/>
-            <a:ext cx="2468880" cy="402336"/>
-          </a:xfrm>
-          <a:prstGeom prst="rect">
-            <a:avLst/>
-          </a:prstGeom>
-          <a:noFill/>
-          <a:ln/>
-        </p:spPr>
-        <p:txBody>
-          <a:bodyPr wrap="square" rtlCol="0" anchor="ctr"/>
-          <a:lstStyle/>
-          <a:p>
-            <a:pPr indent="0" marL="0">
-              <a:buNone/>
-            </a:pPr>
-            <a:r>
-              <a:rPr lang="en-US" sz="1250" b="1" dirty="0">
-                <a:solidFill>
-                  <a:srgbClr val="16211C"/>
-                </a:solidFill>
-                <a:latin typeface="맑은 고딕" pitchFamily="34" charset="0"/>
-                <a:ea typeface="맑은 고딕" pitchFamily="34" charset="-122"/>
-                <a:cs typeface="맑은 고딕" pitchFamily="34" charset="-120"/>
-              </a:rPr>
-              <a:t>어느 약관인지 항상 보인다</a:t>
-            </a:r>
-            <a:endParaRPr lang="en-US" sz="1250" dirty="0"/>
-          </a:p>
-        </p:txBody>
-      </p:sp>
-      <p:sp>
-        <p:nvSpPr>
-          <p:cNvPr id="14" name="Text 11"/>
-          <p:cNvSpPr/>
-          <p:nvPr/>
-        </p:nvSpPr>
-        <p:spPr>
-          <a:xfrm>
-            <a:off x="8942832" y="5577840"/>
-            <a:ext cx="2468880" cy="768096"/>
-          </a:xfrm>
-          <a:prstGeom prst="rect">
-            <a:avLst/>
-          </a:prstGeom>
-          <a:noFill/>
-          <a:ln/>
-        </p:spPr>
-        <p:txBody>
-          <a:bodyPr wrap="square" rtlCol="0" anchor="ctr"/>
-          <a:lstStyle/>
-          <a:p>
-            <a:pPr indent="0" marL="0">
-              <a:lnSpc>
-                <a:spcPts val="1500"/>
-              </a:lnSpc>
-              <a:buNone/>
-            </a:pPr>
-            <a:r>
-              <a:rPr lang="en-US" sz="1000" dirty="0">
-                <a:solidFill>
-                  <a:srgbClr val="44524B"/>
-                </a:solidFill>
-                <a:latin typeface="맑은 고딕" pitchFamily="34" charset="0"/>
-                <a:ea typeface="맑은 고딕" pitchFamily="34" charset="-122"/>
-                <a:cs typeface="맑은 고딕" pitchFamily="34" charset="-120"/>
-              </a:rPr>
-              <a:t>「참좋은운전자상해보험 2판」 — 안 보이면 틀려도 알아챌 수 없습니다.</a:t>
-            </a:r>
-            <a:endParaRPr lang="en-US" sz="1000" dirty="0"/>
-          </a:p>
-        </p:txBody>
-      </p:sp>
       <p:sp>
         <p:nvSpPr>
           <p:cNvPr id="15" name="Text 12"/>

--- a/docs/Insurance_AI_상담설계.pptx
+++ b/docs/Insurance_AI_상담설계.pptx
@@ -3763,7 +3763,7 @@
                 <a:ea typeface="맑은 고딕" pitchFamily="34" charset="-122"/>
                 <a:cs typeface="맑은 고딕" pitchFamily="34" charset="-120"/>
               </a:rPr>
-              <a:t>상품 하나가 파일 하나가 아닙니다. 보장형태 × 납입방법 × 판으로 갈립니다.</a:t>
+              <a:t>상품 하나가 파일 하나가 아닙니다. 보장형태 × 납입방법 × 개정으로 갈립니다.</a:t>
             </a:r>
             <a:endParaRPr lang="en-US" sz="1100" dirty="0"/>
           </a:p>
@@ -3783,7 +3783,7 @@
                 <a:ea typeface="맑은 고딕" pitchFamily="34" charset="-122"/>
                 <a:cs typeface="맑은 고딕" pitchFamily="34" charset="-120"/>
               </a:rPr>
-              <a:t>배수가 6이면 200파일에 손보 상품이 4개만 들어갑니다.</a:t>
+              <a:t>배수가 6이면 200건에 손보 상품이 4개만 들어갑니다.</a:t>
             </a:r>
             <a:endParaRPr lang="en-US" sz="1100" dirty="0"/>
           </a:p>
@@ -3891,7 +3891,7 @@
                 <a:ea typeface="맑은 고딕" pitchFamily="34" charset="-122"/>
                 <a:cs typeface="맑은 고딕" pitchFamily="34" charset="-120"/>
               </a:rPr>
-              <a:t>초기 200파일은 회사가 등록하고, 그 밖의 약관은 요청한 FA가 부담합니다.</a:t>
+              <a:t>현재 판매 중인 약관 200개로 시작하고, 그 밖은 요청한 FA가 부담합니다.</a:t>
             </a:r>
             <a:endParaRPr lang="en-US" sz="1100" dirty="0"/>
           </a:p>
@@ -4147,7 +4147,7 @@
                 <a:ea typeface="맑은 고딕" pitchFamily="34" charset="-122"/>
                 <a:cs typeface="맑은 고딕" pitchFamily="34" charset="-120"/>
               </a:rPr>
-              <a:t>판만 세면 150개가 넘지만, 실손은 1~4세대 표준약관으로 갈리고 보상 판정의 갈래도 세대가 정합니다.</a:t>
+              <a:t>개정분까지 세면 150건이 넘지만, 실손은 1~4세대 표준약관으로 갈리고 보상 판정의 갈래도 세대가 정합니다.</a:t>
             </a:r>
             <a:endParaRPr lang="en-US" sz="1150" dirty="0"/>
           </a:p>
@@ -4167,7 +4167,7 @@
                 <a:ea typeface="맑은 고딕" pitchFamily="34" charset="-122"/>
                 <a:cs typeface="맑은 고딕" pitchFamily="34" charset="-120"/>
               </a:rPr>
-              <a:t>세대 대표 판만 사도 대부분의 질문을 덮습니다. 다만 갱신 · 전환으로 세대가 바뀌므로 「가입 시점」이 아니라 「지금 적용 중인 세대」를 물어야 합니다.</a:t>
+              <a:t>세대 대표 약관만 사도 대부분의 질문을 덮습니다. 다만 갱신 · 전환으로 세대가 바뀌므로 「가입 시점」이 아니라 「지금 적용 중인 세대」를 물어야 합니다.</a:t>
             </a:r>
             <a:endParaRPr lang="en-US" sz="1150" dirty="0"/>
           </a:p>
@@ -5136,7 +5136,7 @@
                 <a:ea typeface="맑은 고딕" pitchFamily="34" charset="-122"/>
                 <a:cs typeface="맑은 고딕" pitchFamily="34" charset="-120"/>
               </a:rPr>
-              <a:t>통과 기준 — 스코프 밖 인용 0건 · 면책 재현율 100% · 판 일치율 100% · 특약 오귀속 0건 · 1차 금액 언급 0건</a:t>
+              <a:t>통과 기준 — 스코프 밖 인용 0건 · 면책 재현율 100% · 약관 시점 일치율 100% · 특약 오귀속 0건 · 1차 금액 언급 0건</a:t>
             </a:r>
             <a:endParaRPr lang="en-US" sz="1250" dirty="0"/>
           </a:p>
@@ -5719,7 +5719,7 @@
                 <a:ea typeface="맑은 고딕" pitchFamily="34" charset="-122"/>
                 <a:cs typeface="맑은 고딕" pitchFamily="34" charset="-120"/>
               </a:rPr>
-              <a:t>상품 · 판 메타데이터 필터 지원</a:t>
+              <a:t>상품 · 약관 시점 필터 지원</a:t>
             </a:r>
             <a:endParaRPr lang="en-US" sz="1200" dirty="0"/>
           </a:p>
@@ -5968,7 +5968,7 @@
                 <a:ea typeface="맑은 고딕" pitchFamily="34" charset="-122"/>
                 <a:cs typeface="맑은 고딕" pitchFamily="34" charset="-120"/>
               </a:rPr>
-              <a:t>판당 / 용량 / 정액 중 무엇인지에 따라 등록 전략이 달라집니다</a:t>
+              <a:t>건당 / 용량 / 정액 중 무엇인지에 따라 등록 전략이 달라집니다</a:t>
             </a:r>
             <a:endParaRPr lang="en-US" sz="1100" dirty="0"/>
           </a:p>
@@ -6178,7 +6178,7 @@
                 <a:ea typeface="맑은 고딕" pitchFamily="34" charset="-122"/>
                 <a:cs typeface="맑은 고딕" pitchFamily="34" charset="-120"/>
               </a:rPr>
-              <a:t>배수 6이면 200파일에 손보 상품이 4개만 들어갑니다</a:t>
+              <a:t>배수 6이면 200건에 손보 상품이 4개만 들어갑니다</a:t>
             </a:r>
             <a:endParaRPr lang="en-US" sz="1100" dirty="0"/>
           </a:p>
@@ -8089,7 +8089,7 @@
                 <a:ea typeface="맑은 고딕" pitchFamily="34" charset="-122"/>
                 <a:cs typeface="맑은 고딕" pitchFamily="34" charset="-120"/>
               </a:rPr>
-              <a:t>보험사 → 상품 → 가입 시점으로 약관 1권을 정확히 짚고, 그 안에서만 찾습니다.</a:t>
+              <a:t>보험사 → 상품 → 약관 시점으로 그 계약의 약관을 정확히 짚고, 그 안에서만 찾습니다.</a:t>
             </a:r>
             <a:endParaRPr lang="en-US" sz="1050" dirty="0"/>
           </a:p>
@@ -11000,7 +11000,7 @@
                 <a:ea typeface="맑은 고딕" pitchFamily="34" charset="-122"/>
                 <a:cs typeface="맑은 고딕" pitchFamily="34" charset="-120"/>
               </a:rPr>
-              <a:t>어느 약관인지 확정한다</a:t>
+              <a:t>어느 약관인지 짚어낸다</a:t>
             </a:r>
             <a:endParaRPr lang="en-US" sz="1500" dirty="0"/>
           </a:p>
@@ -13260,7 +13260,7 @@
                 <a:ea typeface="맑은 고딕" pitchFamily="34" charset="-122"/>
                 <a:cs typeface="맑은 고딕" pitchFamily="34" charset="-120"/>
               </a:rPr>
-              <a:t>보험사 → 상품 검색 → 가입 시점</a:t>
+              <a:t>보험사 → 상품 → 약관 시점</a:t>
             </a:r>
             <a:endParaRPr lang="en-US" sz="1100" dirty="0"/>
           </a:p>
@@ -15534,7 +15534,7 @@
                 <a:ea typeface="맑은 고딕" pitchFamily="34" charset="-122"/>
                 <a:cs typeface="맑은 고딕" pitchFamily="34" charset="-120"/>
               </a:rPr>
-              <a:t>보험사는 치거나 눌러 고르고, 상품은 검색으로 매칭합니다. 판까지 정해져야 검색이 열립니다.</a:t>
+              <a:t>보험사는 치거나 눌러 고르고, 상품은 검색으로 매칭합니다. 약관 시점까지 정해져야 검색이 열립니다.</a:t>
             </a:r>
             <a:endParaRPr lang="en-US" sz="1150" dirty="0"/>
           </a:p>
@@ -15858,7 +15858,7 @@
                 <a:ea typeface="맑은 고딕" pitchFamily="34" charset="-122"/>
                 <a:cs typeface="맑은 고딕" pitchFamily="34" charset="-120"/>
               </a:rPr>
-              <a:t>1~4세대가 보상 갈래를 정합니다. 판 150개가 필요 없습니다.</a:t>
+              <a:t>1~4세대가 보상 갈래를 정합니다. 약관 150건이 필요 없습니다.</a:t>
             </a:r>
             <a:endParaRPr lang="en-US" sz="1000" dirty="0"/>
           </a:p>

--- a/docs/Insurance_AI_상담설계.pptx
+++ b/docs/Insurance_AI_상담설계.pptx
@@ -2468,24 +2468,24 @@
         </p:nvSpPr>
         <p:spPr>
           <a:xfrm>
-            <a:off x="502920" y="384048"/>
-            <a:ext cx="3200400" cy="219456"/>
-          </a:xfrm>
-          <a:prstGeom prst="rect">
-            <a:avLst/>
-          </a:prstGeom>
-          <a:noFill/>
-          <a:ln/>
-        </p:spPr>
-        <p:txBody>
-          <a:bodyPr wrap="square" rtlCol="0" anchor="ctr"/>
-          <a:lstStyle/>
-          <a:p>
-            <a:pPr indent="0" marL="0">
-              <a:buNone/>
-            </a:pPr>
-            <a:r>
-              <a:rPr lang="en-US" sz="1050" b="1" spc="180" kern="0" dirty="0">
+            <a:off x="548640" y="292608"/>
+            <a:ext cx="11064240" cy="219456"/>
+          </a:xfrm>
+          <a:prstGeom prst="rect">
+            <a:avLst/>
+          </a:prstGeom>
+          <a:noFill/>
+          <a:ln/>
+        </p:spPr>
+        <p:txBody>
+          <a:bodyPr wrap="square" rtlCol="0" anchor="ctr"/>
+          <a:lstStyle/>
+          <a:p>
+            <a:pPr indent="0" marL="0">
+              <a:buNone/>
+            </a:pPr>
+            <a:r>
+              <a:rPr lang="en-US" sz="1100" b="1" spc="200" kern="0" dirty="0">
                 <a:solidFill>
                   <a:srgbClr val="0B7C44"/>
                 </a:solidFill>
@@ -2495,7 +2495,7 @@
               </a:rPr>
               <a:t>화면 ④ 약관북</a:t>
             </a:r>
-            <a:endParaRPr lang="en-US" sz="1050" dirty="0"/>
+            <a:endParaRPr lang="en-US" sz="1100" dirty="0"/>
           </a:p>
         </p:txBody>
       </p:sp>
@@ -2507,27 +2507,24 @@
         </p:nvSpPr>
         <p:spPr>
           <a:xfrm>
-            <a:off x="502920" y="621792"/>
-            <a:ext cx="3291840" cy="1005840"/>
-          </a:xfrm>
-          <a:prstGeom prst="rect">
-            <a:avLst/>
-          </a:prstGeom>
-          <a:noFill/>
-          <a:ln/>
-        </p:spPr>
-        <p:txBody>
-          <a:bodyPr wrap="square" rtlCol="0" anchor="ctr"/>
-          <a:lstStyle/>
-          <a:p>
-            <a:pPr indent="0" marL="0">
-              <a:lnSpc>
-                <a:spcPts val="2800"/>
-              </a:lnSpc>
-              <a:buNone/>
-            </a:pPr>
-            <a:r>
-              <a:rPr lang="en-US" sz="2100" b="1" dirty="0">
+            <a:off x="548640" y="512064"/>
+            <a:ext cx="7863840" cy="420624"/>
+          </a:xfrm>
+          <a:prstGeom prst="rect">
+            <a:avLst/>
+          </a:prstGeom>
+          <a:noFill/>
+          <a:ln/>
+        </p:spPr>
+        <p:txBody>
+          <a:bodyPr wrap="square" rtlCol="0" anchor="ctr"/>
+          <a:lstStyle/>
+          <a:p>
+            <a:pPr indent="0" marL="0">
+              <a:buNone/>
+            </a:pPr>
+            <a:r>
+              <a:rPr lang="en-US" sz="2400" b="1" dirty="0">
                 <a:solidFill>
                   <a:srgbClr val="16211C"/>
                 </a:solidFill>
@@ -2537,7 +2534,7 @@
               </a:rPr>
               <a:t>고객 폴더를 열면 질문 범위가 그 고객으로 잠깁니다</a:t>
             </a:r>
-            <a:endParaRPr lang="en-US" sz="2100" dirty="0"/>
+            <a:endParaRPr lang="en-US" sz="2400" dirty="0"/>
           </a:p>
         </p:txBody>
       </p:sp>
@@ -2549,27 +2546,24 @@
         </p:nvSpPr>
         <p:spPr>
           <a:xfrm>
-            <a:off x="502920" y="1700784"/>
-            <a:ext cx="3291840" cy="822960"/>
-          </a:xfrm>
-          <a:prstGeom prst="rect">
-            <a:avLst/>
-          </a:prstGeom>
-          <a:noFill/>
-          <a:ln/>
-        </p:spPr>
-        <p:txBody>
-          <a:bodyPr wrap="square" rtlCol="0" anchor="ctr"/>
-          <a:lstStyle/>
-          <a:p>
-            <a:pPr indent="0" marL="0">
-              <a:lnSpc>
-                <a:spcPts val="1700"/>
-              </a:lnSpc>
-              <a:buNone/>
-            </a:pPr>
-            <a:r>
-              <a:rPr lang="en-US" sz="1150" dirty="0">
+            <a:off x="548640" y="950976"/>
+            <a:ext cx="11064240" cy="274320"/>
+          </a:xfrm>
+          <a:prstGeom prst="rect">
+            <a:avLst/>
+          </a:prstGeom>
+          <a:noFill/>
+          <a:ln/>
+        </p:spPr>
+        <p:txBody>
+          <a:bodyPr wrap="square" rtlCol="0" anchor="ctr"/>
+          <a:lstStyle/>
+          <a:p>
+            <a:pPr indent="0" marL="0">
+              <a:buNone/>
+            </a:pPr>
+            <a:r>
+              <a:rPr lang="en-US" sz="1200" dirty="0">
                 <a:solidFill>
                   <a:srgbClr val="7A867F"/>
                 </a:solidFill>
@@ -2579,20 +2573,71 @@
               </a:rPr>
               <a:t>이 화면이 차별점의 실체입니다. 상담할수록 고객별 약관이 쌓입니다.</a:t>
             </a:r>
-            <a:endParaRPr lang="en-US" sz="1150" dirty="0"/>
-          </a:p>
-        </p:txBody>
-      </p:sp>
-      <p:sp>
-        <p:nvSpPr>
-          <p:cNvPr id="5" name="Shape 3"/>
-          <p:cNvSpPr/>
-          <p:nvPr/>
-        </p:nvSpPr>
-        <p:spPr>
-          <a:xfrm>
-            <a:off x="502920" y="2688336"/>
-            <a:ext cx="64008" cy="969264"/>
+            <a:endParaRPr lang="en-US" sz="1200" dirty="0"/>
+          </a:p>
+        </p:txBody>
+      </p:sp>
+      <p:pic>
+        <p:nvPicPr>
+          <p:cNvPr id="5" name="Image 0" descr="/tmp/claude-0/-home-user-chacha6377/ca7f6080-cf3a-5093-8a0d-eb3bfdb80785/scratchpad/app_entry_wide.png">    </p:cNvPr>
+          <p:cNvPicPr>
+            <a:picLocks noChangeAspect="1"/>
+          </p:cNvPicPr>
+          <p:nvPr/>
+        </p:nvPicPr>
+        <p:blipFill>
+          <a:blip r:embed="rId1"/>
+          <a:stretch>
+            <a:fillRect/>
+          </a:stretch>
+        </p:blipFill>
+        <p:spPr>
+          <a:xfrm>
+            <a:off x="548640" y="1281660"/>
+            <a:ext cx="11064240" cy="4477560"/>
+          </a:xfrm>
+          <a:prstGeom prst="rect">
+            <a:avLst/>
+          </a:prstGeom>
+        </p:spPr>
+      </p:pic>
+      <p:sp>
+        <p:nvSpPr>
+          <p:cNvPr id="6" name="Shape 3"/>
+          <p:cNvSpPr/>
+          <p:nvPr/>
+        </p:nvSpPr>
+        <p:spPr>
+          <a:xfrm>
+            <a:off x="548640" y="5632704"/>
+            <a:ext cx="3520440" cy="768096"/>
+          </a:xfrm>
+          <a:prstGeom prst="roundRect">
+            <a:avLst>
+              <a:gd name="adj" fmla="val 10714"/>
+            </a:avLst>
+          </a:prstGeom>
+          <a:solidFill>
+            <a:srgbClr val="FFFFFF"/>
+          </a:solidFill>
+          <a:ln w="12700">
+            <a:solidFill>
+              <a:srgbClr val="E3E9E5"/>
+            </a:solidFill>
+            <a:prstDash val="solid"/>
+          </a:ln>
+        </p:spPr>
+      </p:sp>
+      <p:sp>
+        <p:nvSpPr>
+          <p:cNvPr id="7" name="Shape 4"/>
+          <p:cNvSpPr/>
+          <p:nvPr/>
+        </p:nvSpPr>
+        <p:spPr>
+          <a:xfrm>
+            <a:off x="548640" y="5632704"/>
+            <a:ext cx="64008" cy="768096"/>
           </a:xfrm>
           <a:prstGeom prst="roundRect">
             <a:avLst>
@@ -2612,30 +2657,30 @@
       </p:sp>
       <p:sp>
         <p:nvSpPr>
-          <p:cNvPr id="6" name="Text 4"/>
-          <p:cNvSpPr/>
-          <p:nvPr/>
-        </p:nvSpPr>
-        <p:spPr>
-          <a:xfrm>
-            <a:off x="749808" y="2706624"/>
-            <a:ext cx="3017520" cy="292608"/>
-          </a:xfrm>
-          <a:prstGeom prst="rect">
-            <a:avLst/>
-          </a:prstGeom>
-          <a:noFill/>
-          <a:ln/>
-        </p:spPr>
-        <p:txBody>
-          <a:bodyPr wrap="square" rtlCol="0" anchor="ctr"/>
-          <a:lstStyle/>
-          <a:p>
-            <a:pPr indent="0" marL="0">
-              <a:buNone/>
-            </a:pPr>
-            <a:r>
-              <a:rPr lang="en-US" sz="1200" b="1" dirty="0">
+          <p:cNvPr id="8" name="Text 5"/>
+          <p:cNvSpPr/>
+          <p:nvPr/>
+        </p:nvSpPr>
+        <p:spPr>
+          <a:xfrm>
+            <a:off x="768096" y="5696712"/>
+            <a:ext cx="3108960" cy="256032"/>
+          </a:xfrm>
+          <a:prstGeom prst="rect">
+            <a:avLst/>
+          </a:prstGeom>
+          <a:noFill/>
+          <a:ln/>
+        </p:spPr>
+        <p:txBody>
+          <a:bodyPr wrap="square" rtlCol="0" anchor="ctr"/>
+          <a:lstStyle/>
+          <a:p>
+            <a:pPr indent="0" marL="0">
+              <a:buNone/>
+            </a:pPr>
+            <a:r>
+              <a:rPr lang="en-US" sz="1150" b="1" dirty="0">
                 <a:solidFill>
                   <a:srgbClr val="16211C"/>
                 </a:solidFill>
@@ -2645,20 +2690,20 @@
               </a:rPr>
               <a:t>폴더가 곧 검색 범위다</a:t>
             </a:r>
-            <a:endParaRPr lang="en-US" sz="1200" dirty="0"/>
-          </a:p>
-        </p:txBody>
-      </p:sp>
-      <p:sp>
-        <p:nvSpPr>
-          <p:cNvPr id="7" name="Text 5"/>
-          <p:cNvSpPr/>
-          <p:nvPr/>
-        </p:nvSpPr>
-        <p:spPr>
-          <a:xfrm>
-            <a:off x="749808" y="2999232"/>
-            <a:ext cx="3017520" cy="621792"/>
+            <a:endParaRPr lang="en-US" sz="1150" dirty="0"/>
+          </a:p>
+        </p:txBody>
+      </p:sp>
+      <p:sp>
+        <p:nvSpPr>
+          <p:cNvPr id="9" name="Text 6"/>
+          <p:cNvSpPr/>
+          <p:nvPr/>
+        </p:nvSpPr>
+        <p:spPr>
+          <a:xfrm>
+            <a:off x="768096" y="5943600"/>
+            <a:ext cx="3108960" cy="402336"/>
           </a:xfrm>
           <a:prstGeom prst="rect">
             <a:avLst/>
@@ -2672,12 +2717,12 @@
           <a:p>
             <a:pPr indent="0" marL="0">
               <a:lnSpc>
-                <a:spcPts val="1500"/>
+                <a:spcPts val="1300"/>
               </a:lnSpc>
               <a:buNone/>
             </a:pPr>
             <a:r>
-              <a:rPr lang="en-US" sz="1000" dirty="0">
+              <a:rPr lang="en-US" sz="950" dirty="0">
                 <a:solidFill>
                   <a:srgbClr val="44524B"/>
                 </a:solidFill>
@@ -2687,20 +2732,47 @@
               </a:rPr>
               <a:t>그 고객 약관 4건 안에서만 찾습니다.</a:t>
             </a:r>
-            <a:endParaRPr lang="en-US" sz="1000" dirty="0"/>
-          </a:p>
-        </p:txBody>
-      </p:sp>
-      <p:sp>
-        <p:nvSpPr>
-          <p:cNvPr id="8" name="Shape 6"/>
-          <p:cNvSpPr/>
-          <p:nvPr/>
-        </p:nvSpPr>
-        <p:spPr>
-          <a:xfrm>
-            <a:off x="502920" y="3858768"/>
-            <a:ext cx="64008" cy="969264"/>
+            <a:endParaRPr lang="en-US" sz="950" dirty="0"/>
+          </a:p>
+        </p:txBody>
+      </p:sp>
+      <p:sp>
+        <p:nvSpPr>
+          <p:cNvPr id="10" name="Shape 7"/>
+          <p:cNvSpPr/>
+          <p:nvPr/>
+        </p:nvSpPr>
+        <p:spPr>
+          <a:xfrm>
+            <a:off x="4288536" y="5632704"/>
+            <a:ext cx="3520440" cy="768096"/>
+          </a:xfrm>
+          <a:prstGeom prst="roundRect">
+            <a:avLst>
+              <a:gd name="adj" fmla="val 10714"/>
+            </a:avLst>
+          </a:prstGeom>
+          <a:solidFill>
+            <a:srgbClr val="FFFFFF"/>
+          </a:solidFill>
+          <a:ln w="12700">
+            <a:solidFill>
+              <a:srgbClr val="E3E9E5"/>
+            </a:solidFill>
+            <a:prstDash val="solid"/>
+          </a:ln>
+        </p:spPr>
+      </p:sp>
+      <p:sp>
+        <p:nvSpPr>
+          <p:cNvPr id="11" name="Shape 8"/>
+          <p:cNvSpPr/>
+          <p:nvPr/>
+        </p:nvSpPr>
+        <p:spPr>
+          <a:xfrm>
+            <a:off x="4288536" y="5632704"/>
+            <a:ext cx="64008" cy="768096"/>
           </a:xfrm>
           <a:prstGeom prst="roundRect">
             <a:avLst>
@@ -2720,30 +2792,30 @@
       </p:sp>
       <p:sp>
         <p:nvSpPr>
-          <p:cNvPr id="9" name="Text 7"/>
-          <p:cNvSpPr/>
-          <p:nvPr/>
-        </p:nvSpPr>
-        <p:spPr>
-          <a:xfrm>
-            <a:off x="749808" y="3877056"/>
-            <a:ext cx="3017520" cy="292608"/>
-          </a:xfrm>
-          <a:prstGeom prst="rect">
-            <a:avLst/>
-          </a:prstGeom>
-          <a:noFill/>
-          <a:ln/>
-        </p:spPr>
-        <p:txBody>
-          <a:bodyPr wrap="square" rtlCol="0" anchor="ctr"/>
-          <a:lstStyle/>
-          <a:p>
-            <a:pPr indent="0" marL="0">
-              <a:buNone/>
-            </a:pPr>
-            <a:r>
-              <a:rPr lang="en-US" sz="1200" b="1" dirty="0">
+          <p:cNvPr id="12" name="Text 9"/>
+          <p:cNvSpPr/>
+          <p:nvPr/>
+        </p:nvSpPr>
+        <p:spPr>
+          <a:xfrm>
+            <a:off x="4507992" y="5696712"/>
+            <a:ext cx="3108960" cy="256032"/>
+          </a:xfrm>
+          <a:prstGeom prst="rect">
+            <a:avLst/>
+          </a:prstGeom>
+          <a:noFill/>
+          <a:ln/>
+        </p:spPr>
+        <p:txBody>
+          <a:bodyPr wrap="square" rtlCol="0" anchor="ctr"/>
+          <a:lstStyle/>
+          <a:p>
+            <a:pPr indent="0" marL="0">
+              <a:buNone/>
+            </a:pPr>
+            <a:r>
+              <a:rPr lang="en-US" sz="1150" b="1" dirty="0">
                 <a:solidFill>
                   <a:srgbClr val="16211C"/>
                 </a:solidFill>
@@ -2753,20 +2825,20 @@
               </a:rPr>
               <a:t>청구 누락을 잡는다</a:t>
             </a:r>
-            <a:endParaRPr lang="en-US" sz="1200" dirty="0"/>
-          </a:p>
-        </p:txBody>
-      </p:sp>
-      <p:sp>
-        <p:nvSpPr>
-          <p:cNvPr id="10" name="Text 8"/>
-          <p:cNvSpPr/>
-          <p:nvPr/>
-        </p:nvSpPr>
-        <p:spPr>
-          <a:xfrm>
-            <a:off x="749808" y="4169664"/>
-            <a:ext cx="3017520" cy="621792"/>
+            <a:endParaRPr lang="en-US" sz="1150" dirty="0"/>
+          </a:p>
+        </p:txBody>
+      </p:sp>
+      <p:sp>
+        <p:nvSpPr>
+          <p:cNvPr id="13" name="Text 10"/>
+          <p:cNvSpPr/>
+          <p:nvPr/>
+        </p:nvSpPr>
+        <p:spPr>
+          <a:xfrm>
+            <a:off x="4507992" y="5943600"/>
+            <a:ext cx="3108960" cy="402336"/>
           </a:xfrm>
           <a:prstGeom prst="rect">
             <a:avLst/>
@@ -2780,12 +2852,12 @@
           <a:p>
             <a:pPr indent="0" marL="0">
               <a:lnSpc>
-                <a:spcPts val="1500"/>
+                <a:spcPts val="1300"/>
               </a:lnSpc>
               <a:buNone/>
             </a:pPr>
             <a:r>
-              <a:rPr lang="en-US" sz="1000" dirty="0">
+              <a:rPr lang="en-US" sz="950" dirty="0">
                 <a:solidFill>
                   <a:srgbClr val="44524B"/>
                 </a:solidFill>
@@ -2795,20 +2867,47 @@
               </a:rPr>
               <a:t>담보가 여러 계약에 걸치면 모두 보여줍니다.</a:t>
             </a:r>
-            <a:endParaRPr lang="en-US" sz="1000" dirty="0"/>
-          </a:p>
-        </p:txBody>
-      </p:sp>
-      <p:sp>
-        <p:nvSpPr>
-          <p:cNvPr id="11" name="Shape 9"/>
-          <p:cNvSpPr/>
-          <p:nvPr/>
-        </p:nvSpPr>
-        <p:spPr>
-          <a:xfrm>
-            <a:off x="502920" y="5029200"/>
-            <a:ext cx="64008" cy="969264"/>
+            <a:endParaRPr lang="en-US" sz="950" dirty="0"/>
+          </a:p>
+        </p:txBody>
+      </p:sp>
+      <p:sp>
+        <p:nvSpPr>
+          <p:cNvPr id="14" name="Shape 11"/>
+          <p:cNvSpPr/>
+          <p:nvPr/>
+        </p:nvSpPr>
+        <p:spPr>
+          <a:xfrm>
+            <a:off x="8028432" y="5632704"/>
+            <a:ext cx="3520440" cy="768096"/>
+          </a:xfrm>
+          <a:prstGeom prst="roundRect">
+            <a:avLst>
+              <a:gd name="adj" fmla="val 10714"/>
+            </a:avLst>
+          </a:prstGeom>
+          <a:solidFill>
+            <a:srgbClr val="FFFFFF"/>
+          </a:solidFill>
+          <a:ln w="12700">
+            <a:solidFill>
+              <a:srgbClr val="E3E9E5"/>
+            </a:solidFill>
+            <a:prstDash val="solid"/>
+          </a:ln>
+        </p:spPr>
+      </p:sp>
+      <p:sp>
+        <p:nvSpPr>
+          <p:cNvPr id="15" name="Shape 12"/>
+          <p:cNvSpPr/>
+          <p:nvPr/>
+        </p:nvSpPr>
+        <p:spPr>
+          <a:xfrm>
+            <a:off x="8028432" y="5632704"/>
+            <a:ext cx="64008" cy="768096"/>
           </a:xfrm>
           <a:prstGeom prst="roundRect">
             <a:avLst>
@@ -2828,30 +2927,30 @@
       </p:sp>
       <p:sp>
         <p:nvSpPr>
-          <p:cNvPr id="12" name="Text 10"/>
-          <p:cNvSpPr/>
-          <p:nvPr/>
-        </p:nvSpPr>
-        <p:spPr>
-          <a:xfrm>
-            <a:off x="749808" y="5047488"/>
-            <a:ext cx="3017520" cy="292608"/>
-          </a:xfrm>
-          <a:prstGeom prst="rect">
-            <a:avLst/>
-          </a:prstGeom>
-          <a:noFill/>
-          <a:ln/>
-        </p:spPr>
-        <p:txBody>
-          <a:bodyPr wrap="square" rtlCol="0" anchor="ctr"/>
-          <a:lstStyle/>
-          <a:p>
-            <a:pPr indent="0" marL="0">
-              <a:buNone/>
-            </a:pPr>
-            <a:r>
-              <a:rPr lang="en-US" sz="1200" b="1" dirty="0">
+          <p:cNvPr id="16" name="Text 13"/>
+          <p:cNvSpPr/>
+          <p:nvPr/>
+        </p:nvSpPr>
+        <p:spPr>
+          <a:xfrm>
+            <a:off x="8247888" y="5696712"/>
+            <a:ext cx="3108960" cy="256032"/>
+          </a:xfrm>
+          <a:prstGeom prst="rect">
+            <a:avLst/>
+          </a:prstGeom>
+          <a:noFill/>
+          <a:ln/>
+        </p:spPr>
+        <p:txBody>
+          <a:bodyPr wrap="square" rtlCol="0" anchor="ctr"/>
+          <a:lstStyle/>
+          <a:p>
+            <a:pPr indent="0" marL="0">
+              <a:buNone/>
+            </a:pPr>
+            <a:r>
+              <a:rPr lang="en-US" sz="1150" b="1" dirty="0">
                 <a:solidFill>
                   <a:srgbClr val="16211C"/>
                 </a:solidFill>
@@ -2861,20 +2960,20 @@
               </a:rPr>
               <a:t>답할 수 있는 수를 밝힌다</a:t>
             </a:r>
-            <a:endParaRPr lang="en-US" sz="1200" dirty="0"/>
-          </a:p>
-        </p:txBody>
-      </p:sp>
-      <p:sp>
-        <p:nvSpPr>
-          <p:cNvPr id="13" name="Text 11"/>
-          <p:cNvSpPr/>
-          <p:nvPr/>
-        </p:nvSpPr>
-        <p:spPr>
-          <a:xfrm>
-            <a:off x="749808" y="5340096"/>
-            <a:ext cx="3017520" cy="621792"/>
+            <a:endParaRPr lang="en-US" sz="1150" dirty="0"/>
+          </a:p>
+        </p:txBody>
+      </p:sp>
+      <p:sp>
+        <p:nvSpPr>
+          <p:cNvPr id="17" name="Text 14"/>
+          <p:cNvSpPr/>
+          <p:nvPr/>
+        </p:nvSpPr>
+        <p:spPr>
+          <a:xfrm>
+            <a:off x="8247888" y="5943600"/>
+            <a:ext cx="3108960" cy="402336"/>
           </a:xfrm>
           <a:prstGeom prst="rect">
             <a:avLst/>
@@ -2888,12 +2987,12 @@
           <a:p>
             <a:pPr indent="0" marL="0">
               <a:lnSpc>
-                <a:spcPts val="1500"/>
+                <a:spcPts val="1300"/>
               </a:lnSpc>
               <a:buNone/>
             </a:pPr>
             <a:r>
-              <a:rPr lang="en-US" sz="1000" dirty="0">
+              <a:rPr lang="en-US" sz="950" dirty="0">
                 <a:solidFill>
                   <a:srgbClr val="44524B"/>
                 </a:solidFill>
@@ -2903,37 +3002,13 @@
               </a:rPr>
               <a:t>약관이 2건뿐이면 「답할 수 있는 건 2건」이라고 씁니다.</a:t>
             </a:r>
-            <a:endParaRPr lang="en-US" sz="1000" dirty="0"/>
-          </a:p>
-        </p:txBody>
-      </p:sp>
-      <p:pic>
-        <p:nvPicPr>
-          <p:cNvPr id="14" name="Image 0" descr="/tmp/claude-0/-home-user-chacha6377/ca7f6080-cf3a-5093-8a0d-eb3bfdb80785/scratchpad/app_entry_main.png">    </p:cNvPr>
-          <p:cNvPicPr>
-            <a:picLocks noChangeAspect="1"/>
-          </p:cNvPicPr>
-          <p:nvPr/>
-        </p:nvPicPr>
-        <p:blipFill>
-          <a:blip r:embed="rId1"/>
-          <a:stretch>
-            <a:fillRect/>
-          </a:stretch>
-        </p:blipFill>
-        <p:spPr>
-          <a:xfrm>
-            <a:off x="4069080" y="1283863"/>
-            <a:ext cx="7726680" cy="4253698"/>
-          </a:xfrm>
-          <a:prstGeom prst="rect">
-            <a:avLst/>
-          </a:prstGeom>
-        </p:spPr>
-      </p:pic>
-      <p:sp>
-        <p:nvSpPr>
-          <p:cNvPr id="15" name="Text 12"/>
+            <a:endParaRPr lang="en-US" sz="950" dirty="0"/>
+          </a:p>
+        </p:txBody>
+      </p:sp>
+      <p:sp>
+        <p:nvSpPr>
+          <p:cNvPr id="18" name="Text 15"/>
           <p:cNvSpPr/>
           <p:nvPr/>
         </p:nvSpPr>
@@ -3010,24 +3085,24 @@
         </p:nvSpPr>
         <p:spPr>
           <a:xfrm>
-            <a:off x="502920" y="384048"/>
-            <a:ext cx="3200400" cy="219456"/>
-          </a:xfrm>
-          <a:prstGeom prst="rect">
-            <a:avLst/>
-          </a:prstGeom>
-          <a:noFill/>
-          <a:ln/>
-        </p:spPr>
-        <p:txBody>
-          <a:bodyPr wrap="square" rtlCol="0" anchor="ctr"/>
-          <a:lstStyle/>
-          <a:p>
-            <a:pPr indent="0" marL="0">
-              <a:buNone/>
-            </a:pPr>
-            <a:r>
-              <a:rPr lang="en-US" sz="1050" b="1" spc="180" kern="0" dirty="0">
+            <a:off x="548640" y="292608"/>
+            <a:ext cx="11064240" cy="219456"/>
+          </a:xfrm>
+          <a:prstGeom prst="rect">
+            <a:avLst/>
+          </a:prstGeom>
+          <a:noFill/>
+          <a:ln/>
+        </p:spPr>
+        <p:txBody>
+          <a:bodyPr wrap="square" rtlCol="0" anchor="ctr"/>
+          <a:lstStyle/>
+          <a:p>
+            <a:pPr indent="0" marL="0">
+              <a:buNone/>
+            </a:pPr>
+            <a:r>
+              <a:rPr lang="en-US" sz="1100" b="1" spc="200" kern="0" dirty="0">
                 <a:solidFill>
                   <a:srgbClr val="0B7C44"/>
                 </a:solidFill>
@@ -3037,7 +3112,7 @@
               </a:rPr>
               <a:t>화면 ⑤ 약관 등록</a:t>
             </a:r>
-            <a:endParaRPr lang="en-US" sz="1050" dirty="0"/>
+            <a:endParaRPr lang="en-US" sz="1100" dirty="0"/>
           </a:p>
         </p:txBody>
       </p:sp>
@@ -3049,27 +3124,24 @@
         </p:nvSpPr>
         <p:spPr>
           <a:xfrm>
-            <a:off x="502920" y="621792"/>
-            <a:ext cx="3291840" cy="1005840"/>
-          </a:xfrm>
-          <a:prstGeom prst="rect">
-            <a:avLst/>
-          </a:prstGeom>
-          <a:noFill/>
-          <a:ln/>
-        </p:spPr>
-        <p:txBody>
-          <a:bodyPr wrap="square" rtlCol="0" anchor="ctr"/>
-          <a:lstStyle/>
-          <a:p>
-            <a:pPr indent="0" marL="0">
-              <a:lnSpc>
-                <a:spcPts val="2800"/>
-              </a:lnSpc>
-              <a:buNone/>
-            </a:pPr>
-            <a:r>
-              <a:rPr lang="en-US" sz="2100" b="1" dirty="0">
+            <a:off x="548640" y="512064"/>
+            <a:ext cx="7863840" cy="420624"/>
+          </a:xfrm>
+          <a:prstGeom prst="rect">
+            <a:avLst/>
+          </a:prstGeom>
+          <a:noFill/>
+          <a:ln/>
+        </p:spPr>
+        <p:txBody>
+          <a:bodyPr wrap="square" rtlCol="0" anchor="ctr"/>
+          <a:lstStyle/>
+          <a:p>
+            <a:pPr indent="0" marL="0">
+              <a:buNone/>
+            </a:pPr>
+            <a:r>
+              <a:rPr lang="en-US" sz="2400" b="1" dirty="0">
                 <a:solidFill>
                   <a:srgbClr val="16211C"/>
                 </a:solidFill>
@@ -3079,7 +3151,7 @@
               </a:rPr>
               <a:t>지금은 하나씩 넣습니다. My Data가 열리면 한 번에 들어옵니다</a:t>
             </a:r>
-            <a:endParaRPr lang="en-US" sz="2100" dirty="0"/>
+            <a:endParaRPr lang="en-US" sz="2400" dirty="0"/>
           </a:p>
         </p:txBody>
       </p:sp>
@@ -3091,27 +3163,24 @@
         </p:nvSpPr>
         <p:spPr>
           <a:xfrm>
-            <a:off x="502920" y="1700784"/>
-            <a:ext cx="3291840" cy="822960"/>
-          </a:xfrm>
-          <a:prstGeom prst="rect">
-            <a:avLst/>
-          </a:prstGeom>
-          <a:noFill/>
-          <a:ln/>
-        </p:spPr>
-        <p:txBody>
-          <a:bodyPr wrap="square" rtlCol="0" anchor="ctr"/>
-          <a:lstStyle/>
-          <a:p>
-            <a:pPr indent="0" marL="0">
-              <a:lnSpc>
-                <a:spcPts val="1700"/>
-              </a:lnSpc>
-              <a:buNone/>
-            </a:pPr>
-            <a:r>
-              <a:rPr lang="en-US" sz="1150" dirty="0">
+            <a:off x="548640" y="950976"/>
+            <a:ext cx="11064240" cy="274320"/>
+          </a:xfrm>
+          <a:prstGeom prst="rect">
+            <a:avLst/>
+          </a:prstGeom>
+          <a:noFill/>
+          <a:ln/>
+        </p:spPr>
+        <p:txBody>
+          <a:bodyPr wrap="square" rtlCol="0" anchor="ctr"/>
+          <a:lstStyle/>
+          <a:p>
+            <a:pPr indent="0" marL="0">
+              <a:buNone/>
+            </a:pPr>
+            <a:r>
+              <a:rPr lang="en-US" sz="1200" dirty="0">
                 <a:solidFill>
                   <a:srgbClr val="7A867F"/>
                 </a:solidFill>
@@ -3121,20 +3190,71 @@
               </a:rPr>
               <a:t>경로를 빠른 순으로 놓되, 아직 안 열린 것은 두되 잠급니다.</a:t>
             </a:r>
-            <a:endParaRPr lang="en-US" sz="1150" dirty="0"/>
-          </a:p>
-        </p:txBody>
-      </p:sp>
-      <p:sp>
-        <p:nvSpPr>
-          <p:cNvPr id="5" name="Shape 3"/>
-          <p:cNvSpPr/>
-          <p:nvPr/>
-        </p:nvSpPr>
-        <p:spPr>
-          <a:xfrm>
-            <a:off x="502920" y="2688336"/>
-            <a:ext cx="64008" cy="969264"/>
+            <a:endParaRPr lang="en-US" sz="1200" dirty="0"/>
+          </a:p>
+        </p:txBody>
+      </p:sp>
+      <p:pic>
+        <p:nvPicPr>
+          <p:cNvPr id="5" name="Image 0" descr="/tmp/claude-0/-home-user-chacha6377/ca7f6080-cf3a-5093-8a0d-eb3bfdb80785/scratchpad/app_register_wide.png">    </p:cNvPr>
+          <p:cNvPicPr>
+            <a:picLocks noChangeAspect="1"/>
+          </p:cNvPicPr>
+          <p:nvPr/>
+        </p:nvPicPr>
+        <p:blipFill>
+          <a:blip r:embed="rId1"/>
+          <a:stretch>
+            <a:fillRect/>
+          </a:stretch>
+        </p:blipFill>
+        <p:spPr>
+          <a:xfrm>
+            <a:off x="548640" y="1281660"/>
+            <a:ext cx="11064240" cy="4477560"/>
+          </a:xfrm>
+          <a:prstGeom prst="rect">
+            <a:avLst/>
+          </a:prstGeom>
+        </p:spPr>
+      </p:pic>
+      <p:sp>
+        <p:nvSpPr>
+          <p:cNvPr id="6" name="Shape 3"/>
+          <p:cNvSpPr/>
+          <p:nvPr/>
+        </p:nvSpPr>
+        <p:spPr>
+          <a:xfrm>
+            <a:off x="548640" y="5632704"/>
+            <a:ext cx="3520440" cy="768096"/>
+          </a:xfrm>
+          <a:prstGeom prst="roundRect">
+            <a:avLst>
+              <a:gd name="adj" fmla="val 10714"/>
+            </a:avLst>
+          </a:prstGeom>
+          <a:solidFill>
+            <a:srgbClr val="FFFFFF"/>
+          </a:solidFill>
+          <a:ln w="12700">
+            <a:solidFill>
+              <a:srgbClr val="E3E9E5"/>
+            </a:solidFill>
+            <a:prstDash val="solid"/>
+          </a:ln>
+        </p:spPr>
+      </p:sp>
+      <p:sp>
+        <p:nvSpPr>
+          <p:cNvPr id="7" name="Shape 4"/>
+          <p:cNvSpPr/>
+          <p:nvPr/>
+        </p:nvSpPr>
+        <p:spPr>
+          <a:xfrm>
+            <a:off x="548640" y="5632704"/>
+            <a:ext cx="64008" cy="768096"/>
           </a:xfrm>
           <a:prstGeom prst="roundRect">
             <a:avLst>
@@ -3154,30 +3274,30 @@
       </p:sp>
       <p:sp>
         <p:nvSpPr>
-          <p:cNvPr id="6" name="Text 4"/>
-          <p:cNvSpPr/>
-          <p:nvPr/>
-        </p:nvSpPr>
-        <p:spPr>
-          <a:xfrm>
-            <a:off x="749808" y="2706624"/>
-            <a:ext cx="3017520" cy="292608"/>
-          </a:xfrm>
-          <a:prstGeom prst="rect">
-            <a:avLst/>
-          </a:prstGeom>
-          <a:noFill/>
-          <a:ln/>
-        </p:spPr>
-        <p:txBody>
-          <a:bodyPr wrap="square" rtlCol="0" anchor="ctr"/>
-          <a:lstStyle/>
-          <a:p>
-            <a:pPr indent="0" marL="0">
-              <a:buNone/>
-            </a:pPr>
-            <a:r>
-              <a:rPr lang="en-US" sz="1200" b="1" dirty="0">
+          <p:cNvPr id="8" name="Text 5"/>
+          <p:cNvSpPr/>
+          <p:nvPr/>
+        </p:nvSpPr>
+        <p:spPr>
+          <a:xfrm>
+            <a:off x="768096" y="5696712"/>
+            <a:ext cx="3108960" cy="256032"/>
+          </a:xfrm>
+          <a:prstGeom prst="rect">
+            <a:avLst/>
+          </a:prstGeom>
+          <a:noFill/>
+          <a:ln/>
+        </p:spPr>
+        <p:txBody>
+          <a:bodyPr wrap="square" rtlCol="0" anchor="ctr"/>
+          <a:lstStyle/>
+          <a:p>
+            <a:pPr indent="0" marL="0">
+              <a:buNone/>
+            </a:pPr>
+            <a:r>
+              <a:rPr lang="en-US" sz="1150" b="1" dirty="0">
                 <a:solidFill>
                   <a:srgbClr val="16211C"/>
                 </a:solidFill>
@@ -3187,20 +3307,20 @@
               </a:rPr>
               <a:t>안 열린 길도 보여준다</a:t>
             </a:r>
-            <a:endParaRPr lang="en-US" sz="1200" dirty="0"/>
-          </a:p>
-        </p:txBody>
-      </p:sp>
-      <p:sp>
-        <p:nvSpPr>
-          <p:cNvPr id="7" name="Text 5"/>
-          <p:cNvSpPr/>
-          <p:nvPr/>
-        </p:nvSpPr>
-        <p:spPr>
-          <a:xfrm>
-            <a:off x="749808" y="2999232"/>
-            <a:ext cx="3017520" cy="621792"/>
+            <a:endParaRPr lang="en-US" sz="1150" dirty="0"/>
+          </a:p>
+        </p:txBody>
+      </p:sp>
+      <p:sp>
+        <p:nvSpPr>
+          <p:cNvPr id="9" name="Text 6"/>
+          <p:cNvSpPr/>
+          <p:nvPr/>
+        </p:nvSpPr>
+        <p:spPr>
+          <a:xfrm>
+            <a:off x="768096" y="5943600"/>
+            <a:ext cx="3108960" cy="402336"/>
           </a:xfrm>
           <a:prstGeom prst="rect">
             <a:avLst/>
@@ -3214,12 +3334,12 @@
           <a:p>
             <a:pPr indent="0" marL="0">
               <a:lnSpc>
-                <a:spcPts val="1500"/>
+                <a:spcPts val="1300"/>
               </a:lnSpc>
               <a:buNone/>
             </a:pPr>
             <a:r>
-              <a:rPr lang="en-US" sz="1000" dirty="0">
+              <a:rPr lang="en-US" sz="950" dirty="0">
                 <a:solidFill>
                   <a:srgbClr val="44524B"/>
                 </a:solidFill>
@@ -3229,20 +3349,47 @@
               </a:rPr>
               <a:t>곧 열릴 경로가 있다는 사실 자체가 안내입니다.</a:t>
             </a:r>
-            <a:endParaRPr lang="en-US" sz="1000" dirty="0"/>
-          </a:p>
-        </p:txBody>
-      </p:sp>
-      <p:sp>
-        <p:nvSpPr>
-          <p:cNvPr id="8" name="Shape 6"/>
-          <p:cNvSpPr/>
-          <p:nvPr/>
-        </p:nvSpPr>
-        <p:spPr>
-          <a:xfrm>
-            <a:off x="502920" y="3858768"/>
-            <a:ext cx="64008" cy="969264"/>
+            <a:endParaRPr lang="en-US" sz="950" dirty="0"/>
+          </a:p>
+        </p:txBody>
+      </p:sp>
+      <p:sp>
+        <p:nvSpPr>
+          <p:cNvPr id="10" name="Shape 7"/>
+          <p:cNvSpPr/>
+          <p:nvPr/>
+        </p:nvSpPr>
+        <p:spPr>
+          <a:xfrm>
+            <a:off x="4288536" y="5632704"/>
+            <a:ext cx="3520440" cy="768096"/>
+          </a:xfrm>
+          <a:prstGeom prst="roundRect">
+            <a:avLst>
+              <a:gd name="adj" fmla="val 10714"/>
+            </a:avLst>
+          </a:prstGeom>
+          <a:solidFill>
+            <a:srgbClr val="FFFFFF"/>
+          </a:solidFill>
+          <a:ln w="12700">
+            <a:solidFill>
+              <a:srgbClr val="E3E9E5"/>
+            </a:solidFill>
+            <a:prstDash val="solid"/>
+          </a:ln>
+        </p:spPr>
+      </p:sp>
+      <p:sp>
+        <p:nvSpPr>
+          <p:cNvPr id="11" name="Shape 8"/>
+          <p:cNvSpPr/>
+          <p:nvPr/>
+        </p:nvSpPr>
+        <p:spPr>
+          <a:xfrm>
+            <a:off x="4288536" y="5632704"/>
+            <a:ext cx="64008" cy="768096"/>
           </a:xfrm>
           <a:prstGeom prst="roundRect">
             <a:avLst>
@@ -3262,30 +3409,30 @@
       </p:sp>
       <p:sp>
         <p:nvSpPr>
-          <p:cNvPr id="9" name="Text 7"/>
-          <p:cNvSpPr/>
-          <p:nvPr/>
-        </p:nvSpPr>
-        <p:spPr>
-          <a:xfrm>
-            <a:off x="749808" y="3877056"/>
-            <a:ext cx="3017520" cy="292608"/>
-          </a:xfrm>
-          <a:prstGeom prst="rect">
-            <a:avLst/>
-          </a:prstGeom>
-          <a:noFill/>
-          <a:ln/>
-        </p:spPr>
-        <p:txBody>
-          <a:bodyPr wrap="square" rtlCol="0" anchor="ctr"/>
-          <a:lstStyle/>
-          <a:p>
-            <a:pPr indent="0" marL="0">
-              <a:buNone/>
-            </a:pPr>
-            <a:r>
-              <a:rPr lang="en-US" sz="1200" b="1" dirty="0">
+          <p:cNvPr id="12" name="Text 9"/>
+          <p:cNvSpPr/>
+          <p:nvPr/>
+        </p:nvSpPr>
+        <p:spPr>
+          <a:xfrm>
+            <a:off x="4507992" y="5696712"/>
+            <a:ext cx="3108960" cy="256032"/>
+          </a:xfrm>
+          <a:prstGeom prst="rect">
+            <a:avLst/>
+          </a:prstGeom>
+          <a:noFill/>
+          <a:ln/>
+        </p:spPr>
+        <p:txBody>
+          <a:bodyPr wrap="square" rtlCol="0" anchor="ctr"/>
+          <a:lstStyle/>
+          <a:p>
+            <a:pPr indent="0" marL="0">
+              <a:buNone/>
+            </a:pPr>
+            <a:r>
+              <a:rPr lang="en-US" sz="1150" b="1" dirty="0">
                 <a:solidFill>
                   <a:srgbClr val="16211C"/>
                 </a:solidFill>
@@ -3295,20 +3442,20 @@
               </a:rPr>
               <a:t>이미 말한 상품은 다시 안 찾는다</a:t>
             </a:r>
-            <a:endParaRPr lang="en-US" sz="1200" dirty="0"/>
-          </a:p>
-        </p:txBody>
-      </p:sp>
-      <p:sp>
-        <p:nvSpPr>
-          <p:cNvPr id="10" name="Text 8"/>
-          <p:cNvSpPr/>
-          <p:nvPr/>
-        </p:nvSpPr>
-        <p:spPr>
-          <a:xfrm>
-            <a:off x="749808" y="4169664"/>
-            <a:ext cx="3017520" cy="621792"/>
+            <a:endParaRPr lang="en-US" sz="1150" dirty="0"/>
+          </a:p>
+        </p:txBody>
+      </p:sp>
+      <p:sp>
+        <p:nvSpPr>
+          <p:cNvPr id="13" name="Text 10"/>
+          <p:cNvSpPr/>
+          <p:nvPr/>
+        </p:nvSpPr>
+        <p:spPr>
+          <a:xfrm>
+            <a:off x="4507992" y="5943600"/>
+            <a:ext cx="3108960" cy="402336"/>
           </a:xfrm>
           <a:prstGeom prst="rect">
             <a:avLst/>
@@ -3322,12 +3469,12 @@
           <a:p>
             <a:pPr indent="0" marL="0">
               <a:lnSpc>
-                <a:spcPts val="1500"/>
+                <a:spcPts val="1300"/>
               </a:lnSpc>
               <a:buNone/>
             </a:pPr>
             <a:r>
-              <a:rPr lang="en-US" sz="1000" dirty="0">
+              <a:rPr lang="en-US" sz="950" dirty="0">
                 <a:solidFill>
                   <a:srgbClr val="44524B"/>
                 </a:solidFill>
@@ -3337,20 +3484,47 @@
               </a:rPr>
               <a:t>지금 가장 빠른 길입니다.</a:t>
             </a:r>
-            <a:endParaRPr lang="en-US" sz="1000" dirty="0"/>
-          </a:p>
-        </p:txBody>
-      </p:sp>
-      <p:sp>
-        <p:nvSpPr>
-          <p:cNvPr id="11" name="Shape 9"/>
-          <p:cNvSpPr/>
-          <p:nvPr/>
-        </p:nvSpPr>
-        <p:spPr>
-          <a:xfrm>
-            <a:off x="502920" y="5029200"/>
-            <a:ext cx="64008" cy="969264"/>
+            <a:endParaRPr lang="en-US" sz="950" dirty="0"/>
+          </a:p>
+        </p:txBody>
+      </p:sp>
+      <p:sp>
+        <p:nvSpPr>
+          <p:cNvPr id="14" name="Shape 11"/>
+          <p:cNvSpPr/>
+          <p:nvPr/>
+        </p:nvSpPr>
+        <p:spPr>
+          <a:xfrm>
+            <a:off x="8028432" y="5632704"/>
+            <a:ext cx="3520440" cy="768096"/>
+          </a:xfrm>
+          <a:prstGeom prst="roundRect">
+            <a:avLst>
+              <a:gd name="adj" fmla="val 10714"/>
+            </a:avLst>
+          </a:prstGeom>
+          <a:solidFill>
+            <a:srgbClr val="FFFFFF"/>
+          </a:solidFill>
+          <a:ln w="12700">
+            <a:solidFill>
+              <a:srgbClr val="E3E9E5"/>
+            </a:solidFill>
+            <a:prstDash val="solid"/>
+          </a:ln>
+        </p:spPr>
+      </p:sp>
+      <p:sp>
+        <p:nvSpPr>
+          <p:cNvPr id="15" name="Shape 12"/>
+          <p:cNvSpPr/>
+          <p:nvPr/>
+        </p:nvSpPr>
+        <p:spPr>
+          <a:xfrm>
+            <a:off x="8028432" y="5632704"/>
+            <a:ext cx="64008" cy="768096"/>
           </a:xfrm>
           <a:prstGeom prst="roundRect">
             <a:avLst>
@@ -3370,30 +3544,30 @@
       </p:sp>
       <p:sp>
         <p:nvSpPr>
-          <p:cNvPr id="12" name="Text 10"/>
-          <p:cNvSpPr/>
-          <p:nvPr/>
-        </p:nvSpPr>
-        <p:spPr>
-          <a:xfrm>
-            <a:off x="749808" y="5047488"/>
-            <a:ext cx="3017520" cy="292608"/>
-          </a:xfrm>
-          <a:prstGeom prst="rect">
-            <a:avLst/>
-          </a:prstGeom>
-          <a:noFill/>
-          <a:ln/>
-        </p:spPr>
-        <p:txBody>
-          <a:bodyPr wrap="square" rtlCol="0" anchor="ctr"/>
-          <a:lstStyle/>
-          <a:p>
-            <a:pPr indent="0" marL="0">
-              <a:buNone/>
-            </a:pPr>
-            <a:r>
-              <a:rPr lang="en-US" sz="1200" b="1" dirty="0">
+          <p:cNvPr id="16" name="Text 13"/>
+          <p:cNvSpPr/>
+          <p:nvPr/>
+        </p:nvSpPr>
+        <p:spPr>
+          <a:xfrm>
+            <a:off x="8247888" y="5696712"/>
+            <a:ext cx="3108960" cy="256032"/>
+          </a:xfrm>
+          <a:prstGeom prst="rect">
+            <a:avLst/>
+          </a:prstGeom>
+          <a:noFill/>
+          <a:ln/>
+        </p:spPr>
+        <p:txBody>
+          <a:bodyPr wrap="square" rtlCol="0" anchor="ctr"/>
+          <a:lstStyle/>
+          <a:p>
+            <a:pPr indent="0" marL="0">
+              <a:buNone/>
+            </a:pPr>
+            <a:r>
+              <a:rPr lang="en-US" sz="1150" b="1" dirty="0">
                 <a:solidFill>
                   <a:srgbClr val="16211C"/>
                 </a:solidFill>
@@ -3403,20 +3577,20 @@
               </a:rPr>
               <a:t>「최근 등록한 상품」은 뺐다</a:t>
             </a:r>
-            <a:endParaRPr lang="en-US" sz="1200" dirty="0"/>
-          </a:p>
-        </p:txBody>
-      </p:sp>
-      <p:sp>
-        <p:nvSpPr>
-          <p:cNvPr id="13" name="Text 11"/>
-          <p:cNvSpPr/>
-          <p:nvPr/>
-        </p:nvSpPr>
-        <p:spPr>
-          <a:xfrm>
-            <a:off x="749808" y="5340096"/>
-            <a:ext cx="3017520" cy="621792"/>
+            <a:endParaRPr lang="en-US" sz="1150" dirty="0"/>
+          </a:p>
+        </p:txBody>
+      </p:sp>
+      <p:sp>
+        <p:nvSpPr>
+          <p:cNvPr id="17" name="Text 14"/>
+          <p:cNvSpPr/>
+          <p:nvPr/>
+        </p:nvSpPr>
+        <p:spPr>
+          <a:xfrm>
+            <a:off x="8247888" y="5943600"/>
+            <a:ext cx="3108960" cy="402336"/>
           </a:xfrm>
           <a:prstGeom prst="rect">
             <a:avLst/>
@@ -3430,12 +3604,12 @@
           <a:p>
             <a:pPr indent="0" marL="0">
               <a:lnSpc>
-                <a:spcPts val="1500"/>
+                <a:spcPts val="1300"/>
               </a:lnSpc>
               <a:buNone/>
             </a:pPr>
             <a:r>
-              <a:rPr lang="en-US" sz="1000" dirty="0">
+              <a:rPr lang="en-US" sz="950" dirty="0">
                 <a:solidFill>
                   <a:srgbClr val="44524B"/>
                 </a:solidFill>
@@ -3445,37 +3619,13 @@
               </a:rPr>
               <a:t>다른 고객 계약을 끌어오게 됩니다.</a:t>
             </a:r>
-            <a:endParaRPr lang="en-US" sz="1000" dirty="0"/>
-          </a:p>
-        </p:txBody>
-      </p:sp>
-      <p:pic>
-        <p:nvPicPr>
-          <p:cNvPr id="14" name="Image 0" descr="/tmp/claude-0/-home-user-chacha6377/ca7f6080-cf3a-5093-8a0d-eb3bfdb80785/scratchpad/app_register_main.png">    </p:cNvPr>
-          <p:cNvPicPr>
-            <a:picLocks noChangeAspect="1"/>
-          </p:cNvPicPr>
-          <p:nvPr/>
-        </p:nvPicPr>
-        <p:blipFill>
-          <a:blip r:embed="rId1"/>
-          <a:stretch>
-            <a:fillRect/>
-          </a:stretch>
-        </p:blipFill>
-        <p:spPr>
-          <a:xfrm>
-            <a:off x="4069080" y="1283863"/>
-            <a:ext cx="7726680" cy="4253698"/>
-          </a:xfrm>
-          <a:prstGeom prst="rect">
-            <a:avLst/>
-          </a:prstGeom>
-        </p:spPr>
-      </p:pic>
-      <p:sp>
-        <p:nvSpPr>
-          <p:cNvPr id="15" name="Text 12"/>
+            <a:endParaRPr lang="en-US" sz="950" dirty="0"/>
+          </a:p>
+        </p:txBody>
+      </p:sp>
+      <p:sp>
+        <p:nvSpPr>
+          <p:cNvPr id="18" name="Text 15"/>
           <p:cNvSpPr/>
           <p:nvPr/>
         </p:nvSpPr>
@@ -14883,24 +15033,24 @@
         </p:nvSpPr>
         <p:spPr>
           <a:xfrm>
-            <a:off x="502920" y="384048"/>
-            <a:ext cx="3200400" cy="219456"/>
-          </a:xfrm>
-          <a:prstGeom prst="rect">
-            <a:avLst/>
-          </a:prstGeom>
-          <a:noFill/>
-          <a:ln/>
-        </p:spPr>
-        <p:txBody>
-          <a:bodyPr wrap="square" rtlCol="0" anchor="ctr"/>
-          <a:lstStyle/>
-          <a:p>
-            <a:pPr indent="0" marL="0">
-              <a:buNone/>
-            </a:pPr>
-            <a:r>
-              <a:rPr lang="en-US" sz="1050" b="1" spc="180" kern="0" dirty="0">
+            <a:off x="548640" y="292608"/>
+            <a:ext cx="11064240" cy="219456"/>
+          </a:xfrm>
+          <a:prstGeom prst="rect">
+            <a:avLst/>
+          </a:prstGeom>
+          <a:noFill/>
+          <a:ln/>
+        </p:spPr>
+        <p:txBody>
+          <a:bodyPr wrap="square" rtlCol="0" anchor="ctr"/>
+          <a:lstStyle/>
+          <a:p>
+            <a:pPr indent="0" marL="0">
+              <a:buNone/>
+            </a:pPr>
+            <a:r>
+              <a:rPr lang="en-US" sz="1100" b="1" spc="200" kern="0" dirty="0">
                 <a:solidFill>
                   <a:srgbClr val="0B7C44"/>
                 </a:solidFill>
@@ -14910,7 +15060,7 @@
               </a:rPr>
               <a:t>화면 ① 일반 답변</a:t>
             </a:r>
-            <a:endParaRPr lang="en-US" sz="1050" dirty="0"/>
+            <a:endParaRPr lang="en-US" sz="1100" dirty="0"/>
           </a:p>
         </p:txBody>
       </p:sp>
@@ -14922,27 +15072,24 @@
         </p:nvSpPr>
         <p:spPr>
           <a:xfrm>
-            <a:off x="502920" y="621792"/>
-            <a:ext cx="3291840" cy="1005840"/>
-          </a:xfrm>
-          <a:prstGeom prst="rect">
-            <a:avLst/>
-          </a:prstGeom>
-          <a:noFill/>
-          <a:ln/>
-        </p:spPr>
-        <p:txBody>
-          <a:bodyPr wrap="square" rtlCol="0" anchor="ctr"/>
-          <a:lstStyle/>
-          <a:p>
-            <a:pPr indent="0" marL="0">
-              <a:lnSpc>
-                <a:spcPts val="2800"/>
-              </a:lnSpc>
-              <a:buNone/>
-            </a:pPr>
-            <a:r>
-              <a:rPr lang="en-US" sz="2100" b="1" dirty="0">
+            <a:off x="548640" y="512064"/>
+            <a:ext cx="7863840" cy="420624"/>
+          </a:xfrm>
+          <a:prstGeom prst="rect">
+            <a:avLst/>
+          </a:prstGeom>
+          <a:noFill/>
+          <a:ln/>
+        </p:spPr>
+        <p:txBody>
+          <a:bodyPr wrap="square" rtlCol="0" anchor="ctr"/>
+          <a:lstStyle/>
+          <a:p>
+            <a:pPr indent="0" marL="0">
+              <a:buNone/>
+            </a:pPr>
+            <a:r>
+              <a:rPr lang="en-US" sz="2400" b="1" dirty="0">
                 <a:solidFill>
                   <a:srgbClr val="16211C"/>
                 </a:solidFill>
@@ -14952,7 +15099,7 @@
               </a:rPr>
               <a:t>먼저 일반으로 답하고, 개인화는 고르게 합니다</a:t>
             </a:r>
-            <a:endParaRPr lang="en-US" sz="2100" dirty="0"/>
+            <a:endParaRPr lang="en-US" sz="2400" dirty="0"/>
           </a:p>
         </p:txBody>
       </p:sp>
@@ -14964,27 +15111,24 @@
         </p:nvSpPr>
         <p:spPr>
           <a:xfrm>
-            <a:off x="502920" y="1700784"/>
-            <a:ext cx="3291840" cy="822960"/>
-          </a:xfrm>
-          <a:prstGeom prst="rect">
-            <a:avLst/>
-          </a:prstGeom>
-          <a:noFill/>
-          <a:ln/>
-        </p:spPr>
-        <p:txBody>
-          <a:bodyPr wrap="square" rtlCol="0" anchor="ctr"/>
-          <a:lstStyle/>
-          <a:p>
-            <a:pPr indent="0" marL="0">
-              <a:lnSpc>
-                <a:spcPts val="1700"/>
-              </a:lnSpc>
-              <a:buNone/>
-            </a:pPr>
-            <a:r>
-              <a:rPr lang="en-US" sz="1150" dirty="0">
+            <a:off x="548640" y="950976"/>
+            <a:ext cx="11064240" cy="274320"/>
+          </a:xfrm>
+          <a:prstGeom prst="rect">
+            <a:avLst/>
+          </a:prstGeom>
+          <a:noFill/>
+          <a:ln/>
+        </p:spPr>
+        <p:txBody>
+          <a:bodyPr wrap="square" rtlCol="0" anchor="ctr"/>
+          <a:lstStyle/>
+          <a:p>
+            <a:pPr indent="0" marL="0">
+              <a:buNone/>
+            </a:pPr>
+            <a:r>
+              <a:rPr lang="en-US" sz="1200" dirty="0">
                 <a:solidFill>
                   <a:srgbClr val="7A867F"/>
                 </a:solidFill>
@@ -14992,22 +15136,73 @@
                 <a:ea typeface="맑은 고딕" pitchFamily="34" charset="-122"/>
                 <a:cs typeface="맑은 고딕" pitchFamily="34" charset="-120"/>
               </a:rPr>
-              <a:t>「골절되면 보상되나요?」는 일반지식만으로 답이 나옵니다. 그 답으로 충분한 경우가 많습니다.</a:t>
-            </a:r>
-            <a:endParaRPr lang="en-US" sz="1150" dirty="0"/>
-          </a:p>
-        </p:txBody>
-      </p:sp>
-      <p:sp>
-        <p:nvSpPr>
-          <p:cNvPr id="5" name="Shape 3"/>
-          <p:cNvSpPr/>
-          <p:nvPr/>
-        </p:nvSpPr>
-        <p:spPr>
-          <a:xfrm>
-            <a:off x="502920" y="2688336"/>
-            <a:ext cx="64008" cy="969264"/>
+              <a:t>「골절되면 보상되나요?」는 일반지식만으로 답이 나옵니다. 여기서 「이 답변으로 충분해요」로 끝내거나, 「약관 등록하기」로 넘어갑니다.</a:t>
+            </a:r>
+            <a:endParaRPr lang="en-US" sz="1200" dirty="0"/>
+          </a:p>
+        </p:txBody>
+      </p:sp>
+      <p:pic>
+        <p:nvPicPr>
+          <p:cNvPr id="5" name="Image 0" descr="/tmp/claude-0/-home-user-chacha6377/ca7f6080-cf3a-5093-8a0d-eb3bfdb80785/scratchpad/app_branch_wide.png">    </p:cNvPr>
+          <p:cNvPicPr>
+            <a:picLocks noChangeAspect="1"/>
+          </p:cNvPicPr>
+          <p:nvPr/>
+        </p:nvPicPr>
+        <p:blipFill>
+          <a:blip r:embed="rId1"/>
+          <a:stretch>
+            <a:fillRect/>
+          </a:stretch>
+        </p:blipFill>
+        <p:spPr>
+          <a:xfrm>
+            <a:off x="548640" y="1281660"/>
+            <a:ext cx="11064240" cy="4477560"/>
+          </a:xfrm>
+          <a:prstGeom prst="rect">
+            <a:avLst/>
+          </a:prstGeom>
+        </p:spPr>
+      </p:pic>
+      <p:sp>
+        <p:nvSpPr>
+          <p:cNvPr id="6" name="Shape 3"/>
+          <p:cNvSpPr/>
+          <p:nvPr/>
+        </p:nvSpPr>
+        <p:spPr>
+          <a:xfrm>
+            <a:off x="548640" y="5632704"/>
+            <a:ext cx="3520440" cy="768096"/>
+          </a:xfrm>
+          <a:prstGeom prst="roundRect">
+            <a:avLst>
+              <a:gd name="adj" fmla="val 10714"/>
+            </a:avLst>
+          </a:prstGeom>
+          <a:solidFill>
+            <a:srgbClr val="FFFFFF"/>
+          </a:solidFill>
+          <a:ln w="12700">
+            <a:solidFill>
+              <a:srgbClr val="E3E9E5"/>
+            </a:solidFill>
+            <a:prstDash val="solid"/>
+          </a:ln>
+        </p:spPr>
+      </p:sp>
+      <p:sp>
+        <p:nvSpPr>
+          <p:cNvPr id="7" name="Shape 4"/>
+          <p:cNvSpPr/>
+          <p:nvPr/>
+        </p:nvSpPr>
+        <p:spPr>
+          <a:xfrm>
+            <a:off x="548640" y="5632704"/>
+            <a:ext cx="64008" cy="768096"/>
           </a:xfrm>
           <a:prstGeom prst="roundRect">
             <a:avLst>
@@ -15027,30 +15222,30 @@
       </p:sp>
       <p:sp>
         <p:nvSpPr>
-          <p:cNvPr id="6" name="Text 4"/>
-          <p:cNvSpPr/>
-          <p:nvPr/>
-        </p:nvSpPr>
-        <p:spPr>
-          <a:xfrm>
-            <a:off x="749808" y="2706624"/>
-            <a:ext cx="3017520" cy="292608"/>
-          </a:xfrm>
-          <a:prstGeom prst="rect">
-            <a:avLst/>
-          </a:prstGeom>
-          <a:noFill/>
-          <a:ln/>
-        </p:spPr>
-        <p:txBody>
-          <a:bodyPr wrap="square" rtlCol="0" anchor="ctr"/>
-          <a:lstStyle/>
-          <a:p>
-            <a:pPr indent="0" marL="0">
-              <a:buNone/>
-            </a:pPr>
-            <a:r>
-              <a:rPr lang="en-US" sz="1200" b="1" dirty="0">
+          <p:cNvPr id="8" name="Text 5"/>
+          <p:cNvSpPr/>
+          <p:nvPr/>
+        </p:nvSpPr>
+        <p:spPr>
+          <a:xfrm>
+            <a:off x="768096" y="5696712"/>
+            <a:ext cx="3108960" cy="256032"/>
+          </a:xfrm>
+          <a:prstGeom prst="rect">
+            <a:avLst/>
+          </a:prstGeom>
+          <a:noFill/>
+          <a:ln/>
+        </p:spPr>
+        <p:txBody>
+          <a:bodyPr wrap="square" rtlCol="0" anchor="ctr"/>
+          <a:lstStyle/>
+          <a:p>
+            <a:pPr indent="0" marL="0">
+              <a:buNone/>
+            </a:pPr>
+            <a:r>
+              <a:rPr lang="en-US" sz="1150" b="1" dirty="0">
                 <a:solidFill>
                   <a:srgbClr val="16211C"/>
                 </a:solidFill>
@@ -15060,20 +15255,20 @@
               </a:rPr>
               <a:t>일반 답변은 실패가 아니다</a:t>
             </a:r>
-            <a:endParaRPr lang="en-US" sz="1200" dirty="0"/>
-          </a:p>
-        </p:txBody>
-      </p:sp>
-      <p:sp>
-        <p:nvSpPr>
-          <p:cNvPr id="7" name="Text 5"/>
-          <p:cNvSpPr/>
-          <p:nvPr/>
-        </p:nvSpPr>
-        <p:spPr>
-          <a:xfrm>
-            <a:off x="749808" y="2999232"/>
-            <a:ext cx="3017520" cy="621792"/>
+            <a:endParaRPr lang="en-US" sz="1150" dirty="0"/>
+          </a:p>
+        </p:txBody>
+      </p:sp>
+      <p:sp>
+        <p:nvSpPr>
+          <p:cNvPr id="9" name="Text 6"/>
+          <p:cNvSpPr/>
+          <p:nvPr/>
+        </p:nvSpPr>
+        <p:spPr>
+          <a:xfrm>
+            <a:off x="768096" y="5943600"/>
+            <a:ext cx="3108960" cy="402336"/>
           </a:xfrm>
           <a:prstGeom prst="rect">
             <a:avLst/>
@@ -15087,12 +15282,12 @@
           <a:p>
             <a:pPr indent="0" marL="0">
               <a:lnSpc>
-                <a:spcPts val="1500"/>
+                <a:spcPts val="1300"/>
               </a:lnSpc>
               <a:buNone/>
             </a:pPr>
             <a:r>
-              <a:rPr lang="en-US" sz="1000" dirty="0">
+              <a:rPr lang="en-US" sz="950" dirty="0">
                 <a:solidFill>
                   <a:srgbClr val="44524B"/>
                 </a:solidFill>
@@ -15102,20 +15297,47 @@
               </a:rPr>
               <a:t>「이 답변으로 충분해요」를 같은 무게로 둡니다.</a:t>
             </a:r>
-            <a:endParaRPr lang="en-US" sz="1000" dirty="0"/>
-          </a:p>
-        </p:txBody>
-      </p:sp>
-      <p:sp>
-        <p:nvSpPr>
-          <p:cNvPr id="8" name="Shape 6"/>
-          <p:cNvSpPr/>
-          <p:nvPr/>
-        </p:nvSpPr>
-        <p:spPr>
-          <a:xfrm>
-            <a:off x="502920" y="3858768"/>
-            <a:ext cx="64008" cy="969264"/>
+            <a:endParaRPr lang="en-US" sz="950" dirty="0"/>
+          </a:p>
+        </p:txBody>
+      </p:sp>
+      <p:sp>
+        <p:nvSpPr>
+          <p:cNvPr id="10" name="Shape 7"/>
+          <p:cNvSpPr/>
+          <p:nvPr/>
+        </p:nvSpPr>
+        <p:spPr>
+          <a:xfrm>
+            <a:off x="4288536" y="5632704"/>
+            <a:ext cx="3520440" cy="768096"/>
+          </a:xfrm>
+          <a:prstGeom prst="roundRect">
+            <a:avLst>
+              <a:gd name="adj" fmla="val 10714"/>
+            </a:avLst>
+          </a:prstGeom>
+          <a:solidFill>
+            <a:srgbClr val="FFFFFF"/>
+          </a:solidFill>
+          <a:ln w="12700">
+            <a:solidFill>
+              <a:srgbClr val="E3E9E5"/>
+            </a:solidFill>
+            <a:prstDash val="solid"/>
+          </a:ln>
+        </p:spPr>
+      </p:sp>
+      <p:sp>
+        <p:nvSpPr>
+          <p:cNvPr id="11" name="Shape 8"/>
+          <p:cNvSpPr/>
+          <p:nvPr/>
+        </p:nvSpPr>
+        <p:spPr>
+          <a:xfrm>
+            <a:off x="4288536" y="5632704"/>
+            <a:ext cx="64008" cy="768096"/>
           </a:xfrm>
           <a:prstGeom prst="roundRect">
             <a:avLst>
@@ -15135,30 +15357,30 @@
       </p:sp>
       <p:sp>
         <p:nvSpPr>
-          <p:cNvPr id="9" name="Text 7"/>
-          <p:cNvSpPr/>
-          <p:nvPr/>
-        </p:nvSpPr>
-        <p:spPr>
-          <a:xfrm>
-            <a:off x="749808" y="3877056"/>
-            <a:ext cx="3017520" cy="292608"/>
-          </a:xfrm>
-          <a:prstGeom prst="rect">
-            <a:avLst/>
-          </a:prstGeom>
-          <a:noFill/>
-          <a:ln/>
-        </p:spPr>
-        <p:txBody>
-          <a:bodyPr wrap="square" rtlCol="0" anchor="ctr"/>
-          <a:lstStyle/>
-          <a:p>
-            <a:pPr indent="0" marL="0">
-              <a:buNone/>
-            </a:pPr>
-            <a:r>
-              <a:rPr lang="en-US" sz="1200" b="1" dirty="0">
+          <p:cNvPr id="12" name="Text 9"/>
+          <p:cNvSpPr/>
+          <p:nvPr/>
+        </p:nvSpPr>
+        <p:spPr>
+          <a:xfrm>
+            <a:off x="4507992" y="5696712"/>
+            <a:ext cx="3108960" cy="256032"/>
+          </a:xfrm>
+          <a:prstGeom prst="rect">
+            <a:avLst/>
+          </a:prstGeom>
+          <a:noFill/>
+          <a:ln/>
+        </p:spPr>
+        <p:txBody>
+          <a:bodyPr wrap="square" rtlCol="0" anchor="ctr"/>
+          <a:lstStyle/>
+          <a:p>
+            <a:pPr indent="0" marL="0">
+              <a:buNone/>
+            </a:pPr>
+            <a:r>
+              <a:rPr lang="en-US" sz="1150" b="1" dirty="0">
                 <a:solidFill>
                   <a:srgbClr val="16211C"/>
                 </a:solidFill>
@@ -15168,20 +15390,20 @@
               </a:rPr>
               <a:t>입구는 약관이지 고객이 아니다</a:t>
             </a:r>
-            <a:endParaRPr lang="en-US" sz="1200" dirty="0"/>
-          </a:p>
-        </p:txBody>
-      </p:sp>
-      <p:sp>
-        <p:nvSpPr>
-          <p:cNvPr id="10" name="Text 8"/>
-          <p:cNvSpPr/>
-          <p:nvPr/>
-        </p:nvSpPr>
-        <p:spPr>
-          <a:xfrm>
-            <a:off x="749808" y="4169664"/>
-            <a:ext cx="3017520" cy="621792"/>
+            <a:endParaRPr lang="en-US" sz="1150" dirty="0"/>
+          </a:p>
+        </p:txBody>
+      </p:sp>
+      <p:sp>
+        <p:nvSpPr>
+          <p:cNvPr id="13" name="Text 10"/>
+          <p:cNvSpPr/>
+          <p:nvPr/>
+        </p:nvSpPr>
+        <p:spPr>
+          <a:xfrm>
+            <a:off x="4507992" y="5943600"/>
+            <a:ext cx="3108960" cy="402336"/>
           </a:xfrm>
           <a:prstGeom prst="rect">
             <a:avLst/>
@@ -15195,12 +15417,12 @@
           <a:p>
             <a:pPr indent="0" marL="0">
               <a:lnSpc>
-                <a:spcPts val="1500"/>
+                <a:spcPts val="1300"/>
               </a:lnSpc>
               <a:buNone/>
             </a:pPr>
             <a:r>
-              <a:rPr lang="en-US" sz="1000" dirty="0">
+              <a:rPr lang="en-US" sz="950" dirty="0">
                 <a:solidFill>
                   <a:srgbClr val="44524B"/>
                 </a:solidFill>
@@ -15210,20 +15432,47 @@
               </a:rPr>
               <a:t>상품을 고르면 그 약관 기준으로 답이 바뀝니다.</a:t>
             </a:r>
-            <a:endParaRPr lang="en-US" sz="1000" dirty="0"/>
-          </a:p>
-        </p:txBody>
-      </p:sp>
-      <p:sp>
-        <p:nvSpPr>
-          <p:cNvPr id="11" name="Shape 9"/>
-          <p:cNvSpPr/>
-          <p:nvPr/>
-        </p:nvSpPr>
-        <p:spPr>
-          <a:xfrm>
-            <a:off x="502920" y="5029200"/>
-            <a:ext cx="64008" cy="969264"/>
+            <a:endParaRPr lang="en-US" sz="950" dirty="0"/>
+          </a:p>
+        </p:txBody>
+      </p:sp>
+      <p:sp>
+        <p:nvSpPr>
+          <p:cNvPr id="14" name="Shape 11"/>
+          <p:cNvSpPr/>
+          <p:nvPr/>
+        </p:nvSpPr>
+        <p:spPr>
+          <a:xfrm>
+            <a:off x="8028432" y="5632704"/>
+            <a:ext cx="3520440" cy="768096"/>
+          </a:xfrm>
+          <a:prstGeom prst="roundRect">
+            <a:avLst>
+              <a:gd name="adj" fmla="val 10714"/>
+            </a:avLst>
+          </a:prstGeom>
+          <a:solidFill>
+            <a:srgbClr val="FFFFFF"/>
+          </a:solidFill>
+          <a:ln w="12700">
+            <a:solidFill>
+              <a:srgbClr val="E3E9E5"/>
+            </a:solidFill>
+            <a:prstDash val="solid"/>
+          </a:ln>
+        </p:spPr>
+      </p:sp>
+      <p:sp>
+        <p:nvSpPr>
+          <p:cNvPr id="15" name="Shape 12"/>
+          <p:cNvSpPr/>
+          <p:nvPr/>
+        </p:nvSpPr>
+        <p:spPr>
+          <a:xfrm>
+            <a:off x="8028432" y="5632704"/>
+            <a:ext cx="64008" cy="768096"/>
           </a:xfrm>
           <a:prstGeom prst="roundRect">
             <a:avLst>
@@ -15243,30 +15492,30 @@
       </p:sp>
       <p:sp>
         <p:nvSpPr>
-          <p:cNvPr id="12" name="Text 10"/>
-          <p:cNvSpPr/>
-          <p:nvPr/>
-        </p:nvSpPr>
-        <p:spPr>
-          <a:xfrm>
-            <a:off x="749808" y="5047488"/>
-            <a:ext cx="3017520" cy="292608"/>
-          </a:xfrm>
-          <a:prstGeom prst="rect">
-            <a:avLst/>
-          </a:prstGeom>
-          <a:noFill/>
-          <a:ln/>
-        </p:spPr>
-        <p:txBody>
-          <a:bodyPr wrap="square" rtlCol="0" anchor="ctr"/>
-          <a:lstStyle/>
-          <a:p>
-            <a:pPr indent="0" marL="0">
-              <a:buNone/>
-            </a:pPr>
-            <a:r>
-              <a:rPr lang="en-US" sz="1200" b="1" dirty="0">
+          <p:cNvPr id="16" name="Text 13"/>
+          <p:cNvSpPr/>
+          <p:nvPr/>
+        </p:nvSpPr>
+        <p:spPr>
+          <a:xfrm>
+            <a:off x="8247888" y="5696712"/>
+            <a:ext cx="3108960" cy="256032"/>
+          </a:xfrm>
+          <a:prstGeom prst="rect">
+            <a:avLst/>
+          </a:prstGeom>
+          <a:noFill/>
+          <a:ln/>
+        </p:spPr>
+        <p:txBody>
+          <a:bodyPr wrap="square" rtlCol="0" anchor="ctr"/>
+          <a:lstStyle/>
+          <a:p>
+            <a:pPr indent="0" marL="0">
+              <a:buNone/>
+            </a:pPr>
+            <a:r>
+              <a:rPr lang="en-US" sz="1150" b="1" dirty="0">
                 <a:solidFill>
                   <a:srgbClr val="16211C"/>
                 </a:solidFill>
@@ -15276,20 +15525,20 @@
               </a:rPr>
               <a:t>여기서 금액은 말하지 않는다</a:t>
             </a:r>
-            <a:endParaRPr lang="en-US" sz="1200" dirty="0"/>
-          </a:p>
-        </p:txBody>
-      </p:sp>
-      <p:sp>
-        <p:nvSpPr>
-          <p:cNvPr id="13" name="Text 11"/>
-          <p:cNvSpPr/>
-          <p:nvPr/>
-        </p:nvSpPr>
-        <p:spPr>
-          <a:xfrm>
-            <a:off x="749808" y="5340096"/>
-            <a:ext cx="3017520" cy="621792"/>
+            <a:endParaRPr lang="en-US" sz="1150" dirty="0"/>
+          </a:p>
+        </p:txBody>
+      </p:sp>
+      <p:sp>
+        <p:nvSpPr>
+          <p:cNvPr id="17" name="Text 14"/>
+          <p:cNvSpPr/>
+          <p:nvPr/>
+        </p:nvSpPr>
+        <p:spPr>
+          <a:xfrm>
+            <a:off x="8247888" y="5943600"/>
+            <a:ext cx="3108960" cy="402336"/>
           </a:xfrm>
           <a:prstGeom prst="rect">
             <a:avLst/>
@@ -15303,12 +15552,12 @@
           <a:p>
             <a:pPr indent="0" marL="0">
               <a:lnSpc>
-                <a:spcPts val="1500"/>
+                <a:spcPts val="1300"/>
               </a:lnSpc>
               <a:buNone/>
             </a:pPr>
             <a:r>
-              <a:rPr lang="en-US" sz="1000" dirty="0">
+              <a:rPr lang="en-US" sz="950" dirty="0">
                 <a:solidFill>
                   <a:srgbClr val="44524B"/>
                 </a:solidFill>
@@ -15318,37 +15567,13 @@
               </a:rPr>
               <a:t>담보 · 지급 조건 · 면책은 상품과 판마다 다릅니다.</a:t>
             </a:r>
-            <a:endParaRPr lang="en-US" sz="1000" dirty="0"/>
-          </a:p>
-        </p:txBody>
-      </p:sp>
-      <p:pic>
-        <p:nvPicPr>
-          <p:cNvPr id="14" name="Image 0" descr="/tmp/claude-0/-home-user-chacha6377/ca7f6080-cf3a-5093-8a0d-eb3bfdb80785/scratchpad/app_branch_main.png">    </p:cNvPr>
-          <p:cNvPicPr>
-            <a:picLocks noChangeAspect="1"/>
-          </p:cNvPicPr>
-          <p:nvPr/>
-        </p:nvPicPr>
-        <p:blipFill>
-          <a:blip r:embed="rId1"/>
-          <a:stretch>
-            <a:fillRect/>
-          </a:stretch>
-        </p:blipFill>
-        <p:spPr>
-          <a:xfrm>
-            <a:off x="4069080" y="738569"/>
-            <a:ext cx="7726680" cy="5344287"/>
-          </a:xfrm>
-          <a:prstGeom prst="rect">
-            <a:avLst/>
-          </a:prstGeom>
-        </p:spPr>
-      </p:pic>
-      <p:sp>
-        <p:nvSpPr>
-          <p:cNvPr id="15" name="Text 12"/>
+            <a:endParaRPr lang="en-US" sz="950" dirty="0"/>
+          </a:p>
+        </p:txBody>
+      </p:sp>
+      <p:sp>
+        <p:nvSpPr>
+          <p:cNvPr id="18" name="Text 15"/>
           <p:cNvSpPr/>
           <p:nvPr/>
         </p:nvSpPr>
@@ -15425,24 +15650,24 @@
         </p:nvSpPr>
         <p:spPr>
           <a:xfrm>
-            <a:off x="502920" y="384048"/>
-            <a:ext cx="3200400" cy="219456"/>
-          </a:xfrm>
-          <a:prstGeom prst="rect">
-            <a:avLst/>
-          </a:prstGeom>
-          <a:noFill/>
-          <a:ln/>
-        </p:spPr>
-        <p:txBody>
-          <a:bodyPr wrap="square" rtlCol="0" anchor="ctr"/>
-          <a:lstStyle/>
-          <a:p>
-            <a:pPr indent="0" marL="0">
-              <a:buNone/>
-            </a:pPr>
-            <a:r>
-              <a:rPr lang="en-US" sz="1050" b="1" spc="180" kern="0" dirty="0">
+            <a:off x="548640" y="292608"/>
+            <a:ext cx="11064240" cy="219456"/>
+          </a:xfrm>
+          <a:prstGeom prst="rect">
+            <a:avLst/>
+          </a:prstGeom>
+          <a:noFill/>
+          <a:ln/>
+        </p:spPr>
+        <p:txBody>
+          <a:bodyPr wrap="square" rtlCol="0" anchor="ctr"/>
+          <a:lstStyle/>
+          <a:p>
+            <a:pPr indent="0" marL="0">
+              <a:buNone/>
+            </a:pPr>
+            <a:r>
+              <a:rPr lang="en-US" sz="1100" b="1" spc="200" kern="0" dirty="0">
                 <a:solidFill>
                   <a:srgbClr val="0B7C44"/>
                 </a:solidFill>
@@ -15450,9 +15675,9 @@
                 <a:ea typeface="맑은 고딕" pitchFamily="34" charset="-122"/>
                 <a:cs typeface="맑은 고딕" pitchFamily="34" charset="-120"/>
               </a:rPr>
-              <a:t>화면 ② 약관 스코프 확정</a:t>
-            </a:r>
-            <a:endParaRPr lang="en-US" sz="1050" dirty="0"/>
+              <a:t>화면 ② 「약관 등록하기」를 누르면</a:t>
+            </a:r>
+            <a:endParaRPr lang="en-US" sz="1100" dirty="0"/>
           </a:p>
         </p:txBody>
       </p:sp>
@@ -15464,27 +15689,24 @@
         </p:nvSpPr>
         <p:spPr>
           <a:xfrm>
-            <a:off x="502920" y="621792"/>
-            <a:ext cx="3291840" cy="1005840"/>
-          </a:xfrm>
-          <a:prstGeom prst="rect">
-            <a:avLst/>
-          </a:prstGeom>
-          <a:noFill/>
-          <a:ln/>
-        </p:spPr>
-        <p:txBody>
-          <a:bodyPr wrap="square" rtlCol="0" anchor="ctr"/>
-          <a:lstStyle/>
-          <a:p>
-            <a:pPr indent="0" marL="0">
-              <a:lnSpc>
-                <a:spcPts val="2800"/>
-              </a:lnSpc>
-              <a:buNone/>
-            </a:pPr>
-            <a:r>
-              <a:rPr lang="en-US" sz="2100" b="1" dirty="0">
+            <a:off x="548640" y="512064"/>
+            <a:ext cx="7863840" cy="420624"/>
+          </a:xfrm>
+          <a:prstGeom prst="rect">
+            <a:avLst/>
+          </a:prstGeom>
+          <a:noFill/>
+          <a:ln/>
+        </p:spPr>
+        <p:txBody>
+          <a:bodyPr wrap="square" rtlCol="0" anchor="ctr"/>
+          <a:lstStyle/>
+          <a:p>
+            <a:pPr indent="0" marL="0">
+              <a:buNone/>
+            </a:pPr>
+            <a:r>
+              <a:rPr lang="en-US" sz="2400" b="1" dirty="0">
                 <a:solidFill>
                   <a:srgbClr val="16211C"/>
                 </a:solidFill>
@@ -15494,7 +15716,7 @@
               </a:rPr>
               <a:t>찾기 전에 정확한 상품을 짚어냅니다</a:t>
             </a:r>
-            <a:endParaRPr lang="en-US" sz="2100" dirty="0"/>
+            <a:endParaRPr lang="en-US" sz="2400" dirty="0"/>
           </a:p>
         </p:txBody>
       </p:sp>
@@ -15506,27 +15728,24 @@
         </p:nvSpPr>
         <p:spPr>
           <a:xfrm>
-            <a:off x="502920" y="1700784"/>
-            <a:ext cx="3291840" cy="822960"/>
-          </a:xfrm>
-          <a:prstGeom prst="rect">
-            <a:avLst/>
-          </a:prstGeom>
-          <a:noFill/>
-          <a:ln/>
-        </p:spPr>
-        <p:txBody>
-          <a:bodyPr wrap="square" rtlCol="0" anchor="ctr"/>
-          <a:lstStyle/>
-          <a:p>
-            <a:pPr indent="0" marL="0">
-              <a:lnSpc>
-                <a:spcPts val="1700"/>
-              </a:lnSpc>
-              <a:buNone/>
-            </a:pPr>
-            <a:r>
-              <a:rPr lang="en-US" sz="1150" dirty="0">
+            <a:off x="548640" y="950976"/>
+            <a:ext cx="11064240" cy="274320"/>
+          </a:xfrm>
+          <a:prstGeom prst="rect">
+            <a:avLst/>
+          </a:prstGeom>
+          <a:noFill/>
+          <a:ln/>
+        </p:spPr>
+        <p:txBody>
+          <a:bodyPr wrap="square" rtlCol="0" anchor="ctr"/>
+          <a:lstStyle/>
+          <a:p>
+            <a:pPr indent="0" marL="0">
+              <a:buNone/>
+            </a:pPr>
+            <a:r>
+              <a:rPr lang="en-US" sz="1200" dirty="0">
                 <a:solidFill>
                   <a:srgbClr val="7A867F"/>
                 </a:solidFill>
@@ -15536,20 +15755,71 @@
               </a:rPr>
               <a:t>보험사는 치거나 눌러 고르고, 상품은 검색으로 매칭합니다. 약관 시점까지 정해져야 검색이 열립니다.</a:t>
             </a:r>
-            <a:endParaRPr lang="en-US" sz="1150" dirty="0"/>
-          </a:p>
-        </p:txBody>
-      </p:sp>
-      <p:sp>
-        <p:nvSpPr>
-          <p:cNvPr id="5" name="Shape 3"/>
-          <p:cNvSpPr/>
-          <p:nvPr/>
-        </p:nvSpPr>
-        <p:spPr>
-          <a:xfrm>
-            <a:off x="502920" y="2688336"/>
-            <a:ext cx="64008" cy="969264"/>
+            <a:endParaRPr lang="en-US" sz="1200" dirty="0"/>
+          </a:p>
+        </p:txBody>
+      </p:sp>
+      <p:pic>
+        <p:nvPicPr>
+          <p:cNvPr id="5" name="Image 0" descr="/tmp/claude-0/-home-user-chacha6377/ca7f6080-cf3a-5093-8a0d-eb3bfdb80785/scratchpad/app_scope_wide.png">    </p:cNvPr>
+          <p:cNvPicPr>
+            <a:picLocks noChangeAspect="1"/>
+          </p:cNvPicPr>
+          <p:nvPr/>
+        </p:nvPicPr>
+        <p:blipFill>
+          <a:blip r:embed="rId1"/>
+          <a:stretch>
+            <a:fillRect/>
+          </a:stretch>
+        </p:blipFill>
+        <p:spPr>
+          <a:xfrm>
+            <a:off x="548640" y="1281660"/>
+            <a:ext cx="11064240" cy="4477560"/>
+          </a:xfrm>
+          <a:prstGeom prst="rect">
+            <a:avLst/>
+          </a:prstGeom>
+        </p:spPr>
+      </p:pic>
+      <p:sp>
+        <p:nvSpPr>
+          <p:cNvPr id="6" name="Shape 3"/>
+          <p:cNvSpPr/>
+          <p:nvPr/>
+        </p:nvSpPr>
+        <p:spPr>
+          <a:xfrm>
+            <a:off x="548640" y="5632704"/>
+            <a:ext cx="3520440" cy="768096"/>
+          </a:xfrm>
+          <a:prstGeom prst="roundRect">
+            <a:avLst>
+              <a:gd name="adj" fmla="val 10714"/>
+            </a:avLst>
+          </a:prstGeom>
+          <a:solidFill>
+            <a:srgbClr val="FFFFFF"/>
+          </a:solidFill>
+          <a:ln w="12700">
+            <a:solidFill>
+              <a:srgbClr val="E3E9E5"/>
+            </a:solidFill>
+            <a:prstDash val="solid"/>
+          </a:ln>
+        </p:spPr>
+      </p:sp>
+      <p:sp>
+        <p:nvSpPr>
+          <p:cNvPr id="7" name="Shape 4"/>
+          <p:cNvSpPr/>
+          <p:nvPr/>
+        </p:nvSpPr>
+        <p:spPr>
+          <a:xfrm>
+            <a:off x="548640" y="5632704"/>
+            <a:ext cx="64008" cy="768096"/>
           </a:xfrm>
           <a:prstGeom prst="roundRect">
             <a:avLst>
@@ -15569,30 +15839,30 @@
       </p:sp>
       <p:sp>
         <p:nvSpPr>
-          <p:cNvPr id="6" name="Text 4"/>
-          <p:cNvSpPr/>
-          <p:nvPr/>
-        </p:nvSpPr>
-        <p:spPr>
-          <a:xfrm>
-            <a:off x="749808" y="2706624"/>
-            <a:ext cx="3017520" cy="292608"/>
-          </a:xfrm>
-          <a:prstGeom prst="rect">
-            <a:avLst/>
-          </a:prstGeom>
-          <a:noFill/>
-          <a:ln/>
-        </p:spPr>
-        <p:txBody>
-          <a:bodyPr wrap="square" rtlCol="0" anchor="ctr"/>
-          <a:lstStyle/>
-          <a:p>
-            <a:pPr indent="0" marL="0">
-              <a:buNone/>
-            </a:pPr>
-            <a:r>
-              <a:rPr lang="en-US" sz="1200" b="1" dirty="0">
+          <p:cNvPr id="8" name="Text 5"/>
+          <p:cNvSpPr/>
+          <p:nvPr/>
+        </p:nvSpPr>
+        <p:spPr>
+          <a:xfrm>
+            <a:off x="768096" y="5696712"/>
+            <a:ext cx="3108960" cy="256032"/>
+          </a:xfrm>
+          <a:prstGeom prst="rect">
+            <a:avLst/>
+          </a:prstGeom>
+          <a:noFill/>
+          <a:ln/>
+        </p:spPr>
+        <p:txBody>
+          <a:bodyPr wrap="square" rtlCol="0" anchor="ctr"/>
+          <a:lstStyle/>
+          <a:p>
+            <a:pPr indent="0" marL="0">
+              <a:buNone/>
+            </a:pPr>
+            <a:r>
+              <a:rPr lang="en-US" sz="1150" b="1" dirty="0">
                 <a:solidFill>
                   <a:srgbClr val="16211C"/>
                 </a:solidFill>
@@ -15602,20 +15872,20 @@
               </a:rPr>
               <a:t>보종은 묻지 않는다</a:t>
             </a:r>
-            <a:endParaRPr lang="en-US" sz="1200" dirty="0"/>
-          </a:p>
-        </p:txBody>
-      </p:sp>
-      <p:sp>
-        <p:nvSpPr>
-          <p:cNvPr id="7" name="Text 5"/>
-          <p:cNvSpPr/>
-          <p:nvPr/>
-        </p:nvSpPr>
-        <p:spPr>
-          <a:xfrm>
-            <a:off x="749808" y="2999232"/>
-            <a:ext cx="3017520" cy="621792"/>
+            <a:endParaRPr lang="en-US" sz="1150" dirty="0"/>
+          </a:p>
+        </p:txBody>
+      </p:sp>
+      <p:sp>
+        <p:nvSpPr>
+          <p:cNvPr id="9" name="Text 6"/>
+          <p:cNvSpPr/>
+          <p:nvPr/>
+        </p:nvSpPr>
+        <p:spPr>
+          <a:xfrm>
+            <a:off x="768096" y="5943600"/>
+            <a:ext cx="3108960" cy="402336"/>
           </a:xfrm>
           <a:prstGeom prst="rect">
             <a:avLst/>
@@ -15629,12 +15899,12 @@
           <a:p>
             <a:pPr indent="0" marL="0">
               <a:lnSpc>
-                <a:spcPts val="1500"/>
+                <a:spcPts val="1300"/>
               </a:lnSpc>
               <a:buNone/>
             </a:pPr>
             <a:r>
-              <a:rPr lang="en-US" sz="1000" dirty="0">
+              <a:rPr lang="en-US" sz="950" dirty="0">
                 <a:solidFill>
                   <a:srgbClr val="44524B"/>
                 </a:solidFill>
@@ -15644,20 +15914,47 @@
               </a:rPr>
               <a:t>상품명을 이미 알고 있으니 검색이 더 빠릅니다.</a:t>
             </a:r>
-            <a:endParaRPr lang="en-US" sz="1000" dirty="0"/>
-          </a:p>
-        </p:txBody>
-      </p:sp>
-      <p:sp>
-        <p:nvSpPr>
-          <p:cNvPr id="8" name="Shape 6"/>
-          <p:cNvSpPr/>
-          <p:nvPr/>
-        </p:nvSpPr>
-        <p:spPr>
-          <a:xfrm>
-            <a:off x="502920" y="3858768"/>
-            <a:ext cx="64008" cy="969264"/>
+            <a:endParaRPr lang="en-US" sz="950" dirty="0"/>
+          </a:p>
+        </p:txBody>
+      </p:sp>
+      <p:sp>
+        <p:nvSpPr>
+          <p:cNvPr id="10" name="Shape 7"/>
+          <p:cNvSpPr/>
+          <p:nvPr/>
+        </p:nvSpPr>
+        <p:spPr>
+          <a:xfrm>
+            <a:off x="4288536" y="5632704"/>
+            <a:ext cx="3520440" cy="768096"/>
+          </a:xfrm>
+          <a:prstGeom prst="roundRect">
+            <a:avLst>
+              <a:gd name="adj" fmla="val 10714"/>
+            </a:avLst>
+          </a:prstGeom>
+          <a:solidFill>
+            <a:srgbClr val="FFFFFF"/>
+          </a:solidFill>
+          <a:ln w="12700">
+            <a:solidFill>
+              <a:srgbClr val="E3E9E5"/>
+            </a:solidFill>
+            <a:prstDash val="solid"/>
+          </a:ln>
+        </p:spPr>
+      </p:sp>
+      <p:sp>
+        <p:nvSpPr>
+          <p:cNvPr id="11" name="Shape 8"/>
+          <p:cNvSpPr/>
+          <p:nvPr/>
+        </p:nvSpPr>
+        <p:spPr>
+          <a:xfrm>
+            <a:off x="4288536" y="5632704"/>
+            <a:ext cx="64008" cy="768096"/>
           </a:xfrm>
           <a:prstGeom prst="roundRect">
             <a:avLst>
@@ -15677,30 +15974,30 @@
       </p:sp>
       <p:sp>
         <p:nvSpPr>
-          <p:cNvPr id="9" name="Text 7"/>
-          <p:cNvSpPr/>
-          <p:nvPr/>
-        </p:nvSpPr>
-        <p:spPr>
-          <a:xfrm>
-            <a:off x="749808" y="3877056"/>
-            <a:ext cx="3017520" cy="292608"/>
-          </a:xfrm>
-          <a:prstGeom prst="rect">
-            <a:avLst/>
-          </a:prstGeom>
-          <a:noFill/>
-          <a:ln/>
-        </p:spPr>
-        <p:txBody>
-          <a:bodyPr wrap="square" rtlCol="0" anchor="ctr"/>
-          <a:lstStyle/>
-          <a:p>
-            <a:pPr indent="0" marL="0">
-              <a:buNone/>
-            </a:pPr>
-            <a:r>
-              <a:rPr lang="en-US" sz="1200" b="1" dirty="0">
+          <p:cNvPr id="12" name="Text 9"/>
+          <p:cNvSpPr/>
+          <p:nvPr/>
+        </p:nvSpPr>
+        <p:spPr>
+          <a:xfrm>
+            <a:off x="4507992" y="5696712"/>
+            <a:ext cx="3108960" cy="256032"/>
+          </a:xfrm>
+          <a:prstGeom prst="rect">
+            <a:avLst/>
+          </a:prstGeom>
+          <a:noFill/>
+          <a:ln/>
+        </p:spPr>
+        <p:txBody>
+          <a:bodyPr wrap="square" rtlCol="0" anchor="ctr"/>
+          <a:lstStyle/>
+          <a:p>
+            <a:pPr indent="0" marL="0">
+              <a:buNone/>
+            </a:pPr>
+            <a:r>
+              <a:rPr lang="en-US" sz="1150" b="1" dirty="0">
                 <a:solidFill>
                   <a:srgbClr val="16211C"/>
                 </a:solidFill>
@@ -15710,20 +16007,20 @@
               </a:rPr>
               <a:t>겹치는 상품을 함께 본다</a:t>
             </a:r>
-            <a:endParaRPr lang="en-US" sz="1200" dirty="0"/>
-          </a:p>
-        </p:txBody>
-      </p:sp>
-      <p:sp>
-        <p:nvSpPr>
-          <p:cNvPr id="10" name="Text 8"/>
-          <p:cNvSpPr/>
-          <p:nvPr/>
-        </p:nvSpPr>
-        <p:spPr>
-          <a:xfrm>
-            <a:off x="749808" y="4169664"/>
-            <a:ext cx="3017520" cy="621792"/>
+            <a:endParaRPr lang="en-US" sz="1150" dirty="0"/>
+          </a:p>
+        </p:txBody>
+      </p:sp>
+      <p:sp>
+        <p:nvSpPr>
+          <p:cNvPr id="13" name="Text 10"/>
+          <p:cNvSpPr/>
+          <p:nvPr/>
+        </p:nvSpPr>
+        <p:spPr>
+          <a:xfrm>
+            <a:off x="4507992" y="5943600"/>
+            <a:ext cx="3108960" cy="402336"/>
           </a:xfrm>
           <a:prstGeom prst="rect">
             <a:avLst/>
@@ -15737,12 +16034,12 @@
           <a:p>
             <a:pPr indent="0" marL="0">
               <a:lnSpc>
-                <a:spcPts val="1500"/>
+                <a:spcPts val="1300"/>
               </a:lnSpc>
               <a:buNone/>
             </a:pPr>
             <a:r>
-              <a:rPr lang="en-US" sz="1000" dirty="0">
+              <a:rPr lang="en-US" sz="950" dirty="0">
                 <a:solidFill>
                   <a:srgbClr val="44524B"/>
                 </a:solidFill>
@@ -15752,20 +16049,47 @@
               </a:rPr>
               <a:t>「참좋은동행」과 「동행Ⅱ」는 다른 약관입니다.</a:t>
             </a:r>
-            <a:endParaRPr lang="en-US" sz="1000" dirty="0"/>
-          </a:p>
-        </p:txBody>
-      </p:sp>
-      <p:sp>
-        <p:nvSpPr>
-          <p:cNvPr id="11" name="Shape 9"/>
-          <p:cNvSpPr/>
-          <p:nvPr/>
-        </p:nvSpPr>
-        <p:spPr>
-          <a:xfrm>
-            <a:off x="502920" y="5029200"/>
-            <a:ext cx="64008" cy="969264"/>
+            <a:endParaRPr lang="en-US" sz="950" dirty="0"/>
+          </a:p>
+        </p:txBody>
+      </p:sp>
+      <p:sp>
+        <p:nvSpPr>
+          <p:cNvPr id="14" name="Shape 11"/>
+          <p:cNvSpPr/>
+          <p:nvPr/>
+        </p:nvSpPr>
+        <p:spPr>
+          <a:xfrm>
+            <a:off x="8028432" y="5632704"/>
+            <a:ext cx="3520440" cy="768096"/>
+          </a:xfrm>
+          <a:prstGeom prst="roundRect">
+            <a:avLst>
+              <a:gd name="adj" fmla="val 10714"/>
+            </a:avLst>
+          </a:prstGeom>
+          <a:solidFill>
+            <a:srgbClr val="FFFFFF"/>
+          </a:solidFill>
+          <a:ln w="12700">
+            <a:solidFill>
+              <a:srgbClr val="E3E9E5"/>
+            </a:solidFill>
+            <a:prstDash val="solid"/>
+          </a:ln>
+        </p:spPr>
+      </p:sp>
+      <p:sp>
+        <p:nvSpPr>
+          <p:cNvPr id="15" name="Shape 12"/>
+          <p:cNvSpPr/>
+          <p:nvPr/>
+        </p:nvSpPr>
+        <p:spPr>
+          <a:xfrm>
+            <a:off x="8028432" y="5632704"/>
+            <a:ext cx="64008" cy="768096"/>
           </a:xfrm>
           <a:prstGeom prst="roundRect">
             <a:avLst>
@@ -15785,30 +16109,30 @@
       </p:sp>
       <p:sp>
         <p:nvSpPr>
-          <p:cNvPr id="12" name="Text 10"/>
-          <p:cNvSpPr/>
-          <p:nvPr/>
-        </p:nvSpPr>
-        <p:spPr>
-          <a:xfrm>
-            <a:off x="749808" y="5047488"/>
-            <a:ext cx="3017520" cy="292608"/>
-          </a:xfrm>
-          <a:prstGeom prst="rect">
-            <a:avLst/>
-          </a:prstGeom>
-          <a:noFill/>
-          <a:ln/>
-        </p:spPr>
-        <p:txBody>
-          <a:bodyPr wrap="square" rtlCol="0" anchor="ctr"/>
-          <a:lstStyle/>
-          <a:p>
-            <a:pPr indent="0" marL="0">
-              <a:buNone/>
-            </a:pPr>
-            <a:r>
-              <a:rPr lang="en-US" sz="1200" b="1" dirty="0">
+          <p:cNvPr id="16" name="Text 13"/>
+          <p:cNvSpPr/>
+          <p:nvPr/>
+        </p:nvSpPr>
+        <p:spPr>
+          <a:xfrm>
+            <a:off x="8247888" y="5696712"/>
+            <a:ext cx="3108960" cy="256032"/>
+          </a:xfrm>
+          <a:prstGeom prst="rect">
+            <a:avLst/>
+          </a:prstGeom>
+          <a:noFill/>
+          <a:ln/>
+        </p:spPr>
+        <p:txBody>
+          <a:bodyPr wrap="square" rtlCol="0" anchor="ctr"/>
+          <a:lstStyle/>
+          <a:p>
+            <a:pPr indent="0" marL="0">
+              <a:buNone/>
+            </a:pPr>
+            <a:r>
+              <a:rPr lang="en-US" sz="1150" b="1" dirty="0">
                 <a:solidFill>
                   <a:srgbClr val="16211C"/>
                 </a:solidFill>
@@ -15818,20 +16142,20 @@
               </a:rPr>
               <a:t>실손은 판이 아니라 세대로</a:t>
             </a:r>
-            <a:endParaRPr lang="en-US" sz="1200" dirty="0"/>
-          </a:p>
-        </p:txBody>
-      </p:sp>
-      <p:sp>
-        <p:nvSpPr>
-          <p:cNvPr id="13" name="Text 11"/>
-          <p:cNvSpPr/>
-          <p:nvPr/>
-        </p:nvSpPr>
-        <p:spPr>
-          <a:xfrm>
-            <a:off x="749808" y="5340096"/>
-            <a:ext cx="3017520" cy="621792"/>
+            <a:endParaRPr lang="en-US" sz="1150" dirty="0"/>
+          </a:p>
+        </p:txBody>
+      </p:sp>
+      <p:sp>
+        <p:nvSpPr>
+          <p:cNvPr id="17" name="Text 14"/>
+          <p:cNvSpPr/>
+          <p:nvPr/>
+        </p:nvSpPr>
+        <p:spPr>
+          <a:xfrm>
+            <a:off x="8247888" y="5943600"/>
+            <a:ext cx="3108960" cy="402336"/>
           </a:xfrm>
           <a:prstGeom prst="rect">
             <a:avLst/>
@@ -15845,12 +16169,12 @@
           <a:p>
             <a:pPr indent="0" marL="0">
               <a:lnSpc>
-                <a:spcPts val="1500"/>
+                <a:spcPts val="1300"/>
               </a:lnSpc>
               <a:buNone/>
             </a:pPr>
             <a:r>
-              <a:rPr lang="en-US" sz="1000" dirty="0">
+              <a:rPr lang="en-US" sz="950" dirty="0">
                 <a:solidFill>
                   <a:srgbClr val="44524B"/>
                 </a:solidFill>
@@ -15860,37 +16184,13 @@
               </a:rPr>
               <a:t>1~4세대가 보상 갈래를 정합니다. 약관 150건이 필요 없습니다.</a:t>
             </a:r>
-            <a:endParaRPr lang="en-US" sz="1000" dirty="0"/>
-          </a:p>
-        </p:txBody>
-      </p:sp>
-      <p:pic>
-        <p:nvPicPr>
-          <p:cNvPr id="14" name="Image 0" descr="/tmp/claude-0/-home-user-chacha6377/ca7f6080-cf3a-5093-8a0d-eb3bfdb80785/scratchpad/app_scope_main.png">    </p:cNvPr>
-          <p:cNvPicPr>
-            <a:picLocks noChangeAspect="1"/>
-          </p:cNvPicPr>
-          <p:nvPr/>
-        </p:nvPicPr>
-        <p:blipFill>
-          <a:blip r:embed="rId1"/>
-          <a:stretch>
-            <a:fillRect/>
-          </a:stretch>
-        </p:blipFill>
-        <p:spPr>
-          <a:xfrm>
-            <a:off x="4307220" y="384048"/>
-            <a:ext cx="7250399" cy="6053328"/>
-          </a:xfrm>
-          <a:prstGeom prst="rect">
-            <a:avLst/>
-          </a:prstGeom>
-        </p:spPr>
-      </p:pic>
-      <p:sp>
-        <p:nvSpPr>
-          <p:cNvPr id="15" name="Text 12"/>
+            <a:endParaRPr lang="en-US" sz="950" dirty="0"/>
+          </a:p>
+        </p:txBody>
+      </p:sp>
+      <p:sp>
+        <p:nvSpPr>
+          <p:cNvPr id="18" name="Text 15"/>
           <p:cNvSpPr/>
           <p:nvPr/>
         </p:nvSpPr>
@@ -15967,24 +16267,24 @@
         </p:nvSpPr>
         <p:spPr>
           <a:xfrm>
-            <a:off x="502920" y="384048"/>
-            <a:ext cx="3200400" cy="219456"/>
-          </a:xfrm>
-          <a:prstGeom prst="rect">
-            <a:avLst/>
-          </a:prstGeom>
-          <a:noFill/>
-          <a:ln/>
-        </p:spPr>
-        <p:txBody>
-          <a:bodyPr wrap="square" rtlCol="0" anchor="ctr"/>
-          <a:lstStyle/>
-          <a:p>
-            <a:pPr indent="0" marL="0">
-              <a:buNone/>
-            </a:pPr>
-            <a:r>
-              <a:rPr lang="en-US" sz="1050" b="1" spc="180" kern="0" dirty="0">
+            <a:off x="548640" y="292608"/>
+            <a:ext cx="11064240" cy="219456"/>
+          </a:xfrm>
+          <a:prstGeom prst="rect">
+            <a:avLst/>
+          </a:prstGeom>
+          <a:noFill/>
+          <a:ln/>
+        </p:spPr>
+        <p:txBody>
+          <a:bodyPr wrap="square" rtlCol="0" anchor="ctr"/>
+          <a:lstStyle/>
+          <a:p>
+            <a:pPr indent="0" marL="0">
+              <a:buNone/>
+            </a:pPr>
+            <a:r>
+              <a:rPr lang="en-US" sz="1100" b="1" spc="200" kern="0" dirty="0">
                 <a:solidFill>
                   <a:srgbClr val="0B7C44"/>
                 </a:solidFill>
@@ -15994,7 +16294,7 @@
               </a:rPr>
               <a:t>화면 ③ 답변</a:t>
             </a:r>
-            <a:endParaRPr lang="en-US" sz="1050" dirty="0"/>
+            <a:endParaRPr lang="en-US" sz="1100" dirty="0"/>
           </a:p>
         </p:txBody>
       </p:sp>
@@ -16006,27 +16306,24 @@
         </p:nvSpPr>
         <p:spPr>
           <a:xfrm>
-            <a:off x="502920" y="621792"/>
-            <a:ext cx="3291840" cy="1005840"/>
-          </a:xfrm>
-          <a:prstGeom prst="rect">
-            <a:avLst/>
-          </a:prstGeom>
-          <a:noFill/>
-          <a:ln/>
-        </p:spPr>
-        <p:txBody>
-          <a:bodyPr wrap="square" rtlCol="0" anchor="ctr"/>
-          <a:lstStyle/>
-          <a:p>
-            <a:pPr indent="0" marL="0">
-              <a:lnSpc>
-                <a:spcPts val="2800"/>
-              </a:lnSpc>
-              <a:buNone/>
-            </a:pPr>
-            <a:r>
-              <a:rPr lang="en-US" sz="2100" b="1" dirty="0">
+            <a:off x="548640" y="512064"/>
+            <a:ext cx="7863840" cy="420624"/>
+          </a:xfrm>
+          <a:prstGeom prst="rect">
+            <a:avLst/>
+          </a:prstGeom>
+          <a:noFill/>
+          <a:ln/>
+        </p:spPr>
+        <p:txBody>
+          <a:bodyPr wrap="square" rtlCol="0" anchor="ctr"/>
+          <a:lstStyle/>
+          <a:p>
+            <a:pPr indent="0" marL="0">
+              <a:buNone/>
+            </a:pPr>
+            <a:r>
+              <a:rPr lang="en-US" sz="2400" b="1" dirty="0">
                 <a:solidFill>
                   <a:srgbClr val="16211C"/>
                 </a:solidFill>
@@ -16036,7 +16333,7 @@
               </a:rPr>
               <a:t>면책을 먼저 판정하고 조항으로 근거를 답니다</a:t>
             </a:r>
-            <a:endParaRPr lang="en-US" sz="2100" dirty="0"/>
+            <a:endParaRPr lang="en-US" sz="2400" dirty="0"/>
           </a:p>
         </p:txBody>
       </p:sp>
@@ -16048,27 +16345,24 @@
         </p:nvSpPr>
         <p:spPr>
           <a:xfrm>
-            <a:off x="502920" y="1700784"/>
-            <a:ext cx="3291840" cy="822960"/>
-          </a:xfrm>
-          <a:prstGeom prst="rect">
-            <a:avLst/>
-          </a:prstGeom>
-          <a:noFill/>
-          <a:ln/>
-        </p:spPr>
-        <p:txBody>
-          <a:bodyPr wrap="square" rtlCol="0" anchor="ctr"/>
-          <a:lstStyle/>
-          <a:p>
-            <a:pPr indent="0" marL="0">
-              <a:lnSpc>
-                <a:spcPts val="1700"/>
-              </a:lnSpc>
-              <a:buNone/>
-            </a:pPr>
-            <a:r>
-              <a:rPr lang="en-US" sz="1150" dirty="0">
+            <a:off x="548640" y="950976"/>
+            <a:ext cx="11064240" cy="274320"/>
+          </a:xfrm>
+          <a:prstGeom prst="rect">
+            <a:avLst/>
+          </a:prstGeom>
+          <a:noFill/>
+          <a:ln/>
+        </p:spPr>
+        <p:txBody>
+          <a:bodyPr wrap="square" rtlCol="0" anchor="ctr"/>
+          <a:lstStyle/>
+          <a:p>
+            <a:pPr indent="0" marL="0">
+              <a:buNone/>
+            </a:pPr>
+            <a:r>
+              <a:rPr lang="en-US" sz="1200" dirty="0">
                 <a:solidFill>
                   <a:srgbClr val="7A867F"/>
                 </a:solidFill>
@@ -16078,20 +16372,71 @@
               </a:rPr>
               <a:t>고객을 만들지 않고 그냥 묻는 경로입니다. 대부분의 상담이 여기서 끝납니다.</a:t>
             </a:r>
-            <a:endParaRPr lang="en-US" sz="1150" dirty="0"/>
-          </a:p>
-        </p:txBody>
-      </p:sp>
-      <p:sp>
-        <p:nvSpPr>
-          <p:cNvPr id="5" name="Shape 3"/>
-          <p:cNvSpPr/>
-          <p:nvPr/>
-        </p:nvSpPr>
-        <p:spPr>
-          <a:xfrm>
-            <a:off x="502920" y="2688336"/>
-            <a:ext cx="64008" cy="969264"/>
+            <a:endParaRPr lang="en-US" sz="1200" dirty="0"/>
+          </a:p>
+        </p:txBody>
+      </p:sp>
+      <p:pic>
+        <p:nvPicPr>
+          <p:cNvPr id="5" name="Image 0" descr="/tmp/claude-0/-home-user-chacha6377/ca7f6080-cf3a-5093-8a0d-eb3bfdb80785/scratchpad/app_ask_wide.png">    </p:cNvPr>
+          <p:cNvPicPr>
+            <a:picLocks noChangeAspect="1"/>
+          </p:cNvPicPr>
+          <p:nvPr/>
+        </p:nvPicPr>
+        <p:blipFill>
+          <a:blip r:embed="rId1"/>
+          <a:stretch>
+            <a:fillRect/>
+          </a:stretch>
+        </p:blipFill>
+        <p:spPr>
+          <a:xfrm>
+            <a:off x="548640" y="1281660"/>
+            <a:ext cx="11064240" cy="4477560"/>
+          </a:xfrm>
+          <a:prstGeom prst="rect">
+            <a:avLst/>
+          </a:prstGeom>
+        </p:spPr>
+      </p:pic>
+      <p:sp>
+        <p:nvSpPr>
+          <p:cNvPr id="6" name="Shape 3"/>
+          <p:cNvSpPr/>
+          <p:nvPr/>
+        </p:nvSpPr>
+        <p:spPr>
+          <a:xfrm>
+            <a:off x="548640" y="5632704"/>
+            <a:ext cx="3520440" cy="768096"/>
+          </a:xfrm>
+          <a:prstGeom prst="roundRect">
+            <a:avLst>
+              <a:gd name="adj" fmla="val 10714"/>
+            </a:avLst>
+          </a:prstGeom>
+          <a:solidFill>
+            <a:srgbClr val="FFFFFF"/>
+          </a:solidFill>
+          <a:ln w="12700">
+            <a:solidFill>
+              <a:srgbClr val="E3E9E5"/>
+            </a:solidFill>
+            <a:prstDash val="solid"/>
+          </a:ln>
+        </p:spPr>
+      </p:sp>
+      <p:sp>
+        <p:nvSpPr>
+          <p:cNvPr id="7" name="Shape 4"/>
+          <p:cNvSpPr/>
+          <p:nvPr/>
+        </p:nvSpPr>
+        <p:spPr>
+          <a:xfrm>
+            <a:off x="548640" y="5632704"/>
+            <a:ext cx="64008" cy="768096"/>
           </a:xfrm>
           <a:prstGeom prst="roundRect">
             <a:avLst>
@@ -16111,30 +16456,30 @@
       </p:sp>
       <p:sp>
         <p:nvSpPr>
-          <p:cNvPr id="6" name="Text 4"/>
-          <p:cNvSpPr/>
-          <p:nvPr/>
-        </p:nvSpPr>
-        <p:spPr>
-          <a:xfrm>
-            <a:off x="749808" y="2706624"/>
-            <a:ext cx="3017520" cy="292608"/>
-          </a:xfrm>
-          <a:prstGeom prst="rect">
-            <a:avLst/>
-          </a:prstGeom>
-          <a:noFill/>
-          <a:ln/>
-        </p:spPr>
-        <p:txBody>
-          <a:bodyPr wrap="square" rtlCol="0" anchor="ctr"/>
-          <a:lstStyle/>
-          <a:p>
-            <a:pPr indent="0" marL="0">
-              <a:buNone/>
-            </a:pPr>
-            <a:r>
-              <a:rPr lang="en-US" sz="1200" b="1" dirty="0">
+          <p:cNvPr id="8" name="Text 5"/>
+          <p:cNvSpPr/>
+          <p:nvPr/>
+        </p:nvSpPr>
+        <p:spPr>
+          <a:xfrm>
+            <a:off x="768096" y="5696712"/>
+            <a:ext cx="3108960" cy="256032"/>
+          </a:xfrm>
+          <a:prstGeom prst="rect">
+            <a:avLst/>
+          </a:prstGeom>
+          <a:noFill/>
+          <a:ln/>
+        </p:spPr>
+        <p:txBody>
+          <a:bodyPr wrap="square" rtlCol="0" anchor="ctr"/>
+          <a:lstStyle/>
+          <a:p>
+            <a:pPr indent="0" marL="0">
+              <a:buNone/>
+            </a:pPr>
+            <a:r>
+              <a:rPr lang="en-US" sz="1150" b="1" dirty="0">
                 <a:solidFill>
                   <a:srgbClr val="16211C"/>
                 </a:solidFill>
@@ -16144,20 +16489,20 @@
               </a:rPr>
               <a:t>면책이 먼저다</a:t>
             </a:r>
-            <a:endParaRPr lang="en-US" sz="1200" dirty="0"/>
-          </a:p>
-        </p:txBody>
-      </p:sp>
-      <p:sp>
-        <p:nvSpPr>
-          <p:cNvPr id="7" name="Text 5"/>
-          <p:cNvSpPr/>
-          <p:nvPr/>
-        </p:nvSpPr>
-        <p:spPr>
-          <a:xfrm>
-            <a:off x="749808" y="2999232"/>
-            <a:ext cx="3017520" cy="621792"/>
+            <a:endParaRPr lang="en-US" sz="1150" dirty="0"/>
+          </a:p>
+        </p:txBody>
+      </p:sp>
+      <p:sp>
+        <p:nvSpPr>
+          <p:cNvPr id="9" name="Text 6"/>
+          <p:cNvSpPr/>
+          <p:nvPr/>
+        </p:nvSpPr>
+        <p:spPr>
+          <a:xfrm>
+            <a:off x="768096" y="5943600"/>
+            <a:ext cx="3108960" cy="402336"/>
           </a:xfrm>
           <a:prstGeom prst="rect">
             <a:avLst/>
@@ -16171,12 +16516,12 @@
           <a:p>
             <a:pPr indent="0" marL="0">
               <a:lnSpc>
-                <a:spcPts val="1500"/>
+                <a:spcPts val="1300"/>
               </a:lnSpc>
               <a:buNone/>
             </a:pPr>
             <a:r>
-              <a:rPr lang="en-US" sz="1000" dirty="0">
+              <a:rPr lang="en-US" sz="950" dirty="0">
                 <a:solidFill>
                   <a:srgbClr val="44524B"/>
                 </a:solidFill>
@@ -16186,20 +16531,47 @@
               </a:rPr>
               <a:t>지급사유를 먼저 보이면 아래 면책은 읽히지 않습니다.</a:t>
             </a:r>
-            <a:endParaRPr lang="en-US" sz="1000" dirty="0"/>
-          </a:p>
-        </p:txBody>
-      </p:sp>
-      <p:sp>
-        <p:nvSpPr>
-          <p:cNvPr id="8" name="Shape 6"/>
-          <p:cNvSpPr/>
-          <p:nvPr/>
-        </p:nvSpPr>
-        <p:spPr>
-          <a:xfrm>
-            <a:off x="502920" y="3858768"/>
-            <a:ext cx="64008" cy="969264"/>
+            <a:endParaRPr lang="en-US" sz="950" dirty="0"/>
+          </a:p>
+        </p:txBody>
+      </p:sp>
+      <p:sp>
+        <p:nvSpPr>
+          <p:cNvPr id="10" name="Shape 7"/>
+          <p:cNvSpPr/>
+          <p:nvPr/>
+        </p:nvSpPr>
+        <p:spPr>
+          <a:xfrm>
+            <a:off x="4288536" y="5632704"/>
+            <a:ext cx="3520440" cy="768096"/>
+          </a:xfrm>
+          <a:prstGeom prst="roundRect">
+            <a:avLst>
+              <a:gd name="adj" fmla="val 10714"/>
+            </a:avLst>
+          </a:prstGeom>
+          <a:solidFill>
+            <a:srgbClr val="FFFFFF"/>
+          </a:solidFill>
+          <a:ln w="12700">
+            <a:solidFill>
+              <a:srgbClr val="E3E9E5"/>
+            </a:solidFill>
+            <a:prstDash val="solid"/>
+          </a:ln>
+        </p:spPr>
+      </p:sp>
+      <p:sp>
+        <p:nvSpPr>
+          <p:cNvPr id="11" name="Shape 8"/>
+          <p:cNvSpPr/>
+          <p:nvPr/>
+        </p:nvSpPr>
+        <p:spPr>
+          <a:xfrm>
+            <a:off x="4288536" y="5632704"/>
+            <a:ext cx="64008" cy="768096"/>
           </a:xfrm>
           <a:prstGeom prst="roundRect">
             <a:avLst>
@@ -16219,30 +16591,30 @@
       </p:sp>
       <p:sp>
         <p:nvSpPr>
-          <p:cNvPr id="9" name="Text 7"/>
-          <p:cNvSpPr/>
-          <p:nvPr/>
-        </p:nvSpPr>
-        <p:spPr>
-          <a:xfrm>
-            <a:off x="749808" y="3877056"/>
-            <a:ext cx="3017520" cy="292608"/>
-          </a:xfrm>
-          <a:prstGeom prst="rect">
-            <a:avLst/>
-          </a:prstGeom>
-          <a:noFill/>
-          <a:ln/>
-        </p:spPr>
-        <p:txBody>
-          <a:bodyPr wrap="square" rtlCol="0" anchor="ctr"/>
-          <a:lstStyle/>
-          <a:p>
-            <a:pPr indent="0" marL="0">
-              <a:buNone/>
-            </a:pPr>
-            <a:r>
-              <a:rPr lang="en-US" sz="1200" b="1" dirty="0">
+          <p:cNvPr id="12" name="Text 9"/>
+          <p:cNvSpPr/>
+          <p:nvPr/>
+        </p:nvSpPr>
+        <p:spPr>
+          <a:xfrm>
+            <a:off x="4507992" y="5696712"/>
+            <a:ext cx="3108960" cy="256032"/>
+          </a:xfrm>
+          <a:prstGeom prst="rect">
+            <a:avLst/>
+          </a:prstGeom>
+          <a:noFill/>
+          <a:ln/>
+        </p:spPr>
+        <p:txBody>
+          <a:bodyPr wrap="square" rtlCol="0" anchor="ctr"/>
+          <a:lstStyle/>
+          <a:p>
+            <a:pPr indent="0" marL="0">
+              <a:buNone/>
+            </a:pPr>
+            <a:r>
+              <a:rPr lang="en-US" sz="1150" b="1" dirty="0">
                 <a:solidFill>
                   <a:srgbClr val="16211C"/>
                 </a:solidFill>
@@ -16252,20 +16624,20 @@
               </a:rPr>
               <a:t>근거를 조항으로 제시한다</a:t>
             </a:r>
-            <a:endParaRPr lang="en-US" sz="1200" dirty="0"/>
-          </a:p>
-        </p:txBody>
-      </p:sp>
-      <p:sp>
-        <p:nvSpPr>
-          <p:cNvPr id="10" name="Text 8"/>
-          <p:cNvSpPr/>
-          <p:nvPr/>
-        </p:nvSpPr>
-        <p:spPr>
-          <a:xfrm>
-            <a:off x="749808" y="4169664"/>
-            <a:ext cx="3017520" cy="621792"/>
+            <a:endParaRPr lang="en-US" sz="1150" dirty="0"/>
+          </a:p>
+        </p:txBody>
+      </p:sp>
+      <p:sp>
+        <p:nvSpPr>
+          <p:cNvPr id="13" name="Text 10"/>
+          <p:cNvSpPr/>
+          <p:nvPr/>
+        </p:nvSpPr>
+        <p:spPr>
+          <a:xfrm>
+            <a:off x="4507992" y="5943600"/>
+            <a:ext cx="3108960" cy="402336"/>
           </a:xfrm>
           <a:prstGeom prst="rect">
             <a:avLst/>
@@ -16279,12 +16651,12 @@
           <a:p>
             <a:pPr indent="0" marL="0">
               <a:lnSpc>
-                <a:spcPts val="1500"/>
+                <a:spcPts val="1300"/>
               </a:lnSpc>
               <a:buNone/>
             </a:pPr>
             <a:r>
-              <a:rPr lang="en-US" sz="1000" dirty="0">
+              <a:rPr lang="en-US" sz="950" dirty="0">
                 <a:solidFill>
                   <a:srgbClr val="44524B"/>
                 </a:solidFill>
@@ -16294,20 +16666,47 @@
               </a:rPr>
               <a:t>제5조 1항 6호까지 짚어야 고객에게 읽어줄 수 있습니다.</a:t>
             </a:r>
-            <a:endParaRPr lang="en-US" sz="1000" dirty="0"/>
-          </a:p>
-        </p:txBody>
-      </p:sp>
-      <p:sp>
-        <p:nvSpPr>
-          <p:cNvPr id="11" name="Shape 9"/>
-          <p:cNvSpPr/>
-          <p:nvPr/>
-        </p:nvSpPr>
-        <p:spPr>
-          <a:xfrm>
-            <a:off x="502920" y="5029200"/>
-            <a:ext cx="64008" cy="969264"/>
+            <a:endParaRPr lang="en-US" sz="950" dirty="0"/>
+          </a:p>
+        </p:txBody>
+      </p:sp>
+      <p:sp>
+        <p:nvSpPr>
+          <p:cNvPr id="14" name="Shape 11"/>
+          <p:cNvSpPr/>
+          <p:nvPr/>
+        </p:nvSpPr>
+        <p:spPr>
+          <a:xfrm>
+            <a:off x="8028432" y="5632704"/>
+            <a:ext cx="3520440" cy="768096"/>
+          </a:xfrm>
+          <a:prstGeom prst="roundRect">
+            <a:avLst>
+              <a:gd name="adj" fmla="val 10714"/>
+            </a:avLst>
+          </a:prstGeom>
+          <a:solidFill>
+            <a:srgbClr val="FFFFFF"/>
+          </a:solidFill>
+          <a:ln w="12700">
+            <a:solidFill>
+              <a:srgbClr val="E3E9E5"/>
+            </a:solidFill>
+            <a:prstDash val="solid"/>
+          </a:ln>
+        </p:spPr>
+      </p:sp>
+      <p:sp>
+        <p:nvSpPr>
+          <p:cNvPr id="15" name="Shape 12"/>
+          <p:cNvSpPr/>
+          <p:nvPr/>
+        </p:nvSpPr>
+        <p:spPr>
+          <a:xfrm>
+            <a:off x="8028432" y="5632704"/>
+            <a:ext cx="64008" cy="768096"/>
           </a:xfrm>
           <a:prstGeom prst="roundRect">
             <a:avLst>
@@ -16327,30 +16726,30 @@
       </p:sp>
       <p:sp>
         <p:nvSpPr>
-          <p:cNvPr id="12" name="Text 10"/>
-          <p:cNvSpPr/>
-          <p:nvPr/>
-        </p:nvSpPr>
-        <p:spPr>
-          <a:xfrm>
-            <a:off x="749808" y="5047488"/>
-            <a:ext cx="3017520" cy="292608"/>
-          </a:xfrm>
-          <a:prstGeom prst="rect">
-            <a:avLst/>
-          </a:prstGeom>
-          <a:noFill/>
-          <a:ln/>
-        </p:spPr>
-        <p:txBody>
-          <a:bodyPr wrap="square" rtlCol="0" anchor="ctr"/>
-          <a:lstStyle/>
-          <a:p>
-            <a:pPr indent="0" marL="0">
-              <a:buNone/>
-            </a:pPr>
-            <a:r>
-              <a:rPr lang="en-US" sz="1200" b="1" dirty="0">
+          <p:cNvPr id="16" name="Text 13"/>
+          <p:cNvSpPr/>
+          <p:nvPr/>
+        </p:nvSpPr>
+        <p:spPr>
+          <a:xfrm>
+            <a:off x="8247888" y="5696712"/>
+            <a:ext cx="3108960" cy="256032"/>
+          </a:xfrm>
+          <a:prstGeom prst="rect">
+            <a:avLst/>
+          </a:prstGeom>
+          <a:noFill/>
+          <a:ln/>
+        </p:spPr>
+        <p:txBody>
+          <a:bodyPr wrap="square" rtlCol="0" anchor="ctr"/>
+          <a:lstStyle/>
+          <a:p>
+            <a:pPr indent="0" marL="0">
+              <a:buNone/>
+            </a:pPr>
+            <a:r>
+              <a:rPr lang="en-US" sz="1150" b="1" dirty="0">
                 <a:solidFill>
                   <a:srgbClr val="16211C"/>
                 </a:solidFill>
@@ -16360,20 +16759,20 @@
               </a:rPr>
               <a:t>어느 약관인지 항상 보인다</a:t>
             </a:r>
-            <a:endParaRPr lang="en-US" sz="1200" dirty="0"/>
-          </a:p>
-        </p:txBody>
-      </p:sp>
-      <p:sp>
-        <p:nvSpPr>
-          <p:cNvPr id="13" name="Text 11"/>
-          <p:cNvSpPr/>
-          <p:nvPr/>
-        </p:nvSpPr>
-        <p:spPr>
-          <a:xfrm>
-            <a:off x="749808" y="5340096"/>
-            <a:ext cx="3017520" cy="621792"/>
+            <a:endParaRPr lang="en-US" sz="1150" dirty="0"/>
+          </a:p>
+        </p:txBody>
+      </p:sp>
+      <p:sp>
+        <p:nvSpPr>
+          <p:cNvPr id="17" name="Text 14"/>
+          <p:cNvSpPr/>
+          <p:nvPr/>
+        </p:nvSpPr>
+        <p:spPr>
+          <a:xfrm>
+            <a:off x="8247888" y="5943600"/>
+            <a:ext cx="3108960" cy="402336"/>
           </a:xfrm>
           <a:prstGeom prst="rect">
             <a:avLst/>
@@ -16387,12 +16786,12 @@
           <a:p>
             <a:pPr indent="0" marL="0">
               <a:lnSpc>
-                <a:spcPts val="1500"/>
+                <a:spcPts val="1300"/>
               </a:lnSpc>
               <a:buNone/>
             </a:pPr>
             <a:r>
-              <a:rPr lang="en-US" sz="1000" dirty="0">
+              <a:rPr lang="en-US" sz="950" dirty="0">
                 <a:solidFill>
                   <a:srgbClr val="44524B"/>
                 </a:solidFill>
@@ -16402,37 +16801,13 @@
               </a:rPr>
               <a:t>안 보이면 틀려도 알아챌 수 없습니다.</a:t>
             </a:r>
-            <a:endParaRPr lang="en-US" sz="1000" dirty="0"/>
-          </a:p>
-        </p:txBody>
-      </p:sp>
-      <p:pic>
-        <p:nvPicPr>
-          <p:cNvPr id="14" name="Image 0" descr="/tmp/claude-0/-home-user-chacha6377/ca7f6080-cf3a-5093-8a0d-eb3bfdb80785/scratchpad/app_ask_main.png">    </p:cNvPr>
-          <p:cNvPicPr>
-            <a:picLocks noChangeAspect="1"/>
-          </p:cNvPicPr>
-          <p:nvPr/>
-        </p:nvPicPr>
-        <p:blipFill>
-          <a:blip r:embed="rId1"/>
-          <a:stretch>
-            <a:fillRect/>
-          </a:stretch>
-        </p:blipFill>
-        <p:spPr>
-          <a:xfrm>
-            <a:off x="4391168" y="384048"/>
-            <a:ext cx="7082504" cy="6053328"/>
-          </a:xfrm>
-          <a:prstGeom prst="rect">
-            <a:avLst/>
-          </a:prstGeom>
-        </p:spPr>
-      </p:pic>
-      <p:sp>
-        <p:nvSpPr>
-          <p:cNvPr id="15" name="Text 12"/>
+            <a:endParaRPr lang="en-US" sz="950" dirty="0"/>
+          </a:p>
+        </p:txBody>
+      </p:sp>
+      <p:sp>
+        <p:nvSpPr>
+          <p:cNvPr id="18" name="Text 15"/>
           <p:cNvSpPr/>
           <p:nvPr/>
         </p:nvSpPr>

--- a/docs/Insurance_AI_상담설계.pptx
+++ b/docs/Insurance_AI_상담설계.pptx
@@ -13,9 +13,16 @@
     <p:sldId id="261" r:id="rId7"/>
     <p:sldId id="262" r:id="rId8"/>
     <p:sldId id="263" r:id="rId9"/>
+    <p:sldId id="264" r:id="rId10"/>
+    <p:sldId id="265" r:id="rId11"/>
+    <p:sldId id="266" r:id="rId12"/>
+    <p:sldId id="267" r:id="rId13"/>
+    <p:sldId id="268" r:id="rId14"/>
+    <p:sldId id="269" r:id="rId15"/>
+    <p:sldId id="270" r:id="rId16"/>
   </p:sldIdLst>
   <p:notesMasterIdLst>
-    <p:notesMasterId r:id="rId10"/>
+    <p:notesMasterId r:id="rId17"/>
   </p:notesMasterIdLst>
   <p:sldSz cx="12192000" cy="6858000"/>
   <p:notesSz cx="6858000" cy="12192000"/>
@@ -551,6 +558,534 @@
 </p:notes>
 </file>
 
+<file path=ppt/notesSlides/notesSlide10.xml><?xml version="1.0" encoding="utf-8"?>
+<p:notes xmlns:a="http://schemas.openxmlformats.org/drawingml/2006/main" xmlns:r="http://schemas.openxmlformats.org/officeDocument/2006/relationships" xmlns:p="http://schemas.openxmlformats.org/presentationml/2006/main">
+  <p:cSld>
+    <p:spTree>
+      <p:nvGrpSpPr>
+        <p:cNvPr id="1" name=""/>
+        <p:cNvGrpSpPr/>
+        <p:nvPr/>
+      </p:nvGrpSpPr>
+      <p:grpSpPr>
+        <a:xfrm>
+          <a:off x="0" y="0"/>
+          <a:ext cx="0" cy="0"/>
+          <a:chOff x="0" y="0"/>
+          <a:chExt cx="0" cy="0"/>
+        </a:xfrm>
+      </p:grpSpPr>
+      <p:sp>
+        <p:nvSpPr>
+          <p:cNvPr id="2" name="Slide Image Placeholder 1"/>
+          <p:cNvSpPr>
+            <a:spLocks noGrp="1" noRot="1" noChangeAspect="1"/>
+          </p:cNvSpPr>
+          <p:nvPr>
+            <p:ph type="sldImg"/>
+          </p:nvPr>
+        </p:nvSpPr>
+        <p:spPr/>
+      </p:sp>
+      <p:sp>
+        <p:nvSpPr>
+          <p:cNvPr id="3" name="Notes Placeholder 2"/>
+          <p:cNvSpPr>
+            <a:spLocks noGrp="1"/>
+          </p:cNvSpPr>
+          <p:nvPr>
+            <p:ph type="body" idx="1"/>
+          </p:nvPr>
+        </p:nvSpPr>
+        <p:spPr/>
+        <p:txBody>
+          <a:bodyPr/>
+          <a:lstStyle/>
+          <a:p>
+            <a:r>
+              <a:rPr lang="en-US" dirty="0"/>
+              <a:t/>
+            </a:r>
+            <a:endParaRPr lang="en-US" dirty="0"/>
+          </a:p>
+        </p:txBody>
+      </p:sp>
+      <p:sp>
+        <p:nvSpPr>
+          <p:cNvPr id="4" name="Slide Number Placeholder 3"/>
+          <p:cNvSpPr>
+            <a:spLocks noGrp="1"/>
+          </p:cNvSpPr>
+          <p:nvPr>
+            <p:ph type="sldNum" sz="quarter" idx="10"/>
+          </p:nvPr>
+        </p:nvSpPr>
+        <p:spPr/>
+        <p:txBody>
+          <a:bodyPr/>
+          <a:lstStyle/>
+          <a:p>
+            <a:fld id="{F7021451-1387-4CA6-816F-3879F97B5CBC}" type="slidenum">
+              <a:rPr lang="en-US"/>
+              <a:t>10</a:t>
+            </a:fld>
+            <a:endParaRPr lang="en-US"/>
+          </a:p>
+        </p:txBody>
+      </p:sp>
+    </p:spTree>
+    <p:extLst>
+      <p:ext uri="{BB962C8B-B14F-4D97-AF65-F5344CB8AC3E}">
+        <p14:creationId xmlns:p14="http://schemas.microsoft.com/office/powerpoint/2010/main" val="1024086991"/>
+      </p:ext>
+    </p:extLst>
+  </p:cSld>
+  <p:clrMapOvr>
+    <a:masterClrMapping/>
+  </p:clrMapOvr>
+</p:notes>
+</file>
+
+<file path=ppt/notesSlides/notesSlide11.xml><?xml version="1.0" encoding="utf-8"?>
+<p:notes xmlns:a="http://schemas.openxmlformats.org/drawingml/2006/main" xmlns:r="http://schemas.openxmlformats.org/officeDocument/2006/relationships" xmlns:p="http://schemas.openxmlformats.org/presentationml/2006/main">
+  <p:cSld>
+    <p:spTree>
+      <p:nvGrpSpPr>
+        <p:cNvPr id="1" name=""/>
+        <p:cNvGrpSpPr/>
+        <p:nvPr/>
+      </p:nvGrpSpPr>
+      <p:grpSpPr>
+        <a:xfrm>
+          <a:off x="0" y="0"/>
+          <a:ext cx="0" cy="0"/>
+          <a:chOff x="0" y="0"/>
+          <a:chExt cx="0" cy="0"/>
+        </a:xfrm>
+      </p:grpSpPr>
+      <p:sp>
+        <p:nvSpPr>
+          <p:cNvPr id="2" name="Slide Image Placeholder 1"/>
+          <p:cNvSpPr>
+            <a:spLocks noGrp="1" noRot="1" noChangeAspect="1"/>
+          </p:cNvSpPr>
+          <p:nvPr>
+            <p:ph type="sldImg"/>
+          </p:nvPr>
+        </p:nvSpPr>
+        <p:spPr/>
+      </p:sp>
+      <p:sp>
+        <p:nvSpPr>
+          <p:cNvPr id="3" name="Notes Placeholder 2"/>
+          <p:cNvSpPr>
+            <a:spLocks noGrp="1"/>
+          </p:cNvSpPr>
+          <p:nvPr>
+            <p:ph type="body" idx="1"/>
+          </p:nvPr>
+        </p:nvSpPr>
+        <p:spPr/>
+        <p:txBody>
+          <a:bodyPr/>
+          <a:lstStyle/>
+          <a:p>
+            <a:r>
+              <a:rPr lang="en-US" dirty="0"/>
+              <a:t/>
+            </a:r>
+            <a:endParaRPr lang="en-US" dirty="0"/>
+          </a:p>
+        </p:txBody>
+      </p:sp>
+      <p:sp>
+        <p:nvSpPr>
+          <p:cNvPr id="4" name="Slide Number Placeholder 3"/>
+          <p:cNvSpPr>
+            <a:spLocks noGrp="1"/>
+          </p:cNvSpPr>
+          <p:nvPr>
+            <p:ph type="sldNum" sz="quarter" idx="10"/>
+          </p:nvPr>
+        </p:nvSpPr>
+        <p:spPr/>
+        <p:txBody>
+          <a:bodyPr/>
+          <a:lstStyle/>
+          <a:p>
+            <a:fld id="{F7021451-1387-4CA6-816F-3879F97B5CBC}" type="slidenum">
+              <a:rPr lang="en-US"/>
+              <a:t>11</a:t>
+            </a:fld>
+            <a:endParaRPr lang="en-US"/>
+          </a:p>
+        </p:txBody>
+      </p:sp>
+    </p:spTree>
+    <p:extLst>
+      <p:ext uri="{BB962C8B-B14F-4D97-AF65-F5344CB8AC3E}">
+        <p14:creationId xmlns:p14="http://schemas.microsoft.com/office/powerpoint/2010/main" val="1024086991"/>
+      </p:ext>
+    </p:extLst>
+  </p:cSld>
+  <p:clrMapOvr>
+    <a:masterClrMapping/>
+  </p:clrMapOvr>
+</p:notes>
+</file>
+
+<file path=ppt/notesSlides/notesSlide12.xml><?xml version="1.0" encoding="utf-8"?>
+<p:notes xmlns:a="http://schemas.openxmlformats.org/drawingml/2006/main" xmlns:r="http://schemas.openxmlformats.org/officeDocument/2006/relationships" xmlns:p="http://schemas.openxmlformats.org/presentationml/2006/main">
+  <p:cSld>
+    <p:spTree>
+      <p:nvGrpSpPr>
+        <p:cNvPr id="1" name=""/>
+        <p:cNvGrpSpPr/>
+        <p:nvPr/>
+      </p:nvGrpSpPr>
+      <p:grpSpPr>
+        <a:xfrm>
+          <a:off x="0" y="0"/>
+          <a:ext cx="0" cy="0"/>
+          <a:chOff x="0" y="0"/>
+          <a:chExt cx="0" cy="0"/>
+        </a:xfrm>
+      </p:grpSpPr>
+      <p:sp>
+        <p:nvSpPr>
+          <p:cNvPr id="2" name="Slide Image Placeholder 1"/>
+          <p:cNvSpPr>
+            <a:spLocks noGrp="1" noRot="1" noChangeAspect="1"/>
+          </p:cNvSpPr>
+          <p:nvPr>
+            <p:ph type="sldImg"/>
+          </p:nvPr>
+        </p:nvSpPr>
+        <p:spPr/>
+      </p:sp>
+      <p:sp>
+        <p:nvSpPr>
+          <p:cNvPr id="3" name="Notes Placeholder 2"/>
+          <p:cNvSpPr>
+            <a:spLocks noGrp="1"/>
+          </p:cNvSpPr>
+          <p:nvPr>
+            <p:ph type="body" idx="1"/>
+          </p:nvPr>
+        </p:nvSpPr>
+        <p:spPr/>
+        <p:txBody>
+          <a:bodyPr/>
+          <a:lstStyle/>
+          <a:p>
+            <a:r>
+              <a:rPr lang="en-US" dirty="0"/>
+              <a:t/>
+            </a:r>
+            <a:endParaRPr lang="en-US" dirty="0"/>
+          </a:p>
+        </p:txBody>
+      </p:sp>
+      <p:sp>
+        <p:nvSpPr>
+          <p:cNvPr id="4" name="Slide Number Placeholder 3"/>
+          <p:cNvSpPr>
+            <a:spLocks noGrp="1"/>
+          </p:cNvSpPr>
+          <p:nvPr>
+            <p:ph type="sldNum" sz="quarter" idx="10"/>
+          </p:nvPr>
+        </p:nvSpPr>
+        <p:spPr/>
+        <p:txBody>
+          <a:bodyPr/>
+          <a:lstStyle/>
+          <a:p>
+            <a:fld id="{F7021451-1387-4CA6-816F-3879F97B5CBC}" type="slidenum">
+              <a:rPr lang="en-US"/>
+              <a:t>12</a:t>
+            </a:fld>
+            <a:endParaRPr lang="en-US"/>
+          </a:p>
+        </p:txBody>
+      </p:sp>
+    </p:spTree>
+    <p:extLst>
+      <p:ext uri="{BB962C8B-B14F-4D97-AF65-F5344CB8AC3E}">
+        <p14:creationId xmlns:p14="http://schemas.microsoft.com/office/powerpoint/2010/main" val="1024086991"/>
+      </p:ext>
+    </p:extLst>
+  </p:cSld>
+  <p:clrMapOvr>
+    <a:masterClrMapping/>
+  </p:clrMapOvr>
+</p:notes>
+</file>
+
+<file path=ppt/notesSlides/notesSlide13.xml><?xml version="1.0" encoding="utf-8"?>
+<p:notes xmlns:a="http://schemas.openxmlformats.org/drawingml/2006/main" xmlns:r="http://schemas.openxmlformats.org/officeDocument/2006/relationships" xmlns:p="http://schemas.openxmlformats.org/presentationml/2006/main">
+  <p:cSld>
+    <p:spTree>
+      <p:nvGrpSpPr>
+        <p:cNvPr id="1" name=""/>
+        <p:cNvGrpSpPr/>
+        <p:nvPr/>
+      </p:nvGrpSpPr>
+      <p:grpSpPr>
+        <a:xfrm>
+          <a:off x="0" y="0"/>
+          <a:ext cx="0" cy="0"/>
+          <a:chOff x="0" y="0"/>
+          <a:chExt cx="0" cy="0"/>
+        </a:xfrm>
+      </p:grpSpPr>
+      <p:sp>
+        <p:nvSpPr>
+          <p:cNvPr id="2" name="Slide Image Placeholder 1"/>
+          <p:cNvSpPr>
+            <a:spLocks noGrp="1" noRot="1" noChangeAspect="1"/>
+          </p:cNvSpPr>
+          <p:nvPr>
+            <p:ph type="sldImg"/>
+          </p:nvPr>
+        </p:nvSpPr>
+        <p:spPr/>
+      </p:sp>
+      <p:sp>
+        <p:nvSpPr>
+          <p:cNvPr id="3" name="Notes Placeholder 2"/>
+          <p:cNvSpPr>
+            <a:spLocks noGrp="1"/>
+          </p:cNvSpPr>
+          <p:nvPr>
+            <p:ph type="body" idx="1"/>
+          </p:nvPr>
+        </p:nvSpPr>
+        <p:spPr/>
+        <p:txBody>
+          <a:bodyPr/>
+          <a:lstStyle/>
+          <a:p>
+            <a:r>
+              <a:rPr lang="en-US" dirty="0"/>
+              <a:t/>
+            </a:r>
+            <a:endParaRPr lang="en-US" dirty="0"/>
+          </a:p>
+        </p:txBody>
+      </p:sp>
+      <p:sp>
+        <p:nvSpPr>
+          <p:cNvPr id="4" name="Slide Number Placeholder 3"/>
+          <p:cNvSpPr>
+            <a:spLocks noGrp="1"/>
+          </p:cNvSpPr>
+          <p:nvPr>
+            <p:ph type="sldNum" sz="quarter" idx="10"/>
+          </p:nvPr>
+        </p:nvSpPr>
+        <p:spPr/>
+        <p:txBody>
+          <a:bodyPr/>
+          <a:lstStyle/>
+          <a:p>
+            <a:fld id="{F7021451-1387-4CA6-816F-3879F97B5CBC}" type="slidenum">
+              <a:rPr lang="en-US"/>
+              <a:t>13</a:t>
+            </a:fld>
+            <a:endParaRPr lang="en-US"/>
+          </a:p>
+        </p:txBody>
+      </p:sp>
+    </p:spTree>
+    <p:extLst>
+      <p:ext uri="{BB962C8B-B14F-4D97-AF65-F5344CB8AC3E}">
+        <p14:creationId xmlns:p14="http://schemas.microsoft.com/office/powerpoint/2010/main" val="1024086991"/>
+      </p:ext>
+    </p:extLst>
+  </p:cSld>
+  <p:clrMapOvr>
+    <a:masterClrMapping/>
+  </p:clrMapOvr>
+</p:notes>
+</file>
+
+<file path=ppt/notesSlides/notesSlide14.xml><?xml version="1.0" encoding="utf-8"?>
+<p:notes xmlns:a="http://schemas.openxmlformats.org/drawingml/2006/main" xmlns:r="http://schemas.openxmlformats.org/officeDocument/2006/relationships" xmlns:p="http://schemas.openxmlformats.org/presentationml/2006/main">
+  <p:cSld>
+    <p:spTree>
+      <p:nvGrpSpPr>
+        <p:cNvPr id="1" name=""/>
+        <p:cNvGrpSpPr/>
+        <p:nvPr/>
+      </p:nvGrpSpPr>
+      <p:grpSpPr>
+        <a:xfrm>
+          <a:off x="0" y="0"/>
+          <a:ext cx="0" cy="0"/>
+          <a:chOff x="0" y="0"/>
+          <a:chExt cx="0" cy="0"/>
+        </a:xfrm>
+      </p:grpSpPr>
+      <p:sp>
+        <p:nvSpPr>
+          <p:cNvPr id="2" name="Slide Image Placeholder 1"/>
+          <p:cNvSpPr>
+            <a:spLocks noGrp="1" noRot="1" noChangeAspect="1"/>
+          </p:cNvSpPr>
+          <p:nvPr>
+            <p:ph type="sldImg"/>
+          </p:nvPr>
+        </p:nvSpPr>
+        <p:spPr/>
+      </p:sp>
+      <p:sp>
+        <p:nvSpPr>
+          <p:cNvPr id="3" name="Notes Placeholder 2"/>
+          <p:cNvSpPr>
+            <a:spLocks noGrp="1"/>
+          </p:cNvSpPr>
+          <p:nvPr>
+            <p:ph type="body" idx="1"/>
+          </p:nvPr>
+        </p:nvSpPr>
+        <p:spPr/>
+        <p:txBody>
+          <a:bodyPr/>
+          <a:lstStyle/>
+          <a:p>
+            <a:r>
+              <a:rPr lang="en-US" dirty="0"/>
+              <a:t/>
+            </a:r>
+            <a:endParaRPr lang="en-US" dirty="0"/>
+          </a:p>
+        </p:txBody>
+      </p:sp>
+      <p:sp>
+        <p:nvSpPr>
+          <p:cNvPr id="4" name="Slide Number Placeholder 3"/>
+          <p:cNvSpPr>
+            <a:spLocks noGrp="1"/>
+          </p:cNvSpPr>
+          <p:nvPr>
+            <p:ph type="sldNum" sz="quarter" idx="10"/>
+          </p:nvPr>
+        </p:nvSpPr>
+        <p:spPr/>
+        <p:txBody>
+          <a:bodyPr/>
+          <a:lstStyle/>
+          <a:p>
+            <a:fld id="{F7021451-1387-4CA6-816F-3879F97B5CBC}" type="slidenum">
+              <a:rPr lang="en-US"/>
+              <a:t>14</a:t>
+            </a:fld>
+            <a:endParaRPr lang="en-US"/>
+          </a:p>
+        </p:txBody>
+      </p:sp>
+    </p:spTree>
+    <p:extLst>
+      <p:ext uri="{BB962C8B-B14F-4D97-AF65-F5344CB8AC3E}">
+        <p14:creationId xmlns:p14="http://schemas.microsoft.com/office/powerpoint/2010/main" val="1024086991"/>
+      </p:ext>
+    </p:extLst>
+  </p:cSld>
+  <p:clrMapOvr>
+    <a:masterClrMapping/>
+  </p:clrMapOvr>
+</p:notes>
+</file>
+
+<file path=ppt/notesSlides/notesSlide15.xml><?xml version="1.0" encoding="utf-8"?>
+<p:notes xmlns:a="http://schemas.openxmlformats.org/drawingml/2006/main" xmlns:r="http://schemas.openxmlformats.org/officeDocument/2006/relationships" xmlns:p="http://schemas.openxmlformats.org/presentationml/2006/main">
+  <p:cSld>
+    <p:spTree>
+      <p:nvGrpSpPr>
+        <p:cNvPr id="1" name=""/>
+        <p:cNvGrpSpPr/>
+        <p:nvPr/>
+      </p:nvGrpSpPr>
+      <p:grpSpPr>
+        <a:xfrm>
+          <a:off x="0" y="0"/>
+          <a:ext cx="0" cy="0"/>
+          <a:chOff x="0" y="0"/>
+          <a:chExt cx="0" cy="0"/>
+        </a:xfrm>
+      </p:grpSpPr>
+      <p:sp>
+        <p:nvSpPr>
+          <p:cNvPr id="2" name="Slide Image Placeholder 1"/>
+          <p:cNvSpPr>
+            <a:spLocks noGrp="1" noRot="1" noChangeAspect="1"/>
+          </p:cNvSpPr>
+          <p:nvPr>
+            <p:ph type="sldImg"/>
+          </p:nvPr>
+        </p:nvSpPr>
+        <p:spPr/>
+      </p:sp>
+      <p:sp>
+        <p:nvSpPr>
+          <p:cNvPr id="3" name="Notes Placeholder 2"/>
+          <p:cNvSpPr>
+            <a:spLocks noGrp="1"/>
+          </p:cNvSpPr>
+          <p:nvPr>
+            <p:ph type="body" idx="1"/>
+          </p:nvPr>
+        </p:nvSpPr>
+        <p:spPr/>
+        <p:txBody>
+          <a:bodyPr/>
+          <a:lstStyle/>
+          <a:p>
+            <a:r>
+              <a:rPr lang="en-US" dirty="0"/>
+              <a:t/>
+            </a:r>
+            <a:endParaRPr lang="en-US" dirty="0"/>
+          </a:p>
+        </p:txBody>
+      </p:sp>
+      <p:sp>
+        <p:nvSpPr>
+          <p:cNvPr id="4" name="Slide Number Placeholder 3"/>
+          <p:cNvSpPr>
+            <a:spLocks noGrp="1"/>
+          </p:cNvSpPr>
+          <p:nvPr>
+            <p:ph type="sldNum" sz="quarter" idx="10"/>
+          </p:nvPr>
+        </p:nvSpPr>
+        <p:spPr/>
+        <p:txBody>
+          <a:bodyPr/>
+          <a:lstStyle/>
+          <a:p>
+            <a:fld id="{F7021451-1387-4CA6-816F-3879F97B5CBC}" type="slidenum">
+              <a:rPr lang="en-US"/>
+              <a:t>15</a:t>
+            </a:fld>
+            <a:endParaRPr lang="en-US"/>
+          </a:p>
+        </p:txBody>
+      </p:sp>
+    </p:spTree>
+    <p:extLst>
+      <p:ext uri="{BB962C8B-B14F-4D97-AF65-F5344CB8AC3E}">
+        <p14:creationId xmlns:p14="http://schemas.microsoft.com/office/powerpoint/2010/main" val="1024086991"/>
+      </p:ext>
+    </p:extLst>
+  </p:cSld>
+  <p:clrMapOvr>
+    <a:masterClrMapping/>
+  </p:clrMapOvr>
+</p:notes>
+</file>
+
 <file path=ppt/notesSlides/notesSlide2.xml><?xml version="1.0" encoding="utf-8"?>
 <p:notes xmlns:a="http://schemas.openxmlformats.org/drawingml/2006/main" xmlns:r="http://schemas.openxmlformats.org/officeDocument/2006/relationships" xmlns:p="http://schemas.openxmlformats.org/presentationml/2006/main">
   <p:cSld>
@@ -1149,6 +1684,94 @@
             <a:fld id="{F7021451-1387-4CA6-816F-3879F97B5CBC}" type="slidenum">
               <a:rPr lang="en-US"/>
               <a:t>8</a:t>
+            </a:fld>
+            <a:endParaRPr lang="en-US"/>
+          </a:p>
+        </p:txBody>
+      </p:sp>
+    </p:spTree>
+    <p:extLst>
+      <p:ext uri="{BB962C8B-B14F-4D97-AF65-F5344CB8AC3E}">
+        <p14:creationId xmlns:p14="http://schemas.microsoft.com/office/powerpoint/2010/main" val="1024086991"/>
+      </p:ext>
+    </p:extLst>
+  </p:cSld>
+  <p:clrMapOvr>
+    <a:masterClrMapping/>
+  </p:clrMapOvr>
+</p:notes>
+</file>
+
+<file path=ppt/notesSlides/notesSlide9.xml><?xml version="1.0" encoding="utf-8"?>
+<p:notes xmlns:a="http://schemas.openxmlformats.org/drawingml/2006/main" xmlns:r="http://schemas.openxmlformats.org/officeDocument/2006/relationships" xmlns:p="http://schemas.openxmlformats.org/presentationml/2006/main">
+  <p:cSld>
+    <p:spTree>
+      <p:nvGrpSpPr>
+        <p:cNvPr id="1" name=""/>
+        <p:cNvGrpSpPr/>
+        <p:nvPr/>
+      </p:nvGrpSpPr>
+      <p:grpSpPr>
+        <a:xfrm>
+          <a:off x="0" y="0"/>
+          <a:ext cx="0" cy="0"/>
+          <a:chOff x="0" y="0"/>
+          <a:chExt cx="0" cy="0"/>
+        </a:xfrm>
+      </p:grpSpPr>
+      <p:sp>
+        <p:nvSpPr>
+          <p:cNvPr id="2" name="Slide Image Placeholder 1"/>
+          <p:cNvSpPr>
+            <a:spLocks noGrp="1" noRot="1" noChangeAspect="1"/>
+          </p:cNvSpPr>
+          <p:nvPr>
+            <p:ph type="sldImg"/>
+          </p:nvPr>
+        </p:nvSpPr>
+        <p:spPr/>
+      </p:sp>
+      <p:sp>
+        <p:nvSpPr>
+          <p:cNvPr id="3" name="Notes Placeholder 2"/>
+          <p:cNvSpPr>
+            <a:spLocks noGrp="1"/>
+          </p:cNvSpPr>
+          <p:nvPr>
+            <p:ph type="body" idx="1"/>
+          </p:nvPr>
+        </p:nvSpPr>
+        <p:spPr/>
+        <p:txBody>
+          <a:bodyPr/>
+          <a:lstStyle/>
+          <a:p>
+            <a:r>
+              <a:rPr lang="en-US" dirty="0"/>
+              <a:t/>
+            </a:r>
+            <a:endParaRPr lang="en-US" dirty="0"/>
+          </a:p>
+        </p:txBody>
+      </p:sp>
+      <p:sp>
+        <p:nvSpPr>
+          <p:cNvPr id="4" name="Slide Number Placeholder 3"/>
+          <p:cNvSpPr>
+            <a:spLocks noGrp="1"/>
+          </p:cNvSpPr>
+          <p:nvPr>
+            <p:ph type="sldNum" sz="quarter" idx="10"/>
+          </p:nvPr>
+        </p:nvSpPr>
+        <p:spPr/>
+        <p:txBody>
+          <a:bodyPr/>
+          <a:lstStyle/>
+          <a:p>
+            <a:fld id="{F7021451-1387-4CA6-816F-3879F97B5CBC}" type="slidenum">
+              <a:rPr lang="en-US"/>
+              <a:t>9</a:t>
             </a:fld>
             <a:endParaRPr lang="en-US"/>
           </a:p>
@@ -1813,6 +2436,1853 @@
 </p:sld>
 </file>
 
+<file path=ppt/slides/slide10.xml><?xml version="1.0" encoding="utf-8"?>
+<p:sld xmlns:a="http://schemas.openxmlformats.org/drawingml/2006/main" xmlns:r="http://schemas.openxmlformats.org/officeDocument/2006/relationships" xmlns:p="http://schemas.openxmlformats.org/presentationml/2006/main">
+  <p:cSld name="Slide 10">
+    <p:bg>
+      <p:bgPr>
+        <a:solidFill>
+          <a:srgbClr val="FBFCFB"/>
+        </a:solidFill>
+      </p:bgPr>
+    </p:bg>
+    <p:spTree>
+      <p:nvGrpSpPr>
+        <p:cNvPr id="1" name=""/>
+        <p:cNvGrpSpPr/>
+        <p:nvPr/>
+      </p:nvGrpSpPr>
+      <p:grpSpPr>
+        <a:xfrm>
+          <a:off x="0" y="0"/>
+          <a:ext cx="0" cy="0"/>
+          <a:chOff x="0" y="0"/>
+          <a:chExt cx="0" cy="0"/>
+        </a:xfrm>
+      </p:grpSpPr>
+      <p:sp>
+        <p:nvSpPr>
+          <p:cNvPr id="2" name="Text 0"/>
+          <p:cNvSpPr/>
+          <p:nvPr/>
+        </p:nvSpPr>
+        <p:spPr>
+          <a:xfrm>
+            <a:off x="457200" y="219456"/>
+            <a:ext cx="7863840" cy="201168"/>
+          </a:xfrm>
+          <a:prstGeom prst="rect">
+            <a:avLst/>
+          </a:prstGeom>
+          <a:noFill/>
+          <a:ln/>
+        </p:spPr>
+        <p:txBody>
+          <a:bodyPr wrap="square" rtlCol="0" anchor="ctr"/>
+          <a:lstStyle/>
+          <a:p>
+            <a:pPr indent="0" marL="0">
+              <a:buNone/>
+            </a:pPr>
+            <a:r>
+              <a:rPr lang="en-US" sz="1050" b="1" spc="180" kern="0" dirty="0">
+                <a:solidFill>
+                  <a:srgbClr val="0B7C44"/>
+                </a:solidFill>
+                <a:latin typeface="맑은 고딕" pitchFamily="34" charset="0"/>
+                <a:ea typeface="맑은 고딕" pitchFamily="34" charset="-122"/>
+                <a:cs typeface="맑은 고딕" pitchFamily="34" charset="-120"/>
+              </a:rPr>
+              <a:t>화면 ③ 답변  ·  3/3</a:t>
+            </a:r>
+            <a:endParaRPr lang="en-US" sz="1050" dirty="0"/>
+          </a:p>
+        </p:txBody>
+      </p:sp>
+      <p:sp>
+        <p:nvSpPr>
+          <p:cNvPr id="3" name="Text 1"/>
+          <p:cNvSpPr/>
+          <p:nvPr/>
+        </p:nvSpPr>
+        <p:spPr>
+          <a:xfrm>
+            <a:off x="457200" y="420624"/>
+            <a:ext cx="8595360" cy="365760"/>
+          </a:xfrm>
+          <a:prstGeom prst="rect">
+            <a:avLst/>
+          </a:prstGeom>
+          <a:noFill/>
+          <a:ln/>
+        </p:spPr>
+        <p:txBody>
+          <a:bodyPr wrap="square" rtlCol="0" anchor="ctr"/>
+          <a:lstStyle/>
+          <a:p>
+            <a:pPr indent="0" marL="0">
+              <a:buNone/>
+            </a:pPr>
+            <a:r>
+              <a:rPr lang="en-US" sz="2000" b="1" dirty="0">
+                <a:solidFill>
+                  <a:srgbClr val="16211C"/>
+                </a:solidFill>
+                <a:latin typeface="맑은 고딕" pitchFamily="34" charset="0"/>
+                <a:ea typeface="맑은 고딕" pitchFamily="34" charset="-122"/>
+                <a:cs typeface="맑은 고딕" pitchFamily="34" charset="-120"/>
+              </a:rPr>
+              <a:t>면책을 먼저 판정하고 조항으로 근거를 답니다</a:t>
+            </a:r>
+            <a:endParaRPr lang="en-US" sz="2000" dirty="0"/>
+          </a:p>
+        </p:txBody>
+      </p:sp>
+      <p:pic>
+        <p:nvPicPr>
+          <p:cNvPr id="4" name="Image 0" descr="/tmp/claude-0/-home-user-chacha6377/ca7f6080-cf3a-5093-8a0d-eb3bfdb80785/scratchpad/app_ask_p3.png">    </p:cNvPr>
+          <p:cNvPicPr>
+            <a:picLocks noChangeAspect="1"/>
+          </p:cNvPicPr>
+          <p:nvPr/>
+        </p:nvPicPr>
+        <p:blipFill>
+          <a:blip r:embed="rId1"/>
+          <a:stretch>
+            <a:fillRect/>
+          </a:stretch>
+        </p:blipFill>
+        <p:spPr>
+          <a:xfrm>
+            <a:off x="457200" y="1054346"/>
+            <a:ext cx="11247120" cy="4785884"/>
+          </a:xfrm>
+          <a:prstGeom prst="rect">
+            <a:avLst/>
+          </a:prstGeom>
+        </p:spPr>
+      </p:pic>
+      <p:sp>
+        <p:nvSpPr>
+          <p:cNvPr id="5" name="Text 2"/>
+          <p:cNvSpPr/>
+          <p:nvPr/>
+        </p:nvSpPr>
+        <p:spPr>
+          <a:xfrm>
+            <a:off x="11384280" y="6510528"/>
+            <a:ext cx="411480" cy="256032"/>
+          </a:xfrm>
+          <a:prstGeom prst="rect">
+            <a:avLst/>
+          </a:prstGeom>
+          <a:noFill/>
+          <a:ln/>
+        </p:spPr>
+        <p:txBody>
+          <a:bodyPr wrap="square" rtlCol="0" anchor="ctr"/>
+          <a:lstStyle/>
+          <a:p>
+            <a:pPr algn="r" indent="0" marL="0">
+              <a:buNone/>
+            </a:pPr>
+            <a:r>
+              <a:rPr lang="en-US" sz="1000" dirty="0">
+                <a:solidFill>
+                  <a:srgbClr val="7A867F"/>
+                </a:solidFill>
+                <a:latin typeface="맑은 고딕" pitchFamily="34" charset="0"/>
+                <a:ea typeface="맑은 고딕" pitchFamily="34" charset="-122"/>
+                <a:cs typeface="맑은 고딕" pitchFamily="34" charset="-120"/>
+              </a:rPr>
+              <a:t>10</a:t>
+            </a:r>
+            <a:endParaRPr lang="en-US" sz="1000" dirty="0"/>
+          </a:p>
+        </p:txBody>
+      </p:sp>
+    </p:spTree>
+  </p:cSld>
+  <p:clrMapOvr>
+    <a:masterClrMapping/>
+  </p:clrMapOvr>
+</p:sld>
+</file>
+
+<file path=ppt/slides/slide11.xml><?xml version="1.0" encoding="utf-8"?>
+<p:sld xmlns:a="http://schemas.openxmlformats.org/drawingml/2006/main" xmlns:r="http://schemas.openxmlformats.org/officeDocument/2006/relationships" xmlns:p="http://schemas.openxmlformats.org/presentationml/2006/main">
+  <p:cSld name="Slide 11">
+    <p:bg>
+      <p:bgPr>
+        <a:solidFill>
+          <a:srgbClr val="FBFCFB"/>
+        </a:solidFill>
+      </p:bgPr>
+    </p:bg>
+    <p:spTree>
+      <p:nvGrpSpPr>
+        <p:cNvPr id="1" name=""/>
+        <p:cNvGrpSpPr/>
+        <p:nvPr/>
+      </p:nvGrpSpPr>
+      <p:grpSpPr>
+        <a:xfrm>
+          <a:off x="0" y="0"/>
+          <a:ext cx="0" cy="0"/>
+          <a:chOff x="0" y="0"/>
+          <a:chExt cx="0" cy="0"/>
+        </a:xfrm>
+      </p:grpSpPr>
+      <p:sp>
+        <p:nvSpPr>
+          <p:cNvPr id="2" name="Text 0"/>
+          <p:cNvSpPr/>
+          <p:nvPr/>
+        </p:nvSpPr>
+        <p:spPr>
+          <a:xfrm>
+            <a:off x="457200" y="219456"/>
+            <a:ext cx="7863840" cy="201168"/>
+          </a:xfrm>
+          <a:prstGeom prst="rect">
+            <a:avLst/>
+          </a:prstGeom>
+          <a:noFill/>
+          <a:ln/>
+        </p:spPr>
+        <p:txBody>
+          <a:bodyPr wrap="square" rtlCol="0" anchor="ctr"/>
+          <a:lstStyle/>
+          <a:p>
+            <a:pPr indent="0" marL="0">
+              <a:buNone/>
+            </a:pPr>
+            <a:r>
+              <a:rPr lang="en-US" sz="1050" b="1" spc="180" kern="0" dirty="0">
+                <a:solidFill>
+                  <a:srgbClr val="0B7C44"/>
+                </a:solidFill>
+                <a:latin typeface="맑은 고딕" pitchFamily="34" charset="0"/>
+                <a:ea typeface="맑은 고딕" pitchFamily="34" charset="-122"/>
+                <a:cs typeface="맑은 고딕" pitchFamily="34" charset="-120"/>
+              </a:rPr>
+              <a:t>화면 ④ 약관북</a:t>
+            </a:r>
+            <a:endParaRPr lang="en-US" sz="1050" dirty="0"/>
+          </a:p>
+        </p:txBody>
+      </p:sp>
+      <p:sp>
+        <p:nvSpPr>
+          <p:cNvPr id="3" name="Text 1"/>
+          <p:cNvSpPr/>
+          <p:nvPr/>
+        </p:nvSpPr>
+        <p:spPr>
+          <a:xfrm>
+            <a:off x="457200" y="420624"/>
+            <a:ext cx="8595360" cy="365760"/>
+          </a:xfrm>
+          <a:prstGeom prst="rect">
+            <a:avLst/>
+          </a:prstGeom>
+          <a:noFill/>
+          <a:ln/>
+        </p:spPr>
+        <p:txBody>
+          <a:bodyPr wrap="square" rtlCol="0" anchor="ctr"/>
+          <a:lstStyle/>
+          <a:p>
+            <a:pPr indent="0" marL="0">
+              <a:buNone/>
+            </a:pPr>
+            <a:r>
+              <a:rPr lang="en-US" sz="2000" b="1" dirty="0">
+                <a:solidFill>
+                  <a:srgbClr val="16211C"/>
+                </a:solidFill>
+                <a:latin typeface="맑은 고딕" pitchFamily="34" charset="0"/>
+                <a:ea typeface="맑은 고딕" pitchFamily="34" charset="-122"/>
+                <a:cs typeface="맑은 고딕" pitchFamily="34" charset="-120"/>
+              </a:rPr>
+              <a:t>고객 폴더를 열면 질문 범위가 그 고객으로 잠깁니다</a:t>
+            </a:r>
+            <a:endParaRPr lang="en-US" sz="2000" dirty="0"/>
+          </a:p>
+        </p:txBody>
+      </p:sp>
+      <p:sp>
+        <p:nvSpPr>
+          <p:cNvPr id="4" name="Text 2"/>
+          <p:cNvSpPr/>
+          <p:nvPr/>
+        </p:nvSpPr>
+        <p:spPr>
+          <a:xfrm>
+            <a:off x="457200" y="804672"/>
+            <a:ext cx="11247120" cy="256032"/>
+          </a:xfrm>
+          <a:prstGeom prst="rect">
+            <a:avLst/>
+          </a:prstGeom>
+          <a:noFill/>
+          <a:ln/>
+        </p:spPr>
+        <p:txBody>
+          <a:bodyPr wrap="square" rtlCol="0" anchor="ctr"/>
+          <a:lstStyle/>
+          <a:p>
+            <a:pPr indent="0" marL="0">
+              <a:buNone/>
+            </a:pPr>
+            <a:r>
+              <a:rPr lang="en-US" sz="1150" dirty="0">
+                <a:solidFill>
+                  <a:srgbClr val="7A867F"/>
+                </a:solidFill>
+                <a:latin typeface="맑은 고딕" pitchFamily="34" charset="0"/>
+                <a:ea typeface="맑은 고딕" pitchFamily="34" charset="-122"/>
+                <a:cs typeface="맑은 고딕" pitchFamily="34" charset="-120"/>
+              </a:rPr>
+              <a:t>이 화면이 차별점의 실체입니다. 상담할수록 고객별 약관이 쌓입니다.</a:t>
+            </a:r>
+            <a:endParaRPr lang="en-US" sz="1150" dirty="0"/>
+          </a:p>
+        </p:txBody>
+      </p:sp>
+      <p:pic>
+        <p:nvPicPr>
+          <p:cNvPr id="5" name="Image 0" descr="/tmp/claude-0/-home-user-chacha6377/ca7f6080-cf3a-5093-8a0d-eb3bfdb80785/scratchpad/app_entry_p1.png">    </p:cNvPr>
+          <p:cNvPicPr>
+            <a:picLocks noChangeAspect="1"/>
+          </p:cNvPicPr>
+          <p:nvPr/>
+        </p:nvPicPr>
+        <p:blipFill>
+          <a:blip r:embed="rId1"/>
+          <a:stretch>
+            <a:fillRect/>
+          </a:stretch>
+        </p:blipFill>
+        <p:spPr>
+          <a:xfrm>
+            <a:off x="1629354" y="1097280"/>
+            <a:ext cx="8902813" cy="4901184"/>
+          </a:xfrm>
+          <a:prstGeom prst="rect">
+            <a:avLst/>
+          </a:prstGeom>
+        </p:spPr>
+      </p:pic>
+      <p:sp>
+        <p:nvSpPr>
+          <p:cNvPr id="6" name="Shape 3"/>
+          <p:cNvSpPr/>
+          <p:nvPr/>
+        </p:nvSpPr>
+        <p:spPr>
+          <a:xfrm>
+            <a:off x="457200" y="6035040"/>
+            <a:ext cx="54864" cy="457200"/>
+          </a:xfrm>
+          <a:prstGeom prst="roundRect">
+            <a:avLst>
+              <a:gd name="adj" fmla="val 50000"/>
+            </a:avLst>
+          </a:prstGeom>
+          <a:solidFill>
+            <a:srgbClr val="14A05A"/>
+          </a:solidFill>
+          <a:ln w="12700">
+            <a:solidFill>
+              <a:srgbClr val="14A05A"/>
+            </a:solidFill>
+            <a:prstDash val="solid"/>
+          </a:ln>
+        </p:spPr>
+      </p:sp>
+      <p:sp>
+        <p:nvSpPr>
+          <p:cNvPr id="7" name="Text 4"/>
+          <p:cNvSpPr/>
+          <p:nvPr/>
+        </p:nvSpPr>
+        <p:spPr>
+          <a:xfrm>
+            <a:off x="658368" y="6035040"/>
+            <a:ext cx="10607040" cy="457200"/>
+          </a:xfrm>
+          <a:prstGeom prst="rect">
+            <a:avLst/>
+          </a:prstGeom>
+          <a:noFill/>
+          <a:ln/>
+        </p:spPr>
+        <p:txBody>
+          <a:bodyPr wrap="square" rtlCol="0" anchor="ctr"/>
+          <a:lstStyle/>
+          <a:p>
+            <a:pPr indent="0" marL="0">
+              <a:buNone/>
+            </a:pPr>
+            <a:r>
+              <a:rPr lang="en-US" sz="1150" dirty="0">
+                <a:solidFill>
+                  <a:srgbClr val="44524B"/>
+                </a:solidFill>
+                <a:latin typeface="맑은 고딕" pitchFamily="34" charset="0"/>
+                <a:ea typeface="맑은 고딕" pitchFamily="34" charset="-122"/>
+                <a:cs typeface="맑은 고딕" pitchFamily="34" charset="-120"/>
+              </a:rPr>
+              <a:t>그 고객 약관 안에서만 찾습니다. 담보가 여러 계약에 걸치면 모두 보여줍니다.</a:t>
+            </a:r>
+            <a:endParaRPr lang="en-US" sz="1150" dirty="0"/>
+          </a:p>
+        </p:txBody>
+      </p:sp>
+      <p:sp>
+        <p:nvSpPr>
+          <p:cNvPr id="8" name="Text 5"/>
+          <p:cNvSpPr/>
+          <p:nvPr/>
+        </p:nvSpPr>
+        <p:spPr>
+          <a:xfrm>
+            <a:off x="11384280" y="6510528"/>
+            <a:ext cx="411480" cy="256032"/>
+          </a:xfrm>
+          <a:prstGeom prst="rect">
+            <a:avLst/>
+          </a:prstGeom>
+          <a:noFill/>
+          <a:ln/>
+        </p:spPr>
+        <p:txBody>
+          <a:bodyPr wrap="square" rtlCol="0" anchor="ctr"/>
+          <a:lstStyle/>
+          <a:p>
+            <a:pPr algn="r" indent="0" marL="0">
+              <a:buNone/>
+            </a:pPr>
+            <a:r>
+              <a:rPr lang="en-US" sz="1000" dirty="0">
+                <a:solidFill>
+                  <a:srgbClr val="7A867F"/>
+                </a:solidFill>
+                <a:latin typeface="맑은 고딕" pitchFamily="34" charset="0"/>
+                <a:ea typeface="맑은 고딕" pitchFamily="34" charset="-122"/>
+                <a:cs typeface="맑은 고딕" pitchFamily="34" charset="-120"/>
+              </a:rPr>
+              <a:t>11</a:t>
+            </a:r>
+            <a:endParaRPr lang="en-US" sz="1000" dirty="0"/>
+          </a:p>
+        </p:txBody>
+      </p:sp>
+    </p:spTree>
+  </p:cSld>
+  <p:clrMapOvr>
+    <a:masterClrMapping/>
+  </p:clrMapOvr>
+</p:sld>
+</file>
+
+<file path=ppt/slides/slide12.xml><?xml version="1.0" encoding="utf-8"?>
+<p:sld xmlns:a="http://schemas.openxmlformats.org/drawingml/2006/main" xmlns:r="http://schemas.openxmlformats.org/officeDocument/2006/relationships" xmlns:p="http://schemas.openxmlformats.org/presentationml/2006/main">
+  <p:cSld name="Slide 12">
+    <p:bg>
+      <p:bgPr>
+        <a:solidFill>
+          <a:srgbClr val="FBFCFB"/>
+        </a:solidFill>
+      </p:bgPr>
+    </p:bg>
+    <p:spTree>
+      <p:nvGrpSpPr>
+        <p:cNvPr id="1" name=""/>
+        <p:cNvGrpSpPr/>
+        <p:nvPr/>
+      </p:nvGrpSpPr>
+      <p:grpSpPr>
+        <a:xfrm>
+          <a:off x="0" y="0"/>
+          <a:ext cx="0" cy="0"/>
+          <a:chOff x="0" y="0"/>
+          <a:chExt cx="0" cy="0"/>
+        </a:xfrm>
+      </p:grpSpPr>
+      <p:sp>
+        <p:nvSpPr>
+          <p:cNvPr id="2" name="Text 0"/>
+          <p:cNvSpPr/>
+          <p:nvPr/>
+        </p:nvSpPr>
+        <p:spPr>
+          <a:xfrm>
+            <a:off x="457200" y="219456"/>
+            <a:ext cx="7863840" cy="201168"/>
+          </a:xfrm>
+          <a:prstGeom prst="rect">
+            <a:avLst/>
+          </a:prstGeom>
+          <a:noFill/>
+          <a:ln/>
+        </p:spPr>
+        <p:txBody>
+          <a:bodyPr wrap="square" rtlCol="0" anchor="ctr"/>
+          <a:lstStyle/>
+          <a:p>
+            <a:pPr indent="0" marL="0">
+              <a:buNone/>
+            </a:pPr>
+            <a:r>
+              <a:rPr lang="en-US" sz="1050" b="1" spc="180" kern="0" dirty="0">
+                <a:solidFill>
+                  <a:srgbClr val="0B7C44"/>
+                </a:solidFill>
+                <a:latin typeface="맑은 고딕" pitchFamily="34" charset="0"/>
+                <a:ea typeface="맑은 고딕" pitchFamily="34" charset="-122"/>
+                <a:cs typeface="맑은 고딕" pitchFamily="34" charset="-120"/>
+              </a:rPr>
+              <a:t>화면 ⑤ 약관 등록</a:t>
+            </a:r>
+            <a:endParaRPr lang="en-US" sz="1050" dirty="0"/>
+          </a:p>
+        </p:txBody>
+      </p:sp>
+      <p:sp>
+        <p:nvSpPr>
+          <p:cNvPr id="3" name="Text 1"/>
+          <p:cNvSpPr/>
+          <p:nvPr/>
+        </p:nvSpPr>
+        <p:spPr>
+          <a:xfrm>
+            <a:off x="457200" y="420624"/>
+            <a:ext cx="8595360" cy="365760"/>
+          </a:xfrm>
+          <a:prstGeom prst="rect">
+            <a:avLst/>
+          </a:prstGeom>
+          <a:noFill/>
+          <a:ln/>
+        </p:spPr>
+        <p:txBody>
+          <a:bodyPr wrap="square" rtlCol="0" anchor="ctr"/>
+          <a:lstStyle/>
+          <a:p>
+            <a:pPr indent="0" marL="0">
+              <a:buNone/>
+            </a:pPr>
+            <a:r>
+              <a:rPr lang="en-US" sz="2000" b="1" dirty="0">
+                <a:solidFill>
+                  <a:srgbClr val="16211C"/>
+                </a:solidFill>
+                <a:latin typeface="맑은 고딕" pitchFamily="34" charset="0"/>
+                <a:ea typeface="맑은 고딕" pitchFamily="34" charset="-122"/>
+                <a:cs typeface="맑은 고딕" pitchFamily="34" charset="-120"/>
+              </a:rPr>
+              <a:t>지금은 하나씩. My Data가 열리면 한 번에 들어옵니다</a:t>
+            </a:r>
+            <a:endParaRPr lang="en-US" sz="2000" dirty="0"/>
+          </a:p>
+        </p:txBody>
+      </p:sp>
+      <p:sp>
+        <p:nvSpPr>
+          <p:cNvPr id="4" name="Text 2"/>
+          <p:cNvSpPr/>
+          <p:nvPr/>
+        </p:nvSpPr>
+        <p:spPr>
+          <a:xfrm>
+            <a:off x="457200" y="804672"/>
+            <a:ext cx="11247120" cy="256032"/>
+          </a:xfrm>
+          <a:prstGeom prst="rect">
+            <a:avLst/>
+          </a:prstGeom>
+          <a:noFill/>
+          <a:ln/>
+        </p:spPr>
+        <p:txBody>
+          <a:bodyPr wrap="square" rtlCol="0" anchor="ctr"/>
+          <a:lstStyle/>
+          <a:p>
+            <a:pPr indent="0" marL="0">
+              <a:buNone/>
+            </a:pPr>
+            <a:r>
+              <a:rPr lang="en-US" sz="1150" dirty="0">
+                <a:solidFill>
+                  <a:srgbClr val="7A867F"/>
+                </a:solidFill>
+                <a:latin typeface="맑은 고딕" pitchFamily="34" charset="0"/>
+                <a:ea typeface="맑은 고딕" pitchFamily="34" charset="-122"/>
+                <a:cs typeface="맑은 고딕" pitchFamily="34" charset="-120"/>
+              </a:rPr>
+              <a:t>안 열린 경로도 화면에 두되 잠급니다 — 곧 열릴 길이 있다는 사실 자체가 안내입니다.</a:t>
+            </a:r>
+            <a:endParaRPr lang="en-US" sz="1150" dirty="0"/>
+          </a:p>
+        </p:txBody>
+      </p:sp>
+      <p:pic>
+        <p:nvPicPr>
+          <p:cNvPr id="5" name="Image 0" descr="/tmp/claude-0/-home-user-chacha6377/ca7f6080-cf3a-5093-8a0d-eb3bfdb80785/scratchpad/app_register_p1.png">    </p:cNvPr>
+          <p:cNvPicPr>
+            <a:picLocks noChangeAspect="1"/>
+          </p:cNvPicPr>
+          <p:nvPr/>
+        </p:nvPicPr>
+        <p:blipFill>
+          <a:blip r:embed="rId1"/>
+          <a:stretch>
+            <a:fillRect/>
+          </a:stretch>
+        </p:blipFill>
+        <p:spPr>
+          <a:xfrm>
+            <a:off x="1629354" y="1097280"/>
+            <a:ext cx="8902813" cy="4901184"/>
+          </a:xfrm>
+          <a:prstGeom prst="rect">
+            <a:avLst/>
+          </a:prstGeom>
+        </p:spPr>
+      </p:pic>
+      <p:sp>
+        <p:nvSpPr>
+          <p:cNvPr id="6" name="Shape 3"/>
+          <p:cNvSpPr/>
+          <p:nvPr/>
+        </p:nvSpPr>
+        <p:spPr>
+          <a:xfrm>
+            <a:off x="457200" y="6035040"/>
+            <a:ext cx="54864" cy="457200"/>
+          </a:xfrm>
+          <a:prstGeom prst="roundRect">
+            <a:avLst>
+              <a:gd name="adj" fmla="val 50000"/>
+            </a:avLst>
+          </a:prstGeom>
+          <a:solidFill>
+            <a:srgbClr val="14A05A"/>
+          </a:solidFill>
+          <a:ln w="12700">
+            <a:solidFill>
+              <a:srgbClr val="14A05A"/>
+            </a:solidFill>
+            <a:prstDash val="solid"/>
+          </a:ln>
+        </p:spPr>
+      </p:sp>
+      <p:sp>
+        <p:nvSpPr>
+          <p:cNvPr id="7" name="Text 4"/>
+          <p:cNvSpPr/>
+          <p:nvPr/>
+        </p:nvSpPr>
+        <p:spPr>
+          <a:xfrm>
+            <a:off x="658368" y="6035040"/>
+            <a:ext cx="10607040" cy="457200"/>
+          </a:xfrm>
+          <a:prstGeom prst="rect">
+            <a:avLst/>
+          </a:prstGeom>
+          <a:noFill/>
+          <a:ln/>
+        </p:spPr>
+        <p:txBody>
+          <a:bodyPr wrap="square" rtlCol="0" anchor="ctr"/>
+          <a:lstStyle/>
+          <a:p>
+            <a:pPr indent="0" marL="0">
+              <a:buNone/>
+            </a:pPr>
+            <a:r>
+              <a:rPr lang="en-US" sz="1150" dirty="0">
+                <a:solidFill>
+                  <a:srgbClr val="44524B"/>
+                </a:solidFill>
+                <a:latin typeface="맑은 고딕" pitchFamily="34" charset="0"/>
+                <a:ea typeface="맑은 고딕" pitchFamily="34" charset="-122"/>
+                <a:cs typeface="맑은 고딕" pitchFamily="34" charset="-120"/>
+              </a:rPr>
+              <a:t>「최근 등록한 상품」은 뺐습니다 — 다른 고객 계약을 끌어오게 됩니다.</a:t>
+            </a:r>
+            <a:endParaRPr lang="en-US" sz="1150" dirty="0"/>
+          </a:p>
+        </p:txBody>
+      </p:sp>
+      <p:sp>
+        <p:nvSpPr>
+          <p:cNvPr id="8" name="Text 5"/>
+          <p:cNvSpPr/>
+          <p:nvPr/>
+        </p:nvSpPr>
+        <p:spPr>
+          <a:xfrm>
+            <a:off x="11384280" y="6510528"/>
+            <a:ext cx="411480" cy="256032"/>
+          </a:xfrm>
+          <a:prstGeom prst="rect">
+            <a:avLst/>
+          </a:prstGeom>
+          <a:noFill/>
+          <a:ln/>
+        </p:spPr>
+        <p:txBody>
+          <a:bodyPr wrap="square" rtlCol="0" anchor="ctr"/>
+          <a:lstStyle/>
+          <a:p>
+            <a:pPr algn="r" indent="0" marL="0">
+              <a:buNone/>
+            </a:pPr>
+            <a:r>
+              <a:rPr lang="en-US" sz="1000" dirty="0">
+                <a:solidFill>
+                  <a:srgbClr val="7A867F"/>
+                </a:solidFill>
+                <a:latin typeface="맑은 고딕" pitchFamily="34" charset="0"/>
+                <a:ea typeface="맑은 고딕" pitchFamily="34" charset="-122"/>
+                <a:cs typeface="맑은 고딕" pitchFamily="34" charset="-120"/>
+              </a:rPr>
+              <a:t>12</a:t>
+            </a:r>
+            <a:endParaRPr lang="en-US" sz="1000" dirty="0"/>
+          </a:p>
+        </p:txBody>
+      </p:sp>
+    </p:spTree>
+  </p:cSld>
+  <p:clrMapOvr>
+    <a:masterClrMapping/>
+  </p:clrMapOvr>
+</p:sld>
+</file>
+
+<file path=ppt/slides/slide13.xml><?xml version="1.0" encoding="utf-8"?>
+<p:sld xmlns:a="http://schemas.openxmlformats.org/drawingml/2006/main" xmlns:r="http://schemas.openxmlformats.org/officeDocument/2006/relationships" xmlns:p="http://schemas.openxmlformats.org/presentationml/2006/main">
+  <p:cSld name="Slide 13">
+    <p:bg>
+      <p:bgPr>
+        <a:solidFill>
+          <a:srgbClr val="FBFCFB"/>
+        </a:solidFill>
+      </p:bgPr>
+    </p:bg>
+    <p:spTree>
+      <p:nvGrpSpPr>
+        <p:cNvPr id="1" name=""/>
+        <p:cNvGrpSpPr/>
+        <p:nvPr/>
+      </p:nvGrpSpPr>
+      <p:grpSpPr>
+        <a:xfrm>
+          <a:off x="0" y="0"/>
+          <a:ext cx="0" cy="0"/>
+          <a:chOff x="0" y="0"/>
+          <a:chExt cx="0" cy="0"/>
+        </a:xfrm>
+      </p:grpSpPr>
+      <p:sp>
+        <p:nvSpPr>
+          <p:cNvPr id="2" name="Text 0"/>
+          <p:cNvSpPr/>
+          <p:nvPr/>
+        </p:nvSpPr>
+        <p:spPr>
+          <a:xfrm>
+            <a:off x="457200" y="219456"/>
+            <a:ext cx="7863840" cy="201168"/>
+          </a:xfrm>
+          <a:prstGeom prst="rect">
+            <a:avLst/>
+          </a:prstGeom>
+          <a:noFill/>
+          <a:ln/>
+        </p:spPr>
+        <p:txBody>
+          <a:bodyPr wrap="square" rtlCol="0" anchor="ctr"/>
+          <a:lstStyle/>
+          <a:p>
+            <a:pPr indent="0" marL="0">
+              <a:buNone/>
+            </a:pPr>
+            <a:r>
+              <a:rPr lang="en-US" sz="1050" b="1" spc="180" kern="0" dirty="0">
+                <a:solidFill>
+                  <a:srgbClr val="0B7C44"/>
+                </a:solidFill>
+                <a:latin typeface="맑은 고딕" pitchFamily="34" charset="0"/>
+                <a:ea typeface="맑은 고딕" pitchFamily="34" charset="-122"/>
+                <a:cs typeface="맑은 고딕" pitchFamily="34" charset="-120"/>
+              </a:rPr>
+              <a:t>화면 ⑥ 보장맵  ·  1/2</a:t>
+            </a:r>
+            <a:endParaRPr lang="en-US" sz="1050" dirty="0"/>
+          </a:p>
+        </p:txBody>
+      </p:sp>
+      <p:sp>
+        <p:nvSpPr>
+          <p:cNvPr id="3" name="Text 1"/>
+          <p:cNvSpPr/>
+          <p:nvPr/>
+        </p:nvSpPr>
+        <p:spPr>
+          <a:xfrm>
+            <a:off x="457200" y="420624"/>
+            <a:ext cx="8595360" cy="365760"/>
+          </a:xfrm>
+          <a:prstGeom prst="rect">
+            <a:avLst/>
+          </a:prstGeom>
+          <a:noFill/>
+          <a:ln/>
+        </p:spPr>
+        <p:txBody>
+          <a:bodyPr wrap="square" rtlCol="0" anchor="ctr"/>
+          <a:lstStyle/>
+          <a:p>
+            <a:pPr indent="0" marL="0">
+              <a:buNone/>
+            </a:pPr>
+            <a:r>
+              <a:rPr lang="en-US" sz="2000" b="1" dirty="0">
+                <a:solidFill>
+                  <a:srgbClr val="16211C"/>
+                </a:solidFill>
+                <a:latin typeface="맑은 고딕" pitchFamily="34" charset="0"/>
+                <a:ea typeface="맑은 고딕" pitchFamily="34" charset="-122"/>
+                <a:cs typeface="맑은 고딕" pitchFamily="34" charset="-120"/>
+              </a:rPr>
+              <a:t>약관이 담보로 펼쳐지되, 가입 여부는 따로입니다</a:t>
+            </a:r>
+            <a:endParaRPr lang="en-US" sz="2000" dirty="0"/>
+          </a:p>
+        </p:txBody>
+      </p:sp>
+      <p:sp>
+        <p:nvSpPr>
+          <p:cNvPr id="4" name="Text 2"/>
+          <p:cNvSpPr/>
+          <p:nvPr/>
+        </p:nvSpPr>
+        <p:spPr>
+          <a:xfrm>
+            <a:off x="457200" y="804672"/>
+            <a:ext cx="11247120" cy="256032"/>
+          </a:xfrm>
+          <a:prstGeom prst="rect">
+            <a:avLst/>
+          </a:prstGeom>
+          <a:noFill/>
+          <a:ln/>
+        </p:spPr>
+        <p:txBody>
+          <a:bodyPr wrap="square" rtlCol="0" anchor="ctr"/>
+          <a:lstStyle/>
+          <a:p>
+            <a:pPr indent="0" marL="0">
+              <a:buNone/>
+            </a:pPr>
+            <a:r>
+              <a:rPr lang="en-US" sz="1150" dirty="0">
+                <a:solidFill>
+                  <a:srgbClr val="7A867F"/>
+                </a:solidFill>
+                <a:latin typeface="맑은 고딕" pitchFamily="34" charset="0"/>
+                <a:ea typeface="맑은 고딕" pitchFamily="34" charset="-122"/>
+                <a:cs typeface="맑은 고딕" pitchFamily="34" charset="-120"/>
+              </a:rPr>
+              <a:t>약관은 가입 「가능한」 담보의 목록일 뿐입니다. 기본값은 「확인 필요」입니다.</a:t>
+            </a:r>
+            <a:endParaRPr lang="en-US" sz="1150" dirty="0"/>
+          </a:p>
+        </p:txBody>
+      </p:sp>
+      <p:pic>
+        <p:nvPicPr>
+          <p:cNvPr id="5" name="Image 0" descr="/tmp/claude-0/-home-user-chacha6377/ca7f6080-cf3a-5093-8a0d-eb3bfdb80785/scratchpad/app_coverage_p1.png">    </p:cNvPr>
+          <p:cNvPicPr>
+            <a:picLocks noChangeAspect="1"/>
+          </p:cNvPicPr>
+          <p:nvPr/>
+        </p:nvPicPr>
+        <p:blipFill>
+          <a:blip r:embed="rId1"/>
+          <a:stretch>
+            <a:fillRect/>
+          </a:stretch>
+        </p:blipFill>
+        <p:spPr>
+          <a:xfrm>
+            <a:off x="457200" y="1154930"/>
+            <a:ext cx="11247120" cy="4785884"/>
+          </a:xfrm>
+          <a:prstGeom prst="rect">
+            <a:avLst/>
+          </a:prstGeom>
+        </p:spPr>
+      </p:pic>
+      <p:sp>
+        <p:nvSpPr>
+          <p:cNvPr id="6" name="Shape 3"/>
+          <p:cNvSpPr/>
+          <p:nvPr/>
+        </p:nvSpPr>
+        <p:spPr>
+          <a:xfrm>
+            <a:off x="457200" y="6035040"/>
+            <a:ext cx="54864" cy="457200"/>
+          </a:xfrm>
+          <a:prstGeom prst="roundRect">
+            <a:avLst>
+              <a:gd name="adj" fmla="val 50000"/>
+            </a:avLst>
+          </a:prstGeom>
+          <a:solidFill>
+            <a:srgbClr val="14A05A"/>
+          </a:solidFill>
+          <a:ln w="12700">
+            <a:solidFill>
+              <a:srgbClr val="14A05A"/>
+            </a:solidFill>
+            <a:prstDash val="solid"/>
+          </a:ln>
+        </p:spPr>
+      </p:sp>
+      <p:sp>
+        <p:nvSpPr>
+          <p:cNvPr id="7" name="Text 4"/>
+          <p:cNvSpPr/>
+          <p:nvPr/>
+        </p:nvSpPr>
+        <p:spPr>
+          <a:xfrm>
+            <a:off x="658368" y="6035040"/>
+            <a:ext cx="10607040" cy="457200"/>
+          </a:xfrm>
+          <a:prstGeom prst="rect">
+            <a:avLst/>
+          </a:prstGeom>
+          <a:noFill/>
+          <a:ln/>
+        </p:spPr>
+        <p:txBody>
+          <a:bodyPr wrap="square" rtlCol="0" anchor="ctr"/>
+          <a:lstStyle/>
+          <a:p>
+            <a:pPr indent="0" marL="0">
+              <a:buNone/>
+            </a:pPr>
+            <a:r>
+              <a:rPr lang="en-US" sz="1150" dirty="0">
+                <a:solidFill>
+                  <a:srgbClr val="44524B"/>
+                </a:solidFill>
+                <a:latin typeface="맑은 고딕" pitchFamily="34" charset="0"/>
+                <a:ea typeface="맑은 고딕" pitchFamily="34" charset="-122"/>
+                <a:cs typeface="맑은 고딕" pitchFamily="34" charset="-120"/>
+              </a:rPr>
+              <a:t>「미가입」은 확인된 사실이고 「확인 필요」는 아직 모르는 것입니다.</a:t>
+            </a:r>
+            <a:endParaRPr lang="en-US" sz="1150" dirty="0"/>
+          </a:p>
+        </p:txBody>
+      </p:sp>
+      <p:sp>
+        <p:nvSpPr>
+          <p:cNvPr id="8" name="Text 5"/>
+          <p:cNvSpPr/>
+          <p:nvPr/>
+        </p:nvSpPr>
+        <p:spPr>
+          <a:xfrm>
+            <a:off x="11384280" y="6510528"/>
+            <a:ext cx="411480" cy="256032"/>
+          </a:xfrm>
+          <a:prstGeom prst="rect">
+            <a:avLst/>
+          </a:prstGeom>
+          <a:noFill/>
+          <a:ln/>
+        </p:spPr>
+        <p:txBody>
+          <a:bodyPr wrap="square" rtlCol="0" anchor="ctr"/>
+          <a:lstStyle/>
+          <a:p>
+            <a:pPr algn="r" indent="0" marL="0">
+              <a:buNone/>
+            </a:pPr>
+            <a:r>
+              <a:rPr lang="en-US" sz="1000" dirty="0">
+                <a:solidFill>
+                  <a:srgbClr val="7A867F"/>
+                </a:solidFill>
+                <a:latin typeface="맑은 고딕" pitchFamily="34" charset="0"/>
+                <a:ea typeface="맑은 고딕" pitchFamily="34" charset="-122"/>
+                <a:cs typeface="맑은 고딕" pitchFamily="34" charset="-120"/>
+              </a:rPr>
+              <a:t>13</a:t>
+            </a:r>
+            <a:endParaRPr lang="en-US" sz="1000" dirty="0"/>
+          </a:p>
+        </p:txBody>
+      </p:sp>
+    </p:spTree>
+  </p:cSld>
+  <p:clrMapOvr>
+    <a:masterClrMapping/>
+  </p:clrMapOvr>
+</p:sld>
+</file>
+
+<file path=ppt/slides/slide14.xml><?xml version="1.0" encoding="utf-8"?>
+<p:sld xmlns:a="http://schemas.openxmlformats.org/drawingml/2006/main" xmlns:r="http://schemas.openxmlformats.org/officeDocument/2006/relationships" xmlns:p="http://schemas.openxmlformats.org/presentationml/2006/main">
+  <p:cSld name="Slide 14">
+    <p:bg>
+      <p:bgPr>
+        <a:solidFill>
+          <a:srgbClr val="FBFCFB"/>
+        </a:solidFill>
+      </p:bgPr>
+    </p:bg>
+    <p:spTree>
+      <p:nvGrpSpPr>
+        <p:cNvPr id="1" name=""/>
+        <p:cNvGrpSpPr/>
+        <p:nvPr/>
+      </p:nvGrpSpPr>
+      <p:grpSpPr>
+        <a:xfrm>
+          <a:off x="0" y="0"/>
+          <a:ext cx="0" cy="0"/>
+          <a:chOff x="0" y="0"/>
+          <a:chExt cx="0" cy="0"/>
+        </a:xfrm>
+      </p:grpSpPr>
+      <p:sp>
+        <p:nvSpPr>
+          <p:cNvPr id="2" name="Text 0"/>
+          <p:cNvSpPr/>
+          <p:nvPr/>
+        </p:nvSpPr>
+        <p:spPr>
+          <a:xfrm>
+            <a:off x="457200" y="219456"/>
+            <a:ext cx="7863840" cy="201168"/>
+          </a:xfrm>
+          <a:prstGeom prst="rect">
+            <a:avLst/>
+          </a:prstGeom>
+          <a:noFill/>
+          <a:ln/>
+        </p:spPr>
+        <p:txBody>
+          <a:bodyPr wrap="square" rtlCol="0" anchor="ctr"/>
+          <a:lstStyle/>
+          <a:p>
+            <a:pPr indent="0" marL="0">
+              <a:buNone/>
+            </a:pPr>
+            <a:r>
+              <a:rPr lang="en-US" sz="1050" b="1" spc="180" kern="0" dirty="0">
+                <a:solidFill>
+                  <a:srgbClr val="0B7C44"/>
+                </a:solidFill>
+                <a:latin typeface="맑은 고딕" pitchFamily="34" charset="0"/>
+                <a:ea typeface="맑은 고딕" pitchFamily="34" charset="-122"/>
+                <a:cs typeface="맑은 고딕" pitchFamily="34" charset="-120"/>
+              </a:rPr>
+              <a:t>화면 ⑥ 보장맵  ·  2/2</a:t>
+            </a:r>
+            <a:endParaRPr lang="en-US" sz="1050" dirty="0"/>
+          </a:p>
+        </p:txBody>
+      </p:sp>
+      <p:sp>
+        <p:nvSpPr>
+          <p:cNvPr id="3" name="Text 1"/>
+          <p:cNvSpPr/>
+          <p:nvPr/>
+        </p:nvSpPr>
+        <p:spPr>
+          <a:xfrm>
+            <a:off x="457200" y="420624"/>
+            <a:ext cx="8595360" cy="365760"/>
+          </a:xfrm>
+          <a:prstGeom prst="rect">
+            <a:avLst/>
+          </a:prstGeom>
+          <a:noFill/>
+          <a:ln/>
+        </p:spPr>
+        <p:txBody>
+          <a:bodyPr wrap="square" rtlCol="0" anchor="ctr"/>
+          <a:lstStyle/>
+          <a:p>
+            <a:pPr indent="0" marL="0">
+              <a:buNone/>
+            </a:pPr>
+            <a:r>
+              <a:rPr lang="en-US" sz="2000" b="1" dirty="0">
+                <a:solidFill>
+                  <a:srgbClr val="16211C"/>
+                </a:solidFill>
+                <a:latin typeface="맑은 고딕" pitchFamily="34" charset="0"/>
+                <a:ea typeface="맑은 고딕" pitchFamily="34" charset="-122"/>
+                <a:cs typeface="맑은 고딕" pitchFamily="34" charset="-120"/>
+              </a:rPr>
+              <a:t>약관이 담보로 펼쳐지되, 가입 여부는 따로입니다</a:t>
+            </a:r>
+            <a:endParaRPr lang="en-US" sz="2000" dirty="0"/>
+          </a:p>
+        </p:txBody>
+      </p:sp>
+      <p:pic>
+        <p:nvPicPr>
+          <p:cNvPr id="4" name="Image 0" descr="/tmp/claude-0/-home-user-chacha6377/ca7f6080-cf3a-5093-8a0d-eb3bfdb80785/scratchpad/app_coverage_p2.png">    </p:cNvPr>
+          <p:cNvPicPr>
+            <a:picLocks noChangeAspect="1"/>
+          </p:cNvPicPr>
+          <p:nvPr/>
+        </p:nvPicPr>
+        <p:blipFill>
+          <a:blip r:embed="rId1"/>
+          <a:stretch>
+            <a:fillRect/>
+          </a:stretch>
+        </p:blipFill>
+        <p:spPr>
+          <a:xfrm>
+            <a:off x="457200" y="1054346"/>
+            <a:ext cx="11247120" cy="4785884"/>
+          </a:xfrm>
+          <a:prstGeom prst="rect">
+            <a:avLst/>
+          </a:prstGeom>
+        </p:spPr>
+      </p:pic>
+      <p:sp>
+        <p:nvSpPr>
+          <p:cNvPr id="5" name="Shape 2"/>
+          <p:cNvSpPr/>
+          <p:nvPr/>
+        </p:nvSpPr>
+        <p:spPr>
+          <a:xfrm>
+            <a:off x="457200" y="6035040"/>
+            <a:ext cx="54864" cy="457200"/>
+          </a:xfrm>
+          <a:prstGeom prst="roundRect">
+            <a:avLst>
+              <a:gd name="adj" fmla="val 50000"/>
+            </a:avLst>
+          </a:prstGeom>
+          <a:solidFill>
+            <a:srgbClr val="14A05A"/>
+          </a:solidFill>
+          <a:ln w="12700">
+            <a:solidFill>
+              <a:srgbClr val="14A05A"/>
+            </a:solidFill>
+            <a:prstDash val="solid"/>
+          </a:ln>
+        </p:spPr>
+      </p:sp>
+      <p:sp>
+        <p:nvSpPr>
+          <p:cNvPr id="6" name="Text 3"/>
+          <p:cNvSpPr/>
+          <p:nvPr/>
+        </p:nvSpPr>
+        <p:spPr>
+          <a:xfrm>
+            <a:off x="658368" y="6035040"/>
+            <a:ext cx="10607040" cy="457200"/>
+          </a:xfrm>
+          <a:prstGeom prst="rect">
+            <a:avLst/>
+          </a:prstGeom>
+          <a:noFill/>
+          <a:ln/>
+        </p:spPr>
+        <p:txBody>
+          <a:bodyPr wrap="square" rtlCol="0" anchor="ctr"/>
+          <a:lstStyle/>
+          <a:p>
+            <a:pPr indent="0" marL="0">
+              <a:buNone/>
+            </a:pPr>
+            <a:r>
+              <a:rPr lang="en-US" sz="1150" dirty="0">
+                <a:solidFill>
+                  <a:srgbClr val="44524B"/>
+                </a:solidFill>
+                <a:latin typeface="맑은 고딕" pitchFamily="34" charset="0"/>
+                <a:ea typeface="맑은 고딕" pitchFamily="34" charset="-122"/>
+                <a:cs typeface="맑은 고딕" pitchFamily="34" charset="-120"/>
+              </a:rPr>
+              <a:t>면책 · 미가입 · 확인 필요 건도 숨기지 않고 사유와 함께 남깁니다.</a:t>
+            </a:r>
+            <a:endParaRPr lang="en-US" sz="1150" dirty="0"/>
+          </a:p>
+        </p:txBody>
+      </p:sp>
+      <p:sp>
+        <p:nvSpPr>
+          <p:cNvPr id="7" name="Text 4"/>
+          <p:cNvSpPr/>
+          <p:nvPr/>
+        </p:nvSpPr>
+        <p:spPr>
+          <a:xfrm>
+            <a:off x="11384280" y="6510528"/>
+            <a:ext cx="411480" cy="256032"/>
+          </a:xfrm>
+          <a:prstGeom prst="rect">
+            <a:avLst/>
+          </a:prstGeom>
+          <a:noFill/>
+          <a:ln/>
+        </p:spPr>
+        <p:txBody>
+          <a:bodyPr wrap="square" rtlCol="0" anchor="ctr"/>
+          <a:lstStyle/>
+          <a:p>
+            <a:pPr algn="r" indent="0" marL="0">
+              <a:buNone/>
+            </a:pPr>
+            <a:r>
+              <a:rPr lang="en-US" sz="1000" dirty="0">
+                <a:solidFill>
+                  <a:srgbClr val="7A867F"/>
+                </a:solidFill>
+                <a:latin typeface="맑은 고딕" pitchFamily="34" charset="0"/>
+                <a:ea typeface="맑은 고딕" pitchFamily="34" charset="-122"/>
+                <a:cs typeface="맑은 고딕" pitchFamily="34" charset="-120"/>
+              </a:rPr>
+              <a:t>14</a:t>
+            </a:r>
+            <a:endParaRPr lang="en-US" sz="1000" dirty="0"/>
+          </a:p>
+        </p:txBody>
+      </p:sp>
+    </p:spTree>
+  </p:cSld>
+  <p:clrMapOvr>
+    <a:masterClrMapping/>
+  </p:clrMapOvr>
+</p:sld>
+</file>
+
+<file path=ppt/slides/slide15.xml><?xml version="1.0" encoding="utf-8"?>
+<p:sld xmlns:a="http://schemas.openxmlformats.org/drawingml/2006/main" xmlns:r="http://schemas.openxmlformats.org/officeDocument/2006/relationships" xmlns:p="http://schemas.openxmlformats.org/presentationml/2006/main">
+  <p:cSld name="Slide 15">
+    <p:bg>
+      <p:bgPr>
+        <a:solidFill>
+          <a:srgbClr val="14201B"/>
+        </a:solidFill>
+      </p:bgPr>
+    </p:bg>
+    <p:spTree>
+      <p:nvGrpSpPr>
+        <p:cNvPr id="1" name=""/>
+        <p:cNvGrpSpPr/>
+        <p:nvPr/>
+      </p:nvGrpSpPr>
+      <p:grpSpPr>
+        <a:xfrm>
+          <a:off x="0" y="0"/>
+          <a:ext cx="0" cy="0"/>
+          <a:chOff x="0" y="0"/>
+          <a:chExt cx="0" cy="0"/>
+        </a:xfrm>
+      </p:grpSpPr>
+      <p:sp>
+        <p:nvSpPr>
+          <p:cNvPr id="2" name="Text 0"/>
+          <p:cNvSpPr/>
+          <p:nvPr/>
+        </p:nvSpPr>
+        <p:spPr>
+          <a:xfrm>
+            <a:off x="822960" y="1280160"/>
+            <a:ext cx="10515600" cy="329184"/>
+          </a:xfrm>
+          <a:prstGeom prst="rect">
+            <a:avLst/>
+          </a:prstGeom>
+          <a:noFill/>
+          <a:ln/>
+        </p:spPr>
+        <p:txBody>
+          <a:bodyPr wrap="square" rtlCol="0" anchor="ctr"/>
+          <a:lstStyle/>
+          <a:p>
+            <a:pPr indent="0" marL="0">
+              <a:buNone/>
+            </a:pPr>
+            <a:r>
+              <a:rPr lang="en-US" sz="1300" b="1" spc="200" kern="0" dirty="0">
+                <a:solidFill>
+                  <a:srgbClr val="8FE3BE"/>
+                </a:solidFill>
+                <a:latin typeface="맑은 고딕" pitchFamily="34" charset="0"/>
+                <a:ea typeface="맑은 고딕" pitchFamily="34" charset="-122"/>
+                <a:cs typeface="맑은 고딕" pitchFamily="34" charset="-120"/>
+              </a:rPr>
+              <a:t>앞으로</a:t>
+            </a:r>
+            <a:endParaRPr lang="en-US" sz="1300" dirty="0"/>
+          </a:p>
+        </p:txBody>
+      </p:sp>
+      <p:sp>
+        <p:nvSpPr>
+          <p:cNvPr id="3" name="Text 1"/>
+          <p:cNvSpPr/>
+          <p:nvPr/>
+        </p:nvSpPr>
+        <p:spPr>
+          <a:xfrm>
+            <a:off x="822960" y="1737360"/>
+            <a:ext cx="10515600" cy="1554480"/>
+          </a:xfrm>
+          <a:prstGeom prst="rect">
+            <a:avLst/>
+          </a:prstGeom>
+          <a:noFill/>
+          <a:ln/>
+        </p:spPr>
+        <p:txBody>
+          <a:bodyPr wrap="square" rtlCol="0" anchor="ctr"/>
+          <a:lstStyle/>
+          <a:p>
+            <a:pPr indent="0" marL="0">
+              <a:lnSpc>
+                <a:spcPts val="4600"/>
+              </a:lnSpc>
+              <a:buNone/>
+            </a:pPr>
+            <a:r>
+              <a:rPr lang="en-US" sz="3200" b="1" dirty="0">
+                <a:solidFill>
+                  <a:srgbClr val="FFFFFF"/>
+                </a:solidFill>
+                <a:latin typeface="맑은 고딕" pitchFamily="34" charset="0"/>
+                <a:ea typeface="맑은 고딕" pitchFamily="34" charset="-122"/>
+                <a:cs typeface="맑은 고딕" pitchFamily="34" charset="-120"/>
+              </a:rPr>
+              <a:t>10월 1일은 시작입니다.</a:t>
+            </a:r>
+            <a:endParaRPr lang="en-US" sz="3200" dirty="0"/>
+          </a:p>
+          <a:p>
+            <a:pPr indent="0" marL="0">
+              <a:lnSpc>
+                <a:spcPts val="4600"/>
+              </a:lnSpc>
+              <a:buNone/>
+            </a:pPr>
+            <a:r>
+              <a:rPr lang="en-US" sz="3200" b="1" dirty="0">
+                <a:solidFill>
+                  <a:srgbClr val="FFFFFF"/>
+                </a:solidFill>
+                <a:latin typeface="맑은 고딕" pitchFamily="34" charset="0"/>
+                <a:ea typeface="맑은 고딕" pitchFamily="34" charset="-122"/>
+                <a:cs typeface="맑은 고딕" pitchFamily="34" charset="-120"/>
+              </a:rPr>
+              <a:t>지금 구조 위에 계속 얹습니다.</a:t>
+            </a:r>
+            <a:endParaRPr lang="en-US" sz="3200" dirty="0"/>
+          </a:p>
+        </p:txBody>
+      </p:sp>
+      <p:sp>
+        <p:nvSpPr>
+          <p:cNvPr id="4" name="Shape 2"/>
+          <p:cNvSpPr/>
+          <p:nvPr/>
+        </p:nvSpPr>
+        <p:spPr>
+          <a:xfrm>
+            <a:off x="822960" y="3931920"/>
+            <a:ext cx="3291840" cy="0"/>
+          </a:xfrm>
+          <a:prstGeom prst="line">
+            <a:avLst/>
+          </a:prstGeom>
+          <a:noFill/>
+          <a:ln w="31750">
+            <a:solidFill>
+              <a:srgbClr val="14A05A"/>
+            </a:solidFill>
+            <a:prstDash val="solid"/>
+          </a:ln>
+        </p:spPr>
+      </p:sp>
+      <p:sp>
+        <p:nvSpPr>
+          <p:cNvPr id="5" name="Text 3"/>
+          <p:cNvSpPr/>
+          <p:nvPr/>
+        </p:nvSpPr>
+        <p:spPr>
+          <a:xfrm>
+            <a:off x="822960" y="4059936"/>
+            <a:ext cx="3291840" cy="256032"/>
+          </a:xfrm>
+          <a:prstGeom prst="rect">
+            <a:avLst/>
+          </a:prstGeom>
+          <a:noFill/>
+          <a:ln/>
+        </p:spPr>
+        <p:txBody>
+          <a:bodyPr wrap="square" rtlCol="0" anchor="ctr"/>
+          <a:lstStyle/>
+          <a:p>
+            <a:pPr indent="0" marL="0">
+              <a:buNone/>
+            </a:pPr>
+            <a:r>
+              <a:rPr lang="en-US" sz="1100" b="1" spc="100" kern="0" dirty="0">
+                <a:solidFill>
+                  <a:srgbClr val="14A05A"/>
+                </a:solidFill>
+                <a:latin typeface="맑은 고딕" pitchFamily="34" charset="0"/>
+                <a:ea typeface="맑은 고딕" pitchFamily="34" charset="-122"/>
+                <a:cs typeface="맑은 고딕" pitchFamily="34" charset="-120"/>
+              </a:rPr>
+              <a:t>지금 · 10월 1일</a:t>
+            </a:r>
+            <a:endParaRPr lang="en-US" sz="1100" dirty="0"/>
+          </a:p>
+        </p:txBody>
+      </p:sp>
+      <p:sp>
+        <p:nvSpPr>
+          <p:cNvPr id="6" name="Text 4"/>
+          <p:cNvSpPr/>
+          <p:nvPr/>
+        </p:nvSpPr>
+        <p:spPr>
+          <a:xfrm>
+            <a:off x="822960" y="4334256"/>
+            <a:ext cx="3291840" cy="310896"/>
+          </a:xfrm>
+          <a:prstGeom prst="rect">
+            <a:avLst/>
+          </a:prstGeom>
+          <a:noFill/>
+          <a:ln/>
+        </p:spPr>
+        <p:txBody>
+          <a:bodyPr wrap="square" rtlCol="0" anchor="ctr"/>
+          <a:lstStyle/>
+          <a:p>
+            <a:pPr indent="0" marL="0">
+              <a:buNone/>
+            </a:pPr>
+            <a:r>
+              <a:rPr lang="en-US" sz="1400" b="1" dirty="0">
+                <a:solidFill>
+                  <a:srgbClr val="FFFFFF"/>
+                </a:solidFill>
+                <a:latin typeface="맑은 고딕" pitchFamily="34" charset="0"/>
+                <a:ea typeface="맑은 고딕" pitchFamily="34" charset="-122"/>
+                <a:cs typeface="맑은 고딕" pitchFamily="34" charset="-120"/>
+              </a:rPr>
+              <a:t>약관을 직접 짚어 답합니다</a:t>
+            </a:r>
+            <a:endParaRPr lang="en-US" sz="1400" dirty="0"/>
+          </a:p>
+        </p:txBody>
+      </p:sp>
+      <p:sp>
+        <p:nvSpPr>
+          <p:cNvPr id="7" name="Text 5"/>
+          <p:cNvSpPr/>
+          <p:nvPr/>
+        </p:nvSpPr>
+        <p:spPr>
+          <a:xfrm>
+            <a:off x="822960" y="4681728"/>
+            <a:ext cx="3291840" cy="914400"/>
+          </a:xfrm>
+          <a:prstGeom prst="rect">
+            <a:avLst/>
+          </a:prstGeom>
+          <a:noFill/>
+          <a:ln/>
+        </p:spPr>
+        <p:txBody>
+          <a:bodyPr wrap="square" rtlCol="0" anchor="ctr"/>
+          <a:lstStyle/>
+          <a:p>
+            <a:pPr indent="0" marL="0">
+              <a:lnSpc>
+                <a:spcPts val="1600"/>
+              </a:lnSpc>
+              <a:buNone/>
+            </a:pPr>
+            <a:r>
+              <a:rPr lang="en-US" sz="1100" dirty="0">
+                <a:solidFill>
+                  <a:srgbClr val="A9BAB2"/>
+                </a:solidFill>
+                <a:latin typeface="맑은 고딕" pitchFamily="34" charset="0"/>
+                <a:ea typeface="맑은 고딕" pitchFamily="34" charset="-122"/>
+                <a:cs typeface="맑은 고딕" pitchFamily="34" charset="-120"/>
+              </a:rPr>
+              <a:t>보험사 → 상품 → 약관 시점을 고르고, 그 약관 안에서만 답합니다. 고객 폴더에 쌓입니다.</a:t>
+            </a:r>
+            <a:endParaRPr lang="en-US" sz="1100" dirty="0"/>
+          </a:p>
+        </p:txBody>
+      </p:sp>
+      <p:sp>
+        <p:nvSpPr>
+          <p:cNvPr id="8" name="Shape 6"/>
+          <p:cNvSpPr/>
+          <p:nvPr/>
+        </p:nvSpPr>
+        <p:spPr>
+          <a:xfrm>
+            <a:off x="4434840" y="3931920"/>
+            <a:ext cx="3291840" cy="0"/>
+          </a:xfrm>
+          <a:prstGeom prst="line">
+            <a:avLst/>
+          </a:prstGeom>
+          <a:noFill/>
+          <a:ln w="31750">
+            <a:solidFill>
+              <a:srgbClr val="4E8FF0"/>
+            </a:solidFill>
+            <a:prstDash val="solid"/>
+          </a:ln>
+        </p:spPr>
+      </p:sp>
+      <p:sp>
+        <p:nvSpPr>
+          <p:cNvPr id="9" name="Text 7"/>
+          <p:cNvSpPr/>
+          <p:nvPr/>
+        </p:nvSpPr>
+        <p:spPr>
+          <a:xfrm>
+            <a:off x="4434840" y="4059936"/>
+            <a:ext cx="3291840" cy="256032"/>
+          </a:xfrm>
+          <a:prstGeom prst="rect">
+            <a:avLst/>
+          </a:prstGeom>
+          <a:noFill/>
+          <a:ln/>
+        </p:spPr>
+        <p:txBody>
+          <a:bodyPr wrap="square" rtlCol="0" anchor="ctr"/>
+          <a:lstStyle/>
+          <a:p>
+            <a:pPr indent="0" marL="0">
+              <a:buNone/>
+            </a:pPr>
+            <a:r>
+              <a:rPr lang="en-US" sz="1100" b="1" spc="100" kern="0" dirty="0">
+                <a:solidFill>
+                  <a:srgbClr val="4E8FF0"/>
+                </a:solidFill>
+                <a:latin typeface="맑은 고딕" pitchFamily="34" charset="0"/>
+                <a:ea typeface="맑은 고딕" pitchFamily="34" charset="-122"/>
+                <a:cs typeface="맑은 고딕" pitchFamily="34" charset="-120"/>
+              </a:rPr>
+              <a:t>다음 · My Data</a:t>
+            </a:r>
+            <a:endParaRPr lang="en-US" sz="1100" dirty="0"/>
+          </a:p>
+        </p:txBody>
+      </p:sp>
+      <p:sp>
+        <p:nvSpPr>
+          <p:cNvPr id="10" name="Text 8"/>
+          <p:cNvSpPr/>
+          <p:nvPr/>
+        </p:nvSpPr>
+        <p:spPr>
+          <a:xfrm>
+            <a:off x="4434840" y="4334256"/>
+            <a:ext cx="3291840" cy="310896"/>
+          </a:xfrm>
+          <a:prstGeom prst="rect">
+            <a:avLst/>
+          </a:prstGeom>
+          <a:noFill/>
+          <a:ln/>
+        </p:spPr>
+        <p:txBody>
+          <a:bodyPr wrap="square" rtlCol="0" anchor="ctr"/>
+          <a:lstStyle/>
+          <a:p>
+            <a:pPr indent="0" marL="0">
+              <a:buNone/>
+            </a:pPr>
+            <a:r>
+              <a:rPr lang="en-US" sz="1400" b="1" dirty="0">
+                <a:solidFill>
+                  <a:srgbClr val="FFFFFF"/>
+                </a:solidFill>
+                <a:latin typeface="맑은 고딕" pitchFamily="34" charset="0"/>
+                <a:ea typeface="맑은 고딕" pitchFamily="34" charset="-122"/>
+                <a:cs typeface="맑은 고딕" pitchFamily="34" charset="-120"/>
+              </a:rPr>
+              <a:t>고르지 않아도 됩니다</a:t>
+            </a:r>
+            <a:endParaRPr lang="en-US" sz="1400" dirty="0"/>
+          </a:p>
+        </p:txBody>
+      </p:sp>
+      <p:sp>
+        <p:nvSpPr>
+          <p:cNvPr id="11" name="Text 9"/>
+          <p:cNvSpPr/>
+          <p:nvPr/>
+        </p:nvSpPr>
+        <p:spPr>
+          <a:xfrm>
+            <a:off x="4434840" y="4681728"/>
+            <a:ext cx="3291840" cy="914400"/>
+          </a:xfrm>
+          <a:prstGeom prst="rect">
+            <a:avLst/>
+          </a:prstGeom>
+          <a:noFill/>
+          <a:ln/>
+        </p:spPr>
+        <p:txBody>
+          <a:bodyPr wrap="square" rtlCol="0" anchor="ctr"/>
+          <a:lstStyle/>
+          <a:p>
+            <a:pPr indent="0" marL="0">
+              <a:lnSpc>
+                <a:spcPts val="1600"/>
+              </a:lnSpc>
+              <a:buNone/>
+            </a:pPr>
+            <a:r>
+              <a:rPr lang="en-US" sz="1100" dirty="0">
+                <a:solidFill>
+                  <a:srgbClr val="A9BAB2"/>
+                </a:solidFill>
+                <a:latin typeface="맑은 고딕" pitchFamily="34" charset="0"/>
+                <a:ea typeface="맑은 고딕" pitchFamily="34" charset="-122"/>
+                <a:cs typeface="맑은 고딕" pitchFamily="34" charset="-120"/>
+              </a:rPr>
+              <a:t>계약이 한 번에 들어와 약관이 자동으로 정해집니다. 클릭이 사라집니다.</a:t>
+            </a:r>
+            <a:endParaRPr lang="en-US" sz="1100" dirty="0"/>
+          </a:p>
+        </p:txBody>
+      </p:sp>
+      <p:sp>
+        <p:nvSpPr>
+          <p:cNvPr id="12" name="Shape 10"/>
+          <p:cNvSpPr/>
+          <p:nvPr/>
+        </p:nvSpPr>
+        <p:spPr>
+          <a:xfrm>
+            <a:off x="8046720" y="3931920"/>
+            <a:ext cx="3291840" cy="0"/>
+          </a:xfrm>
+          <a:prstGeom prst="line">
+            <a:avLst/>
+          </a:prstGeom>
+          <a:noFill/>
+          <a:ln w="31750">
+            <a:solidFill>
+              <a:srgbClr val="C9A567"/>
+            </a:solidFill>
+            <a:prstDash val="solid"/>
+          </a:ln>
+        </p:spPr>
+      </p:sp>
+      <p:sp>
+        <p:nvSpPr>
+          <p:cNvPr id="13" name="Text 11"/>
+          <p:cNvSpPr/>
+          <p:nvPr/>
+        </p:nvSpPr>
+        <p:spPr>
+          <a:xfrm>
+            <a:off x="8046720" y="4059936"/>
+            <a:ext cx="3291840" cy="256032"/>
+          </a:xfrm>
+          <a:prstGeom prst="rect">
+            <a:avLst/>
+          </a:prstGeom>
+          <a:noFill/>
+          <a:ln/>
+        </p:spPr>
+        <p:txBody>
+          <a:bodyPr wrap="square" rtlCol="0" anchor="ctr"/>
+          <a:lstStyle/>
+          <a:p>
+            <a:pPr indent="0" marL="0">
+              <a:buNone/>
+            </a:pPr>
+            <a:r>
+              <a:rPr lang="en-US" sz="1100" b="1" spc="100" kern="0" dirty="0">
+                <a:solidFill>
+                  <a:srgbClr val="C9A567"/>
+                </a:solidFill>
+                <a:latin typeface="맑은 고딕" pitchFamily="34" charset="0"/>
+                <a:ea typeface="맑은 고딕" pitchFamily="34" charset="-122"/>
+                <a:cs typeface="맑은 고딕" pitchFamily="34" charset="-120"/>
+              </a:rPr>
+              <a:t>그다음 · 보장분석</a:t>
+            </a:r>
+            <a:endParaRPr lang="en-US" sz="1100" dirty="0"/>
+          </a:p>
+        </p:txBody>
+      </p:sp>
+      <p:sp>
+        <p:nvSpPr>
+          <p:cNvPr id="14" name="Text 12"/>
+          <p:cNvSpPr/>
+          <p:nvPr/>
+        </p:nvSpPr>
+        <p:spPr>
+          <a:xfrm>
+            <a:off x="8046720" y="4334256"/>
+            <a:ext cx="3291840" cy="310896"/>
+          </a:xfrm>
+          <a:prstGeom prst="rect">
+            <a:avLst/>
+          </a:prstGeom>
+          <a:noFill/>
+          <a:ln/>
+        </p:spPr>
+        <p:txBody>
+          <a:bodyPr wrap="square" rtlCol="0" anchor="ctr"/>
+          <a:lstStyle/>
+          <a:p>
+            <a:pPr indent="0" marL="0">
+              <a:buNone/>
+            </a:pPr>
+            <a:r>
+              <a:rPr lang="en-US" sz="1400" b="1" dirty="0">
+                <a:solidFill>
+                  <a:srgbClr val="FFFFFF"/>
+                </a:solidFill>
+                <a:latin typeface="맑은 고딕" pitchFamily="34" charset="0"/>
+                <a:ea typeface="맑은 고딕" pitchFamily="34" charset="-122"/>
+                <a:cs typeface="맑은 고딕" pitchFamily="34" charset="-120"/>
+              </a:rPr>
+              <a:t>「얼마 나와요?」에 답합니다</a:t>
+            </a:r>
+            <a:endParaRPr lang="en-US" sz="1400" dirty="0"/>
+          </a:p>
+        </p:txBody>
+      </p:sp>
+      <p:sp>
+        <p:nvSpPr>
+          <p:cNvPr id="15" name="Text 13"/>
+          <p:cNvSpPr/>
+          <p:nvPr/>
+        </p:nvSpPr>
+        <p:spPr>
+          <a:xfrm>
+            <a:off x="8046720" y="4681728"/>
+            <a:ext cx="3291840" cy="914400"/>
+          </a:xfrm>
+          <a:prstGeom prst="rect">
+            <a:avLst/>
+          </a:prstGeom>
+          <a:noFill/>
+          <a:ln/>
+        </p:spPr>
+        <p:txBody>
+          <a:bodyPr wrap="square" rtlCol="0" anchor="ctr"/>
+          <a:lstStyle/>
+          <a:p>
+            <a:pPr indent="0" marL="0">
+              <a:lnSpc>
+                <a:spcPts val="1600"/>
+              </a:lnSpc>
+              <a:buNone/>
+            </a:pPr>
+            <a:r>
+              <a:rPr lang="en-US" sz="1100" dirty="0">
+                <a:solidFill>
+                  <a:srgbClr val="A9BAB2"/>
+                </a:solidFill>
+                <a:latin typeface="맑은 고딕" pitchFamily="34" charset="0"/>
+                <a:ea typeface="맑은 고딕" pitchFamily="34" charset="-122"/>
+                <a:cs typeface="맑은 고딕" pitchFamily="34" charset="-120"/>
+              </a:rPr>
+              <a:t>가입 담보와 금액이 붙어 보장공백 · 비교까지 갑니다.</a:t>
+            </a:r>
+            <a:endParaRPr lang="en-US" sz="1100" dirty="0"/>
+          </a:p>
+        </p:txBody>
+      </p:sp>
+      <p:sp>
+        <p:nvSpPr>
+          <p:cNvPr id="16" name="Text 14"/>
+          <p:cNvSpPr/>
+          <p:nvPr/>
+        </p:nvSpPr>
+        <p:spPr>
+          <a:xfrm>
+            <a:off x="822960" y="6126480"/>
+            <a:ext cx="10515600" cy="274320"/>
+          </a:xfrm>
+          <a:prstGeom prst="rect">
+            <a:avLst/>
+          </a:prstGeom>
+          <a:noFill/>
+          <a:ln/>
+        </p:spPr>
+        <p:txBody>
+          <a:bodyPr wrap="square" rtlCol="0" anchor="ctr"/>
+          <a:lstStyle/>
+          <a:p>
+            <a:pPr indent="0" marL="0">
+              <a:buNone/>
+            </a:pPr>
+            <a:r>
+              <a:rPr lang="en-US" sz="1000" dirty="0">
+                <a:solidFill>
+                  <a:srgbClr val="5F7169"/>
+                </a:solidFill>
+                <a:latin typeface="맑은 고딕" pitchFamily="34" charset="0"/>
+                <a:ea typeface="맑은 고딕" pitchFamily="34" charset="-122"/>
+                <a:cs typeface="맑은 고딕" pitchFamily="34" charset="-120"/>
+              </a:rPr>
+              <a:t>주식회사 아이에프에이 AX팀 · 화면 속 고객명과 대화는 가상입니다.</a:t>
+            </a:r>
+            <a:endParaRPr lang="en-US" sz="1000" dirty="0"/>
+          </a:p>
+        </p:txBody>
+      </p:sp>
+    </p:spTree>
+  </p:cSld>
+  <p:clrMapOvr>
+    <a:masterClrMapping/>
+  </p:clrMapOvr>
+</p:sld>
+</file>
+
 <file path=ppt/slides/slide2.xml><?xml version="1.0" encoding="utf-8"?>
 <p:sld xmlns:a="http://schemas.openxmlformats.org/drawingml/2006/main" xmlns:r="http://schemas.openxmlformats.org/officeDocument/2006/relationships" xmlns:p="http://schemas.openxmlformats.org/presentationml/2006/main">
   <p:cSld name="Slide 2">
@@ -3493,8 +5963,8 @@
         </p:nvSpPr>
         <p:spPr>
           <a:xfrm>
-            <a:off x="548640" y="292608"/>
-            <a:ext cx="11064240" cy="219456"/>
+            <a:off x="457200" y="219456"/>
+            <a:ext cx="7863840" cy="201168"/>
           </a:xfrm>
           <a:prstGeom prst="rect">
             <a:avLst/>
@@ -3510,7 +5980,7 @@
               <a:buNone/>
             </a:pPr>
             <a:r>
-              <a:rPr lang="en-US" sz="1100" b="1" spc="200" kern="0" dirty="0">
+              <a:rPr lang="en-US" sz="1050" b="1" spc="180" kern="0" dirty="0">
                 <a:solidFill>
                   <a:srgbClr val="0B7C44"/>
                 </a:solidFill>
@@ -3518,9 +5988,9 @@
                 <a:ea typeface="맑은 고딕" pitchFamily="34" charset="-122"/>
                 <a:cs typeface="맑은 고딕" pitchFamily="34" charset="-120"/>
               </a:rPr>
-              <a:t>화면 ① 일반 답변</a:t>
-            </a:r>
-            <a:endParaRPr lang="en-US" sz="1100" dirty="0"/>
+              <a:t>화면 ① 일반 답변  ·  1/2</a:t>
+            </a:r>
+            <a:endParaRPr lang="en-US" sz="1050" dirty="0"/>
           </a:p>
         </p:txBody>
       </p:sp>
@@ -3532,8 +6002,8 @@
         </p:nvSpPr>
         <p:spPr>
           <a:xfrm>
-            <a:off x="548640" y="512064"/>
-            <a:ext cx="7863840" cy="420624"/>
+            <a:off x="457200" y="420624"/>
+            <a:ext cx="8595360" cy="365760"/>
           </a:xfrm>
           <a:prstGeom prst="rect">
             <a:avLst/>
@@ -3549,7 +6019,7 @@
               <a:buNone/>
             </a:pPr>
             <a:r>
-              <a:rPr lang="en-US" sz="2400" b="1" dirty="0">
+              <a:rPr lang="en-US" sz="2000" b="1" dirty="0">
                 <a:solidFill>
                   <a:srgbClr val="16211C"/>
                 </a:solidFill>
@@ -3559,7 +6029,7 @@
               </a:rPr>
               <a:t>먼저 일반으로 답하고, 개인화는 고르게 합니다</a:t>
             </a:r>
-            <a:endParaRPr lang="en-US" sz="2400" dirty="0"/>
+            <a:endParaRPr lang="en-US" sz="2000" dirty="0"/>
           </a:p>
         </p:txBody>
       </p:sp>
@@ -3571,8 +6041,8 @@
         </p:nvSpPr>
         <p:spPr>
           <a:xfrm>
-            <a:off x="548640" y="950976"/>
-            <a:ext cx="11064240" cy="274320"/>
+            <a:off x="457200" y="804672"/>
+            <a:ext cx="11247120" cy="256032"/>
           </a:xfrm>
           <a:prstGeom prst="rect">
             <a:avLst/>
@@ -3588,7 +6058,7 @@
               <a:buNone/>
             </a:pPr>
             <a:r>
-              <a:rPr lang="en-US" sz="1200" dirty="0">
+              <a:rPr lang="en-US" sz="1150" dirty="0">
                 <a:solidFill>
                   <a:srgbClr val="7A867F"/>
                 </a:solidFill>
@@ -3596,15 +6066,15 @@
                 <a:ea typeface="맑은 고딕" pitchFamily="34" charset="-122"/>
                 <a:cs typeface="맑은 고딕" pitchFamily="34" charset="-120"/>
               </a:rPr>
-              <a:t>「골절되면 보상되나요?」는 일반지식만으로 답이 나옵니다. 여기서 「이 답변으로 충분해요」로 끝내거나, 「약관 등록하기」로 넘어갑니다.</a:t>
-            </a:r>
-            <a:endParaRPr lang="en-US" sz="1200" dirty="0"/>
+              <a:t>「골절되면 보상되나요?」는 일반지식만으로 답이 나옵니다. 여기서 「이 답변으로 충분해요」로 끝내거나 「약관 등록하기」로 넘어갑니다.</a:t>
+            </a:r>
+            <a:endParaRPr lang="en-US" sz="1150" dirty="0"/>
           </a:p>
         </p:txBody>
       </p:sp>
       <p:pic>
         <p:nvPicPr>
-          <p:cNvPr id="5" name="Image 0" descr="/tmp/claude-0/-home-user-chacha6377/ca7f6080-cf3a-5093-8a0d-eb3bfdb80785/scratchpad/app_branch_wide.png">    </p:cNvPr>
+          <p:cNvPr id="5" name="Image 0" descr="/tmp/claude-0/-home-user-chacha6377/ca7f6080-cf3a-5093-8a0d-eb3bfdb80785/scratchpad/app_branch_p1.png">    </p:cNvPr>
           <p:cNvPicPr>
             <a:picLocks noChangeAspect="1"/>
           </p:cNvPicPr>
@@ -3618,8 +6088,8 @@
         </p:blipFill>
         <p:spPr>
           <a:xfrm>
-            <a:off x="929052" y="1298448"/>
-            <a:ext cx="10303417" cy="4169664"/>
+            <a:off x="457200" y="1154930"/>
+            <a:ext cx="11247120" cy="4785884"/>
           </a:xfrm>
           <a:prstGeom prst="rect">
             <a:avLst/>
@@ -3634,39 +6104,12 @@
         </p:nvSpPr>
         <p:spPr>
           <a:xfrm>
-            <a:off x="548640" y="5614416"/>
-            <a:ext cx="3520440" cy="786384"/>
+            <a:off x="457200" y="6035040"/>
+            <a:ext cx="54864" cy="457200"/>
           </a:xfrm>
           <a:prstGeom prst="roundRect">
             <a:avLst>
-              <a:gd name="adj" fmla="val 10465"/>
-            </a:avLst>
-          </a:prstGeom>
-          <a:solidFill>
-            <a:srgbClr val="FFFFFF"/>
-          </a:solidFill>
-          <a:ln w="12700">
-            <a:solidFill>
-              <a:srgbClr val="E3E9E5"/>
-            </a:solidFill>
-            <a:prstDash val="solid"/>
-          </a:ln>
-        </p:spPr>
-      </p:sp>
-      <p:sp>
-        <p:nvSpPr>
-          <p:cNvPr id="7" name="Shape 4"/>
-          <p:cNvSpPr/>
-          <p:nvPr/>
-        </p:nvSpPr>
-        <p:spPr>
-          <a:xfrm>
-            <a:off x="548640" y="5614416"/>
-            <a:ext cx="64008" cy="786384"/>
-          </a:xfrm>
-          <a:prstGeom prst="roundRect">
-            <a:avLst>
-              <a:gd name="adj" fmla="val 42857"/>
+              <a:gd name="adj" fmla="val 50000"/>
             </a:avLst>
           </a:prstGeom>
           <a:solidFill>
@@ -3682,358 +6125,46 @@
       </p:sp>
       <p:sp>
         <p:nvSpPr>
+          <p:cNvPr id="7" name="Text 4"/>
+          <p:cNvSpPr/>
+          <p:nvPr/>
+        </p:nvSpPr>
+        <p:spPr>
+          <a:xfrm>
+            <a:off x="658368" y="6035040"/>
+            <a:ext cx="10607040" cy="457200"/>
+          </a:xfrm>
+          <a:prstGeom prst="rect">
+            <a:avLst/>
+          </a:prstGeom>
+          <a:noFill/>
+          <a:ln/>
+        </p:spPr>
+        <p:txBody>
+          <a:bodyPr wrap="square" rtlCol="0" anchor="ctr"/>
+          <a:lstStyle/>
+          <a:p>
+            <a:pPr indent="0" marL="0">
+              <a:buNone/>
+            </a:pPr>
+            <a:r>
+              <a:rPr lang="en-US" sz="1150" dirty="0">
+                <a:solidFill>
+                  <a:srgbClr val="44524B"/>
+                </a:solidFill>
+                <a:latin typeface="맑은 고딕" pitchFamily="34" charset="0"/>
+                <a:ea typeface="맑은 고딕" pitchFamily="34" charset="-122"/>
+                <a:cs typeface="맑은 고딕" pitchFamily="34" charset="-120"/>
+              </a:rPr>
+              <a:t>걸릴 수 있는 담보를 넓게 열거합니다 — 좁게 잡으면 청구를 놓칩니다.</a:t>
+            </a:r>
+            <a:endParaRPr lang="en-US" sz="1150" dirty="0"/>
+          </a:p>
+        </p:txBody>
+      </p:sp>
+      <p:sp>
+        <p:nvSpPr>
           <p:cNvPr id="8" name="Text 5"/>
-          <p:cNvSpPr/>
-          <p:nvPr/>
-        </p:nvSpPr>
-        <p:spPr>
-          <a:xfrm>
-            <a:off x="768096" y="5687568"/>
-            <a:ext cx="3108960" cy="256032"/>
-          </a:xfrm>
-          <a:prstGeom prst="rect">
-            <a:avLst/>
-          </a:prstGeom>
-          <a:noFill/>
-          <a:ln/>
-        </p:spPr>
-        <p:txBody>
-          <a:bodyPr wrap="square" rtlCol="0" anchor="ctr"/>
-          <a:lstStyle/>
-          <a:p>
-            <a:pPr indent="0" marL="0">
-              <a:buNone/>
-            </a:pPr>
-            <a:r>
-              <a:rPr lang="en-US" sz="1150" b="1" dirty="0">
-                <a:solidFill>
-                  <a:srgbClr val="16211C"/>
-                </a:solidFill>
-                <a:latin typeface="맑은 고딕" pitchFamily="34" charset="0"/>
-                <a:ea typeface="맑은 고딕" pitchFamily="34" charset="-122"/>
-                <a:cs typeface="맑은 고딕" pitchFamily="34" charset="-120"/>
-              </a:rPr>
-              <a:t>일반 답변은 실패가 아니다</a:t>
-            </a:r>
-            <a:endParaRPr lang="en-US" sz="1150" dirty="0"/>
-          </a:p>
-        </p:txBody>
-      </p:sp>
-      <p:sp>
-        <p:nvSpPr>
-          <p:cNvPr id="9" name="Text 6"/>
-          <p:cNvSpPr/>
-          <p:nvPr/>
-        </p:nvSpPr>
-        <p:spPr>
-          <a:xfrm>
-            <a:off x="768096" y="5943600"/>
-            <a:ext cx="3108960" cy="420624"/>
-          </a:xfrm>
-          <a:prstGeom prst="rect">
-            <a:avLst/>
-          </a:prstGeom>
-          <a:noFill/>
-          <a:ln/>
-        </p:spPr>
-        <p:txBody>
-          <a:bodyPr wrap="square" rtlCol="0" anchor="ctr"/>
-          <a:lstStyle/>
-          <a:p>
-            <a:pPr indent="0" marL="0">
-              <a:lnSpc>
-                <a:spcPts val="1300"/>
-              </a:lnSpc>
-              <a:buNone/>
-            </a:pPr>
-            <a:r>
-              <a:rPr lang="en-US" sz="950" dirty="0">
-                <a:solidFill>
-                  <a:srgbClr val="44524B"/>
-                </a:solidFill>
-                <a:latin typeface="맑은 고딕" pitchFamily="34" charset="0"/>
-                <a:ea typeface="맑은 고딕" pitchFamily="34" charset="-122"/>
-                <a:cs typeface="맑은 고딕" pitchFamily="34" charset="-120"/>
-              </a:rPr>
-              <a:t>「이 답변으로 충분해요」를 같은 무게로 둡니다.</a:t>
-            </a:r>
-            <a:endParaRPr lang="en-US" sz="950" dirty="0"/>
-          </a:p>
-        </p:txBody>
-      </p:sp>
-      <p:sp>
-        <p:nvSpPr>
-          <p:cNvPr id="10" name="Shape 7"/>
-          <p:cNvSpPr/>
-          <p:nvPr/>
-        </p:nvSpPr>
-        <p:spPr>
-          <a:xfrm>
-            <a:off x="4288536" y="5614416"/>
-            <a:ext cx="3520440" cy="786384"/>
-          </a:xfrm>
-          <a:prstGeom prst="roundRect">
-            <a:avLst>
-              <a:gd name="adj" fmla="val 10465"/>
-            </a:avLst>
-          </a:prstGeom>
-          <a:solidFill>
-            <a:srgbClr val="FFFFFF"/>
-          </a:solidFill>
-          <a:ln w="12700">
-            <a:solidFill>
-              <a:srgbClr val="E3E9E5"/>
-            </a:solidFill>
-            <a:prstDash val="solid"/>
-          </a:ln>
-        </p:spPr>
-      </p:sp>
-      <p:sp>
-        <p:nvSpPr>
-          <p:cNvPr id="11" name="Shape 8"/>
-          <p:cNvSpPr/>
-          <p:nvPr/>
-        </p:nvSpPr>
-        <p:spPr>
-          <a:xfrm>
-            <a:off x="4288536" y="5614416"/>
-            <a:ext cx="64008" cy="786384"/>
-          </a:xfrm>
-          <a:prstGeom prst="roundRect">
-            <a:avLst>
-              <a:gd name="adj" fmla="val 42857"/>
-            </a:avLst>
-          </a:prstGeom>
-          <a:solidFill>
-            <a:srgbClr val="14A05A"/>
-          </a:solidFill>
-          <a:ln w="12700">
-            <a:solidFill>
-              <a:srgbClr val="14A05A"/>
-            </a:solidFill>
-            <a:prstDash val="solid"/>
-          </a:ln>
-        </p:spPr>
-      </p:sp>
-      <p:sp>
-        <p:nvSpPr>
-          <p:cNvPr id="12" name="Text 9"/>
-          <p:cNvSpPr/>
-          <p:nvPr/>
-        </p:nvSpPr>
-        <p:spPr>
-          <a:xfrm>
-            <a:off x="4507992" y="5687568"/>
-            <a:ext cx="3108960" cy="256032"/>
-          </a:xfrm>
-          <a:prstGeom prst="rect">
-            <a:avLst/>
-          </a:prstGeom>
-          <a:noFill/>
-          <a:ln/>
-        </p:spPr>
-        <p:txBody>
-          <a:bodyPr wrap="square" rtlCol="0" anchor="ctr"/>
-          <a:lstStyle/>
-          <a:p>
-            <a:pPr indent="0" marL="0">
-              <a:buNone/>
-            </a:pPr>
-            <a:r>
-              <a:rPr lang="en-US" sz="1150" b="1" dirty="0">
-                <a:solidFill>
-                  <a:srgbClr val="16211C"/>
-                </a:solidFill>
-                <a:latin typeface="맑은 고딕" pitchFamily="34" charset="0"/>
-                <a:ea typeface="맑은 고딕" pitchFamily="34" charset="-122"/>
-                <a:cs typeface="맑은 고딕" pitchFamily="34" charset="-120"/>
-              </a:rPr>
-              <a:t>입구는 약관이지 고객이 아니다</a:t>
-            </a:r>
-            <a:endParaRPr lang="en-US" sz="1150" dirty="0"/>
-          </a:p>
-        </p:txBody>
-      </p:sp>
-      <p:sp>
-        <p:nvSpPr>
-          <p:cNvPr id="13" name="Text 10"/>
-          <p:cNvSpPr/>
-          <p:nvPr/>
-        </p:nvSpPr>
-        <p:spPr>
-          <a:xfrm>
-            <a:off x="4507992" y="5943600"/>
-            <a:ext cx="3108960" cy="420624"/>
-          </a:xfrm>
-          <a:prstGeom prst="rect">
-            <a:avLst/>
-          </a:prstGeom>
-          <a:noFill/>
-          <a:ln/>
-        </p:spPr>
-        <p:txBody>
-          <a:bodyPr wrap="square" rtlCol="0" anchor="ctr"/>
-          <a:lstStyle/>
-          <a:p>
-            <a:pPr indent="0" marL="0">
-              <a:lnSpc>
-                <a:spcPts val="1300"/>
-              </a:lnSpc>
-              <a:buNone/>
-            </a:pPr>
-            <a:r>
-              <a:rPr lang="en-US" sz="950" dirty="0">
-                <a:solidFill>
-                  <a:srgbClr val="44524B"/>
-                </a:solidFill>
-                <a:latin typeface="맑은 고딕" pitchFamily="34" charset="0"/>
-                <a:ea typeface="맑은 고딕" pitchFamily="34" charset="-122"/>
-                <a:cs typeface="맑은 고딕" pitchFamily="34" charset="-120"/>
-              </a:rPr>
-              <a:t>상품을 고르면 그 약관 기준으로 답이 바뀝니다.</a:t>
-            </a:r>
-            <a:endParaRPr lang="en-US" sz="950" dirty="0"/>
-          </a:p>
-        </p:txBody>
-      </p:sp>
-      <p:sp>
-        <p:nvSpPr>
-          <p:cNvPr id="14" name="Shape 11"/>
-          <p:cNvSpPr/>
-          <p:nvPr/>
-        </p:nvSpPr>
-        <p:spPr>
-          <a:xfrm>
-            <a:off x="8028432" y="5614416"/>
-            <a:ext cx="3520440" cy="786384"/>
-          </a:xfrm>
-          <a:prstGeom prst="roundRect">
-            <a:avLst>
-              <a:gd name="adj" fmla="val 10465"/>
-            </a:avLst>
-          </a:prstGeom>
-          <a:solidFill>
-            <a:srgbClr val="FFFFFF"/>
-          </a:solidFill>
-          <a:ln w="12700">
-            <a:solidFill>
-              <a:srgbClr val="E3E9E5"/>
-            </a:solidFill>
-            <a:prstDash val="solid"/>
-          </a:ln>
-        </p:spPr>
-      </p:sp>
-      <p:sp>
-        <p:nvSpPr>
-          <p:cNvPr id="15" name="Shape 12"/>
-          <p:cNvSpPr/>
-          <p:nvPr/>
-        </p:nvSpPr>
-        <p:spPr>
-          <a:xfrm>
-            <a:off x="8028432" y="5614416"/>
-            <a:ext cx="64008" cy="786384"/>
-          </a:xfrm>
-          <a:prstGeom prst="roundRect">
-            <a:avLst>
-              <a:gd name="adj" fmla="val 42857"/>
-            </a:avLst>
-          </a:prstGeom>
-          <a:solidFill>
-            <a:srgbClr val="14A05A"/>
-          </a:solidFill>
-          <a:ln w="12700">
-            <a:solidFill>
-              <a:srgbClr val="14A05A"/>
-            </a:solidFill>
-            <a:prstDash val="solid"/>
-          </a:ln>
-        </p:spPr>
-      </p:sp>
-      <p:sp>
-        <p:nvSpPr>
-          <p:cNvPr id="16" name="Text 13"/>
-          <p:cNvSpPr/>
-          <p:nvPr/>
-        </p:nvSpPr>
-        <p:spPr>
-          <a:xfrm>
-            <a:off x="8247888" y="5687568"/>
-            <a:ext cx="3108960" cy="256032"/>
-          </a:xfrm>
-          <a:prstGeom prst="rect">
-            <a:avLst/>
-          </a:prstGeom>
-          <a:noFill/>
-          <a:ln/>
-        </p:spPr>
-        <p:txBody>
-          <a:bodyPr wrap="square" rtlCol="0" anchor="ctr"/>
-          <a:lstStyle/>
-          <a:p>
-            <a:pPr indent="0" marL="0">
-              <a:buNone/>
-            </a:pPr>
-            <a:r>
-              <a:rPr lang="en-US" sz="1150" b="1" dirty="0">
-                <a:solidFill>
-                  <a:srgbClr val="16211C"/>
-                </a:solidFill>
-                <a:latin typeface="맑은 고딕" pitchFamily="34" charset="0"/>
-                <a:ea typeface="맑은 고딕" pitchFamily="34" charset="-122"/>
-                <a:cs typeface="맑은 고딕" pitchFamily="34" charset="-120"/>
-              </a:rPr>
-              <a:t>여기서 금액은 말하지 않는다</a:t>
-            </a:r>
-            <a:endParaRPr lang="en-US" sz="1150" dirty="0"/>
-          </a:p>
-        </p:txBody>
-      </p:sp>
-      <p:sp>
-        <p:nvSpPr>
-          <p:cNvPr id="17" name="Text 14"/>
-          <p:cNvSpPr/>
-          <p:nvPr/>
-        </p:nvSpPr>
-        <p:spPr>
-          <a:xfrm>
-            <a:off x="8247888" y="5943600"/>
-            <a:ext cx="3108960" cy="420624"/>
-          </a:xfrm>
-          <a:prstGeom prst="rect">
-            <a:avLst/>
-          </a:prstGeom>
-          <a:noFill/>
-          <a:ln/>
-        </p:spPr>
-        <p:txBody>
-          <a:bodyPr wrap="square" rtlCol="0" anchor="ctr"/>
-          <a:lstStyle/>
-          <a:p>
-            <a:pPr indent="0" marL="0">
-              <a:lnSpc>
-                <a:spcPts val="1300"/>
-              </a:lnSpc>
-              <a:buNone/>
-            </a:pPr>
-            <a:r>
-              <a:rPr lang="en-US" sz="950" dirty="0">
-                <a:solidFill>
-                  <a:srgbClr val="44524B"/>
-                </a:solidFill>
-                <a:latin typeface="맑은 고딕" pitchFamily="34" charset="0"/>
-                <a:ea typeface="맑은 고딕" pitchFamily="34" charset="-122"/>
-                <a:cs typeface="맑은 고딕" pitchFamily="34" charset="-120"/>
-              </a:rPr>
-              <a:t>담보 · 지급 조건 · 면책은 상품과 판마다 다릅니다.</a:t>
-            </a:r>
-            <a:endParaRPr lang="en-US" sz="950" dirty="0"/>
-          </a:p>
-        </p:txBody>
-      </p:sp>
-      <p:sp>
-        <p:nvSpPr>
-          <p:cNvPr id="18" name="Text 15"/>
           <p:cNvSpPr/>
           <p:nvPr/>
         </p:nvSpPr>
@@ -4110,8 +6241,8 @@
         </p:nvSpPr>
         <p:spPr>
           <a:xfrm>
-            <a:off x="548640" y="292608"/>
-            <a:ext cx="11064240" cy="219456"/>
+            <a:off x="457200" y="219456"/>
+            <a:ext cx="7863840" cy="201168"/>
           </a:xfrm>
           <a:prstGeom prst="rect">
             <a:avLst/>
@@ -4127,7 +6258,7 @@
               <a:buNone/>
             </a:pPr>
             <a:r>
-              <a:rPr lang="en-US" sz="1100" b="1" spc="200" kern="0" dirty="0">
+              <a:rPr lang="en-US" sz="1050" b="1" spc="180" kern="0" dirty="0">
                 <a:solidFill>
                   <a:srgbClr val="0B7C44"/>
                 </a:solidFill>
@@ -4135,9 +6266,9 @@
                 <a:ea typeface="맑은 고딕" pitchFamily="34" charset="-122"/>
                 <a:cs typeface="맑은 고딕" pitchFamily="34" charset="-120"/>
               </a:rPr>
-              <a:t>화면 ② 「약관 등록하기」를 누르면</a:t>
-            </a:r>
-            <a:endParaRPr lang="en-US" sz="1100" dirty="0"/>
+              <a:t>화면 ① 일반 답변  ·  2/2</a:t>
+            </a:r>
+            <a:endParaRPr lang="en-US" sz="1050" dirty="0"/>
           </a:p>
         </p:txBody>
       </p:sp>
@@ -4149,8 +6280,8 @@
         </p:nvSpPr>
         <p:spPr>
           <a:xfrm>
-            <a:off x="548640" y="512064"/>
-            <a:ext cx="7863840" cy="420624"/>
+            <a:off x="457200" y="420624"/>
+            <a:ext cx="8595360" cy="365760"/>
           </a:xfrm>
           <a:prstGeom prst="rect">
             <a:avLst/>
@@ -4166,7 +6297,7 @@
               <a:buNone/>
             </a:pPr>
             <a:r>
-              <a:rPr lang="en-US" sz="2400" b="1" dirty="0">
+              <a:rPr lang="en-US" sz="2000" b="1" dirty="0">
                 <a:solidFill>
                   <a:srgbClr val="16211C"/>
                 </a:solidFill>
@@ -4174,54 +6305,15 @@
                 <a:ea typeface="맑은 고딕" pitchFamily="34" charset="-122"/>
                 <a:cs typeface="맑은 고딕" pitchFamily="34" charset="-120"/>
               </a:rPr>
-              <a:t>찾기 전에 정확한 상품을 짚어냅니다</a:t>
-            </a:r>
-            <a:endParaRPr lang="en-US" sz="2400" dirty="0"/>
-          </a:p>
-        </p:txBody>
-      </p:sp>
-      <p:sp>
-        <p:nvSpPr>
-          <p:cNvPr id="4" name="Text 2"/>
-          <p:cNvSpPr/>
-          <p:nvPr/>
-        </p:nvSpPr>
-        <p:spPr>
-          <a:xfrm>
-            <a:off x="548640" y="950976"/>
-            <a:ext cx="11064240" cy="274320"/>
-          </a:xfrm>
-          <a:prstGeom prst="rect">
-            <a:avLst/>
-          </a:prstGeom>
-          <a:noFill/>
-          <a:ln/>
-        </p:spPr>
-        <p:txBody>
-          <a:bodyPr wrap="square" rtlCol="0" anchor="ctr"/>
-          <a:lstStyle/>
-          <a:p>
-            <a:pPr indent="0" marL="0">
-              <a:buNone/>
-            </a:pPr>
-            <a:r>
-              <a:rPr lang="en-US" sz="1200" dirty="0">
-                <a:solidFill>
-                  <a:srgbClr val="7A867F"/>
-                </a:solidFill>
-                <a:latin typeface="맑은 고딕" pitchFamily="34" charset="0"/>
-                <a:ea typeface="맑은 고딕" pitchFamily="34" charset="-122"/>
-                <a:cs typeface="맑은 고딕" pitchFamily="34" charset="-120"/>
-              </a:rPr>
-              <a:t>보험사는 치거나 눌러 고르고, 상품은 검색으로 매칭합니다. 약관 시점까지 정해져야 검색이 열립니다.</a:t>
-            </a:r>
-            <a:endParaRPr lang="en-US" sz="1200" dirty="0"/>
+              <a:t>먼저 일반으로 답하고, 개인화는 고르게 합니다</a:t>
+            </a:r>
+            <a:endParaRPr lang="en-US" sz="2000" dirty="0"/>
           </a:p>
         </p:txBody>
       </p:sp>
       <p:pic>
         <p:nvPicPr>
-          <p:cNvPr id="5" name="Image 0" descr="/tmp/claude-0/-home-user-chacha6377/ca7f6080-cf3a-5093-8a0d-eb3bfdb80785/scratchpad/app_scope_wide.png">    </p:cNvPr>
+          <p:cNvPr id="4" name="Image 0" descr="/tmp/claude-0/-home-user-chacha6377/ca7f6080-cf3a-5093-8a0d-eb3bfdb80785/scratchpad/app_branch_p2.png">    </p:cNvPr>
           <p:cNvPicPr>
             <a:picLocks noChangeAspect="1"/>
           </p:cNvPicPr>
@@ -4235,8 +6327,8 @@
         </p:blipFill>
         <p:spPr>
           <a:xfrm>
-            <a:off x="929052" y="1298448"/>
-            <a:ext cx="10303417" cy="4169664"/>
+            <a:off x="457200" y="1054346"/>
+            <a:ext cx="11247120" cy="4785884"/>
           </a:xfrm>
           <a:prstGeom prst="rect">
             <a:avLst/>
@@ -4245,45 +6337,18 @@
       </p:pic>
       <p:sp>
         <p:nvSpPr>
-          <p:cNvPr id="6" name="Shape 3"/>
-          <p:cNvSpPr/>
-          <p:nvPr/>
-        </p:nvSpPr>
-        <p:spPr>
-          <a:xfrm>
-            <a:off x="548640" y="5614416"/>
-            <a:ext cx="3520440" cy="786384"/>
+          <p:cNvPr id="5" name="Shape 2"/>
+          <p:cNvSpPr/>
+          <p:nvPr/>
+        </p:nvSpPr>
+        <p:spPr>
+          <a:xfrm>
+            <a:off x="457200" y="6035040"/>
+            <a:ext cx="54864" cy="457200"/>
           </a:xfrm>
           <a:prstGeom prst="roundRect">
             <a:avLst>
-              <a:gd name="adj" fmla="val 10465"/>
-            </a:avLst>
-          </a:prstGeom>
-          <a:solidFill>
-            <a:srgbClr val="FFFFFF"/>
-          </a:solidFill>
-          <a:ln w="12700">
-            <a:solidFill>
-              <a:srgbClr val="E3E9E5"/>
-            </a:solidFill>
-            <a:prstDash val="solid"/>
-          </a:ln>
-        </p:spPr>
-      </p:sp>
-      <p:sp>
-        <p:nvSpPr>
-          <p:cNvPr id="7" name="Shape 4"/>
-          <p:cNvSpPr/>
-          <p:nvPr/>
-        </p:nvSpPr>
-        <p:spPr>
-          <a:xfrm>
-            <a:off x="548640" y="5614416"/>
-            <a:ext cx="64008" cy="786384"/>
-          </a:xfrm>
-          <a:prstGeom prst="roundRect">
-            <a:avLst>
-              <a:gd name="adj" fmla="val 42857"/>
+              <a:gd name="adj" fmla="val 50000"/>
             </a:avLst>
           </a:prstGeom>
           <a:solidFill>
@@ -4299,14 +6364,14 @@
       </p:sp>
       <p:sp>
         <p:nvSpPr>
-          <p:cNvPr id="8" name="Text 5"/>
-          <p:cNvSpPr/>
-          <p:nvPr/>
-        </p:nvSpPr>
-        <p:spPr>
-          <a:xfrm>
-            <a:off x="768096" y="5687568"/>
-            <a:ext cx="3108960" cy="256032"/>
+          <p:cNvPr id="6" name="Text 3"/>
+          <p:cNvSpPr/>
+          <p:nvPr/>
+        </p:nvSpPr>
+        <p:spPr>
+          <a:xfrm>
+            <a:off x="658368" y="6035040"/>
+            <a:ext cx="10607040" cy="457200"/>
           </a:xfrm>
           <a:prstGeom prst="rect">
             <a:avLst/>
@@ -4322,15 +6387,15 @@
               <a:buNone/>
             </a:pPr>
             <a:r>
-              <a:rPr lang="en-US" sz="1150" b="1" dirty="0">
-                <a:solidFill>
-                  <a:srgbClr val="16211C"/>
-                </a:solidFill>
-                <a:latin typeface="맑은 고딕" pitchFamily="34" charset="0"/>
-                <a:ea typeface="맑은 고딕" pitchFamily="34" charset="-122"/>
-                <a:cs typeface="맑은 고딕" pitchFamily="34" charset="-120"/>
-              </a:rPr>
-              <a:t>보종은 묻지 않는다</a:t>
+              <a:rPr lang="en-US" sz="1150" dirty="0">
+                <a:solidFill>
+                  <a:srgbClr val="44524B"/>
+                </a:solidFill>
+                <a:latin typeface="맑은 고딕" pitchFamily="34" charset="0"/>
+                <a:ea typeface="맑은 고딕" pitchFamily="34" charset="-122"/>
+                <a:cs typeface="맑은 고딕" pitchFamily="34" charset="-120"/>
+              </a:rPr>
+              <a:t>「이 답변으로 충분해요」를 같은 무게로 둡니다. 일반 답변은 실패가 아닙니다.</a:t>
             </a:r>
             <a:endParaRPr lang="en-US" sz="1150" dirty="0"/>
           </a:p>
@@ -4338,319 +6403,7 @@
       </p:sp>
       <p:sp>
         <p:nvSpPr>
-          <p:cNvPr id="9" name="Text 6"/>
-          <p:cNvSpPr/>
-          <p:nvPr/>
-        </p:nvSpPr>
-        <p:spPr>
-          <a:xfrm>
-            <a:off x="768096" y="5943600"/>
-            <a:ext cx="3108960" cy="420624"/>
-          </a:xfrm>
-          <a:prstGeom prst="rect">
-            <a:avLst/>
-          </a:prstGeom>
-          <a:noFill/>
-          <a:ln/>
-        </p:spPr>
-        <p:txBody>
-          <a:bodyPr wrap="square" rtlCol="0" anchor="ctr"/>
-          <a:lstStyle/>
-          <a:p>
-            <a:pPr indent="0" marL="0">
-              <a:lnSpc>
-                <a:spcPts val="1300"/>
-              </a:lnSpc>
-              <a:buNone/>
-            </a:pPr>
-            <a:r>
-              <a:rPr lang="en-US" sz="950" dirty="0">
-                <a:solidFill>
-                  <a:srgbClr val="44524B"/>
-                </a:solidFill>
-                <a:latin typeface="맑은 고딕" pitchFamily="34" charset="0"/>
-                <a:ea typeface="맑은 고딕" pitchFamily="34" charset="-122"/>
-                <a:cs typeface="맑은 고딕" pitchFamily="34" charset="-120"/>
-              </a:rPr>
-              <a:t>상품명을 이미 알고 있으니 검색이 더 빠릅니다.</a:t>
-            </a:r>
-            <a:endParaRPr lang="en-US" sz="950" dirty="0"/>
-          </a:p>
-        </p:txBody>
-      </p:sp>
-      <p:sp>
-        <p:nvSpPr>
-          <p:cNvPr id="10" name="Shape 7"/>
-          <p:cNvSpPr/>
-          <p:nvPr/>
-        </p:nvSpPr>
-        <p:spPr>
-          <a:xfrm>
-            <a:off x="4288536" y="5614416"/>
-            <a:ext cx="3520440" cy="786384"/>
-          </a:xfrm>
-          <a:prstGeom prst="roundRect">
-            <a:avLst>
-              <a:gd name="adj" fmla="val 10465"/>
-            </a:avLst>
-          </a:prstGeom>
-          <a:solidFill>
-            <a:srgbClr val="FFFFFF"/>
-          </a:solidFill>
-          <a:ln w="12700">
-            <a:solidFill>
-              <a:srgbClr val="E3E9E5"/>
-            </a:solidFill>
-            <a:prstDash val="solid"/>
-          </a:ln>
-        </p:spPr>
-      </p:sp>
-      <p:sp>
-        <p:nvSpPr>
-          <p:cNvPr id="11" name="Shape 8"/>
-          <p:cNvSpPr/>
-          <p:nvPr/>
-        </p:nvSpPr>
-        <p:spPr>
-          <a:xfrm>
-            <a:off x="4288536" y="5614416"/>
-            <a:ext cx="64008" cy="786384"/>
-          </a:xfrm>
-          <a:prstGeom prst="roundRect">
-            <a:avLst>
-              <a:gd name="adj" fmla="val 42857"/>
-            </a:avLst>
-          </a:prstGeom>
-          <a:solidFill>
-            <a:srgbClr val="14A05A"/>
-          </a:solidFill>
-          <a:ln w="12700">
-            <a:solidFill>
-              <a:srgbClr val="14A05A"/>
-            </a:solidFill>
-            <a:prstDash val="solid"/>
-          </a:ln>
-        </p:spPr>
-      </p:sp>
-      <p:sp>
-        <p:nvSpPr>
-          <p:cNvPr id="12" name="Text 9"/>
-          <p:cNvSpPr/>
-          <p:nvPr/>
-        </p:nvSpPr>
-        <p:spPr>
-          <a:xfrm>
-            <a:off x="4507992" y="5687568"/>
-            <a:ext cx="3108960" cy="256032"/>
-          </a:xfrm>
-          <a:prstGeom prst="rect">
-            <a:avLst/>
-          </a:prstGeom>
-          <a:noFill/>
-          <a:ln/>
-        </p:spPr>
-        <p:txBody>
-          <a:bodyPr wrap="square" rtlCol="0" anchor="ctr"/>
-          <a:lstStyle/>
-          <a:p>
-            <a:pPr indent="0" marL="0">
-              <a:buNone/>
-            </a:pPr>
-            <a:r>
-              <a:rPr lang="en-US" sz="1150" b="1" dirty="0">
-                <a:solidFill>
-                  <a:srgbClr val="16211C"/>
-                </a:solidFill>
-                <a:latin typeface="맑은 고딕" pitchFamily="34" charset="0"/>
-                <a:ea typeface="맑은 고딕" pitchFamily="34" charset="-122"/>
-                <a:cs typeface="맑은 고딕" pitchFamily="34" charset="-120"/>
-              </a:rPr>
-              <a:t>겹치는 상품을 함께 본다</a:t>
-            </a:r>
-            <a:endParaRPr lang="en-US" sz="1150" dirty="0"/>
-          </a:p>
-        </p:txBody>
-      </p:sp>
-      <p:sp>
-        <p:nvSpPr>
-          <p:cNvPr id="13" name="Text 10"/>
-          <p:cNvSpPr/>
-          <p:nvPr/>
-        </p:nvSpPr>
-        <p:spPr>
-          <a:xfrm>
-            <a:off x="4507992" y="5943600"/>
-            <a:ext cx="3108960" cy="420624"/>
-          </a:xfrm>
-          <a:prstGeom prst="rect">
-            <a:avLst/>
-          </a:prstGeom>
-          <a:noFill/>
-          <a:ln/>
-        </p:spPr>
-        <p:txBody>
-          <a:bodyPr wrap="square" rtlCol="0" anchor="ctr"/>
-          <a:lstStyle/>
-          <a:p>
-            <a:pPr indent="0" marL="0">
-              <a:lnSpc>
-                <a:spcPts val="1300"/>
-              </a:lnSpc>
-              <a:buNone/>
-            </a:pPr>
-            <a:r>
-              <a:rPr lang="en-US" sz="950" dirty="0">
-                <a:solidFill>
-                  <a:srgbClr val="44524B"/>
-                </a:solidFill>
-                <a:latin typeface="맑은 고딕" pitchFamily="34" charset="0"/>
-                <a:ea typeface="맑은 고딕" pitchFamily="34" charset="-122"/>
-                <a:cs typeface="맑은 고딕" pitchFamily="34" charset="-120"/>
-              </a:rPr>
-              <a:t>「참좋은동행」과 「동행Ⅱ」는 다른 약관입니다.</a:t>
-            </a:r>
-            <a:endParaRPr lang="en-US" sz="950" dirty="0"/>
-          </a:p>
-        </p:txBody>
-      </p:sp>
-      <p:sp>
-        <p:nvSpPr>
-          <p:cNvPr id="14" name="Shape 11"/>
-          <p:cNvSpPr/>
-          <p:nvPr/>
-        </p:nvSpPr>
-        <p:spPr>
-          <a:xfrm>
-            <a:off x="8028432" y="5614416"/>
-            <a:ext cx="3520440" cy="786384"/>
-          </a:xfrm>
-          <a:prstGeom prst="roundRect">
-            <a:avLst>
-              <a:gd name="adj" fmla="val 10465"/>
-            </a:avLst>
-          </a:prstGeom>
-          <a:solidFill>
-            <a:srgbClr val="FFFFFF"/>
-          </a:solidFill>
-          <a:ln w="12700">
-            <a:solidFill>
-              <a:srgbClr val="E3E9E5"/>
-            </a:solidFill>
-            <a:prstDash val="solid"/>
-          </a:ln>
-        </p:spPr>
-      </p:sp>
-      <p:sp>
-        <p:nvSpPr>
-          <p:cNvPr id="15" name="Shape 12"/>
-          <p:cNvSpPr/>
-          <p:nvPr/>
-        </p:nvSpPr>
-        <p:spPr>
-          <a:xfrm>
-            <a:off x="8028432" y="5614416"/>
-            <a:ext cx="64008" cy="786384"/>
-          </a:xfrm>
-          <a:prstGeom prst="roundRect">
-            <a:avLst>
-              <a:gd name="adj" fmla="val 42857"/>
-            </a:avLst>
-          </a:prstGeom>
-          <a:solidFill>
-            <a:srgbClr val="14A05A"/>
-          </a:solidFill>
-          <a:ln w="12700">
-            <a:solidFill>
-              <a:srgbClr val="14A05A"/>
-            </a:solidFill>
-            <a:prstDash val="solid"/>
-          </a:ln>
-        </p:spPr>
-      </p:sp>
-      <p:sp>
-        <p:nvSpPr>
-          <p:cNvPr id="16" name="Text 13"/>
-          <p:cNvSpPr/>
-          <p:nvPr/>
-        </p:nvSpPr>
-        <p:spPr>
-          <a:xfrm>
-            <a:off x="8247888" y="5687568"/>
-            <a:ext cx="3108960" cy="256032"/>
-          </a:xfrm>
-          <a:prstGeom prst="rect">
-            <a:avLst/>
-          </a:prstGeom>
-          <a:noFill/>
-          <a:ln/>
-        </p:spPr>
-        <p:txBody>
-          <a:bodyPr wrap="square" rtlCol="0" anchor="ctr"/>
-          <a:lstStyle/>
-          <a:p>
-            <a:pPr indent="0" marL="0">
-              <a:buNone/>
-            </a:pPr>
-            <a:r>
-              <a:rPr lang="en-US" sz="1150" b="1" dirty="0">
-                <a:solidFill>
-                  <a:srgbClr val="16211C"/>
-                </a:solidFill>
-                <a:latin typeface="맑은 고딕" pitchFamily="34" charset="0"/>
-                <a:ea typeface="맑은 고딕" pitchFamily="34" charset="-122"/>
-                <a:cs typeface="맑은 고딕" pitchFamily="34" charset="-120"/>
-              </a:rPr>
-              <a:t>실손은 판이 아니라 세대로</a:t>
-            </a:r>
-            <a:endParaRPr lang="en-US" sz="1150" dirty="0"/>
-          </a:p>
-        </p:txBody>
-      </p:sp>
-      <p:sp>
-        <p:nvSpPr>
-          <p:cNvPr id="17" name="Text 14"/>
-          <p:cNvSpPr/>
-          <p:nvPr/>
-        </p:nvSpPr>
-        <p:spPr>
-          <a:xfrm>
-            <a:off x="8247888" y="5943600"/>
-            <a:ext cx="3108960" cy="420624"/>
-          </a:xfrm>
-          <a:prstGeom prst="rect">
-            <a:avLst/>
-          </a:prstGeom>
-          <a:noFill/>
-          <a:ln/>
-        </p:spPr>
-        <p:txBody>
-          <a:bodyPr wrap="square" rtlCol="0" anchor="ctr"/>
-          <a:lstStyle/>
-          <a:p>
-            <a:pPr indent="0" marL="0">
-              <a:lnSpc>
-                <a:spcPts val="1300"/>
-              </a:lnSpc>
-              <a:buNone/>
-            </a:pPr>
-            <a:r>
-              <a:rPr lang="en-US" sz="950" dirty="0">
-                <a:solidFill>
-                  <a:srgbClr val="44524B"/>
-                </a:solidFill>
-                <a:latin typeface="맑은 고딕" pitchFamily="34" charset="0"/>
-                <a:ea typeface="맑은 고딕" pitchFamily="34" charset="-122"/>
-                <a:cs typeface="맑은 고딕" pitchFamily="34" charset="-120"/>
-              </a:rPr>
-              <a:t>1~4세대가 보상 갈래를 정합니다. 약관 150건이 필요 없습니다.</a:t>
-            </a:r>
-            <a:endParaRPr lang="en-US" sz="950" dirty="0"/>
-          </a:p>
-        </p:txBody>
-      </p:sp>
-      <p:sp>
-        <p:nvSpPr>
-          <p:cNvPr id="18" name="Text 15"/>
+          <p:cNvPr id="7" name="Text 4"/>
           <p:cNvSpPr/>
           <p:nvPr/>
         </p:nvSpPr>
@@ -4727,8 +6480,8 @@
         </p:nvSpPr>
         <p:spPr>
           <a:xfrm>
-            <a:off x="548640" y="292608"/>
-            <a:ext cx="11064240" cy="219456"/>
+            <a:off x="457200" y="219456"/>
+            <a:ext cx="7863840" cy="201168"/>
           </a:xfrm>
           <a:prstGeom prst="rect">
             <a:avLst/>
@@ -4744,7 +6497,7 @@
               <a:buNone/>
             </a:pPr>
             <a:r>
-              <a:rPr lang="en-US" sz="1100" b="1" spc="200" kern="0" dirty="0">
+              <a:rPr lang="en-US" sz="1050" b="1" spc="180" kern="0" dirty="0">
                 <a:solidFill>
                   <a:srgbClr val="0B7C44"/>
                 </a:solidFill>
@@ -4752,9 +6505,9 @@
                 <a:ea typeface="맑은 고딕" pitchFamily="34" charset="-122"/>
                 <a:cs typeface="맑은 고딕" pitchFamily="34" charset="-120"/>
               </a:rPr>
-              <a:t>화면 ③ 답변</a:t>
-            </a:r>
-            <a:endParaRPr lang="en-US" sz="1100" dirty="0"/>
+              <a:t>화면 ② 약관 짚어내기  ·  1/3</a:t>
+            </a:r>
+            <a:endParaRPr lang="en-US" sz="1050" dirty="0"/>
           </a:p>
         </p:txBody>
       </p:sp>
@@ -4766,8 +6519,8 @@
         </p:nvSpPr>
         <p:spPr>
           <a:xfrm>
-            <a:off x="548640" y="512064"/>
-            <a:ext cx="7863840" cy="420624"/>
+            <a:off x="457200" y="420624"/>
+            <a:ext cx="8595360" cy="365760"/>
           </a:xfrm>
           <a:prstGeom prst="rect">
             <a:avLst/>
@@ -4783,7 +6536,7 @@
               <a:buNone/>
             </a:pPr>
             <a:r>
-              <a:rPr lang="en-US" sz="2400" b="1" dirty="0">
+              <a:rPr lang="en-US" sz="2000" b="1" dirty="0">
                 <a:solidFill>
                   <a:srgbClr val="16211C"/>
                 </a:solidFill>
@@ -4791,9 +6544,9 @@
                 <a:ea typeface="맑은 고딕" pitchFamily="34" charset="-122"/>
                 <a:cs typeface="맑은 고딕" pitchFamily="34" charset="-120"/>
               </a:rPr>
-              <a:t>면책을 먼저 판정하고 조항으로 근거를 답니다</a:t>
-            </a:r>
-            <a:endParaRPr lang="en-US" sz="2400" dirty="0"/>
+              <a:t>대화하면서 정확한 상품을 짚어냅니다</a:t>
+            </a:r>
+            <a:endParaRPr lang="en-US" sz="2000" dirty="0"/>
           </a:p>
         </p:txBody>
       </p:sp>
@@ -4805,8 +6558,8 @@
         </p:nvSpPr>
         <p:spPr>
           <a:xfrm>
-            <a:off x="548640" y="950976"/>
-            <a:ext cx="11064240" cy="274320"/>
+            <a:off x="457200" y="804672"/>
+            <a:ext cx="11247120" cy="256032"/>
           </a:xfrm>
           <a:prstGeom prst="rect">
             <a:avLst/>
@@ -4822,7 +6575,7 @@
               <a:buNone/>
             </a:pPr>
             <a:r>
-              <a:rPr lang="en-US" sz="1200" dirty="0">
+              <a:rPr lang="en-US" sz="1150" dirty="0">
                 <a:solidFill>
                   <a:srgbClr val="7A867F"/>
                 </a:solidFill>
@@ -4830,15 +6583,15 @@
                 <a:ea typeface="맑은 고딕" pitchFamily="34" charset="-122"/>
                 <a:cs typeface="맑은 고딕" pitchFamily="34" charset="-120"/>
               </a:rPr>
-              <a:t>고객을 만들지 않고 그냥 묻는 경로입니다. 대부분의 상담이 여기서 끝납니다.</a:t>
-            </a:r>
-            <a:endParaRPr lang="en-US" sz="1200" dirty="0"/>
+              <a:t>별도 화면으로 빠지지 않습니다. 챗봇이므로 AI가 묻고 FA가 고르는 것이 곧 대화입니다.</a:t>
+            </a:r>
+            <a:endParaRPr lang="en-US" sz="1150" dirty="0"/>
           </a:p>
         </p:txBody>
       </p:sp>
       <p:pic>
         <p:nvPicPr>
-          <p:cNvPr id="5" name="Image 0" descr="/tmp/claude-0/-home-user-chacha6377/ca7f6080-cf3a-5093-8a0d-eb3bfdb80785/scratchpad/app_ask_wide.png">    </p:cNvPr>
+          <p:cNvPr id="5" name="Image 0" descr="/tmp/claude-0/-home-user-chacha6377/ca7f6080-cf3a-5093-8a0d-eb3bfdb80785/scratchpad/app_scope_p1.png">    </p:cNvPr>
           <p:cNvPicPr>
             <a:picLocks noChangeAspect="1"/>
           </p:cNvPicPr>
@@ -4852,8 +6605,8 @@
         </p:blipFill>
         <p:spPr>
           <a:xfrm>
-            <a:off x="929052" y="1298448"/>
-            <a:ext cx="10303417" cy="4169664"/>
+            <a:off x="457200" y="1154930"/>
+            <a:ext cx="11247120" cy="4785884"/>
           </a:xfrm>
           <a:prstGeom prst="rect">
             <a:avLst/>
@@ -4868,39 +6621,12 @@
         </p:nvSpPr>
         <p:spPr>
           <a:xfrm>
-            <a:off x="548640" y="5614416"/>
-            <a:ext cx="3520440" cy="786384"/>
+            <a:off x="457200" y="6035040"/>
+            <a:ext cx="54864" cy="457200"/>
           </a:xfrm>
           <a:prstGeom prst="roundRect">
             <a:avLst>
-              <a:gd name="adj" fmla="val 10465"/>
-            </a:avLst>
-          </a:prstGeom>
-          <a:solidFill>
-            <a:srgbClr val="FFFFFF"/>
-          </a:solidFill>
-          <a:ln w="12700">
-            <a:solidFill>
-              <a:srgbClr val="E3E9E5"/>
-            </a:solidFill>
-            <a:prstDash val="solid"/>
-          </a:ln>
-        </p:spPr>
-      </p:sp>
-      <p:sp>
-        <p:nvSpPr>
-          <p:cNvPr id="7" name="Shape 4"/>
-          <p:cNvSpPr/>
-          <p:nvPr/>
-        </p:nvSpPr>
-        <p:spPr>
-          <a:xfrm>
-            <a:off x="548640" y="5614416"/>
-            <a:ext cx="64008" cy="786384"/>
-          </a:xfrm>
-          <a:prstGeom prst="roundRect">
-            <a:avLst>
-              <a:gd name="adj" fmla="val 42857"/>
+              <a:gd name="adj" fmla="val 50000"/>
             </a:avLst>
           </a:prstGeom>
           <a:solidFill>
@@ -4916,358 +6642,46 @@
       </p:sp>
       <p:sp>
         <p:nvSpPr>
+          <p:cNvPr id="7" name="Text 4"/>
+          <p:cNvSpPr/>
+          <p:nvPr/>
+        </p:nvSpPr>
+        <p:spPr>
+          <a:xfrm>
+            <a:off x="658368" y="6035040"/>
+            <a:ext cx="10607040" cy="457200"/>
+          </a:xfrm>
+          <a:prstGeom prst="rect">
+            <a:avLst/>
+          </a:prstGeom>
+          <a:noFill/>
+          <a:ln/>
+        </p:spPr>
+        <p:txBody>
+          <a:bodyPr wrap="square" rtlCol="0" anchor="ctr"/>
+          <a:lstStyle/>
+          <a:p>
+            <a:pPr indent="0" marL="0">
+              <a:buNone/>
+            </a:pPr>
+            <a:r>
+              <a:rPr lang="en-US" sz="1150" dirty="0">
+                <a:solidFill>
+                  <a:srgbClr val="44524B"/>
+                </a:solidFill>
+                <a:latin typeface="맑은 고딕" pitchFamily="34" charset="0"/>
+                <a:ea typeface="맑은 고딕" pitchFamily="34" charset="-122"/>
+                <a:cs typeface="맑은 고딕" pitchFamily="34" charset="-120"/>
+              </a:rPr>
+              <a:t>AI가 보험사를 묻고 칩으로 고릅니다. 고른 값은 사용자 말풍선으로 남습니다.</a:t>
+            </a:r>
+            <a:endParaRPr lang="en-US" sz="1150" dirty="0"/>
+          </a:p>
+        </p:txBody>
+      </p:sp>
+      <p:sp>
+        <p:nvSpPr>
           <p:cNvPr id="8" name="Text 5"/>
-          <p:cNvSpPr/>
-          <p:nvPr/>
-        </p:nvSpPr>
-        <p:spPr>
-          <a:xfrm>
-            <a:off x="768096" y="5687568"/>
-            <a:ext cx="3108960" cy="256032"/>
-          </a:xfrm>
-          <a:prstGeom prst="rect">
-            <a:avLst/>
-          </a:prstGeom>
-          <a:noFill/>
-          <a:ln/>
-        </p:spPr>
-        <p:txBody>
-          <a:bodyPr wrap="square" rtlCol="0" anchor="ctr"/>
-          <a:lstStyle/>
-          <a:p>
-            <a:pPr indent="0" marL="0">
-              <a:buNone/>
-            </a:pPr>
-            <a:r>
-              <a:rPr lang="en-US" sz="1150" b="1" dirty="0">
-                <a:solidFill>
-                  <a:srgbClr val="16211C"/>
-                </a:solidFill>
-                <a:latin typeface="맑은 고딕" pitchFamily="34" charset="0"/>
-                <a:ea typeface="맑은 고딕" pitchFamily="34" charset="-122"/>
-                <a:cs typeface="맑은 고딕" pitchFamily="34" charset="-120"/>
-              </a:rPr>
-              <a:t>면책이 먼저다</a:t>
-            </a:r>
-            <a:endParaRPr lang="en-US" sz="1150" dirty="0"/>
-          </a:p>
-        </p:txBody>
-      </p:sp>
-      <p:sp>
-        <p:nvSpPr>
-          <p:cNvPr id="9" name="Text 6"/>
-          <p:cNvSpPr/>
-          <p:nvPr/>
-        </p:nvSpPr>
-        <p:spPr>
-          <a:xfrm>
-            <a:off x="768096" y="5943600"/>
-            <a:ext cx="3108960" cy="420624"/>
-          </a:xfrm>
-          <a:prstGeom prst="rect">
-            <a:avLst/>
-          </a:prstGeom>
-          <a:noFill/>
-          <a:ln/>
-        </p:spPr>
-        <p:txBody>
-          <a:bodyPr wrap="square" rtlCol="0" anchor="ctr"/>
-          <a:lstStyle/>
-          <a:p>
-            <a:pPr indent="0" marL="0">
-              <a:lnSpc>
-                <a:spcPts val="1300"/>
-              </a:lnSpc>
-              <a:buNone/>
-            </a:pPr>
-            <a:r>
-              <a:rPr lang="en-US" sz="950" dirty="0">
-                <a:solidFill>
-                  <a:srgbClr val="44524B"/>
-                </a:solidFill>
-                <a:latin typeface="맑은 고딕" pitchFamily="34" charset="0"/>
-                <a:ea typeface="맑은 고딕" pitchFamily="34" charset="-122"/>
-                <a:cs typeface="맑은 고딕" pitchFamily="34" charset="-120"/>
-              </a:rPr>
-              <a:t>지급사유를 먼저 보이면 아래 면책은 읽히지 않습니다.</a:t>
-            </a:r>
-            <a:endParaRPr lang="en-US" sz="950" dirty="0"/>
-          </a:p>
-        </p:txBody>
-      </p:sp>
-      <p:sp>
-        <p:nvSpPr>
-          <p:cNvPr id="10" name="Shape 7"/>
-          <p:cNvSpPr/>
-          <p:nvPr/>
-        </p:nvSpPr>
-        <p:spPr>
-          <a:xfrm>
-            <a:off x="4288536" y="5614416"/>
-            <a:ext cx="3520440" cy="786384"/>
-          </a:xfrm>
-          <a:prstGeom prst="roundRect">
-            <a:avLst>
-              <a:gd name="adj" fmla="val 10465"/>
-            </a:avLst>
-          </a:prstGeom>
-          <a:solidFill>
-            <a:srgbClr val="FFFFFF"/>
-          </a:solidFill>
-          <a:ln w="12700">
-            <a:solidFill>
-              <a:srgbClr val="E3E9E5"/>
-            </a:solidFill>
-            <a:prstDash val="solid"/>
-          </a:ln>
-        </p:spPr>
-      </p:sp>
-      <p:sp>
-        <p:nvSpPr>
-          <p:cNvPr id="11" name="Shape 8"/>
-          <p:cNvSpPr/>
-          <p:nvPr/>
-        </p:nvSpPr>
-        <p:spPr>
-          <a:xfrm>
-            <a:off x="4288536" y="5614416"/>
-            <a:ext cx="64008" cy="786384"/>
-          </a:xfrm>
-          <a:prstGeom prst="roundRect">
-            <a:avLst>
-              <a:gd name="adj" fmla="val 42857"/>
-            </a:avLst>
-          </a:prstGeom>
-          <a:solidFill>
-            <a:srgbClr val="14A05A"/>
-          </a:solidFill>
-          <a:ln w="12700">
-            <a:solidFill>
-              <a:srgbClr val="14A05A"/>
-            </a:solidFill>
-            <a:prstDash val="solid"/>
-          </a:ln>
-        </p:spPr>
-      </p:sp>
-      <p:sp>
-        <p:nvSpPr>
-          <p:cNvPr id="12" name="Text 9"/>
-          <p:cNvSpPr/>
-          <p:nvPr/>
-        </p:nvSpPr>
-        <p:spPr>
-          <a:xfrm>
-            <a:off x="4507992" y="5687568"/>
-            <a:ext cx="3108960" cy="256032"/>
-          </a:xfrm>
-          <a:prstGeom prst="rect">
-            <a:avLst/>
-          </a:prstGeom>
-          <a:noFill/>
-          <a:ln/>
-        </p:spPr>
-        <p:txBody>
-          <a:bodyPr wrap="square" rtlCol="0" anchor="ctr"/>
-          <a:lstStyle/>
-          <a:p>
-            <a:pPr indent="0" marL="0">
-              <a:buNone/>
-            </a:pPr>
-            <a:r>
-              <a:rPr lang="en-US" sz="1150" b="1" dirty="0">
-                <a:solidFill>
-                  <a:srgbClr val="16211C"/>
-                </a:solidFill>
-                <a:latin typeface="맑은 고딕" pitchFamily="34" charset="0"/>
-                <a:ea typeface="맑은 고딕" pitchFamily="34" charset="-122"/>
-                <a:cs typeface="맑은 고딕" pitchFamily="34" charset="-120"/>
-              </a:rPr>
-              <a:t>근거를 조항으로 제시한다</a:t>
-            </a:r>
-            <a:endParaRPr lang="en-US" sz="1150" dirty="0"/>
-          </a:p>
-        </p:txBody>
-      </p:sp>
-      <p:sp>
-        <p:nvSpPr>
-          <p:cNvPr id="13" name="Text 10"/>
-          <p:cNvSpPr/>
-          <p:nvPr/>
-        </p:nvSpPr>
-        <p:spPr>
-          <a:xfrm>
-            <a:off x="4507992" y="5943600"/>
-            <a:ext cx="3108960" cy="420624"/>
-          </a:xfrm>
-          <a:prstGeom prst="rect">
-            <a:avLst/>
-          </a:prstGeom>
-          <a:noFill/>
-          <a:ln/>
-        </p:spPr>
-        <p:txBody>
-          <a:bodyPr wrap="square" rtlCol="0" anchor="ctr"/>
-          <a:lstStyle/>
-          <a:p>
-            <a:pPr indent="0" marL="0">
-              <a:lnSpc>
-                <a:spcPts val="1300"/>
-              </a:lnSpc>
-              <a:buNone/>
-            </a:pPr>
-            <a:r>
-              <a:rPr lang="en-US" sz="950" dirty="0">
-                <a:solidFill>
-                  <a:srgbClr val="44524B"/>
-                </a:solidFill>
-                <a:latin typeface="맑은 고딕" pitchFamily="34" charset="0"/>
-                <a:ea typeface="맑은 고딕" pitchFamily="34" charset="-122"/>
-                <a:cs typeface="맑은 고딕" pitchFamily="34" charset="-120"/>
-              </a:rPr>
-              <a:t>제5조 1항 6호까지 짚어야 고객에게 읽어줄 수 있습니다.</a:t>
-            </a:r>
-            <a:endParaRPr lang="en-US" sz="950" dirty="0"/>
-          </a:p>
-        </p:txBody>
-      </p:sp>
-      <p:sp>
-        <p:nvSpPr>
-          <p:cNvPr id="14" name="Shape 11"/>
-          <p:cNvSpPr/>
-          <p:nvPr/>
-        </p:nvSpPr>
-        <p:spPr>
-          <a:xfrm>
-            <a:off x="8028432" y="5614416"/>
-            <a:ext cx="3520440" cy="786384"/>
-          </a:xfrm>
-          <a:prstGeom prst="roundRect">
-            <a:avLst>
-              <a:gd name="adj" fmla="val 10465"/>
-            </a:avLst>
-          </a:prstGeom>
-          <a:solidFill>
-            <a:srgbClr val="FFFFFF"/>
-          </a:solidFill>
-          <a:ln w="12700">
-            <a:solidFill>
-              <a:srgbClr val="E3E9E5"/>
-            </a:solidFill>
-            <a:prstDash val="solid"/>
-          </a:ln>
-        </p:spPr>
-      </p:sp>
-      <p:sp>
-        <p:nvSpPr>
-          <p:cNvPr id="15" name="Shape 12"/>
-          <p:cNvSpPr/>
-          <p:nvPr/>
-        </p:nvSpPr>
-        <p:spPr>
-          <a:xfrm>
-            <a:off x="8028432" y="5614416"/>
-            <a:ext cx="64008" cy="786384"/>
-          </a:xfrm>
-          <a:prstGeom prst="roundRect">
-            <a:avLst>
-              <a:gd name="adj" fmla="val 42857"/>
-            </a:avLst>
-          </a:prstGeom>
-          <a:solidFill>
-            <a:srgbClr val="14A05A"/>
-          </a:solidFill>
-          <a:ln w="12700">
-            <a:solidFill>
-              <a:srgbClr val="14A05A"/>
-            </a:solidFill>
-            <a:prstDash val="solid"/>
-          </a:ln>
-        </p:spPr>
-      </p:sp>
-      <p:sp>
-        <p:nvSpPr>
-          <p:cNvPr id="16" name="Text 13"/>
-          <p:cNvSpPr/>
-          <p:nvPr/>
-        </p:nvSpPr>
-        <p:spPr>
-          <a:xfrm>
-            <a:off x="8247888" y="5687568"/>
-            <a:ext cx="3108960" cy="256032"/>
-          </a:xfrm>
-          <a:prstGeom prst="rect">
-            <a:avLst/>
-          </a:prstGeom>
-          <a:noFill/>
-          <a:ln/>
-        </p:spPr>
-        <p:txBody>
-          <a:bodyPr wrap="square" rtlCol="0" anchor="ctr"/>
-          <a:lstStyle/>
-          <a:p>
-            <a:pPr indent="0" marL="0">
-              <a:buNone/>
-            </a:pPr>
-            <a:r>
-              <a:rPr lang="en-US" sz="1150" b="1" dirty="0">
-                <a:solidFill>
-                  <a:srgbClr val="16211C"/>
-                </a:solidFill>
-                <a:latin typeface="맑은 고딕" pitchFamily="34" charset="0"/>
-                <a:ea typeface="맑은 고딕" pitchFamily="34" charset="-122"/>
-                <a:cs typeface="맑은 고딕" pitchFamily="34" charset="-120"/>
-              </a:rPr>
-              <a:t>어느 약관인지 항상 보인다</a:t>
-            </a:r>
-            <a:endParaRPr lang="en-US" sz="1150" dirty="0"/>
-          </a:p>
-        </p:txBody>
-      </p:sp>
-      <p:sp>
-        <p:nvSpPr>
-          <p:cNvPr id="17" name="Text 14"/>
-          <p:cNvSpPr/>
-          <p:nvPr/>
-        </p:nvSpPr>
-        <p:spPr>
-          <a:xfrm>
-            <a:off x="8247888" y="5943600"/>
-            <a:ext cx="3108960" cy="420624"/>
-          </a:xfrm>
-          <a:prstGeom prst="rect">
-            <a:avLst/>
-          </a:prstGeom>
-          <a:noFill/>
-          <a:ln/>
-        </p:spPr>
-        <p:txBody>
-          <a:bodyPr wrap="square" rtlCol="0" anchor="ctr"/>
-          <a:lstStyle/>
-          <a:p>
-            <a:pPr indent="0" marL="0">
-              <a:lnSpc>
-                <a:spcPts val="1300"/>
-              </a:lnSpc>
-              <a:buNone/>
-            </a:pPr>
-            <a:r>
-              <a:rPr lang="en-US" sz="950" dirty="0">
-                <a:solidFill>
-                  <a:srgbClr val="44524B"/>
-                </a:solidFill>
-                <a:latin typeface="맑은 고딕" pitchFamily="34" charset="0"/>
-                <a:ea typeface="맑은 고딕" pitchFamily="34" charset="-122"/>
-                <a:cs typeface="맑은 고딕" pitchFamily="34" charset="-120"/>
-              </a:rPr>
-              <a:t>안 보이면 틀려도 알아챌 수 없습니다.</a:t>
-            </a:r>
-            <a:endParaRPr lang="en-US" sz="950" dirty="0"/>
-          </a:p>
-        </p:txBody>
-      </p:sp>
-      <p:sp>
-        <p:nvSpPr>
-          <p:cNvPr id="18" name="Text 15"/>
           <p:cNvSpPr/>
           <p:nvPr/>
         </p:nvSpPr>
@@ -5344,8 +6758,8 @@
         </p:nvSpPr>
         <p:spPr>
           <a:xfrm>
-            <a:off x="548640" y="292608"/>
-            <a:ext cx="11064240" cy="219456"/>
+            <a:off x="457200" y="219456"/>
+            <a:ext cx="7863840" cy="201168"/>
           </a:xfrm>
           <a:prstGeom prst="rect">
             <a:avLst/>
@@ -5361,7 +6775,7 @@
               <a:buNone/>
             </a:pPr>
             <a:r>
-              <a:rPr lang="en-US" sz="1100" b="1" spc="200" kern="0" dirty="0">
+              <a:rPr lang="en-US" sz="1050" b="1" spc="180" kern="0" dirty="0">
                 <a:solidFill>
                   <a:srgbClr val="0B7C44"/>
                 </a:solidFill>
@@ -5369,9 +6783,9 @@
                 <a:ea typeface="맑은 고딕" pitchFamily="34" charset="-122"/>
                 <a:cs typeface="맑은 고딕" pitchFamily="34" charset="-120"/>
               </a:rPr>
-              <a:t>화면 ④ 약관북</a:t>
-            </a:r>
-            <a:endParaRPr lang="en-US" sz="1100" dirty="0"/>
+              <a:t>화면 ② 약관 짚어내기  ·  2/3</a:t>
+            </a:r>
+            <a:endParaRPr lang="en-US" sz="1050" dirty="0"/>
           </a:p>
         </p:txBody>
       </p:sp>
@@ -5383,8 +6797,8 @@
         </p:nvSpPr>
         <p:spPr>
           <a:xfrm>
-            <a:off x="548640" y="512064"/>
-            <a:ext cx="7863840" cy="420624"/>
+            <a:off x="457200" y="420624"/>
+            <a:ext cx="8595360" cy="365760"/>
           </a:xfrm>
           <a:prstGeom prst="rect">
             <a:avLst/>
@@ -5400,7 +6814,7 @@
               <a:buNone/>
             </a:pPr>
             <a:r>
-              <a:rPr lang="en-US" sz="2400" b="1" dirty="0">
+              <a:rPr lang="en-US" sz="2000" b="1" dirty="0">
                 <a:solidFill>
                   <a:srgbClr val="16211C"/>
                 </a:solidFill>
@@ -5408,54 +6822,15 @@
                 <a:ea typeface="맑은 고딕" pitchFamily="34" charset="-122"/>
                 <a:cs typeface="맑은 고딕" pitchFamily="34" charset="-120"/>
               </a:rPr>
-              <a:t>고객 폴더를 열면 질문 범위가 그 고객으로 잠깁니다</a:t>
-            </a:r>
-            <a:endParaRPr lang="en-US" sz="2400" dirty="0"/>
-          </a:p>
-        </p:txBody>
-      </p:sp>
-      <p:sp>
-        <p:nvSpPr>
-          <p:cNvPr id="4" name="Text 2"/>
-          <p:cNvSpPr/>
-          <p:nvPr/>
-        </p:nvSpPr>
-        <p:spPr>
-          <a:xfrm>
-            <a:off x="548640" y="950976"/>
-            <a:ext cx="11064240" cy="274320"/>
-          </a:xfrm>
-          <a:prstGeom prst="rect">
-            <a:avLst/>
-          </a:prstGeom>
-          <a:noFill/>
-          <a:ln/>
-        </p:spPr>
-        <p:txBody>
-          <a:bodyPr wrap="square" rtlCol="0" anchor="ctr"/>
-          <a:lstStyle/>
-          <a:p>
-            <a:pPr indent="0" marL="0">
-              <a:buNone/>
-            </a:pPr>
-            <a:r>
-              <a:rPr lang="en-US" sz="1200" dirty="0">
-                <a:solidFill>
-                  <a:srgbClr val="7A867F"/>
-                </a:solidFill>
-                <a:latin typeface="맑은 고딕" pitchFamily="34" charset="0"/>
-                <a:ea typeface="맑은 고딕" pitchFamily="34" charset="-122"/>
-                <a:cs typeface="맑은 고딕" pitchFamily="34" charset="-120"/>
-              </a:rPr>
-              <a:t>이 화면이 차별점의 실체입니다. 상담할수록 고객별 약관이 쌓입니다.</a:t>
-            </a:r>
-            <a:endParaRPr lang="en-US" sz="1200" dirty="0"/>
+              <a:t>대화하면서 정확한 상품을 짚어냅니다</a:t>
+            </a:r>
+            <a:endParaRPr lang="en-US" sz="2000" dirty="0"/>
           </a:p>
         </p:txBody>
       </p:sp>
       <p:pic>
         <p:nvPicPr>
-          <p:cNvPr id="5" name="Image 0" descr="/tmp/claude-0/-home-user-chacha6377/ca7f6080-cf3a-5093-8a0d-eb3bfdb80785/scratchpad/app_entry_wide.png">    </p:cNvPr>
+          <p:cNvPr id="4" name="Image 0" descr="/tmp/claude-0/-home-user-chacha6377/ca7f6080-cf3a-5093-8a0d-eb3bfdb80785/scratchpad/app_scope_p2.png">    </p:cNvPr>
           <p:cNvPicPr>
             <a:picLocks noChangeAspect="1"/>
           </p:cNvPicPr>
@@ -5469,8 +6844,8 @@
         </p:blipFill>
         <p:spPr>
           <a:xfrm>
-            <a:off x="929052" y="1298448"/>
-            <a:ext cx="10303417" cy="4169664"/>
+            <a:off x="457200" y="1054346"/>
+            <a:ext cx="11247120" cy="4785884"/>
           </a:xfrm>
           <a:prstGeom prst="rect">
             <a:avLst/>
@@ -5479,45 +6854,18 @@
       </p:pic>
       <p:sp>
         <p:nvSpPr>
-          <p:cNvPr id="6" name="Shape 3"/>
-          <p:cNvSpPr/>
-          <p:nvPr/>
-        </p:nvSpPr>
-        <p:spPr>
-          <a:xfrm>
-            <a:off x="548640" y="5614416"/>
-            <a:ext cx="3520440" cy="786384"/>
+          <p:cNvPr id="5" name="Shape 2"/>
+          <p:cNvSpPr/>
+          <p:nvPr/>
+        </p:nvSpPr>
+        <p:spPr>
+          <a:xfrm>
+            <a:off x="457200" y="6035040"/>
+            <a:ext cx="54864" cy="457200"/>
           </a:xfrm>
           <a:prstGeom prst="roundRect">
             <a:avLst>
-              <a:gd name="adj" fmla="val 10465"/>
-            </a:avLst>
-          </a:prstGeom>
-          <a:solidFill>
-            <a:srgbClr val="FFFFFF"/>
-          </a:solidFill>
-          <a:ln w="12700">
-            <a:solidFill>
-              <a:srgbClr val="E3E9E5"/>
-            </a:solidFill>
-            <a:prstDash val="solid"/>
-          </a:ln>
-        </p:spPr>
-      </p:sp>
-      <p:sp>
-        <p:nvSpPr>
-          <p:cNvPr id="7" name="Shape 4"/>
-          <p:cNvSpPr/>
-          <p:nvPr/>
-        </p:nvSpPr>
-        <p:spPr>
-          <a:xfrm>
-            <a:off x="548640" y="5614416"/>
-            <a:ext cx="64008" cy="786384"/>
-          </a:xfrm>
-          <a:prstGeom prst="roundRect">
-            <a:avLst>
-              <a:gd name="adj" fmla="val 42857"/>
+              <a:gd name="adj" fmla="val 50000"/>
             </a:avLst>
           </a:prstGeom>
           <a:solidFill>
@@ -5533,14 +6881,14 @@
       </p:sp>
       <p:sp>
         <p:nvSpPr>
-          <p:cNvPr id="8" name="Text 5"/>
-          <p:cNvSpPr/>
-          <p:nvPr/>
-        </p:nvSpPr>
-        <p:spPr>
-          <a:xfrm>
-            <a:off x="768096" y="5687568"/>
-            <a:ext cx="3108960" cy="256032"/>
+          <p:cNvPr id="6" name="Text 3"/>
+          <p:cNvSpPr/>
+          <p:nvPr/>
+        </p:nvSpPr>
+        <p:spPr>
+          <a:xfrm>
+            <a:off x="658368" y="6035040"/>
+            <a:ext cx="10607040" cy="457200"/>
           </a:xfrm>
           <a:prstGeom prst="rect">
             <a:avLst/>
@@ -5556,15 +6904,15 @@
               <a:buNone/>
             </a:pPr>
             <a:r>
-              <a:rPr lang="en-US" sz="1150" b="1" dirty="0">
-                <a:solidFill>
-                  <a:srgbClr val="16211C"/>
-                </a:solidFill>
-                <a:latin typeface="맑은 고딕" pitchFamily="34" charset="0"/>
-                <a:ea typeface="맑은 고딕" pitchFamily="34" charset="-122"/>
-                <a:cs typeface="맑은 고딕" pitchFamily="34" charset="-120"/>
-              </a:rPr>
-              <a:t>폴더가 곧 검색 범위다</a:t>
+              <a:rPr lang="en-US" sz="1150" dirty="0">
+                <a:solidFill>
+                  <a:srgbClr val="44524B"/>
+                </a:solidFill>
+                <a:latin typeface="맑은 고딕" pitchFamily="34" charset="0"/>
+                <a:ea typeface="맑은 고딕" pitchFamily="34" charset="-122"/>
+                <a:cs typeface="맑은 고딕" pitchFamily="34" charset="-120"/>
+              </a:rPr>
+              <a:t>보종은 묻지 않습니다. 상품명을 치면 매칭되고, 겹치는 상품을 나란히 놓습니다.</a:t>
             </a:r>
             <a:endParaRPr lang="en-US" sz="1150" dirty="0"/>
           </a:p>
@@ -5572,319 +6920,7 @@
       </p:sp>
       <p:sp>
         <p:nvSpPr>
-          <p:cNvPr id="9" name="Text 6"/>
-          <p:cNvSpPr/>
-          <p:nvPr/>
-        </p:nvSpPr>
-        <p:spPr>
-          <a:xfrm>
-            <a:off x="768096" y="5943600"/>
-            <a:ext cx="3108960" cy="420624"/>
-          </a:xfrm>
-          <a:prstGeom prst="rect">
-            <a:avLst/>
-          </a:prstGeom>
-          <a:noFill/>
-          <a:ln/>
-        </p:spPr>
-        <p:txBody>
-          <a:bodyPr wrap="square" rtlCol="0" anchor="ctr"/>
-          <a:lstStyle/>
-          <a:p>
-            <a:pPr indent="0" marL="0">
-              <a:lnSpc>
-                <a:spcPts val="1300"/>
-              </a:lnSpc>
-              <a:buNone/>
-            </a:pPr>
-            <a:r>
-              <a:rPr lang="en-US" sz="950" dirty="0">
-                <a:solidFill>
-                  <a:srgbClr val="44524B"/>
-                </a:solidFill>
-                <a:latin typeface="맑은 고딕" pitchFamily="34" charset="0"/>
-                <a:ea typeface="맑은 고딕" pitchFamily="34" charset="-122"/>
-                <a:cs typeface="맑은 고딕" pitchFamily="34" charset="-120"/>
-              </a:rPr>
-              <a:t>그 고객 약관 4건 안에서만 찾습니다.</a:t>
-            </a:r>
-            <a:endParaRPr lang="en-US" sz="950" dirty="0"/>
-          </a:p>
-        </p:txBody>
-      </p:sp>
-      <p:sp>
-        <p:nvSpPr>
-          <p:cNvPr id="10" name="Shape 7"/>
-          <p:cNvSpPr/>
-          <p:nvPr/>
-        </p:nvSpPr>
-        <p:spPr>
-          <a:xfrm>
-            <a:off x="4288536" y="5614416"/>
-            <a:ext cx="3520440" cy="786384"/>
-          </a:xfrm>
-          <a:prstGeom prst="roundRect">
-            <a:avLst>
-              <a:gd name="adj" fmla="val 10465"/>
-            </a:avLst>
-          </a:prstGeom>
-          <a:solidFill>
-            <a:srgbClr val="FFFFFF"/>
-          </a:solidFill>
-          <a:ln w="12700">
-            <a:solidFill>
-              <a:srgbClr val="E3E9E5"/>
-            </a:solidFill>
-            <a:prstDash val="solid"/>
-          </a:ln>
-        </p:spPr>
-      </p:sp>
-      <p:sp>
-        <p:nvSpPr>
-          <p:cNvPr id="11" name="Shape 8"/>
-          <p:cNvSpPr/>
-          <p:nvPr/>
-        </p:nvSpPr>
-        <p:spPr>
-          <a:xfrm>
-            <a:off x="4288536" y="5614416"/>
-            <a:ext cx="64008" cy="786384"/>
-          </a:xfrm>
-          <a:prstGeom prst="roundRect">
-            <a:avLst>
-              <a:gd name="adj" fmla="val 42857"/>
-            </a:avLst>
-          </a:prstGeom>
-          <a:solidFill>
-            <a:srgbClr val="14A05A"/>
-          </a:solidFill>
-          <a:ln w="12700">
-            <a:solidFill>
-              <a:srgbClr val="14A05A"/>
-            </a:solidFill>
-            <a:prstDash val="solid"/>
-          </a:ln>
-        </p:spPr>
-      </p:sp>
-      <p:sp>
-        <p:nvSpPr>
-          <p:cNvPr id="12" name="Text 9"/>
-          <p:cNvSpPr/>
-          <p:nvPr/>
-        </p:nvSpPr>
-        <p:spPr>
-          <a:xfrm>
-            <a:off x="4507992" y="5687568"/>
-            <a:ext cx="3108960" cy="256032"/>
-          </a:xfrm>
-          <a:prstGeom prst="rect">
-            <a:avLst/>
-          </a:prstGeom>
-          <a:noFill/>
-          <a:ln/>
-        </p:spPr>
-        <p:txBody>
-          <a:bodyPr wrap="square" rtlCol="0" anchor="ctr"/>
-          <a:lstStyle/>
-          <a:p>
-            <a:pPr indent="0" marL="0">
-              <a:buNone/>
-            </a:pPr>
-            <a:r>
-              <a:rPr lang="en-US" sz="1150" b="1" dirty="0">
-                <a:solidFill>
-                  <a:srgbClr val="16211C"/>
-                </a:solidFill>
-                <a:latin typeface="맑은 고딕" pitchFamily="34" charset="0"/>
-                <a:ea typeface="맑은 고딕" pitchFamily="34" charset="-122"/>
-                <a:cs typeface="맑은 고딕" pitchFamily="34" charset="-120"/>
-              </a:rPr>
-              <a:t>청구 누락을 잡는다</a:t>
-            </a:r>
-            <a:endParaRPr lang="en-US" sz="1150" dirty="0"/>
-          </a:p>
-        </p:txBody>
-      </p:sp>
-      <p:sp>
-        <p:nvSpPr>
-          <p:cNvPr id="13" name="Text 10"/>
-          <p:cNvSpPr/>
-          <p:nvPr/>
-        </p:nvSpPr>
-        <p:spPr>
-          <a:xfrm>
-            <a:off x="4507992" y="5943600"/>
-            <a:ext cx="3108960" cy="420624"/>
-          </a:xfrm>
-          <a:prstGeom prst="rect">
-            <a:avLst/>
-          </a:prstGeom>
-          <a:noFill/>
-          <a:ln/>
-        </p:spPr>
-        <p:txBody>
-          <a:bodyPr wrap="square" rtlCol="0" anchor="ctr"/>
-          <a:lstStyle/>
-          <a:p>
-            <a:pPr indent="0" marL="0">
-              <a:lnSpc>
-                <a:spcPts val="1300"/>
-              </a:lnSpc>
-              <a:buNone/>
-            </a:pPr>
-            <a:r>
-              <a:rPr lang="en-US" sz="950" dirty="0">
-                <a:solidFill>
-                  <a:srgbClr val="44524B"/>
-                </a:solidFill>
-                <a:latin typeface="맑은 고딕" pitchFamily="34" charset="0"/>
-                <a:ea typeface="맑은 고딕" pitchFamily="34" charset="-122"/>
-                <a:cs typeface="맑은 고딕" pitchFamily="34" charset="-120"/>
-              </a:rPr>
-              <a:t>담보가 여러 계약에 걸치면 모두 보여줍니다.</a:t>
-            </a:r>
-            <a:endParaRPr lang="en-US" sz="950" dirty="0"/>
-          </a:p>
-        </p:txBody>
-      </p:sp>
-      <p:sp>
-        <p:nvSpPr>
-          <p:cNvPr id="14" name="Shape 11"/>
-          <p:cNvSpPr/>
-          <p:nvPr/>
-        </p:nvSpPr>
-        <p:spPr>
-          <a:xfrm>
-            <a:off x="8028432" y="5614416"/>
-            <a:ext cx="3520440" cy="786384"/>
-          </a:xfrm>
-          <a:prstGeom prst="roundRect">
-            <a:avLst>
-              <a:gd name="adj" fmla="val 10465"/>
-            </a:avLst>
-          </a:prstGeom>
-          <a:solidFill>
-            <a:srgbClr val="FFFFFF"/>
-          </a:solidFill>
-          <a:ln w="12700">
-            <a:solidFill>
-              <a:srgbClr val="E3E9E5"/>
-            </a:solidFill>
-            <a:prstDash val="solid"/>
-          </a:ln>
-        </p:spPr>
-      </p:sp>
-      <p:sp>
-        <p:nvSpPr>
-          <p:cNvPr id="15" name="Shape 12"/>
-          <p:cNvSpPr/>
-          <p:nvPr/>
-        </p:nvSpPr>
-        <p:spPr>
-          <a:xfrm>
-            <a:off x="8028432" y="5614416"/>
-            <a:ext cx="64008" cy="786384"/>
-          </a:xfrm>
-          <a:prstGeom prst="roundRect">
-            <a:avLst>
-              <a:gd name="adj" fmla="val 42857"/>
-            </a:avLst>
-          </a:prstGeom>
-          <a:solidFill>
-            <a:srgbClr val="14A05A"/>
-          </a:solidFill>
-          <a:ln w="12700">
-            <a:solidFill>
-              <a:srgbClr val="14A05A"/>
-            </a:solidFill>
-            <a:prstDash val="solid"/>
-          </a:ln>
-        </p:spPr>
-      </p:sp>
-      <p:sp>
-        <p:nvSpPr>
-          <p:cNvPr id="16" name="Text 13"/>
-          <p:cNvSpPr/>
-          <p:nvPr/>
-        </p:nvSpPr>
-        <p:spPr>
-          <a:xfrm>
-            <a:off x="8247888" y="5687568"/>
-            <a:ext cx="3108960" cy="256032"/>
-          </a:xfrm>
-          <a:prstGeom prst="rect">
-            <a:avLst/>
-          </a:prstGeom>
-          <a:noFill/>
-          <a:ln/>
-        </p:spPr>
-        <p:txBody>
-          <a:bodyPr wrap="square" rtlCol="0" anchor="ctr"/>
-          <a:lstStyle/>
-          <a:p>
-            <a:pPr indent="0" marL="0">
-              <a:buNone/>
-            </a:pPr>
-            <a:r>
-              <a:rPr lang="en-US" sz="1150" b="1" dirty="0">
-                <a:solidFill>
-                  <a:srgbClr val="16211C"/>
-                </a:solidFill>
-                <a:latin typeface="맑은 고딕" pitchFamily="34" charset="0"/>
-                <a:ea typeface="맑은 고딕" pitchFamily="34" charset="-122"/>
-                <a:cs typeface="맑은 고딕" pitchFamily="34" charset="-120"/>
-              </a:rPr>
-              <a:t>답할 수 있는 수를 밝힌다</a:t>
-            </a:r>
-            <a:endParaRPr lang="en-US" sz="1150" dirty="0"/>
-          </a:p>
-        </p:txBody>
-      </p:sp>
-      <p:sp>
-        <p:nvSpPr>
-          <p:cNvPr id="17" name="Text 14"/>
-          <p:cNvSpPr/>
-          <p:nvPr/>
-        </p:nvSpPr>
-        <p:spPr>
-          <a:xfrm>
-            <a:off x="8247888" y="5943600"/>
-            <a:ext cx="3108960" cy="420624"/>
-          </a:xfrm>
-          <a:prstGeom prst="rect">
-            <a:avLst/>
-          </a:prstGeom>
-          <a:noFill/>
-          <a:ln/>
-        </p:spPr>
-        <p:txBody>
-          <a:bodyPr wrap="square" rtlCol="0" anchor="ctr"/>
-          <a:lstStyle/>
-          <a:p>
-            <a:pPr indent="0" marL="0">
-              <a:lnSpc>
-                <a:spcPts val="1300"/>
-              </a:lnSpc>
-              <a:buNone/>
-            </a:pPr>
-            <a:r>
-              <a:rPr lang="en-US" sz="950" dirty="0">
-                <a:solidFill>
-                  <a:srgbClr val="44524B"/>
-                </a:solidFill>
-                <a:latin typeface="맑은 고딕" pitchFamily="34" charset="0"/>
-                <a:ea typeface="맑은 고딕" pitchFamily="34" charset="-122"/>
-                <a:cs typeface="맑은 고딕" pitchFamily="34" charset="-120"/>
-              </a:rPr>
-              <a:t>약관이 2건뿐이면 「답할 수 있는 건 2건」이라고 씁니다.</a:t>
-            </a:r>
-            <a:endParaRPr lang="en-US" sz="950" dirty="0"/>
-          </a:p>
-        </p:txBody>
-      </p:sp>
-      <p:sp>
-        <p:nvSpPr>
-          <p:cNvPr id="18" name="Text 15"/>
+          <p:cNvPr id="7" name="Text 4"/>
           <p:cNvSpPr/>
           <p:nvPr/>
         </p:nvSpPr>
@@ -5961,8 +6997,8 @@
         </p:nvSpPr>
         <p:spPr>
           <a:xfrm>
-            <a:off x="548640" y="292608"/>
-            <a:ext cx="11064240" cy="219456"/>
+            <a:off x="457200" y="219456"/>
+            <a:ext cx="7863840" cy="201168"/>
           </a:xfrm>
           <a:prstGeom prst="rect">
             <a:avLst/>
@@ -5978,7 +7014,7 @@
               <a:buNone/>
             </a:pPr>
             <a:r>
-              <a:rPr lang="en-US" sz="1100" b="1" spc="200" kern="0" dirty="0">
+              <a:rPr lang="en-US" sz="1050" b="1" spc="180" kern="0" dirty="0">
                 <a:solidFill>
                   <a:srgbClr val="0B7C44"/>
                 </a:solidFill>
@@ -5986,9 +7022,9 @@
                 <a:ea typeface="맑은 고딕" pitchFamily="34" charset="-122"/>
                 <a:cs typeface="맑은 고딕" pitchFamily="34" charset="-120"/>
               </a:rPr>
-              <a:t>화면 ⑤ 약관 등록</a:t>
-            </a:r>
-            <a:endParaRPr lang="en-US" sz="1100" dirty="0"/>
+              <a:t>화면 ② 약관 짚어내기  ·  3/3</a:t>
+            </a:r>
+            <a:endParaRPr lang="en-US" sz="1050" dirty="0"/>
           </a:p>
         </p:txBody>
       </p:sp>
@@ -6000,8 +7036,8 @@
         </p:nvSpPr>
         <p:spPr>
           <a:xfrm>
-            <a:off x="548640" y="512064"/>
-            <a:ext cx="7863840" cy="420624"/>
+            <a:off x="457200" y="420624"/>
+            <a:ext cx="8595360" cy="365760"/>
           </a:xfrm>
           <a:prstGeom prst="rect">
             <a:avLst/>
@@ -6017,7 +7053,7 @@
               <a:buNone/>
             </a:pPr>
             <a:r>
-              <a:rPr lang="en-US" sz="2400" b="1" dirty="0">
+              <a:rPr lang="en-US" sz="2000" b="1" dirty="0">
                 <a:solidFill>
                   <a:srgbClr val="16211C"/>
                 </a:solidFill>
@@ -6025,54 +7061,15 @@
                 <a:ea typeface="맑은 고딕" pitchFamily="34" charset="-122"/>
                 <a:cs typeface="맑은 고딕" pitchFamily="34" charset="-120"/>
               </a:rPr>
-              <a:t>지금은 하나씩 넣습니다. My Data가 열리면 한 번에 들어옵니다</a:t>
-            </a:r>
-            <a:endParaRPr lang="en-US" sz="2400" dirty="0"/>
-          </a:p>
-        </p:txBody>
-      </p:sp>
-      <p:sp>
-        <p:nvSpPr>
-          <p:cNvPr id="4" name="Text 2"/>
-          <p:cNvSpPr/>
-          <p:nvPr/>
-        </p:nvSpPr>
-        <p:spPr>
-          <a:xfrm>
-            <a:off x="548640" y="950976"/>
-            <a:ext cx="11064240" cy="274320"/>
-          </a:xfrm>
-          <a:prstGeom prst="rect">
-            <a:avLst/>
-          </a:prstGeom>
-          <a:noFill/>
-          <a:ln/>
-        </p:spPr>
-        <p:txBody>
-          <a:bodyPr wrap="square" rtlCol="0" anchor="ctr"/>
-          <a:lstStyle/>
-          <a:p>
-            <a:pPr indent="0" marL="0">
-              <a:buNone/>
-            </a:pPr>
-            <a:r>
-              <a:rPr lang="en-US" sz="1200" dirty="0">
-                <a:solidFill>
-                  <a:srgbClr val="7A867F"/>
-                </a:solidFill>
-                <a:latin typeface="맑은 고딕" pitchFamily="34" charset="0"/>
-                <a:ea typeface="맑은 고딕" pitchFamily="34" charset="-122"/>
-                <a:cs typeface="맑은 고딕" pitchFamily="34" charset="-120"/>
-              </a:rPr>
-              <a:t>경로를 빠른 순으로 놓되, 아직 안 열린 것은 두되 잠급니다.</a:t>
-            </a:r>
-            <a:endParaRPr lang="en-US" sz="1200" dirty="0"/>
+              <a:t>대화하면서 정확한 상품을 짚어냅니다</a:t>
+            </a:r>
+            <a:endParaRPr lang="en-US" sz="2000" dirty="0"/>
           </a:p>
         </p:txBody>
       </p:sp>
       <p:pic>
         <p:nvPicPr>
-          <p:cNvPr id="5" name="Image 0" descr="/tmp/claude-0/-home-user-chacha6377/ca7f6080-cf3a-5093-8a0d-eb3bfdb80785/scratchpad/app_register_wide.png">    </p:cNvPr>
+          <p:cNvPr id="4" name="Image 0" descr="/tmp/claude-0/-home-user-chacha6377/ca7f6080-cf3a-5093-8a0d-eb3bfdb80785/scratchpad/app_scope_p3.png">    </p:cNvPr>
           <p:cNvPicPr>
             <a:picLocks noChangeAspect="1"/>
           </p:cNvPicPr>
@@ -6086,8 +7083,8 @@
         </p:blipFill>
         <p:spPr>
           <a:xfrm>
-            <a:off x="929052" y="1298448"/>
-            <a:ext cx="10303417" cy="4169664"/>
+            <a:off x="457200" y="1054346"/>
+            <a:ext cx="11247120" cy="4785884"/>
           </a:xfrm>
           <a:prstGeom prst="rect">
             <a:avLst/>
@@ -6096,45 +7093,18 @@
       </p:pic>
       <p:sp>
         <p:nvSpPr>
-          <p:cNvPr id="6" name="Shape 3"/>
-          <p:cNvSpPr/>
-          <p:nvPr/>
-        </p:nvSpPr>
-        <p:spPr>
-          <a:xfrm>
-            <a:off x="548640" y="5614416"/>
-            <a:ext cx="3520440" cy="786384"/>
+          <p:cNvPr id="5" name="Shape 2"/>
+          <p:cNvSpPr/>
+          <p:nvPr/>
+        </p:nvSpPr>
+        <p:spPr>
+          <a:xfrm>
+            <a:off x="457200" y="6035040"/>
+            <a:ext cx="54864" cy="457200"/>
           </a:xfrm>
           <a:prstGeom prst="roundRect">
             <a:avLst>
-              <a:gd name="adj" fmla="val 10465"/>
-            </a:avLst>
-          </a:prstGeom>
-          <a:solidFill>
-            <a:srgbClr val="FFFFFF"/>
-          </a:solidFill>
-          <a:ln w="12700">
-            <a:solidFill>
-              <a:srgbClr val="E3E9E5"/>
-            </a:solidFill>
-            <a:prstDash val="solid"/>
-          </a:ln>
-        </p:spPr>
-      </p:sp>
-      <p:sp>
-        <p:nvSpPr>
-          <p:cNvPr id="7" name="Shape 4"/>
-          <p:cNvSpPr/>
-          <p:nvPr/>
-        </p:nvSpPr>
-        <p:spPr>
-          <a:xfrm>
-            <a:off x="548640" y="5614416"/>
-            <a:ext cx="64008" cy="786384"/>
-          </a:xfrm>
-          <a:prstGeom prst="roundRect">
-            <a:avLst>
-              <a:gd name="adj" fmla="val 42857"/>
+              <a:gd name="adj" fmla="val 50000"/>
             </a:avLst>
           </a:prstGeom>
           <a:solidFill>
@@ -6150,14 +7120,14 @@
       </p:sp>
       <p:sp>
         <p:nvSpPr>
-          <p:cNvPr id="8" name="Text 5"/>
-          <p:cNvSpPr/>
-          <p:nvPr/>
-        </p:nvSpPr>
-        <p:spPr>
-          <a:xfrm>
-            <a:off x="768096" y="5687568"/>
-            <a:ext cx="3108960" cy="256032"/>
+          <p:cNvPr id="6" name="Text 3"/>
+          <p:cNvSpPr/>
+          <p:nvPr/>
+        </p:nvSpPr>
+        <p:spPr>
+          <a:xfrm>
+            <a:off x="658368" y="6035040"/>
+            <a:ext cx="10607040" cy="457200"/>
           </a:xfrm>
           <a:prstGeom prst="rect">
             <a:avLst/>
@@ -6173,15 +7143,15 @@
               <a:buNone/>
             </a:pPr>
             <a:r>
-              <a:rPr lang="en-US" sz="1150" b="1" dirty="0">
-                <a:solidFill>
-                  <a:srgbClr val="16211C"/>
-                </a:solidFill>
-                <a:latin typeface="맑은 고딕" pitchFamily="34" charset="0"/>
-                <a:ea typeface="맑은 고딕" pitchFamily="34" charset="-122"/>
-                <a:cs typeface="맑은 고딕" pitchFamily="34" charset="-120"/>
-              </a:rPr>
-              <a:t>안 열린 길도 보여준다</a:t>
+              <a:rPr lang="en-US" sz="1150" dirty="0">
+                <a:solidFill>
+                  <a:srgbClr val="44524B"/>
+                </a:solidFill>
+                <a:latin typeface="맑은 고딕" pitchFamily="34" charset="0"/>
+                <a:ea typeface="맑은 고딕" pitchFamily="34" charset="-122"/>
+                <a:cs typeface="맑은 고딕" pitchFamily="34" charset="-120"/>
+              </a:rPr>
+              <a:t>「보상은 가입 시점의 약관을 따릅니다」 — 왜 묻는지를 함께 말합니다.</a:t>
             </a:r>
             <a:endParaRPr lang="en-US" sz="1150" dirty="0"/>
           </a:p>
@@ -6189,319 +7159,7 @@
       </p:sp>
       <p:sp>
         <p:nvSpPr>
-          <p:cNvPr id="9" name="Text 6"/>
-          <p:cNvSpPr/>
-          <p:nvPr/>
-        </p:nvSpPr>
-        <p:spPr>
-          <a:xfrm>
-            <a:off x="768096" y="5943600"/>
-            <a:ext cx="3108960" cy="420624"/>
-          </a:xfrm>
-          <a:prstGeom prst="rect">
-            <a:avLst/>
-          </a:prstGeom>
-          <a:noFill/>
-          <a:ln/>
-        </p:spPr>
-        <p:txBody>
-          <a:bodyPr wrap="square" rtlCol="0" anchor="ctr"/>
-          <a:lstStyle/>
-          <a:p>
-            <a:pPr indent="0" marL="0">
-              <a:lnSpc>
-                <a:spcPts val="1300"/>
-              </a:lnSpc>
-              <a:buNone/>
-            </a:pPr>
-            <a:r>
-              <a:rPr lang="en-US" sz="950" dirty="0">
-                <a:solidFill>
-                  <a:srgbClr val="44524B"/>
-                </a:solidFill>
-                <a:latin typeface="맑은 고딕" pitchFamily="34" charset="0"/>
-                <a:ea typeface="맑은 고딕" pitchFamily="34" charset="-122"/>
-                <a:cs typeface="맑은 고딕" pitchFamily="34" charset="-120"/>
-              </a:rPr>
-              <a:t>곧 열릴 경로가 있다는 사실 자체가 안내입니다.</a:t>
-            </a:r>
-            <a:endParaRPr lang="en-US" sz="950" dirty="0"/>
-          </a:p>
-        </p:txBody>
-      </p:sp>
-      <p:sp>
-        <p:nvSpPr>
-          <p:cNvPr id="10" name="Shape 7"/>
-          <p:cNvSpPr/>
-          <p:nvPr/>
-        </p:nvSpPr>
-        <p:spPr>
-          <a:xfrm>
-            <a:off x="4288536" y="5614416"/>
-            <a:ext cx="3520440" cy="786384"/>
-          </a:xfrm>
-          <a:prstGeom prst="roundRect">
-            <a:avLst>
-              <a:gd name="adj" fmla="val 10465"/>
-            </a:avLst>
-          </a:prstGeom>
-          <a:solidFill>
-            <a:srgbClr val="FFFFFF"/>
-          </a:solidFill>
-          <a:ln w="12700">
-            <a:solidFill>
-              <a:srgbClr val="E3E9E5"/>
-            </a:solidFill>
-            <a:prstDash val="solid"/>
-          </a:ln>
-        </p:spPr>
-      </p:sp>
-      <p:sp>
-        <p:nvSpPr>
-          <p:cNvPr id="11" name="Shape 8"/>
-          <p:cNvSpPr/>
-          <p:nvPr/>
-        </p:nvSpPr>
-        <p:spPr>
-          <a:xfrm>
-            <a:off x="4288536" y="5614416"/>
-            <a:ext cx="64008" cy="786384"/>
-          </a:xfrm>
-          <a:prstGeom prst="roundRect">
-            <a:avLst>
-              <a:gd name="adj" fmla="val 42857"/>
-            </a:avLst>
-          </a:prstGeom>
-          <a:solidFill>
-            <a:srgbClr val="14A05A"/>
-          </a:solidFill>
-          <a:ln w="12700">
-            <a:solidFill>
-              <a:srgbClr val="14A05A"/>
-            </a:solidFill>
-            <a:prstDash val="solid"/>
-          </a:ln>
-        </p:spPr>
-      </p:sp>
-      <p:sp>
-        <p:nvSpPr>
-          <p:cNvPr id="12" name="Text 9"/>
-          <p:cNvSpPr/>
-          <p:nvPr/>
-        </p:nvSpPr>
-        <p:spPr>
-          <a:xfrm>
-            <a:off x="4507992" y="5687568"/>
-            <a:ext cx="3108960" cy="256032"/>
-          </a:xfrm>
-          <a:prstGeom prst="rect">
-            <a:avLst/>
-          </a:prstGeom>
-          <a:noFill/>
-          <a:ln/>
-        </p:spPr>
-        <p:txBody>
-          <a:bodyPr wrap="square" rtlCol="0" anchor="ctr"/>
-          <a:lstStyle/>
-          <a:p>
-            <a:pPr indent="0" marL="0">
-              <a:buNone/>
-            </a:pPr>
-            <a:r>
-              <a:rPr lang="en-US" sz="1150" b="1" dirty="0">
-                <a:solidFill>
-                  <a:srgbClr val="16211C"/>
-                </a:solidFill>
-                <a:latin typeface="맑은 고딕" pitchFamily="34" charset="0"/>
-                <a:ea typeface="맑은 고딕" pitchFamily="34" charset="-122"/>
-                <a:cs typeface="맑은 고딕" pitchFamily="34" charset="-120"/>
-              </a:rPr>
-              <a:t>이미 말한 상품은 다시 안 찾는다</a:t>
-            </a:r>
-            <a:endParaRPr lang="en-US" sz="1150" dirty="0"/>
-          </a:p>
-        </p:txBody>
-      </p:sp>
-      <p:sp>
-        <p:nvSpPr>
-          <p:cNvPr id="13" name="Text 10"/>
-          <p:cNvSpPr/>
-          <p:nvPr/>
-        </p:nvSpPr>
-        <p:spPr>
-          <a:xfrm>
-            <a:off x="4507992" y="5943600"/>
-            <a:ext cx="3108960" cy="420624"/>
-          </a:xfrm>
-          <a:prstGeom prst="rect">
-            <a:avLst/>
-          </a:prstGeom>
-          <a:noFill/>
-          <a:ln/>
-        </p:spPr>
-        <p:txBody>
-          <a:bodyPr wrap="square" rtlCol="0" anchor="ctr"/>
-          <a:lstStyle/>
-          <a:p>
-            <a:pPr indent="0" marL="0">
-              <a:lnSpc>
-                <a:spcPts val="1300"/>
-              </a:lnSpc>
-              <a:buNone/>
-            </a:pPr>
-            <a:r>
-              <a:rPr lang="en-US" sz="950" dirty="0">
-                <a:solidFill>
-                  <a:srgbClr val="44524B"/>
-                </a:solidFill>
-                <a:latin typeface="맑은 고딕" pitchFamily="34" charset="0"/>
-                <a:ea typeface="맑은 고딕" pitchFamily="34" charset="-122"/>
-                <a:cs typeface="맑은 고딕" pitchFamily="34" charset="-120"/>
-              </a:rPr>
-              <a:t>지금 가장 빠른 길입니다.</a:t>
-            </a:r>
-            <a:endParaRPr lang="en-US" sz="950" dirty="0"/>
-          </a:p>
-        </p:txBody>
-      </p:sp>
-      <p:sp>
-        <p:nvSpPr>
-          <p:cNvPr id="14" name="Shape 11"/>
-          <p:cNvSpPr/>
-          <p:nvPr/>
-        </p:nvSpPr>
-        <p:spPr>
-          <a:xfrm>
-            <a:off x="8028432" y="5614416"/>
-            <a:ext cx="3520440" cy="786384"/>
-          </a:xfrm>
-          <a:prstGeom prst="roundRect">
-            <a:avLst>
-              <a:gd name="adj" fmla="val 10465"/>
-            </a:avLst>
-          </a:prstGeom>
-          <a:solidFill>
-            <a:srgbClr val="FFFFFF"/>
-          </a:solidFill>
-          <a:ln w="12700">
-            <a:solidFill>
-              <a:srgbClr val="E3E9E5"/>
-            </a:solidFill>
-            <a:prstDash val="solid"/>
-          </a:ln>
-        </p:spPr>
-      </p:sp>
-      <p:sp>
-        <p:nvSpPr>
-          <p:cNvPr id="15" name="Shape 12"/>
-          <p:cNvSpPr/>
-          <p:nvPr/>
-        </p:nvSpPr>
-        <p:spPr>
-          <a:xfrm>
-            <a:off x="8028432" y="5614416"/>
-            <a:ext cx="64008" cy="786384"/>
-          </a:xfrm>
-          <a:prstGeom prst="roundRect">
-            <a:avLst>
-              <a:gd name="adj" fmla="val 42857"/>
-            </a:avLst>
-          </a:prstGeom>
-          <a:solidFill>
-            <a:srgbClr val="14A05A"/>
-          </a:solidFill>
-          <a:ln w="12700">
-            <a:solidFill>
-              <a:srgbClr val="14A05A"/>
-            </a:solidFill>
-            <a:prstDash val="solid"/>
-          </a:ln>
-        </p:spPr>
-      </p:sp>
-      <p:sp>
-        <p:nvSpPr>
-          <p:cNvPr id="16" name="Text 13"/>
-          <p:cNvSpPr/>
-          <p:nvPr/>
-        </p:nvSpPr>
-        <p:spPr>
-          <a:xfrm>
-            <a:off x="8247888" y="5687568"/>
-            <a:ext cx="3108960" cy="256032"/>
-          </a:xfrm>
-          <a:prstGeom prst="rect">
-            <a:avLst/>
-          </a:prstGeom>
-          <a:noFill/>
-          <a:ln/>
-        </p:spPr>
-        <p:txBody>
-          <a:bodyPr wrap="square" rtlCol="0" anchor="ctr"/>
-          <a:lstStyle/>
-          <a:p>
-            <a:pPr indent="0" marL="0">
-              <a:buNone/>
-            </a:pPr>
-            <a:r>
-              <a:rPr lang="en-US" sz="1150" b="1" dirty="0">
-                <a:solidFill>
-                  <a:srgbClr val="16211C"/>
-                </a:solidFill>
-                <a:latin typeface="맑은 고딕" pitchFamily="34" charset="0"/>
-                <a:ea typeface="맑은 고딕" pitchFamily="34" charset="-122"/>
-                <a:cs typeface="맑은 고딕" pitchFamily="34" charset="-120"/>
-              </a:rPr>
-              <a:t>「최근 등록한 상품」은 뺐다</a:t>
-            </a:r>
-            <a:endParaRPr lang="en-US" sz="1150" dirty="0"/>
-          </a:p>
-        </p:txBody>
-      </p:sp>
-      <p:sp>
-        <p:nvSpPr>
-          <p:cNvPr id="17" name="Text 14"/>
-          <p:cNvSpPr/>
-          <p:nvPr/>
-        </p:nvSpPr>
-        <p:spPr>
-          <a:xfrm>
-            <a:off x="8247888" y="5943600"/>
-            <a:ext cx="3108960" cy="420624"/>
-          </a:xfrm>
-          <a:prstGeom prst="rect">
-            <a:avLst/>
-          </a:prstGeom>
-          <a:noFill/>
-          <a:ln/>
-        </p:spPr>
-        <p:txBody>
-          <a:bodyPr wrap="square" rtlCol="0" anchor="ctr"/>
-          <a:lstStyle/>
-          <a:p>
-            <a:pPr indent="0" marL="0">
-              <a:lnSpc>
-                <a:spcPts val="1300"/>
-              </a:lnSpc>
-              <a:buNone/>
-            </a:pPr>
-            <a:r>
-              <a:rPr lang="en-US" sz="950" dirty="0">
-                <a:solidFill>
-                  <a:srgbClr val="44524B"/>
-                </a:solidFill>
-                <a:latin typeface="맑은 고딕" pitchFamily="34" charset="0"/>
-                <a:ea typeface="맑은 고딕" pitchFamily="34" charset="-122"/>
-                <a:cs typeface="맑은 고딕" pitchFamily="34" charset="-120"/>
-              </a:rPr>
-              <a:t>다른 고객 계약을 끌어오게 됩니다.</a:t>
-            </a:r>
-            <a:endParaRPr lang="en-US" sz="950" dirty="0"/>
-          </a:p>
-        </p:txBody>
-      </p:sp>
-      <p:sp>
-        <p:nvSpPr>
-          <p:cNvPr id="18" name="Text 15"/>
+          <p:cNvPr id="7" name="Text 4"/>
           <p:cNvSpPr/>
           <p:nvPr/>
         </p:nvSpPr>
@@ -6552,7 +7210,7 @@
     <p:bg>
       <p:bgPr>
         <a:solidFill>
-          <a:srgbClr val="14201B"/>
+          <a:srgbClr val="FBFCFB"/>
         </a:solidFill>
       </p:bgPr>
     </p:bg>
@@ -6578,8 +7236,8 @@
         </p:nvSpPr>
         <p:spPr>
           <a:xfrm>
-            <a:off x="822960" y="1280160"/>
-            <a:ext cx="10515600" cy="329184"/>
+            <a:off x="457200" y="219456"/>
+            <a:ext cx="7863840" cy="201168"/>
           </a:xfrm>
           <a:prstGeom prst="rect">
             <a:avLst/>
@@ -6595,17 +7253,17 @@
               <a:buNone/>
             </a:pPr>
             <a:r>
-              <a:rPr lang="en-US" sz="1300" b="1" spc="200" kern="0" dirty="0">
-                <a:solidFill>
-                  <a:srgbClr val="8FE3BE"/>
-                </a:solidFill>
-                <a:latin typeface="맑은 고딕" pitchFamily="34" charset="0"/>
-                <a:ea typeface="맑은 고딕" pitchFamily="34" charset="-122"/>
-                <a:cs typeface="맑은 고딕" pitchFamily="34" charset="-120"/>
-              </a:rPr>
-              <a:t>앞으로</a:t>
-            </a:r>
-            <a:endParaRPr lang="en-US" sz="1300" dirty="0"/>
+              <a:rPr lang="en-US" sz="1050" b="1" spc="180" kern="0" dirty="0">
+                <a:solidFill>
+                  <a:srgbClr val="0B7C44"/>
+                </a:solidFill>
+                <a:latin typeface="맑은 고딕" pitchFamily="34" charset="0"/>
+                <a:ea typeface="맑은 고딕" pitchFamily="34" charset="-122"/>
+                <a:cs typeface="맑은 고딕" pitchFamily="34" charset="-120"/>
+              </a:rPr>
+              <a:t>화면 ③ 답변  ·  1/3</a:t>
+            </a:r>
+            <a:endParaRPr lang="en-US" sz="1050" dirty="0"/>
           </a:p>
         </p:txBody>
       </p:sp>
@@ -6617,8 +7275,8 @@
         </p:nvSpPr>
         <p:spPr>
           <a:xfrm>
-            <a:off x="822960" y="1737360"/>
-            <a:ext cx="10515600" cy="1554480"/>
+            <a:off x="457200" y="420624"/>
+            <a:ext cx="8595360" cy="365760"/>
           </a:xfrm>
           <a:prstGeom prst="rect">
             <a:avLst/>
@@ -6631,62 +7289,106 @@
           <a:lstStyle/>
           <a:p>
             <a:pPr indent="0" marL="0">
-              <a:lnSpc>
-                <a:spcPts val="4600"/>
-              </a:lnSpc>
-              <a:buNone/>
-            </a:pPr>
-            <a:r>
-              <a:rPr lang="en-US" sz="3200" b="1" dirty="0">
-                <a:solidFill>
-                  <a:srgbClr val="FFFFFF"/>
-                </a:solidFill>
-                <a:latin typeface="맑은 고딕" pitchFamily="34" charset="0"/>
-                <a:ea typeface="맑은 고딕" pitchFamily="34" charset="-122"/>
-                <a:cs typeface="맑은 고딕" pitchFamily="34" charset="-120"/>
-              </a:rPr>
-              <a:t>10월 1일은 시작입니다.</a:t>
-            </a:r>
-            <a:endParaRPr lang="en-US" sz="3200" dirty="0"/>
-          </a:p>
+              <a:buNone/>
+            </a:pPr>
+            <a:r>
+              <a:rPr lang="en-US" sz="2000" b="1" dirty="0">
+                <a:solidFill>
+                  <a:srgbClr val="16211C"/>
+                </a:solidFill>
+                <a:latin typeface="맑은 고딕" pitchFamily="34" charset="0"/>
+                <a:ea typeface="맑은 고딕" pitchFamily="34" charset="-122"/>
+                <a:cs typeface="맑은 고딕" pitchFamily="34" charset="-120"/>
+              </a:rPr>
+              <a:t>면책을 먼저 판정하고 조항으로 근거를 답니다</a:t>
+            </a:r>
+            <a:endParaRPr lang="en-US" sz="2000" dirty="0"/>
+          </a:p>
+        </p:txBody>
+      </p:sp>
+      <p:sp>
+        <p:nvSpPr>
+          <p:cNvPr id="4" name="Text 2"/>
+          <p:cNvSpPr/>
+          <p:nvPr/>
+        </p:nvSpPr>
+        <p:spPr>
+          <a:xfrm>
+            <a:off x="457200" y="804672"/>
+            <a:ext cx="11247120" cy="256032"/>
+          </a:xfrm>
+          <a:prstGeom prst="rect">
+            <a:avLst/>
+          </a:prstGeom>
+          <a:noFill/>
+          <a:ln/>
+        </p:spPr>
+        <p:txBody>
+          <a:bodyPr wrap="square" rtlCol="0" anchor="ctr"/>
+          <a:lstStyle/>
           <a:p>
             <a:pPr indent="0" marL="0">
-              <a:lnSpc>
-                <a:spcPts val="4600"/>
-              </a:lnSpc>
-              <a:buNone/>
-            </a:pPr>
-            <a:r>
-              <a:rPr lang="en-US" sz="3200" b="1" dirty="0">
-                <a:solidFill>
-                  <a:srgbClr val="FFFFFF"/>
-                </a:solidFill>
-                <a:latin typeface="맑은 고딕" pitchFamily="34" charset="0"/>
-                <a:ea typeface="맑은 고딕" pitchFamily="34" charset="-122"/>
-                <a:cs typeface="맑은 고딕" pitchFamily="34" charset="-120"/>
-              </a:rPr>
-              <a:t>지금 구조 위에 계속 얹습니다.</a:t>
-            </a:r>
-            <a:endParaRPr lang="en-US" sz="3200" dirty="0"/>
-          </a:p>
-        </p:txBody>
-      </p:sp>
-      <p:sp>
-        <p:nvSpPr>
-          <p:cNvPr id="4" name="Shape 2"/>
-          <p:cNvSpPr/>
-          <p:nvPr/>
-        </p:nvSpPr>
-        <p:spPr>
-          <a:xfrm>
-            <a:off x="822960" y="3931920"/>
-            <a:ext cx="3291840" cy="0"/>
-          </a:xfrm>
-          <a:prstGeom prst="line">
-            <a:avLst/>
-          </a:prstGeom>
-          <a:noFill/>
-          <a:ln w="31750">
+              <a:buNone/>
+            </a:pPr>
+            <a:r>
+              <a:rPr lang="en-US" sz="1150" dirty="0">
+                <a:solidFill>
+                  <a:srgbClr val="7A867F"/>
+                </a:solidFill>
+                <a:latin typeface="맑은 고딕" pitchFamily="34" charset="0"/>
+                <a:ea typeface="맑은 고딕" pitchFamily="34" charset="-122"/>
+                <a:cs typeface="맑은 고딕" pitchFamily="34" charset="-120"/>
+              </a:rPr>
+              <a:t>고객을 만들지 않고 그냥 묻는 경로입니다. 대부분의 상담이 여기서 끝납니다.</a:t>
+            </a:r>
+            <a:endParaRPr lang="en-US" sz="1150" dirty="0"/>
+          </a:p>
+        </p:txBody>
+      </p:sp>
+      <p:pic>
+        <p:nvPicPr>
+          <p:cNvPr id="5" name="Image 0" descr="/tmp/claude-0/-home-user-chacha6377/ca7f6080-cf3a-5093-8a0d-eb3bfdb80785/scratchpad/app_ask_p1.png">    </p:cNvPr>
+          <p:cNvPicPr>
+            <a:picLocks noChangeAspect="1"/>
+          </p:cNvPicPr>
+          <p:nvPr/>
+        </p:nvPicPr>
+        <p:blipFill>
+          <a:blip r:embed="rId1"/>
+          <a:stretch>
+            <a:fillRect/>
+          </a:stretch>
+        </p:blipFill>
+        <p:spPr>
+          <a:xfrm>
+            <a:off x="457200" y="1154930"/>
+            <a:ext cx="11247120" cy="4785884"/>
+          </a:xfrm>
+          <a:prstGeom prst="rect">
+            <a:avLst/>
+          </a:prstGeom>
+        </p:spPr>
+      </p:pic>
+      <p:sp>
+        <p:nvSpPr>
+          <p:cNvPr id="6" name="Shape 3"/>
+          <p:cNvSpPr/>
+          <p:nvPr/>
+        </p:nvSpPr>
+        <p:spPr>
+          <a:xfrm>
+            <a:off x="457200" y="6035040"/>
+            <a:ext cx="54864" cy="457200"/>
+          </a:xfrm>
+          <a:prstGeom prst="roundRect">
+            <a:avLst>
+              <a:gd name="adj" fmla="val 50000"/>
+            </a:avLst>
+          </a:prstGeom>
+          <a:solidFill>
+            <a:srgbClr val="14A05A"/>
+          </a:solidFill>
+          <a:ln w="12700">
             <a:solidFill>
               <a:srgbClr val="14A05A"/>
             </a:solidFill>
@@ -6696,14 +7398,14 @@
       </p:sp>
       <p:sp>
         <p:nvSpPr>
-          <p:cNvPr id="5" name="Text 3"/>
-          <p:cNvSpPr/>
-          <p:nvPr/>
-        </p:nvSpPr>
-        <p:spPr>
-          <a:xfrm>
-            <a:off x="822960" y="4059936"/>
-            <a:ext cx="3291840" cy="256032"/>
+          <p:cNvPr id="7" name="Text 4"/>
+          <p:cNvSpPr/>
+          <p:nvPr/>
+        </p:nvSpPr>
+        <p:spPr>
+          <a:xfrm>
+            <a:off x="658368" y="6035040"/>
+            <a:ext cx="10607040" cy="457200"/>
           </a:xfrm>
           <a:prstGeom prst="rect">
             <a:avLst/>
@@ -6719,30 +7421,101 @@
               <a:buNone/>
             </a:pPr>
             <a:r>
-              <a:rPr lang="en-US" sz="1100" b="1" spc="100" kern="0" dirty="0">
-                <a:solidFill>
-                  <a:srgbClr val="14A05A"/>
-                </a:solidFill>
-                <a:latin typeface="맑은 고딕" pitchFamily="34" charset="0"/>
-                <a:ea typeface="맑은 고딕" pitchFamily="34" charset="-122"/>
-                <a:cs typeface="맑은 고딕" pitchFamily="34" charset="-120"/>
-              </a:rPr>
-              <a:t>지금 · 10월 1일</a:t>
-            </a:r>
-            <a:endParaRPr lang="en-US" sz="1100" dirty="0"/>
-          </a:p>
-        </p:txBody>
-      </p:sp>
-      <p:sp>
-        <p:nvSpPr>
-          <p:cNvPr id="6" name="Text 4"/>
-          <p:cNvSpPr/>
-          <p:nvPr/>
-        </p:nvSpPr>
-        <p:spPr>
-          <a:xfrm>
-            <a:off x="822960" y="4334256"/>
-            <a:ext cx="3291840" cy="310896"/>
+              <a:rPr lang="en-US" sz="1150" dirty="0">
+                <a:solidFill>
+                  <a:srgbClr val="44524B"/>
+                </a:solidFill>
+                <a:latin typeface="맑은 고딕" pitchFamily="34" charset="0"/>
+                <a:ea typeface="맑은 고딕" pitchFamily="34" charset="-122"/>
+                <a:cs typeface="맑은 고딕" pitchFamily="34" charset="-120"/>
+              </a:rPr>
+              <a:t>확정 전에는 되물어 좁힙니다 — 보험사 → 상품 → 가입 시점.</a:t>
+            </a:r>
+            <a:endParaRPr lang="en-US" sz="1150" dirty="0"/>
+          </a:p>
+        </p:txBody>
+      </p:sp>
+      <p:sp>
+        <p:nvSpPr>
+          <p:cNvPr id="8" name="Text 5"/>
+          <p:cNvSpPr/>
+          <p:nvPr/>
+        </p:nvSpPr>
+        <p:spPr>
+          <a:xfrm>
+            <a:off x="11384280" y="6510528"/>
+            <a:ext cx="411480" cy="256032"/>
+          </a:xfrm>
+          <a:prstGeom prst="rect">
+            <a:avLst/>
+          </a:prstGeom>
+          <a:noFill/>
+          <a:ln/>
+        </p:spPr>
+        <p:txBody>
+          <a:bodyPr wrap="square" rtlCol="0" anchor="ctr"/>
+          <a:lstStyle/>
+          <a:p>
+            <a:pPr algn="r" indent="0" marL="0">
+              <a:buNone/>
+            </a:pPr>
+            <a:r>
+              <a:rPr lang="en-US" sz="1000" dirty="0">
+                <a:solidFill>
+                  <a:srgbClr val="7A867F"/>
+                </a:solidFill>
+                <a:latin typeface="맑은 고딕" pitchFamily="34" charset="0"/>
+                <a:ea typeface="맑은 고딕" pitchFamily="34" charset="-122"/>
+                <a:cs typeface="맑은 고딕" pitchFamily="34" charset="-120"/>
+              </a:rPr>
+              <a:t>8</a:t>
+            </a:r>
+            <a:endParaRPr lang="en-US" sz="1000" dirty="0"/>
+          </a:p>
+        </p:txBody>
+      </p:sp>
+    </p:spTree>
+  </p:cSld>
+  <p:clrMapOvr>
+    <a:masterClrMapping/>
+  </p:clrMapOvr>
+</p:sld>
+</file>
+
+<file path=ppt/slides/slide9.xml><?xml version="1.0" encoding="utf-8"?>
+<p:sld xmlns:a="http://schemas.openxmlformats.org/drawingml/2006/main" xmlns:r="http://schemas.openxmlformats.org/officeDocument/2006/relationships" xmlns:p="http://schemas.openxmlformats.org/presentationml/2006/main">
+  <p:cSld name="Slide 9">
+    <p:bg>
+      <p:bgPr>
+        <a:solidFill>
+          <a:srgbClr val="FBFCFB"/>
+        </a:solidFill>
+      </p:bgPr>
+    </p:bg>
+    <p:spTree>
+      <p:nvGrpSpPr>
+        <p:cNvPr id="1" name=""/>
+        <p:cNvGrpSpPr/>
+        <p:nvPr/>
+      </p:nvGrpSpPr>
+      <p:grpSpPr>
+        <a:xfrm>
+          <a:off x="0" y="0"/>
+          <a:ext cx="0" cy="0"/>
+          <a:chOff x="0" y="0"/>
+          <a:chExt cx="0" cy="0"/>
+        </a:xfrm>
+      </p:grpSpPr>
+      <p:sp>
+        <p:nvSpPr>
+          <p:cNvPr id="2" name="Text 0"/>
+          <p:cNvSpPr/>
+          <p:nvPr/>
+        </p:nvSpPr>
+        <p:spPr>
+          <a:xfrm>
+            <a:off x="457200" y="219456"/>
+            <a:ext cx="7863840" cy="201168"/>
           </a:xfrm>
           <a:prstGeom prst="rect">
             <a:avLst/>
@@ -6758,30 +7531,30 @@
               <a:buNone/>
             </a:pPr>
             <a:r>
-              <a:rPr lang="en-US" sz="1400" b="1" dirty="0">
-                <a:solidFill>
-                  <a:srgbClr val="FFFFFF"/>
-                </a:solidFill>
-                <a:latin typeface="맑은 고딕" pitchFamily="34" charset="0"/>
-                <a:ea typeface="맑은 고딕" pitchFamily="34" charset="-122"/>
-                <a:cs typeface="맑은 고딕" pitchFamily="34" charset="-120"/>
-              </a:rPr>
-              <a:t>약관을 직접 짚어 답합니다</a:t>
-            </a:r>
-            <a:endParaRPr lang="en-US" sz="1400" dirty="0"/>
-          </a:p>
-        </p:txBody>
-      </p:sp>
-      <p:sp>
-        <p:nvSpPr>
-          <p:cNvPr id="7" name="Text 5"/>
-          <p:cNvSpPr/>
-          <p:nvPr/>
-        </p:nvSpPr>
-        <p:spPr>
-          <a:xfrm>
-            <a:off x="822960" y="4681728"/>
-            <a:ext cx="3291840" cy="914400"/>
+              <a:rPr lang="en-US" sz="1050" b="1" spc="180" kern="0" dirty="0">
+                <a:solidFill>
+                  <a:srgbClr val="0B7C44"/>
+                </a:solidFill>
+                <a:latin typeface="맑은 고딕" pitchFamily="34" charset="0"/>
+                <a:ea typeface="맑은 고딕" pitchFamily="34" charset="-122"/>
+                <a:cs typeface="맑은 고딕" pitchFamily="34" charset="-120"/>
+              </a:rPr>
+              <a:t>화면 ③ 답변  ·  2/3</a:t>
+            </a:r>
+            <a:endParaRPr lang="en-US" sz="1050" dirty="0"/>
+          </a:p>
+        </p:txBody>
+      </p:sp>
+      <p:sp>
+        <p:nvSpPr>
+          <p:cNvPr id="3" name="Text 1"/>
+          <p:cNvSpPr/>
+          <p:nvPr/>
+        </p:nvSpPr>
+        <p:spPr>
+          <a:xfrm>
+            <a:off x="457200" y="420624"/>
+            <a:ext cx="8595360" cy="365760"/>
           </a:xfrm>
           <a:prstGeom prst="rect">
             <a:avLst/>
@@ -6794,44 +7567,69 @@
           <a:lstStyle/>
           <a:p>
             <a:pPr indent="0" marL="0">
-              <a:lnSpc>
-                <a:spcPts val="1600"/>
-              </a:lnSpc>
-              <a:buNone/>
-            </a:pPr>
-            <a:r>
-              <a:rPr lang="en-US" sz="1100" dirty="0">
-                <a:solidFill>
-                  <a:srgbClr val="A9BAB2"/>
-                </a:solidFill>
-                <a:latin typeface="맑은 고딕" pitchFamily="34" charset="0"/>
-                <a:ea typeface="맑은 고딕" pitchFamily="34" charset="-122"/>
-                <a:cs typeface="맑은 고딕" pitchFamily="34" charset="-120"/>
-              </a:rPr>
-              <a:t>보험사 → 상품 → 약관 시점을 고르고, 그 약관 안에서만 답합니다. 고객 폴더에 쌓입니다.</a:t>
-            </a:r>
-            <a:endParaRPr lang="en-US" sz="1100" dirty="0"/>
-          </a:p>
-        </p:txBody>
-      </p:sp>
-      <p:sp>
-        <p:nvSpPr>
-          <p:cNvPr id="8" name="Shape 6"/>
-          <p:cNvSpPr/>
-          <p:nvPr/>
-        </p:nvSpPr>
-        <p:spPr>
-          <a:xfrm>
-            <a:off x="4434840" y="3931920"/>
-            <a:ext cx="3291840" cy="0"/>
-          </a:xfrm>
-          <a:prstGeom prst="line">
-            <a:avLst/>
-          </a:prstGeom>
-          <a:noFill/>
-          <a:ln w="31750">
+              <a:buNone/>
+            </a:pPr>
+            <a:r>
+              <a:rPr lang="en-US" sz="2000" b="1" dirty="0">
+                <a:solidFill>
+                  <a:srgbClr val="16211C"/>
+                </a:solidFill>
+                <a:latin typeface="맑은 고딕" pitchFamily="34" charset="0"/>
+                <a:ea typeface="맑은 고딕" pitchFamily="34" charset="-122"/>
+                <a:cs typeface="맑은 고딕" pitchFamily="34" charset="-120"/>
+              </a:rPr>
+              <a:t>면책을 먼저 판정하고 조항으로 근거를 답니다</a:t>
+            </a:r>
+            <a:endParaRPr lang="en-US" sz="2000" dirty="0"/>
+          </a:p>
+        </p:txBody>
+      </p:sp>
+      <p:pic>
+        <p:nvPicPr>
+          <p:cNvPr id="4" name="Image 0" descr="/tmp/claude-0/-home-user-chacha6377/ca7f6080-cf3a-5093-8a0d-eb3bfdb80785/scratchpad/app_ask_p2.png">    </p:cNvPr>
+          <p:cNvPicPr>
+            <a:picLocks noChangeAspect="1"/>
+          </p:cNvPicPr>
+          <p:nvPr/>
+        </p:nvPicPr>
+        <p:blipFill>
+          <a:blip r:embed="rId1"/>
+          <a:stretch>
+            <a:fillRect/>
+          </a:stretch>
+        </p:blipFill>
+        <p:spPr>
+          <a:xfrm>
+            <a:off x="457200" y="1054346"/>
+            <a:ext cx="11247120" cy="4785884"/>
+          </a:xfrm>
+          <a:prstGeom prst="rect">
+            <a:avLst/>
+          </a:prstGeom>
+        </p:spPr>
+      </p:pic>
+      <p:sp>
+        <p:nvSpPr>
+          <p:cNvPr id="5" name="Shape 2"/>
+          <p:cNvSpPr/>
+          <p:nvPr/>
+        </p:nvSpPr>
+        <p:spPr>
+          <a:xfrm>
+            <a:off x="457200" y="6035040"/>
+            <a:ext cx="54864" cy="457200"/>
+          </a:xfrm>
+          <a:prstGeom prst="roundRect">
+            <a:avLst>
+              <a:gd name="adj" fmla="val 50000"/>
+            </a:avLst>
+          </a:prstGeom>
+          <a:solidFill>
+            <a:srgbClr val="14A05A"/>
+          </a:solidFill>
+          <a:ln w="12700">
             <a:solidFill>
-              <a:srgbClr val="4E8FF0"/>
+              <a:srgbClr val="14A05A"/>
             </a:solidFill>
             <a:prstDash val="solid"/>
           </a:ln>
@@ -6839,14 +7637,14 @@
       </p:sp>
       <p:sp>
         <p:nvSpPr>
-          <p:cNvPr id="9" name="Text 7"/>
-          <p:cNvSpPr/>
-          <p:nvPr/>
-        </p:nvSpPr>
-        <p:spPr>
-          <a:xfrm>
-            <a:off x="4434840" y="4059936"/>
-            <a:ext cx="3291840" cy="256032"/>
+          <p:cNvPr id="6" name="Text 3"/>
+          <p:cNvSpPr/>
+          <p:nvPr/>
+        </p:nvSpPr>
+        <p:spPr>
+          <a:xfrm>
+            <a:off x="658368" y="6035040"/>
+            <a:ext cx="10607040" cy="457200"/>
           </a:xfrm>
           <a:prstGeom prst="rect">
             <a:avLst/>
@@ -6862,278 +7660,54 @@
               <a:buNone/>
             </a:pPr>
             <a:r>
-              <a:rPr lang="en-US" sz="1100" b="1" spc="100" kern="0" dirty="0">
-                <a:solidFill>
-                  <a:srgbClr val="4E8FF0"/>
-                </a:solidFill>
-                <a:latin typeface="맑은 고딕" pitchFamily="34" charset="0"/>
-                <a:ea typeface="맑은 고딕" pitchFamily="34" charset="-122"/>
-                <a:cs typeface="맑은 고딕" pitchFamily="34" charset="-120"/>
-              </a:rPr>
-              <a:t>다음 · My Data</a:t>
-            </a:r>
-            <a:endParaRPr lang="en-US" sz="1100" dirty="0"/>
-          </a:p>
-        </p:txBody>
-      </p:sp>
-      <p:sp>
-        <p:nvSpPr>
-          <p:cNvPr id="10" name="Text 8"/>
-          <p:cNvSpPr/>
-          <p:nvPr/>
-        </p:nvSpPr>
-        <p:spPr>
-          <a:xfrm>
-            <a:off x="4434840" y="4334256"/>
-            <a:ext cx="3291840" cy="310896"/>
-          </a:xfrm>
-          <a:prstGeom prst="rect">
-            <a:avLst/>
-          </a:prstGeom>
-          <a:noFill/>
-          <a:ln/>
-        </p:spPr>
-        <p:txBody>
-          <a:bodyPr wrap="square" rtlCol="0" anchor="ctr"/>
-          <a:lstStyle/>
-          <a:p>
-            <a:pPr indent="0" marL="0">
-              <a:buNone/>
-            </a:pPr>
-            <a:r>
-              <a:rPr lang="en-US" sz="1400" b="1" dirty="0">
-                <a:solidFill>
-                  <a:srgbClr val="FFFFFF"/>
-                </a:solidFill>
-                <a:latin typeface="맑은 고딕" pitchFamily="34" charset="0"/>
-                <a:ea typeface="맑은 고딕" pitchFamily="34" charset="-122"/>
-                <a:cs typeface="맑은 고딕" pitchFamily="34" charset="-120"/>
-              </a:rPr>
-              <a:t>고르지 않아도 됩니다</a:t>
-            </a:r>
-            <a:endParaRPr lang="en-US" sz="1400" dirty="0"/>
-          </a:p>
-        </p:txBody>
-      </p:sp>
-      <p:sp>
-        <p:nvSpPr>
-          <p:cNvPr id="11" name="Text 9"/>
-          <p:cNvSpPr/>
-          <p:nvPr/>
-        </p:nvSpPr>
-        <p:spPr>
-          <a:xfrm>
-            <a:off x="4434840" y="4681728"/>
-            <a:ext cx="3291840" cy="914400"/>
-          </a:xfrm>
-          <a:prstGeom prst="rect">
-            <a:avLst/>
-          </a:prstGeom>
-          <a:noFill/>
-          <a:ln/>
-        </p:spPr>
-        <p:txBody>
-          <a:bodyPr wrap="square" rtlCol="0" anchor="ctr"/>
-          <a:lstStyle/>
-          <a:p>
-            <a:pPr indent="0" marL="0">
-              <a:lnSpc>
-                <a:spcPts val="1600"/>
-              </a:lnSpc>
-              <a:buNone/>
-            </a:pPr>
-            <a:r>
-              <a:rPr lang="en-US" sz="1100" dirty="0">
-                <a:solidFill>
-                  <a:srgbClr val="A9BAB2"/>
-                </a:solidFill>
-                <a:latin typeface="맑은 고딕" pitchFamily="34" charset="0"/>
-                <a:ea typeface="맑은 고딕" pitchFamily="34" charset="-122"/>
-                <a:cs typeface="맑은 고딕" pitchFamily="34" charset="-120"/>
-              </a:rPr>
-              <a:t>계약이 한 번에 들어와 약관이 자동으로 정해집니다. 클릭이 사라집니다.</a:t>
-            </a:r>
-            <a:endParaRPr lang="en-US" sz="1100" dirty="0"/>
-          </a:p>
-        </p:txBody>
-      </p:sp>
-      <p:sp>
-        <p:nvSpPr>
-          <p:cNvPr id="12" name="Shape 10"/>
-          <p:cNvSpPr/>
-          <p:nvPr/>
-        </p:nvSpPr>
-        <p:spPr>
-          <a:xfrm>
-            <a:off x="8046720" y="3931920"/>
-            <a:ext cx="3291840" cy="0"/>
-          </a:xfrm>
-          <a:prstGeom prst="line">
-            <a:avLst/>
-          </a:prstGeom>
-          <a:noFill/>
-          <a:ln w="31750">
-            <a:solidFill>
-              <a:srgbClr val="C9A567"/>
-            </a:solidFill>
-            <a:prstDash val="solid"/>
-          </a:ln>
-        </p:spPr>
-      </p:sp>
-      <p:sp>
-        <p:nvSpPr>
-          <p:cNvPr id="13" name="Text 11"/>
-          <p:cNvSpPr/>
-          <p:nvPr/>
-        </p:nvSpPr>
-        <p:spPr>
-          <a:xfrm>
-            <a:off x="8046720" y="4059936"/>
-            <a:ext cx="3291840" cy="256032"/>
-          </a:xfrm>
-          <a:prstGeom prst="rect">
-            <a:avLst/>
-          </a:prstGeom>
-          <a:noFill/>
-          <a:ln/>
-        </p:spPr>
-        <p:txBody>
-          <a:bodyPr wrap="square" rtlCol="0" anchor="ctr"/>
-          <a:lstStyle/>
-          <a:p>
-            <a:pPr indent="0" marL="0">
-              <a:buNone/>
-            </a:pPr>
-            <a:r>
-              <a:rPr lang="en-US" sz="1100" b="1" spc="100" kern="0" dirty="0">
-                <a:solidFill>
-                  <a:srgbClr val="C9A567"/>
-                </a:solidFill>
-                <a:latin typeface="맑은 고딕" pitchFamily="34" charset="0"/>
-                <a:ea typeface="맑은 고딕" pitchFamily="34" charset="-122"/>
-                <a:cs typeface="맑은 고딕" pitchFamily="34" charset="-120"/>
-              </a:rPr>
-              <a:t>그다음 · 보장분석</a:t>
-            </a:r>
-            <a:endParaRPr lang="en-US" sz="1100" dirty="0"/>
-          </a:p>
-        </p:txBody>
-      </p:sp>
-      <p:sp>
-        <p:nvSpPr>
-          <p:cNvPr id="14" name="Text 12"/>
-          <p:cNvSpPr/>
-          <p:nvPr/>
-        </p:nvSpPr>
-        <p:spPr>
-          <a:xfrm>
-            <a:off x="8046720" y="4334256"/>
-            <a:ext cx="3291840" cy="310896"/>
-          </a:xfrm>
-          <a:prstGeom prst="rect">
-            <a:avLst/>
-          </a:prstGeom>
-          <a:noFill/>
-          <a:ln/>
-        </p:spPr>
-        <p:txBody>
-          <a:bodyPr wrap="square" rtlCol="0" anchor="ctr"/>
-          <a:lstStyle/>
-          <a:p>
-            <a:pPr indent="0" marL="0">
-              <a:buNone/>
-            </a:pPr>
-            <a:r>
-              <a:rPr lang="en-US" sz="1400" b="1" dirty="0">
-                <a:solidFill>
-                  <a:srgbClr val="FFFFFF"/>
-                </a:solidFill>
-                <a:latin typeface="맑은 고딕" pitchFamily="34" charset="0"/>
-                <a:ea typeface="맑은 고딕" pitchFamily="34" charset="-122"/>
-                <a:cs typeface="맑은 고딕" pitchFamily="34" charset="-120"/>
-              </a:rPr>
-              <a:t>「얼마 나와요?」에 답합니다</a:t>
-            </a:r>
-            <a:endParaRPr lang="en-US" sz="1400" dirty="0"/>
-          </a:p>
-        </p:txBody>
-      </p:sp>
-      <p:sp>
-        <p:nvSpPr>
-          <p:cNvPr id="15" name="Text 13"/>
-          <p:cNvSpPr/>
-          <p:nvPr/>
-        </p:nvSpPr>
-        <p:spPr>
-          <a:xfrm>
-            <a:off x="8046720" y="4681728"/>
-            <a:ext cx="3291840" cy="914400"/>
-          </a:xfrm>
-          <a:prstGeom prst="rect">
-            <a:avLst/>
-          </a:prstGeom>
-          <a:noFill/>
-          <a:ln/>
-        </p:spPr>
-        <p:txBody>
-          <a:bodyPr wrap="square" rtlCol="0" anchor="ctr"/>
-          <a:lstStyle/>
-          <a:p>
-            <a:pPr indent="0" marL="0">
-              <a:lnSpc>
-                <a:spcPts val="1600"/>
-              </a:lnSpc>
-              <a:buNone/>
-            </a:pPr>
-            <a:r>
-              <a:rPr lang="en-US" sz="1100" dirty="0">
-                <a:solidFill>
-                  <a:srgbClr val="A9BAB2"/>
-                </a:solidFill>
-                <a:latin typeface="맑은 고딕" pitchFamily="34" charset="0"/>
-                <a:ea typeface="맑은 고딕" pitchFamily="34" charset="-122"/>
-                <a:cs typeface="맑은 고딕" pitchFamily="34" charset="-120"/>
-              </a:rPr>
-              <a:t>가입 담보와 금액이 붙어 보장공백 · 비교까지 갑니다.</a:t>
-            </a:r>
-            <a:endParaRPr lang="en-US" sz="1100" dirty="0"/>
-          </a:p>
-        </p:txBody>
-      </p:sp>
-      <p:sp>
-        <p:nvSpPr>
-          <p:cNvPr id="16" name="Text 14"/>
-          <p:cNvSpPr/>
-          <p:nvPr/>
-        </p:nvSpPr>
-        <p:spPr>
-          <a:xfrm>
-            <a:off x="822960" y="6126480"/>
-            <a:ext cx="10515600" cy="274320"/>
-          </a:xfrm>
-          <a:prstGeom prst="rect">
-            <a:avLst/>
-          </a:prstGeom>
-          <a:noFill/>
-          <a:ln/>
-        </p:spPr>
-        <p:txBody>
-          <a:bodyPr wrap="square" rtlCol="0" anchor="ctr"/>
-          <a:lstStyle/>
-          <a:p>
-            <a:pPr indent="0" marL="0">
+              <a:rPr lang="en-US" sz="1150" dirty="0">
+                <a:solidFill>
+                  <a:srgbClr val="44524B"/>
+                </a:solidFill>
+                <a:latin typeface="맑은 고딕" pitchFamily="34" charset="0"/>
+                <a:ea typeface="맑은 고딕" pitchFamily="34" charset="-122"/>
+                <a:cs typeface="맑은 고딕" pitchFamily="34" charset="-120"/>
+              </a:rPr>
+              <a:t>면책을 맨 위에 놓고 조항 위치까지 답니다. 어느 약관인지 하단에 항상 표시합니다.</a:t>
+            </a:r>
+            <a:endParaRPr lang="en-US" sz="1150" dirty="0"/>
+          </a:p>
+        </p:txBody>
+      </p:sp>
+      <p:sp>
+        <p:nvSpPr>
+          <p:cNvPr id="7" name="Text 4"/>
+          <p:cNvSpPr/>
+          <p:nvPr/>
+        </p:nvSpPr>
+        <p:spPr>
+          <a:xfrm>
+            <a:off x="11384280" y="6510528"/>
+            <a:ext cx="411480" cy="256032"/>
+          </a:xfrm>
+          <a:prstGeom prst="rect">
+            <a:avLst/>
+          </a:prstGeom>
+          <a:noFill/>
+          <a:ln/>
+        </p:spPr>
+        <p:txBody>
+          <a:bodyPr wrap="square" rtlCol="0" anchor="ctr"/>
+          <a:lstStyle/>
+          <a:p>
+            <a:pPr algn="r" indent="0" marL="0">
               <a:buNone/>
             </a:pPr>
             <a:r>
               <a:rPr lang="en-US" sz="1000" dirty="0">
                 <a:solidFill>
-                  <a:srgbClr val="5F7169"/>
-                </a:solidFill>
-                <a:latin typeface="맑은 고딕" pitchFamily="34" charset="0"/>
-                <a:ea typeface="맑은 고딕" pitchFamily="34" charset="-122"/>
-                <a:cs typeface="맑은 고딕" pitchFamily="34" charset="-120"/>
-              </a:rPr>
-              <a:t>주식회사 아이에프에이 AX팀 · 화면 속 고객명과 대화는 가상입니다.</a:t>
+                  <a:srgbClr val="7A867F"/>
+                </a:solidFill>
+                <a:latin typeface="맑은 고딕" pitchFamily="34" charset="0"/>
+                <a:ea typeface="맑은 고딕" pitchFamily="34" charset="-122"/>
+                <a:cs typeface="맑은 고딕" pitchFamily="34" charset="-120"/>
+              </a:rPr>
+              <a:t>9</a:t>
             </a:r>
             <a:endParaRPr lang="en-US" sz="1000" dirty="0"/>
           </a:p>
